--- a/docs/plots/carbo/jx_carbo_linsubhr_ratio_grade2.pptx
+++ b/docs/plots/carbo/jx_carbo_linsubhr_ratio_grade2.pptx
@@ -3003,557 +3003,557 @@
           <p:spPr>
             <a:xfrm>
               <a:off x="817517" y="1896563"/>
-              <a:ext cx="7370972" cy="3559791"/>
+              <a:ext cx="7370972" cy="3557280"/>
             </a:xfrm>
             <a:custGeom>
               <a:avLst/>
               <a:pathLst>
-                <a:path w="7370972" h="3559791">
+                <a:path w="7370972" h="3557280">
                   <a:moveTo>
-                    <a:pt x="830252" y="0"/>
+                    <a:pt x="799462" y="0"/>
                   </a:moveTo>
                   <a:lnTo>
-                    <a:pt x="849712" y="40337"/>
-                  </a:lnTo>
-                  <a:lnTo>
-                    <a:pt x="927346" y="194395"/>
-                  </a:lnTo>
-                  <a:lnTo>
-                    <a:pt x="1004981" y="341884"/>
-                  </a:lnTo>
-                  <a:lnTo>
-                    <a:pt x="1082615" y="483082"/>
-                  </a:lnTo>
-                  <a:lnTo>
-                    <a:pt x="1160249" y="618258"/>
-                  </a:lnTo>
-                  <a:lnTo>
-                    <a:pt x="1237883" y="747669"/>
-                  </a:lnTo>
-                  <a:lnTo>
-                    <a:pt x="1315517" y="871561"/>
-                  </a:lnTo>
-                  <a:lnTo>
-                    <a:pt x="1393151" y="990169"/>
-                  </a:lnTo>
-                  <a:lnTo>
-                    <a:pt x="1470785" y="1103719"/>
-                  </a:lnTo>
-                  <a:lnTo>
-                    <a:pt x="1548419" y="1212426"/>
-                  </a:lnTo>
-                  <a:lnTo>
-                    <a:pt x="1626053" y="1316497"/>
-                  </a:lnTo>
-                  <a:lnTo>
-                    <a:pt x="1703687" y="1416130"/>
-                  </a:lnTo>
-                  <a:lnTo>
-                    <a:pt x="1781321" y="1511513"/>
-                  </a:lnTo>
-                  <a:lnTo>
-                    <a:pt x="1858955" y="1602829"/>
-                  </a:lnTo>
-                  <a:lnTo>
-                    <a:pt x="1936589" y="1690250"/>
-                  </a:lnTo>
-                  <a:lnTo>
-                    <a:pt x="2014223" y="1773942"/>
-                  </a:lnTo>
-                  <a:lnTo>
-                    <a:pt x="2091857" y="1854066"/>
-                  </a:lnTo>
-                  <a:lnTo>
-                    <a:pt x="2169491" y="1930772"/>
-                  </a:lnTo>
-                  <a:lnTo>
-                    <a:pt x="2247125" y="2004207"/>
-                  </a:lnTo>
-                  <a:lnTo>
-                    <a:pt x="2324759" y="2074510"/>
-                  </a:lnTo>
-                  <a:lnTo>
-                    <a:pt x="2402393" y="2141814"/>
-                  </a:lnTo>
-                  <a:lnTo>
-                    <a:pt x="2480027" y="2206248"/>
-                  </a:lnTo>
-                  <a:lnTo>
-                    <a:pt x="2557661" y="2267935"/>
-                  </a:lnTo>
-                  <a:lnTo>
-                    <a:pt x="2635295" y="2326990"/>
-                  </a:lnTo>
-                  <a:lnTo>
-                    <a:pt x="2712930" y="2383527"/>
-                  </a:lnTo>
-                  <a:lnTo>
-                    <a:pt x="2790564" y="2437652"/>
-                  </a:lnTo>
-                  <a:lnTo>
-                    <a:pt x="2868198" y="2489470"/>
-                  </a:lnTo>
-                  <a:lnTo>
-                    <a:pt x="2945832" y="2539077"/>
-                  </a:lnTo>
-                  <a:lnTo>
-                    <a:pt x="3023466" y="2586569"/>
-                  </a:lnTo>
-                  <a:lnTo>
-                    <a:pt x="3101100" y="2632035"/>
-                  </a:lnTo>
-                  <a:lnTo>
-                    <a:pt x="3178734" y="2675562"/>
-                  </a:lnTo>
-                  <a:lnTo>
-                    <a:pt x="3256368" y="2717233"/>
-                  </a:lnTo>
-                  <a:lnTo>
-                    <a:pt x="3334002" y="2757126"/>
-                  </a:lnTo>
-                  <a:lnTo>
-                    <a:pt x="3411636" y="2786239"/>
-                  </a:lnTo>
-                  <a:lnTo>
-                    <a:pt x="3489270" y="2796133"/>
-                  </a:lnTo>
-                  <a:lnTo>
-                    <a:pt x="3566904" y="2805915"/>
-                  </a:lnTo>
-                  <a:lnTo>
-                    <a:pt x="3644538" y="2815585"/>
-                  </a:lnTo>
-                  <a:lnTo>
-                    <a:pt x="3722172" y="2825144"/>
-                  </a:lnTo>
-                  <a:lnTo>
-                    <a:pt x="3799806" y="2834594"/>
-                  </a:lnTo>
-                  <a:lnTo>
-                    <a:pt x="3877440" y="2843936"/>
-                  </a:lnTo>
-                  <a:lnTo>
-                    <a:pt x="3955074" y="2853172"/>
-                  </a:lnTo>
-                  <a:lnTo>
-                    <a:pt x="4032708" y="2862302"/>
-                  </a:lnTo>
-                  <a:lnTo>
-                    <a:pt x="4110342" y="2871328"/>
-                  </a:lnTo>
-                  <a:lnTo>
-                    <a:pt x="4187976" y="2880251"/>
-                  </a:lnTo>
-                  <a:lnTo>
-                    <a:pt x="4265610" y="2889072"/>
-                  </a:lnTo>
-                  <a:lnTo>
-                    <a:pt x="4343244" y="2897792"/>
-                  </a:lnTo>
-                  <a:lnTo>
-                    <a:pt x="4420879" y="2906412"/>
-                  </a:lnTo>
-                  <a:lnTo>
-                    <a:pt x="4498513" y="2914935"/>
-                  </a:lnTo>
-                  <a:lnTo>
-                    <a:pt x="4576147" y="2923359"/>
-                  </a:lnTo>
-                  <a:lnTo>
-                    <a:pt x="4653781" y="2931688"/>
-                  </a:lnTo>
-                  <a:lnTo>
-                    <a:pt x="4731415" y="2939921"/>
-                  </a:lnTo>
-                  <a:lnTo>
-                    <a:pt x="4809049" y="2948061"/>
-                  </a:lnTo>
-                  <a:lnTo>
-                    <a:pt x="4886683" y="2956107"/>
-                  </a:lnTo>
-                  <a:lnTo>
-                    <a:pt x="4964317" y="2964062"/>
-                  </a:lnTo>
-                  <a:lnTo>
-                    <a:pt x="5041951" y="2971926"/>
-                  </a:lnTo>
-                  <a:lnTo>
-                    <a:pt x="5119585" y="2979700"/>
-                  </a:lnTo>
-                  <a:lnTo>
-                    <a:pt x="5197219" y="2987385"/>
-                  </a:lnTo>
-                  <a:lnTo>
-                    <a:pt x="5274853" y="2994982"/>
-                  </a:lnTo>
-                  <a:lnTo>
-                    <a:pt x="5352487" y="3002493"/>
-                  </a:lnTo>
-                  <a:lnTo>
-                    <a:pt x="5430121" y="3009918"/>
-                  </a:lnTo>
-                  <a:lnTo>
-                    <a:pt x="5507755" y="3017258"/>
-                  </a:lnTo>
-                  <a:lnTo>
-                    <a:pt x="5585389" y="3024514"/>
-                  </a:lnTo>
-                  <a:lnTo>
-                    <a:pt x="5663023" y="3031687"/>
-                  </a:lnTo>
-                  <a:lnTo>
-                    <a:pt x="5740657" y="3038779"/>
-                  </a:lnTo>
-                  <a:lnTo>
-                    <a:pt x="5818291" y="3045789"/>
-                  </a:lnTo>
-                  <a:lnTo>
-                    <a:pt x="5895925" y="3052720"/>
-                  </a:lnTo>
-                  <a:lnTo>
-                    <a:pt x="5973559" y="3059571"/>
-                  </a:lnTo>
-                  <a:lnTo>
-                    <a:pt x="6051193" y="3066344"/>
-                  </a:lnTo>
-                  <a:lnTo>
-                    <a:pt x="6128827" y="3073040"/>
-                  </a:lnTo>
-                  <a:lnTo>
-                    <a:pt x="6206462" y="3079659"/>
-                  </a:lnTo>
-                  <a:lnTo>
-                    <a:pt x="6284096" y="3086203"/>
-                  </a:lnTo>
-                  <a:lnTo>
-                    <a:pt x="6361730" y="3092671"/>
-                  </a:lnTo>
-                  <a:lnTo>
-                    <a:pt x="6439364" y="3099066"/>
-                  </a:lnTo>
-                  <a:lnTo>
-                    <a:pt x="6516998" y="3105388"/>
-                  </a:lnTo>
-                  <a:lnTo>
-                    <a:pt x="6594632" y="3111638"/>
-                  </a:lnTo>
-                  <a:lnTo>
-                    <a:pt x="6672266" y="3117817"/>
-                  </a:lnTo>
-                  <a:lnTo>
-                    <a:pt x="6749900" y="3123924"/>
-                  </a:lnTo>
-                  <a:lnTo>
-                    <a:pt x="6827534" y="3129962"/>
-                  </a:lnTo>
-                  <a:lnTo>
-                    <a:pt x="6905168" y="3135932"/>
-                  </a:lnTo>
-                  <a:lnTo>
-                    <a:pt x="6982802" y="3141833"/>
-                  </a:lnTo>
-                  <a:lnTo>
-                    <a:pt x="7060436" y="3147666"/>
-                  </a:lnTo>
-                  <a:lnTo>
-                    <a:pt x="7138070" y="3153433"/>
-                  </a:lnTo>
-                  <a:lnTo>
-                    <a:pt x="7215704" y="3159134"/>
-                  </a:lnTo>
-                  <a:lnTo>
-                    <a:pt x="7293338" y="3164770"/>
-                  </a:lnTo>
-                  <a:lnTo>
-                    <a:pt x="7370972" y="3170342"/>
-                  </a:lnTo>
-                  <a:lnTo>
-                    <a:pt x="7370972" y="3559791"/>
-                  </a:lnTo>
-                  <a:lnTo>
-                    <a:pt x="7293338" y="3555654"/>
-                  </a:lnTo>
-                  <a:lnTo>
-                    <a:pt x="7215704" y="3551334"/>
-                  </a:lnTo>
-                  <a:lnTo>
-                    <a:pt x="7138070" y="3546821"/>
-                  </a:lnTo>
-                  <a:lnTo>
-                    <a:pt x="7060436" y="3542106"/>
-                  </a:lnTo>
-                  <a:lnTo>
-                    <a:pt x="6982802" y="3537182"/>
-                  </a:lnTo>
-                  <a:lnTo>
-                    <a:pt x="6905168" y="3532039"/>
-                  </a:lnTo>
-                  <a:lnTo>
-                    <a:pt x="6827534" y="3526666"/>
-                  </a:lnTo>
-                  <a:lnTo>
-                    <a:pt x="6749900" y="3521054"/>
-                  </a:lnTo>
-                  <a:lnTo>
-                    <a:pt x="6672266" y="3515192"/>
-                  </a:lnTo>
-                  <a:lnTo>
-                    <a:pt x="6594632" y="3509068"/>
-                  </a:lnTo>
-                  <a:lnTo>
-                    <a:pt x="6516998" y="3502672"/>
-                  </a:lnTo>
-                  <a:lnTo>
-                    <a:pt x="6439364" y="3495992"/>
-                  </a:lnTo>
-                  <a:lnTo>
-                    <a:pt x="6361730" y="3489013"/>
-                  </a:lnTo>
-                  <a:lnTo>
-                    <a:pt x="6284096" y="3481724"/>
-                  </a:lnTo>
-                  <a:lnTo>
-                    <a:pt x="6206462" y="3474109"/>
-                  </a:lnTo>
-                  <a:lnTo>
-                    <a:pt x="6128827" y="3466156"/>
-                  </a:lnTo>
-                  <a:lnTo>
-                    <a:pt x="6051193" y="3457848"/>
-                  </a:lnTo>
-                  <a:lnTo>
-                    <a:pt x="5973559" y="3449171"/>
-                  </a:lnTo>
-                  <a:lnTo>
-                    <a:pt x="5895925" y="3440106"/>
-                  </a:lnTo>
-                  <a:lnTo>
-                    <a:pt x="5818291" y="3430638"/>
-                  </a:lnTo>
-                  <a:lnTo>
-                    <a:pt x="5740657" y="3420748"/>
-                  </a:lnTo>
-                  <a:lnTo>
-                    <a:pt x="5663023" y="3410418"/>
-                  </a:lnTo>
-                  <a:lnTo>
-                    <a:pt x="5585389" y="3399627"/>
-                  </a:lnTo>
-                  <a:lnTo>
-                    <a:pt x="5507755" y="3388356"/>
-                  </a:lnTo>
-                  <a:lnTo>
-                    <a:pt x="5430121" y="3376582"/>
-                  </a:lnTo>
-                  <a:lnTo>
-                    <a:pt x="5352487" y="3364284"/>
-                  </a:lnTo>
-                  <a:lnTo>
-                    <a:pt x="5274853" y="3351438"/>
-                  </a:lnTo>
-                  <a:lnTo>
-                    <a:pt x="5197219" y="3338020"/>
-                  </a:lnTo>
-                  <a:lnTo>
-                    <a:pt x="5119585" y="3324004"/>
-                  </a:lnTo>
-                  <a:lnTo>
-                    <a:pt x="5041951" y="3309364"/>
-                  </a:lnTo>
-                  <a:lnTo>
-                    <a:pt x="4964317" y="3294072"/>
-                  </a:lnTo>
-                  <a:lnTo>
-                    <a:pt x="4886683" y="3278098"/>
-                  </a:lnTo>
-                  <a:lnTo>
-                    <a:pt x="4809049" y="3261413"/>
-                  </a:lnTo>
-                  <a:lnTo>
-                    <a:pt x="4731415" y="3243984"/>
-                  </a:lnTo>
-                  <a:lnTo>
-                    <a:pt x="4653781" y="3225779"/>
-                  </a:lnTo>
-                  <a:lnTo>
-                    <a:pt x="4576147" y="3206763"/>
-                  </a:lnTo>
-                  <a:lnTo>
-                    <a:pt x="4498513" y="3186900"/>
-                  </a:lnTo>
-                  <a:lnTo>
-                    <a:pt x="4420879" y="3166152"/>
-                  </a:lnTo>
-                  <a:lnTo>
-                    <a:pt x="4343244" y="3144479"/>
-                  </a:lnTo>
-                  <a:lnTo>
-                    <a:pt x="4265610" y="3121842"/>
-                  </a:lnTo>
-                  <a:lnTo>
-                    <a:pt x="4187976" y="3098195"/>
-                  </a:lnTo>
-                  <a:lnTo>
-                    <a:pt x="4110342" y="3073496"/>
-                  </a:lnTo>
-                  <a:lnTo>
-                    <a:pt x="4032708" y="3047696"/>
-                  </a:lnTo>
-                  <a:lnTo>
-                    <a:pt x="3955074" y="3020747"/>
-                  </a:lnTo>
-                  <a:lnTo>
-                    <a:pt x="3877440" y="2992597"/>
-                  </a:lnTo>
-                  <a:lnTo>
-                    <a:pt x="3799806" y="2963193"/>
-                  </a:lnTo>
-                  <a:lnTo>
-                    <a:pt x="3722172" y="2932479"/>
-                  </a:lnTo>
-                  <a:lnTo>
-                    <a:pt x="3644538" y="2900397"/>
-                  </a:lnTo>
-                  <a:lnTo>
-                    <a:pt x="3566904" y="2866886"/>
-                  </a:lnTo>
-                  <a:lnTo>
-                    <a:pt x="3489270" y="2831882"/>
-                  </a:lnTo>
-                  <a:lnTo>
-                    <a:pt x="3411636" y="2795319"/>
-                  </a:lnTo>
-                  <a:lnTo>
-                    <a:pt x="3334002" y="2776230"/>
-                  </a:lnTo>
-                  <a:lnTo>
-                    <a:pt x="3256368" y="2766105"/>
-                  </a:lnTo>
-                  <a:lnTo>
-                    <a:pt x="3178734" y="2755864"/>
-                  </a:lnTo>
-                  <a:lnTo>
-                    <a:pt x="3101100" y="2745504"/>
-                  </a:lnTo>
-                  <a:lnTo>
-                    <a:pt x="3023466" y="2735025"/>
-                  </a:lnTo>
-                  <a:lnTo>
-                    <a:pt x="2945832" y="2724424"/>
-                  </a:lnTo>
-                  <a:lnTo>
-                    <a:pt x="2868198" y="2713701"/>
-                  </a:lnTo>
-                  <a:lnTo>
-                    <a:pt x="2790564" y="2702855"/>
-                  </a:lnTo>
-                  <a:lnTo>
-                    <a:pt x="2712930" y="2691883"/>
-                  </a:lnTo>
-                  <a:lnTo>
-                    <a:pt x="2635295" y="2680784"/>
-                  </a:lnTo>
-                  <a:lnTo>
-                    <a:pt x="2557661" y="2669557"/>
-                  </a:lnTo>
-                  <a:lnTo>
-                    <a:pt x="2480027" y="2658200"/>
-                  </a:lnTo>
-                  <a:lnTo>
-                    <a:pt x="2402393" y="2646712"/>
-                  </a:lnTo>
-                  <a:lnTo>
-                    <a:pt x="2324759" y="2635091"/>
-                  </a:lnTo>
-                  <a:lnTo>
-                    <a:pt x="2247125" y="2623336"/>
-                  </a:lnTo>
-                  <a:lnTo>
-                    <a:pt x="2169491" y="2611446"/>
-                  </a:lnTo>
-                  <a:lnTo>
-                    <a:pt x="2091857" y="2599418"/>
-                  </a:lnTo>
-                  <a:lnTo>
-                    <a:pt x="2014223" y="2587250"/>
-                  </a:lnTo>
-                  <a:lnTo>
-                    <a:pt x="1936589" y="2574943"/>
-                  </a:lnTo>
-                  <a:lnTo>
-                    <a:pt x="1858955" y="2562493"/>
-                  </a:lnTo>
-                  <a:lnTo>
-                    <a:pt x="1781321" y="2549900"/>
-                  </a:lnTo>
-                  <a:lnTo>
-                    <a:pt x="1703687" y="2537161"/>
-                  </a:lnTo>
-                  <a:lnTo>
-                    <a:pt x="1626053" y="2524274"/>
-                  </a:lnTo>
-                  <a:lnTo>
-                    <a:pt x="1548419" y="2511239"/>
-                  </a:lnTo>
-                  <a:lnTo>
-                    <a:pt x="1470785" y="2498054"/>
-                  </a:lnTo>
-                  <a:lnTo>
-                    <a:pt x="1393151" y="2484716"/>
-                  </a:lnTo>
-                  <a:lnTo>
-                    <a:pt x="1315517" y="2471223"/>
-                  </a:lnTo>
-                  <a:lnTo>
-                    <a:pt x="1237883" y="2457576"/>
-                  </a:lnTo>
-                  <a:lnTo>
-                    <a:pt x="1160249" y="2443770"/>
-                  </a:lnTo>
-                  <a:lnTo>
-                    <a:pt x="1082615" y="2429805"/>
-                  </a:lnTo>
-                  <a:lnTo>
-                    <a:pt x="1004981" y="2415678"/>
-                  </a:lnTo>
-                  <a:lnTo>
-                    <a:pt x="927346" y="2401389"/>
-                  </a:lnTo>
-                  <a:lnTo>
-                    <a:pt x="849712" y="2386934"/>
-                  </a:lnTo>
-                  <a:lnTo>
-                    <a:pt x="772078" y="2372312"/>
-                  </a:lnTo>
-                  <a:lnTo>
-                    <a:pt x="694444" y="2357522"/>
-                  </a:lnTo>
-                  <a:lnTo>
-                    <a:pt x="616810" y="2342560"/>
-                  </a:lnTo>
-                  <a:lnTo>
-                    <a:pt x="539176" y="2327426"/>
-                  </a:lnTo>
-                  <a:lnTo>
-                    <a:pt x="461542" y="2312117"/>
-                  </a:lnTo>
-                  <a:lnTo>
-                    <a:pt x="383908" y="2296631"/>
-                  </a:lnTo>
-                  <a:lnTo>
-                    <a:pt x="306274" y="2280966"/>
-                  </a:lnTo>
-                  <a:lnTo>
-                    <a:pt x="228640" y="2265120"/>
-                  </a:lnTo>
-                  <a:lnTo>
-                    <a:pt x="151006" y="2249092"/>
-                  </a:lnTo>
-                  <a:lnTo>
-                    <a:pt x="73372" y="2232878"/>
-                  </a:lnTo>
-                  <a:lnTo>
-                    <a:pt x="0" y="2217377"/>
+                    <a:pt x="849712" y="101157"/>
+                  </a:lnTo>
+                  <a:lnTo>
+                    <a:pt x="927346" y="250854"/>
+                  </a:lnTo>
+                  <a:lnTo>
+                    <a:pt x="1004981" y="394242"/>
+                  </a:lnTo>
+                  <a:lnTo>
+                    <a:pt x="1082615" y="531585"/>
+                  </a:lnTo>
+                  <a:lnTo>
+                    <a:pt x="1160249" y="663140"/>
+                  </a:lnTo>
+                  <a:lnTo>
+                    <a:pt x="1237883" y="789149"/>
+                  </a:lnTo>
+                  <a:lnTo>
+                    <a:pt x="1315517" y="909847"/>
+                  </a:lnTo>
+                  <a:lnTo>
+                    <a:pt x="1393151" y="1025457"/>
+                  </a:lnTo>
+                  <a:lnTo>
+                    <a:pt x="1470785" y="1136194"/>
+                  </a:lnTo>
+                  <a:lnTo>
+                    <a:pt x="1548419" y="1242264"/>
+                  </a:lnTo>
+                  <a:lnTo>
+                    <a:pt x="1626053" y="1343863"/>
+                  </a:lnTo>
+                  <a:lnTo>
+                    <a:pt x="1703687" y="1441179"/>
+                  </a:lnTo>
+                  <a:lnTo>
+                    <a:pt x="1781321" y="1534394"/>
+                  </a:lnTo>
+                  <a:lnTo>
+                    <a:pt x="1858955" y="1623679"/>
+                  </a:lnTo>
+                  <a:lnTo>
+                    <a:pt x="1936589" y="1709201"/>
+                  </a:lnTo>
+                  <a:lnTo>
+                    <a:pt x="2014223" y="1791118"/>
+                  </a:lnTo>
+                  <a:lnTo>
+                    <a:pt x="2091857" y="1869583"/>
+                  </a:lnTo>
+                  <a:lnTo>
+                    <a:pt x="2169491" y="1944740"/>
+                  </a:lnTo>
+                  <a:lnTo>
+                    <a:pt x="2247125" y="2016729"/>
+                  </a:lnTo>
+                  <a:lnTo>
+                    <a:pt x="2324759" y="2085683"/>
+                  </a:lnTo>
+                  <a:lnTo>
+                    <a:pt x="2402393" y="2151732"/>
+                  </a:lnTo>
+                  <a:lnTo>
+                    <a:pt x="2480027" y="2214996"/>
+                  </a:lnTo>
+                  <a:lnTo>
+                    <a:pt x="2557661" y="2275594"/>
+                  </a:lnTo>
+                  <a:lnTo>
+                    <a:pt x="2635295" y="2333637"/>
+                  </a:lnTo>
+                  <a:lnTo>
+                    <a:pt x="2712930" y="2389234"/>
+                  </a:lnTo>
+                  <a:lnTo>
+                    <a:pt x="2790564" y="2442487"/>
+                  </a:lnTo>
+                  <a:lnTo>
+                    <a:pt x="2868198" y="2493496"/>
+                  </a:lnTo>
+                  <a:lnTo>
+                    <a:pt x="2945832" y="2542355"/>
+                  </a:lnTo>
+                  <a:lnTo>
+                    <a:pt x="3023466" y="2589154"/>
+                  </a:lnTo>
+                  <a:lnTo>
+                    <a:pt x="3101100" y="2633981"/>
+                  </a:lnTo>
+                  <a:lnTo>
+                    <a:pt x="3178734" y="2676918"/>
+                  </a:lnTo>
+                  <a:lnTo>
+                    <a:pt x="3256368" y="2718045"/>
+                  </a:lnTo>
+                  <a:lnTo>
+                    <a:pt x="3334002" y="2757439"/>
+                  </a:lnTo>
+                  <a:lnTo>
+                    <a:pt x="3411636" y="2785602"/>
+                  </a:lnTo>
+                  <a:lnTo>
+                    <a:pt x="3489270" y="2793582"/>
+                  </a:lnTo>
+                  <a:lnTo>
+                    <a:pt x="3566904" y="2801489"/>
+                  </a:lnTo>
+                  <a:lnTo>
+                    <a:pt x="3644538" y="2809323"/>
+                  </a:lnTo>
+                  <a:lnTo>
+                    <a:pt x="3722172" y="2817085"/>
+                  </a:lnTo>
+                  <a:lnTo>
+                    <a:pt x="3799806" y="2824775"/>
+                  </a:lnTo>
+                  <a:lnTo>
+                    <a:pt x="3877440" y="2832395"/>
+                  </a:lnTo>
+                  <a:lnTo>
+                    <a:pt x="3955074" y="2839944"/>
+                  </a:lnTo>
+                  <a:lnTo>
+                    <a:pt x="4032708" y="2847424"/>
+                  </a:lnTo>
+                  <a:lnTo>
+                    <a:pt x="4110342" y="2854836"/>
+                  </a:lnTo>
+                  <a:lnTo>
+                    <a:pt x="4187976" y="2862179"/>
+                  </a:lnTo>
+                  <a:lnTo>
+                    <a:pt x="4265610" y="2869454"/>
+                  </a:lnTo>
+                  <a:lnTo>
+                    <a:pt x="4343244" y="2876662"/>
+                  </a:lnTo>
+                  <a:lnTo>
+                    <a:pt x="4420879" y="2883805"/>
+                  </a:lnTo>
+                  <a:lnTo>
+                    <a:pt x="4498513" y="2890881"/>
+                  </a:lnTo>
+                  <a:lnTo>
+                    <a:pt x="4576147" y="2897892"/>
+                  </a:lnTo>
+                  <a:lnTo>
+                    <a:pt x="4653781" y="2904839"/>
+                  </a:lnTo>
+                  <a:lnTo>
+                    <a:pt x="4731415" y="2911722"/>
+                  </a:lnTo>
+                  <a:lnTo>
+                    <a:pt x="4809049" y="2918541"/>
+                  </a:lnTo>
+                  <a:lnTo>
+                    <a:pt x="4886683" y="2925298"/>
+                  </a:lnTo>
+                  <a:lnTo>
+                    <a:pt x="4964317" y="2931992"/>
+                  </a:lnTo>
+                  <a:lnTo>
+                    <a:pt x="5041951" y="2938625"/>
+                  </a:lnTo>
+                  <a:lnTo>
+                    <a:pt x="5119585" y="2945197"/>
+                  </a:lnTo>
+                  <a:lnTo>
+                    <a:pt x="5197219" y="2951708"/>
+                  </a:lnTo>
+                  <a:lnTo>
+                    <a:pt x="5274853" y="2958160"/>
+                  </a:lnTo>
+                  <a:lnTo>
+                    <a:pt x="5352487" y="2964552"/>
+                  </a:lnTo>
+                  <a:lnTo>
+                    <a:pt x="5430121" y="2970885"/>
+                  </a:lnTo>
+                  <a:lnTo>
+                    <a:pt x="5507755" y="2977160"/>
+                  </a:lnTo>
+                  <a:lnTo>
+                    <a:pt x="5585389" y="2983377"/>
+                  </a:lnTo>
+                  <a:lnTo>
+                    <a:pt x="5663023" y="2989537"/>
+                  </a:lnTo>
+                  <a:lnTo>
+                    <a:pt x="5740657" y="2995640"/>
+                  </a:lnTo>
+                  <a:lnTo>
+                    <a:pt x="5818291" y="3001687"/>
+                  </a:lnTo>
+                  <a:lnTo>
+                    <a:pt x="5895925" y="3007678"/>
+                  </a:lnTo>
+                  <a:lnTo>
+                    <a:pt x="5973559" y="3013615"/>
+                  </a:lnTo>
+                  <a:lnTo>
+                    <a:pt x="6051193" y="3019496"/>
+                  </a:lnTo>
+                  <a:lnTo>
+                    <a:pt x="6128827" y="3025324"/>
+                  </a:lnTo>
+                  <a:lnTo>
+                    <a:pt x="6206462" y="3031097"/>
+                  </a:lnTo>
+                  <a:lnTo>
+                    <a:pt x="6284096" y="3036818"/>
+                  </a:lnTo>
+                  <a:lnTo>
+                    <a:pt x="6361730" y="3042486"/>
+                  </a:lnTo>
+                  <a:lnTo>
+                    <a:pt x="6439364" y="3048102"/>
+                  </a:lnTo>
+                  <a:lnTo>
+                    <a:pt x="6516998" y="3053666"/>
+                  </a:lnTo>
+                  <a:lnTo>
+                    <a:pt x="6594632" y="3059179"/>
+                  </a:lnTo>
+                  <a:lnTo>
+                    <a:pt x="6672266" y="3064641"/>
+                  </a:lnTo>
+                  <a:lnTo>
+                    <a:pt x="6749900" y="3070053"/>
+                  </a:lnTo>
+                  <a:lnTo>
+                    <a:pt x="6827534" y="3075416"/>
+                  </a:lnTo>
+                  <a:lnTo>
+                    <a:pt x="6905168" y="3080728"/>
+                  </a:lnTo>
+                  <a:lnTo>
+                    <a:pt x="6982802" y="3085992"/>
+                  </a:lnTo>
+                  <a:lnTo>
+                    <a:pt x="7060436" y="3091208"/>
+                  </a:lnTo>
+                  <a:lnTo>
+                    <a:pt x="7138070" y="3096375"/>
+                  </a:lnTo>
+                  <a:lnTo>
+                    <a:pt x="7215704" y="3101495"/>
+                  </a:lnTo>
+                  <a:lnTo>
+                    <a:pt x="7293338" y="3106568"/>
+                  </a:lnTo>
+                  <a:lnTo>
+                    <a:pt x="7370972" y="3111594"/>
+                  </a:lnTo>
+                  <a:lnTo>
+                    <a:pt x="7370972" y="3557280"/>
+                  </a:lnTo>
+                  <a:lnTo>
+                    <a:pt x="7293338" y="3553084"/>
+                  </a:lnTo>
+                  <a:lnTo>
+                    <a:pt x="7215704" y="3548703"/>
+                  </a:lnTo>
+                  <a:lnTo>
+                    <a:pt x="7138070" y="3544129"/>
+                  </a:lnTo>
+                  <a:lnTo>
+                    <a:pt x="7060436" y="3539354"/>
+                  </a:lnTo>
+                  <a:lnTo>
+                    <a:pt x="6982802" y="3534368"/>
+                  </a:lnTo>
+                  <a:lnTo>
+                    <a:pt x="6905168" y="3529164"/>
+                  </a:lnTo>
+                  <a:lnTo>
+                    <a:pt x="6827534" y="3523730"/>
+                  </a:lnTo>
+                  <a:lnTo>
+                    <a:pt x="6749900" y="3518057"/>
+                  </a:lnTo>
+                  <a:lnTo>
+                    <a:pt x="6672266" y="3512134"/>
+                  </a:lnTo>
+                  <a:lnTo>
+                    <a:pt x="6594632" y="3505951"/>
+                  </a:lnTo>
+                  <a:lnTo>
+                    <a:pt x="6516998" y="3499496"/>
+                  </a:lnTo>
+                  <a:lnTo>
+                    <a:pt x="6439364" y="3492757"/>
+                  </a:lnTo>
+                  <a:lnTo>
+                    <a:pt x="6361730" y="3485721"/>
+                  </a:lnTo>
+                  <a:lnTo>
+                    <a:pt x="6284096" y="3478375"/>
+                  </a:lnTo>
+                  <a:lnTo>
+                    <a:pt x="6206462" y="3470707"/>
+                  </a:lnTo>
+                  <a:lnTo>
+                    <a:pt x="6128827" y="3462700"/>
+                  </a:lnTo>
+                  <a:lnTo>
+                    <a:pt x="6051193" y="3454342"/>
+                  </a:lnTo>
+                  <a:lnTo>
+                    <a:pt x="5973559" y="3445615"/>
+                  </a:lnTo>
+                  <a:lnTo>
+                    <a:pt x="5895925" y="3436505"/>
+                  </a:lnTo>
+                  <a:lnTo>
+                    <a:pt x="5818291" y="3426994"/>
+                  </a:lnTo>
+                  <a:lnTo>
+                    <a:pt x="5740657" y="3417064"/>
+                  </a:lnTo>
+                  <a:lnTo>
+                    <a:pt x="5663023" y="3406697"/>
+                  </a:lnTo>
+                  <a:lnTo>
+                    <a:pt x="5585389" y="3395874"/>
+                  </a:lnTo>
+                  <a:lnTo>
+                    <a:pt x="5507755" y="3384575"/>
+                  </a:lnTo>
+                  <a:lnTo>
+                    <a:pt x="5430121" y="3372779"/>
+                  </a:lnTo>
+                  <a:lnTo>
+                    <a:pt x="5352487" y="3360463"/>
+                  </a:lnTo>
+                  <a:lnTo>
+                    <a:pt x="5274853" y="3347606"/>
+                  </a:lnTo>
+                  <a:lnTo>
+                    <a:pt x="5197219" y="3334182"/>
+                  </a:lnTo>
+                  <a:lnTo>
+                    <a:pt x="5119585" y="3320168"/>
+                  </a:lnTo>
+                  <a:lnTo>
+                    <a:pt x="5041951" y="3305538"/>
+                  </a:lnTo>
+                  <a:lnTo>
+                    <a:pt x="4964317" y="3290263"/>
+                  </a:lnTo>
+                  <a:lnTo>
+                    <a:pt x="4886683" y="3274316"/>
+                  </a:lnTo>
+                  <a:lnTo>
+                    <a:pt x="4809049" y="3257668"/>
+                  </a:lnTo>
+                  <a:lnTo>
+                    <a:pt x="4731415" y="3240287"/>
+                  </a:lnTo>
+                  <a:lnTo>
+                    <a:pt x="4653781" y="3222141"/>
+                  </a:lnTo>
+                  <a:lnTo>
+                    <a:pt x="4576147" y="3203197"/>
+                  </a:lnTo>
+                  <a:lnTo>
+                    <a:pt x="4498513" y="3183419"/>
+                  </a:lnTo>
+                  <a:lnTo>
+                    <a:pt x="4420879" y="3162770"/>
+                  </a:lnTo>
+                  <a:lnTo>
+                    <a:pt x="4343244" y="3141213"/>
+                  </a:lnTo>
+                  <a:lnTo>
+                    <a:pt x="4265610" y="3118707"/>
+                  </a:lnTo>
+                  <a:lnTo>
+                    <a:pt x="4187976" y="3095211"/>
+                  </a:lnTo>
+                  <a:lnTo>
+                    <a:pt x="4110342" y="3070681"/>
+                  </a:lnTo>
+                  <a:lnTo>
+                    <a:pt x="4032708" y="3045072"/>
+                  </a:lnTo>
+                  <a:lnTo>
+                    <a:pt x="3955074" y="3018335"/>
+                  </a:lnTo>
+                  <a:lnTo>
+                    <a:pt x="3877440" y="2990422"/>
+                  </a:lnTo>
+                  <a:lnTo>
+                    <a:pt x="3799806" y="2961281"/>
+                  </a:lnTo>
+                  <a:lnTo>
+                    <a:pt x="3722172" y="2930857"/>
+                  </a:lnTo>
+                  <a:lnTo>
+                    <a:pt x="3644538" y="2899095"/>
+                  </a:lnTo>
+                  <a:lnTo>
+                    <a:pt x="3566904" y="2865935"/>
+                  </a:lnTo>
+                  <a:lnTo>
+                    <a:pt x="3489270" y="2831315"/>
+                  </a:lnTo>
+                  <a:lnTo>
+                    <a:pt x="3411636" y="2795172"/>
+                  </a:lnTo>
+                  <a:lnTo>
+                    <a:pt x="3334002" y="2777547"/>
+                  </a:lnTo>
+                  <a:lnTo>
+                    <a:pt x="3256368" y="2769418"/>
+                  </a:lnTo>
+                  <a:lnTo>
+                    <a:pt x="3178734" y="2761213"/>
+                  </a:lnTo>
+                  <a:lnTo>
+                    <a:pt x="3101100" y="2752932"/>
+                  </a:lnTo>
+                  <a:lnTo>
+                    <a:pt x="3023466" y="2744575"/>
+                  </a:lnTo>
+                  <a:lnTo>
+                    <a:pt x="2945832" y="2736139"/>
+                  </a:lnTo>
+                  <a:lnTo>
+                    <a:pt x="2868198" y="2727625"/>
+                  </a:lnTo>
+                  <a:lnTo>
+                    <a:pt x="2790564" y="2719032"/>
+                  </a:lnTo>
+                  <a:lnTo>
+                    <a:pt x="2712930" y="2710360"/>
+                  </a:lnTo>
+                  <a:lnTo>
+                    <a:pt x="2635295" y="2701606"/>
+                  </a:lnTo>
+                  <a:lnTo>
+                    <a:pt x="2557661" y="2692772"/>
+                  </a:lnTo>
+                  <a:lnTo>
+                    <a:pt x="2480027" y="2683855"/>
+                  </a:lnTo>
+                  <a:lnTo>
+                    <a:pt x="2402393" y="2674855"/>
+                  </a:lnTo>
+                  <a:lnTo>
+                    <a:pt x="2324759" y="2665772"/>
+                  </a:lnTo>
+                  <a:lnTo>
+                    <a:pt x="2247125" y="2656605"/>
+                  </a:lnTo>
+                  <a:lnTo>
+                    <a:pt x="2169491" y="2647352"/>
+                  </a:lnTo>
+                  <a:lnTo>
+                    <a:pt x="2091857" y="2638013"/>
+                  </a:lnTo>
+                  <a:lnTo>
+                    <a:pt x="2014223" y="2628588"/>
+                  </a:lnTo>
+                  <a:lnTo>
+                    <a:pt x="1936589" y="2619075"/>
+                  </a:lnTo>
+                  <a:lnTo>
+                    <a:pt x="1858955" y="2609474"/>
+                  </a:lnTo>
+                  <a:lnTo>
+                    <a:pt x="1781321" y="2599783"/>
+                  </a:lnTo>
+                  <a:lnTo>
+                    <a:pt x="1703687" y="2590003"/>
+                  </a:lnTo>
+                  <a:lnTo>
+                    <a:pt x="1626053" y="2580131"/>
+                  </a:lnTo>
+                  <a:lnTo>
+                    <a:pt x="1548419" y="2570168"/>
+                  </a:lnTo>
+                  <a:lnTo>
+                    <a:pt x="1470785" y="2560113"/>
+                  </a:lnTo>
+                  <a:lnTo>
+                    <a:pt x="1393151" y="2549964"/>
+                  </a:lnTo>
+                  <a:lnTo>
+                    <a:pt x="1315517" y="2539720"/>
+                  </a:lnTo>
+                  <a:lnTo>
+                    <a:pt x="1237883" y="2529382"/>
+                  </a:lnTo>
+                  <a:lnTo>
+                    <a:pt x="1160249" y="2518947"/>
+                  </a:lnTo>
+                  <a:lnTo>
+                    <a:pt x="1082615" y="2508416"/>
+                  </a:lnTo>
+                  <a:lnTo>
+                    <a:pt x="1004981" y="2497787"/>
+                  </a:lnTo>
+                  <a:lnTo>
+                    <a:pt x="927346" y="2487059"/>
+                  </a:lnTo>
+                  <a:lnTo>
+                    <a:pt x="849712" y="2476231"/>
+                  </a:lnTo>
+                  <a:lnTo>
+                    <a:pt x="772078" y="2465303"/>
+                  </a:lnTo>
+                  <a:lnTo>
+                    <a:pt x="694444" y="2454273"/>
+                  </a:lnTo>
+                  <a:lnTo>
+                    <a:pt x="616810" y="2443141"/>
+                  </a:lnTo>
+                  <a:lnTo>
+                    <a:pt x="539176" y="2431905"/>
+                  </a:lnTo>
+                  <a:lnTo>
+                    <a:pt x="461542" y="2420565"/>
+                  </a:lnTo>
+                  <a:lnTo>
+                    <a:pt x="383908" y="2409120"/>
+                  </a:lnTo>
+                  <a:lnTo>
+                    <a:pt x="306274" y="2397568"/>
+                  </a:lnTo>
+                  <a:lnTo>
+                    <a:pt x="228640" y="2385909"/>
+                  </a:lnTo>
+                  <a:lnTo>
+                    <a:pt x="151006" y="2374142"/>
+                  </a:lnTo>
+                  <a:lnTo>
+                    <a:pt x="73372" y="2362265"/>
+                  </a:lnTo>
+                  <a:lnTo>
+                    <a:pt x="0" y="2350936"/>
                   </a:lnTo>
                   <a:close/>
                 </a:path>
@@ -3579,270 +3579,270 @@
           </p:nvSpPr>
           <p:spPr>
             <a:xfrm>
-              <a:off x="1647770" y="1896563"/>
-              <a:ext cx="6540719" cy="3170342"/>
+              <a:off x="1616980" y="1896563"/>
+              <a:ext cx="6571509" cy="3111594"/>
             </a:xfrm>
             <a:custGeom>
               <a:avLst/>
               <a:pathLst>
-                <a:path w="6540719" h="3170342">
+                <a:path w="6571509" h="3111594">
                   <a:moveTo>
                     <a:pt x="0" y="0"/>
                   </a:moveTo>
                   <a:lnTo>
-                    <a:pt x="19460" y="40337"/>
-                  </a:lnTo>
-                  <a:lnTo>
-                    <a:pt x="97094" y="194395"/>
-                  </a:lnTo>
-                  <a:lnTo>
-                    <a:pt x="174728" y="341884"/>
-                  </a:lnTo>
-                  <a:lnTo>
-                    <a:pt x="252362" y="483082"/>
-                  </a:lnTo>
-                  <a:lnTo>
-                    <a:pt x="329996" y="618258"/>
-                  </a:lnTo>
-                  <a:lnTo>
-                    <a:pt x="407630" y="747669"/>
-                  </a:lnTo>
-                  <a:lnTo>
-                    <a:pt x="485264" y="871561"/>
-                  </a:lnTo>
-                  <a:lnTo>
-                    <a:pt x="562898" y="990169"/>
-                  </a:lnTo>
-                  <a:lnTo>
-                    <a:pt x="640532" y="1103719"/>
-                  </a:lnTo>
-                  <a:lnTo>
-                    <a:pt x="718166" y="1212426"/>
-                  </a:lnTo>
-                  <a:lnTo>
-                    <a:pt x="795800" y="1316497"/>
-                  </a:lnTo>
-                  <a:lnTo>
-                    <a:pt x="873434" y="1416130"/>
-                  </a:lnTo>
-                  <a:lnTo>
-                    <a:pt x="951068" y="1511513"/>
-                  </a:lnTo>
-                  <a:lnTo>
-                    <a:pt x="1028702" y="1602829"/>
-                  </a:lnTo>
-                  <a:lnTo>
-                    <a:pt x="1106336" y="1690250"/>
-                  </a:lnTo>
-                  <a:lnTo>
-                    <a:pt x="1183970" y="1773942"/>
-                  </a:lnTo>
-                  <a:lnTo>
-                    <a:pt x="1261604" y="1854066"/>
-                  </a:lnTo>
-                  <a:lnTo>
-                    <a:pt x="1339238" y="1930772"/>
-                  </a:lnTo>
-                  <a:lnTo>
-                    <a:pt x="1416872" y="2004207"/>
-                  </a:lnTo>
-                  <a:lnTo>
-                    <a:pt x="1494506" y="2074510"/>
-                  </a:lnTo>
-                  <a:lnTo>
-                    <a:pt x="1572140" y="2141814"/>
-                  </a:lnTo>
-                  <a:lnTo>
-                    <a:pt x="1649775" y="2206248"/>
-                  </a:lnTo>
-                  <a:lnTo>
-                    <a:pt x="1727409" y="2267935"/>
-                  </a:lnTo>
-                  <a:lnTo>
-                    <a:pt x="1805043" y="2326990"/>
-                  </a:lnTo>
-                  <a:lnTo>
-                    <a:pt x="1882677" y="2383527"/>
-                  </a:lnTo>
-                  <a:lnTo>
-                    <a:pt x="1960311" y="2437652"/>
-                  </a:lnTo>
-                  <a:lnTo>
-                    <a:pt x="2037945" y="2489470"/>
-                  </a:lnTo>
-                  <a:lnTo>
-                    <a:pt x="2115579" y="2539077"/>
-                  </a:lnTo>
-                  <a:lnTo>
-                    <a:pt x="2193213" y="2586569"/>
-                  </a:lnTo>
-                  <a:lnTo>
-                    <a:pt x="2270847" y="2632035"/>
-                  </a:lnTo>
-                  <a:lnTo>
-                    <a:pt x="2348481" y="2675562"/>
-                  </a:lnTo>
-                  <a:lnTo>
-                    <a:pt x="2426115" y="2717233"/>
-                  </a:lnTo>
-                  <a:lnTo>
-                    <a:pt x="2503749" y="2757126"/>
-                  </a:lnTo>
-                  <a:lnTo>
-                    <a:pt x="2581383" y="2786239"/>
-                  </a:lnTo>
-                  <a:lnTo>
-                    <a:pt x="2659017" y="2796133"/>
-                  </a:lnTo>
-                  <a:lnTo>
-                    <a:pt x="2736651" y="2805915"/>
-                  </a:lnTo>
-                  <a:lnTo>
-                    <a:pt x="2814285" y="2815585"/>
-                  </a:lnTo>
-                  <a:lnTo>
-                    <a:pt x="2891919" y="2825144"/>
-                  </a:lnTo>
-                  <a:lnTo>
-                    <a:pt x="2969553" y="2834594"/>
-                  </a:lnTo>
-                  <a:lnTo>
-                    <a:pt x="3047187" y="2843936"/>
-                  </a:lnTo>
-                  <a:lnTo>
-                    <a:pt x="3124821" y="2853172"/>
-                  </a:lnTo>
-                  <a:lnTo>
-                    <a:pt x="3202455" y="2862302"/>
-                  </a:lnTo>
-                  <a:lnTo>
-                    <a:pt x="3280089" y="2871328"/>
-                  </a:lnTo>
-                  <a:lnTo>
-                    <a:pt x="3357724" y="2880251"/>
-                  </a:lnTo>
-                  <a:lnTo>
-                    <a:pt x="3435358" y="2889072"/>
-                  </a:lnTo>
-                  <a:lnTo>
-                    <a:pt x="3512992" y="2897792"/>
-                  </a:lnTo>
-                  <a:lnTo>
-                    <a:pt x="3590626" y="2906412"/>
-                  </a:lnTo>
-                  <a:lnTo>
-                    <a:pt x="3668260" y="2914935"/>
-                  </a:lnTo>
-                  <a:lnTo>
-                    <a:pt x="3745894" y="2923359"/>
-                  </a:lnTo>
-                  <a:lnTo>
-                    <a:pt x="3823528" y="2931688"/>
-                  </a:lnTo>
-                  <a:lnTo>
-                    <a:pt x="3901162" y="2939921"/>
-                  </a:lnTo>
-                  <a:lnTo>
-                    <a:pt x="3978796" y="2948061"/>
-                  </a:lnTo>
-                  <a:lnTo>
-                    <a:pt x="4056430" y="2956107"/>
-                  </a:lnTo>
-                  <a:lnTo>
-                    <a:pt x="4134064" y="2964062"/>
-                  </a:lnTo>
-                  <a:lnTo>
-                    <a:pt x="4211698" y="2971926"/>
-                  </a:lnTo>
-                  <a:lnTo>
-                    <a:pt x="4289332" y="2979700"/>
-                  </a:lnTo>
-                  <a:lnTo>
-                    <a:pt x="4366966" y="2987385"/>
-                  </a:lnTo>
-                  <a:lnTo>
-                    <a:pt x="4444600" y="2994982"/>
-                  </a:lnTo>
-                  <a:lnTo>
-                    <a:pt x="4522234" y="3002493"/>
-                  </a:lnTo>
-                  <a:lnTo>
-                    <a:pt x="4599868" y="3009918"/>
-                  </a:lnTo>
-                  <a:lnTo>
-                    <a:pt x="4677502" y="3017258"/>
-                  </a:lnTo>
-                  <a:lnTo>
-                    <a:pt x="4755136" y="3024514"/>
-                  </a:lnTo>
-                  <a:lnTo>
-                    <a:pt x="4832770" y="3031687"/>
-                  </a:lnTo>
-                  <a:lnTo>
-                    <a:pt x="4910404" y="3038779"/>
-                  </a:lnTo>
-                  <a:lnTo>
-                    <a:pt x="4988038" y="3045789"/>
-                  </a:lnTo>
-                  <a:lnTo>
-                    <a:pt x="5065672" y="3052720"/>
-                  </a:lnTo>
-                  <a:lnTo>
-                    <a:pt x="5143307" y="3059571"/>
-                  </a:lnTo>
-                  <a:lnTo>
-                    <a:pt x="5220941" y="3066344"/>
-                  </a:lnTo>
-                  <a:lnTo>
-                    <a:pt x="5298575" y="3073040"/>
-                  </a:lnTo>
-                  <a:lnTo>
-                    <a:pt x="5376209" y="3079659"/>
-                  </a:lnTo>
-                  <a:lnTo>
-                    <a:pt x="5453843" y="3086203"/>
-                  </a:lnTo>
-                  <a:lnTo>
-                    <a:pt x="5531477" y="3092671"/>
-                  </a:lnTo>
-                  <a:lnTo>
-                    <a:pt x="5609111" y="3099066"/>
-                  </a:lnTo>
-                  <a:lnTo>
-                    <a:pt x="5686745" y="3105388"/>
-                  </a:lnTo>
-                  <a:lnTo>
-                    <a:pt x="5764379" y="3111638"/>
-                  </a:lnTo>
-                  <a:lnTo>
-                    <a:pt x="5842013" y="3117817"/>
-                  </a:lnTo>
-                  <a:lnTo>
-                    <a:pt x="5919647" y="3123924"/>
-                  </a:lnTo>
-                  <a:lnTo>
-                    <a:pt x="5997281" y="3129962"/>
-                  </a:lnTo>
-                  <a:lnTo>
-                    <a:pt x="6074915" y="3135932"/>
-                  </a:lnTo>
-                  <a:lnTo>
-                    <a:pt x="6152549" y="3141833"/>
-                  </a:lnTo>
-                  <a:lnTo>
-                    <a:pt x="6230183" y="3147666"/>
-                  </a:lnTo>
-                  <a:lnTo>
-                    <a:pt x="6307817" y="3153433"/>
-                  </a:lnTo>
-                  <a:lnTo>
-                    <a:pt x="6385451" y="3159134"/>
-                  </a:lnTo>
-                  <a:lnTo>
-                    <a:pt x="6463085" y="3164770"/>
-                  </a:lnTo>
-                  <a:lnTo>
-                    <a:pt x="6540719" y="3170342"/>
+                    <a:pt x="50249" y="101157"/>
+                  </a:lnTo>
+                  <a:lnTo>
+                    <a:pt x="127884" y="250854"/>
+                  </a:lnTo>
+                  <a:lnTo>
+                    <a:pt x="205518" y="394242"/>
+                  </a:lnTo>
+                  <a:lnTo>
+                    <a:pt x="283152" y="531585"/>
+                  </a:lnTo>
+                  <a:lnTo>
+                    <a:pt x="360786" y="663140"/>
+                  </a:lnTo>
+                  <a:lnTo>
+                    <a:pt x="438420" y="789149"/>
+                  </a:lnTo>
+                  <a:lnTo>
+                    <a:pt x="516054" y="909847"/>
+                  </a:lnTo>
+                  <a:lnTo>
+                    <a:pt x="593688" y="1025457"/>
+                  </a:lnTo>
+                  <a:lnTo>
+                    <a:pt x="671322" y="1136194"/>
+                  </a:lnTo>
+                  <a:lnTo>
+                    <a:pt x="748956" y="1242264"/>
+                  </a:lnTo>
+                  <a:lnTo>
+                    <a:pt x="826590" y="1343863"/>
+                  </a:lnTo>
+                  <a:lnTo>
+                    <a:pt x="904224" y="1441179"/>
+                  </a:lnTo>
+                  <a:lnTo>
+                    <a:pt x="981858" y="1534394"/>
+                  </a:lnTo>
+                  <a:lnTo>
+                    <a:pt x="1059492" y="1623679"/>
+                  </a:lnTo>
+                  <a:lnTo>
+                    <a:pt x="1137126" y="1709201"/>
+                  </a:lnTo>
+                  <a:lnTo>
+                    <a:pt x="1214760" y="1791118"/>
+                  </a:lnTo>
+                  <a:lnTo>
+                    <a:pt x="1292394" y="1869583"/>
+                  </a:lnTo>
+                  <a:lnTo>
+                    <a:pt x="1370028" y="1944740"/>
+                  </a:lnTo>
+                  <a:lnTo>
+                    <a:pt x="1447662" y="2016729"/>
+                  </a:lnTo>
+                  <a:lnTo>
+                    <a:pt x="1525296" y="2085683"/>
+                  </a:lnTo>
+                  <a:lnTo>
+                    <a:pt x="1602930" y="2151732"/>
+                  </a:lnTo>
+                  <a:lnTo>
+                    <a:pt x="1680564" y="2214996"/>
+                  </a:lnTo>
+                  <a:lnTo>
+                    <a:pt x="1758198" y="2275594"/>
+                  </a:lnTo>
+                  <a:lnTo>
+                    <a:pt x="1835832" y="2333637"/>
+                  </a:lnTo>
+                  <a:lnTo>
+                    <a:pt x="1913467" y="2389234"/>
+                  </a:lnTo>
+                  <a:lnTo>
+                    <a:pt x="1991101" y="2442487"/>
+                  </a:lnTo>
+                  <a:lnTo>
+                    <a:pt x="2068735" y="2493496"/>
+                  </a:lnTo>
+                  <a:lnTo>
+                    <a:pt x="2146369" y="2542355"/>
+                  </a:lnTo>
+                  <a:lnTo>
+                    <a:pt x="2224003" y="2589154"/>
+                  </a:lnTo>
+                  <a:lnTo>
+                    <a:pt x="2301637" y="2633981"/>
+                  </a:lnTo>
+                  <a:lnTo>
+                    <a:pt x="2379271" y="2676918"/>
+                  </a:lnTo>
+                  <a:lnTo>
+                    <a:pt x="2456905" y="2718045"/>
+                  </a:lnTo>
+                  <a:lnTo>
+                    <a:pt x="2534539" y="2757439"/>
+                  </a:lnTo>
+                  <a:lnTo>
+                    <a:pt x="2612173" y="2785602"/>
+                  </a:lnTo>
+                  <a:lnTo>
+                    <a:pt x="2689807" y="2793582"/>
+                  </a:lnTo>
+                  <a:lnTo>
+                    <a:pt x="2767441" y="2801489"/>
+                  </a:lnTo>
+                  <a:lnTo>
+                    <a:pt x="2845075" y="2809323"/>
+                  </a:lnTo>
+                  <a:lnTo>
+                    <a:pt x="2922709" y="2817085"/>
+                  </a:lnTo>
+                  <a:lnTo>
+                    <a:pt x="3000343" y="2824775"/>
+                  </a:lnTo>
+                  <a:lnTo>
+                    <a:pt x="3077977" y="2832395"/>
+                  </a:lnTo>
+                  <a:lnTo>
+                    <a:pt x="3155611" y="2839944"/>
+                  </a:lnTo>
+                  <a:lnTo>
+                    <a:pt x="3233245" y="2847424"/>
+                  </a:lnTo>
+                  <a:lnTo>
+                    <a:pt x="3310879" y="2854836"/>
+                  </a:lnTo>
+                  <a:lnTo>
+                    <a:pt x="3388513" y="2862179"/>
+                  </a:lnTo>
+                  <a:lnTo>
+                    <a:pt x="3466147" y="2869454"/>
+                  </a:lnTo>
+                  <a:lnTo>
+                    <a:pt x="3543781" y="2876662"/>
+                  </a:lnTo>
+                  <a:lnTo>
+                    <a:pt x="3621416" y="2883805"/>
+                  </a:lnTo>
+                  <a:lnTo>
+                    <a:pt x="3699050" y="2890881"/>
+                  </a:lnTo>
+                  <a:lnTo>
+                    <a:pt x="3776684" y="2897892"/>
+                  </a:lnTo>
+                  <a:lnTo>
+                    <a:pt x="3854318" y="2904839"/>
+                  </a:lnTo>
+                  <a:lnTo>
+                    <a:pt x="3931952" y="2911722"/>
+                  </a:lnTo>
+                  <a:lnTo>
+                    <a:pt x="4009586" y="2918541"/>
+                  </a:lnTo>
+                  <a:lnTo>
+                    <a:pt x="4087220" y="2925298"/>
+                  </a:lnTo>
+                  <a:lnTo>
+                    <a:pt x="4164854" y="2931992"/>
+                  </a:lnTo>
+                  <a:lnTo>
+                    <a:pt x="4242488" y="2938625"/>
+                  </a:lnTo>
+                  <a:lnTo>
+                    <a:pt x="4320122" y="2945197"/>
+                  </a:lnTo>
+                  <a:lnTo>
+                    <a:pt x="4397756" y="2951708"/>
+                  </a:lnTo>
+                  <a:lnTo>
+                    <a:pt x="4475390" y="2958160"/>
+                  </a:lnTo>
+                  <a:lnTo>
+                    <a:pt x="4553024" y="2964552"/>
+                  </a:lnTo>
+                  <a:lnTo>
+                    <a:pt x="4630658" y="2970885"/>
+                  </a:lnTo>
+                  <a:lnTo>
+                    <a:pt x="4708292" y="2977160"/>
+                  </a:lnTo>
+                  <a:lnTo>
+                    <a:pt x="4785926" y="2983377"/>
+                  </a:lnTo>
+                  <a:lnTo>
+                    <a:pt x="4863560" y="2989537"/>
+                  </a:lnTo>
+                  <a:lnTo>
+                    <a:pt x="4941194" y="2995640"/>
+                  </a:lnTo>
+                  <a:lnTo>
+                    <a:pt x="5018828" y="3001687"/>
+                  </a:lnTo>
+                  <a:lnTo>
+                    <a:pt x="5096462" y="3007678"/>
+                  </a:lnTo>
+                  <a:lnTo>
+                    <a:pt x="5174096" y="3013615"/>
+                  </a:lnTo>
+                  <a:lnTo>
+                    <a:pt x="5251730" y="3019496"/>
+                  </a:lnTo>
+                  <a:lnTo>
+                    <a:pt x="5329365" y="3025324"/>
+                  </a:lnTo>
+                  <a:lnTo>
+                    <a:pt x="5406999" y="3031097"/>
+                  </a:lnTo>
+                  <a:lnTo>
+                    <a:pt x="5484633" y="3036818"/>
+                  </a:lnTo>
+                  <a:lnTo>
+                    <a:pt x="5562267" y="3042486"/>
+                  </a:lnTo>
+                  <a:lnTo>
+                    <a:pt x="5639901" y="3048102"/>
+                  </a:lnTo>
+                  <a:lnTo>
+                    <a:pt x="5717535" y="3053666"/>
+                  </a:lnTo>
+                  <a:lnTo>
+                    <a:pt x="5795169" y="3059179"/>
+                  </a:lnTo>
+                  <a:lnTo>
+                    <a:pt x="5872803" y="3064641"/>
+                  </a:lnTo>
+                  <a:lnTo>
+                    <a:pt x="5950437" y="3070053"/>
+                  </a:lnTo>
+                  <a:lnTo>
+                    <a:pt x="6028071" y="3075416"/>
+                  </a:lnTo>
+                  <a:lnTo>
+                    <a:pt x="6105705" y="3080728"/>
+                  </a:lnTo>
+                  <a:lnTo>
+                    <a:pt x="6183339" y="3085992"/>
+                  </a:lnTo>
+                  <a:lnTo>
+                    <a:pt x="6260973" y="3091208"/>
+                  </a:lnTo>
+                  <a:lnTo>
+                    <a:pt x="6338607" y="3096375"/>
+                  </a:lnTo>
+                  <a:lnTo>
+                    <a:pt x="6416241" y="3101495"/>
+                  </a:lnTo>
+                  <a:lnTo>
+                    <a:pt x="6493875" y="3106568"/>
+                  </a:lnTo>
+                  <a:lnTo>
+                    <a:pt x="6571509" y="3111594"/>
                   </a:lnTo>
                 </a:path>
               </a:pathLst>
@@ -3862,297 +3862,297 @@
           </p:nvSpPr>
           <p:spPr>
             <a:xfrm>
-              <a:off x="817517" y="4113940"/>
-              <a:ext cx="7370972" cy="1342414"/>
+              <a:off x="817517" y="4247500"/>
+              <a:ext cx="7370972" cy="1206344"/>
             </a:xfrm>
             <a:custGeom>
               <a:avLst/>
               <a:pathLst>
-                <a:path w="7370972" h="1342414">
+                <a:path w="7370972" h="1206344">
                   <a:moveTo>
-                    <a:pt x="7370972" y="1342414"/>
+                    <a:pt x="7370972" y="1206344"/>
                   </a:moveTo>
                   <a:lnTo>
-                    <a:pt x="7293338" y="1338277"/>
-                  </a:lnTo>
-                  <a:lnTo>
-                    <a:pt x="7215704" y="1333957"/>
-                  </a:lnTo>
-                  <a:lnTo>
-                    <a:pt x="7138070" y="1329444"/>
-                  </a:lnTo>
-                  <a:lnTo>
-                    <a:pt x="7060436" y="1324729"/>
-                  </a:lnTo>
-                  <a:lnTo>
-                    <a:pt x="6982802" y="1319805"/>
-                  </a:lnTo>
-                  <a:lnTo>
-                    <a:pt x="6905168" y="1314661"/>
-                  </a:lnTo>
-                  <a:lnTo>
-                    <a:pt x="6827534" y="1309289"/>
-                  </a:lnTo>
-                  <a:lnTo>
-                    <a:pt x="6749900" y="1303677"/>
-                  </a:lnTo>
-                  <a:lnTo>
-                    <a:pt x="6672266" y="1297815"/>
-                  </a:lnTo>
-                  <a:lnTo>
-                    <a:pt x="6594632" y="1291691"/>
-                  </a:lnTo>
-                  <a:lnTo>
-                    <a:pt x="6516998" y="1285295"/>
-                  </a:lnTo>
-                  <a:lnTo>
-                    <a:pt x="6439364" y="1278615"/>
-                  </a:lnTo>
-                  <a:lnTo>
-                    <a:pt x="6361730" y="1271636"/>
-                  </a:lnTo>
-                  <a:lnTo>
-                    <a:pt x="6284096" y="1264347"/>
-                  </a:lnTo>
-                  <a:lnTo>
-                    <a:pt x="6206462" y="1256732"/>
-                  </a:lnTo>
-                  <a:lnTo>
-                    <a:pt x="6128827" y="1248779"/>
-                  </a:lnTo>
-                  <a:lnTo>
-                    <a:pt x="6051193" y="1240471"/>
-                  </a:lnTo>
-                  <a:lnTo>
-                    <a:pt x="5973559" y="1231794"/>
-                  </a:lnTo>
-                  <a:lnTo>
-                    <a:pt x="5895925" y="1222729"/>
-                  </a:lnTo>
-                  <a:lnTo>
-                    <a:pt x="5818291" y="1213261"/>
-                  </a:lnTo>
-                  <a:lnTo>
-                    <a:pt x="5740657" y="1203371"/>
-                  </a:lnTo>
-                  <a:lnTo>
-                    <a:pt x="5663023" y="1193041"/>
-                  </a:lnTo>
-                  <a:lnTo>
-                    <a:pt x="5585389" y="1182250"/>
-                  </a:lnTo>
-                  <a:lnTo>
-                    <a:pt x="5507755" y="1170979"/>
-                  </a:lnTo>
-                  <a:lnTo>
-                    <a:pt x="5430121" y="1159205"/>
-                  </a:lnTo>
-                  <a:lnTo>
-                    <a:pt x="5352487" y="1146907"/>
-                  </a:lnTo>
-                  <a:lnTo>
-                    <a:pt x="5274853" y="1134061"/>
-                  </a:lnTo>
-                  <a:lnTo>
-                    <a:pt x="5197219" y="1120643"/>
-                  </a:lnTo>
-                  <a:lnTo>
-                    <a:pt x="5119585" y="1106627"/>
-                  </a:lnTo>
-                  <a:lnTo>
-                    <a:pt x="5041951" y="1091987"/>
-                  </a:lnTo>
-                  <a:lnTo>
-                    <a:pt x="4964317" y="1076695"/>
-                  </a:lnTo>
-                  <a:lnTo>
-                    <a:pt x="4886683" y="1060721"/>
-                  </a:lnTo>
-                  <a:lnTo>
-                    <a:pt x="4809049" y="1044036"/>
-                  </a:lnTo>
-                  <a:lnTo>
-                    <a:pt x="4731415" y="1026607"/>
-                  </a:lnTo>
-                  <a:lnTo>
-                    <a:pt x="4653781" y="1008402"/>
-                  </a:lnTo>
-                  <a:lnTo>
-                    <a:pt x="4576147" y="989386"/>
-                  </a:lnTo>
-                  <a:lnTo>
-                    <a:pt x="4498513" y="969523"/>
-                  </a:lnTo>
-                  <a:lnTo>
-                    <a:pt x="4420879" y="948775"/>
-                  </a:lnTo>
-                  <a:lnTo>
-                    <a:pt x="4343244" y="927102"/>
-                  </a:lnTo>
-                  <a:lnTo>
-                    <a:pt x="4265610" y="904465"/>
-                  </a:lnTo>
-                  <a:lnTo>
-                    <a:pt x="4187976" y="880818"/>
-                  </a:lnTo>
-                  <a:lnTo>
-                    <a:pt x="4110342" y="856119"/>
-                  </a:lnTo>
-                  <a:lnTo>
-                    <a:pt x="4032708" y="830319"/>
-                  </a:lnTo>
-                  <a:lnTo>
-                    <a:pt x="3955074" y="803370"/>
-                  </a:lnTo>
-                  <a:lnTo>
-                    <a:pt x="3877440" y="775220"/>
-                  </a:lnTo>
-                  <a:lnTo>
-                    <a:pt x="3799806" y="745816"/>
-                  </a:lnTo>
-                  <a:lnTo>
-                    <a:pt x="3722172" y="715102"/>
-                  </a:lnTo>
-                  <a:lnTo>
-                    <a:pt x="3644538" y="683020"/>
-                  </a:lnTo>
-                  <a:lnTo>
-                    <a:pt x="3566904" y="649509"/>
-                  </a:lnTo>
-                  <a:lnTo>
-                    <a:pt x="3489270" y="614505"/>
-                  </a:lnTo>
-                  <a:lnTo>
-                    <a:pt x="3411636" y="577942"/>
-                  </a:lnTo>
-                  <a:lnTo>
-                    <a:pt x="3334002" y="558853"/>
-                  </a:lnTo>
-                  <a:lnTo>
-                    <a:pt x="3256368" y="548728"/>
-                  </a:lnTo>
-                  <a:lnTo>
-                    <a:pt x="3178734" y="538487"/>
-                  </a:lnTo>
-                  <a:lnTo>
-                    <a:pt x="3101100" y="528127"/>
-                  </a:lnTo>
-                  <a:lnTo>
-                    <a:pt x="3023466" y="517648"/>
-                  </a:lnTo>
-                  <a:lnTo>
-                    <a:pt x="2945832" y="507047"/>
-                  </a:lnTo>
-                  <a:lnTo>
-                    <a:pt x="2868198" y="496324"/>
-                  </a:lnTo>
-                  <a:lnTo>
-                    <a:pt x="2790564" y="485478"/>
-                  </a:lnTo>
-                  <a:lnTo>
-                    <a:pt x="2712930" y="474505"/>
-                  </a:lnTo>
-                  <a:lnTo>
-                    <a:pt x="2635295" y="463407"/>
-                  </a:lnTo>
-                  <a:lnTo>
-                    <a:pt x="2557661" y="452180"/>
-                  </a:lnTo>
-                  <a:lnTo>
-                    <a:pt x="2480027" y="440823"/>
-                  </a:lnTo>
-                  <a:lnTo>
-                    <a:pt x="2402393" y="429335"/>
-                  </a:lnTo>
-                  <a:lnTo>
-                    <a:pt x="2324759" y="417714"/>
-                  </a:lnTo>
-                  <a:lnTo>
-                    <a:pt x="2247125" y="405959"/>
-                  </a:lnTo>
-                  <a:lnTo>
-                    <a:pt x="2169491" y="394069"/>
-                  </a:lnTo>
-                  <a:lnTo>
-                    <a:pt x="2091857" y="382040"/>
-                  </a:lnTo>
-                  <a:lnTo>
-                    <a:pt x="2014223" y="369873"/>
-                  </a:lnTo>
-                  <a:lnTo>
-                    <a:pt x="1936589" y="357566"/>
-                  </a:lnTo>
-                  <a:lnTo>
-                    <a:pt x="1858955" y="345116"/>
-                  </a:lnTo>
-                  <a:lnTo>
-                    <a:pt x="1781321" y="332523"/>
-                  </a:lnTo>
-                  <a:lnTo>
-                    <a:pt x="1703687" y="319783"/>
-                  </a:lnTo>
-                  <a:lnTo>
-                    <a:pt x="1626053" y="306897"/>
-                  </a:lnTo>
-                  <a:lnTo>
-                    <a:pt x="1548419" y="293862"/>
-                  </a:lnTo>
-                  <a:lnTo>
-                    <a:pt x="1470785" y="280676"/>
-                  </a:lnTo>
-                  <a:lnTo>
-                    <a:pt x="1393151" y="267339"/>
-                  </a:lnTo>
-                  <a:lnTo>
-                    <a:pt x="1315517" y="253846"/>
-                  </a:lnTo>
-                  <a:lnTo>
-                    <a:pt x="1237883" y="240198"/>
-                  </a:lnTo>
-                  <a:lnTo>
-                    <a:pt x="1160249" y="226393"/>
-                  </a:lnTo>
-                  <a:lnTo>
-                    <a:pt x="1082615" y="212428"/>
-                  </a:lnTo>
-                  <a:lnTo>
-                    <a:pt x="1004981" y="198301"/>
-                  </a:lnTo>
-                  <a:lnTo>
-                    <a:pt x="927346" y="184012"/>
-                  </a:lnTo>
-                  <a:lnTo>
-                    <a:pt x="849712" y="169557"/>
-                  </a:lnTo>
-                  <a:lnTo>
-                    <a:pt x="772078" y="154935"/>
-                  </a:lnTo>
-                  <a:lnTo>
-                    <a:pt x="694444" y="140145"/>
-                  </a:lnTo>
-                  <a:lnTo>
-                    <a:pt x="616810" y="125183"/>
-                  </a:lnTo>
-                  <a:lnTo>
-                    <a:pt x="539176" y="110049"/>
-                  </a:lnTo>
-                  <a:lnTo>
-                    <a:pt x="461542" y="94740"/>
-                  </a:lnTo>
-                  <a:lnTo>
-                    <a:pt x="383908" y="79254"/>
-                  </a:lnTo>
-                  <a:lnTo>
-                    <a:pt x="306274" y="63589"/>
-                  </a:lnTo>
-                  <a:lnTo>
-                    <a:pt x="228640" y="47743"/>
-                  </a:lnTo>
-                  <a:lnTo>
-                    <a:pt x="151006" y="31715"/>
-                  </a:lnTo>
-                  <a:lnTo>
-                    <a:pt x="73372" y="15501"/>
+                    <a:pt x="7293338" y="1202147"/>
+                  </a:lnTo>
+                  <a:lnTo>
+                    <a:pt x="7215704" y="1197766"/>
+                  </a:lnTo>
+                  <a:lnTo>
+                    <a:pt x="7138070" y="1193192"/>
+                  </a:lnTo>
+                  <a:lnTo>
+                    <a:pt x="7060436" y="1188417"/>
+                  </a:lnTo>
+                  <a:lnTo>
+                    <a:pt x="6982802" y="1183432"/>
+                  </a:lnTo>
+                  <a:lnTo>
+                    <a:pt x="6905168" y="1178227"/>
+                  </a:lnTo>
+                  <a:lnTo>
+                    <a:pt x="6827534" y="1172793"/>
+                  </a:lnTo>
+                  <a:lnTo>
+                    <a:pt x="6749900" y="1167120"/>
+                  </a:lnTo>
+                  <a:lnTo>
+                    <a:pt x="6672266" y="1161198"/>
+                  </a:lnTo>
+                  <a:lnTo>
+                    <a:pt x="6594632" y="1155015"/>
+                  </a:lnTo>
+                  <a:lnTo>
+                    <a:pt x="6516998" y="1148559"/>
+                  </a:lnTo>
+                  <a:lnTo>
+                    <a:pt x="6439364" y="1141820"/>
+                  </a:lnTo>
+                  <a:lnTo>
+                    <a:pt x="6361730" y="1134784"/>
+                  </a:lnTo>
+                  <a:lnTo>
+                    <a:pt x="6284096" y="1127439"/>
+                  </a:lnTo>
+                  <a:lnTo>
+                    <a:pt x="6206462" y="1119770"/>
+                  </a:lnTo>
+                  <a:lnTo>
+                    <a:pt x="6128827" y="1111764"/>
+                  </a:lnTo>
+                  <a:lnTo>
+                    <a:pt x="6051193" y="1103405"/>
+                  </a:lnTo>
+                  <a:lnTo>
+                    <a:pt x="5973559" y="1094679"/>
+                  </a:lnTo>
+                  <a:lnTo>
+                    <a:pt x="5895925" y="1085569"/>
+                  </a:lnTo>
+                  <a:lnTo>
+                    <a:pt x="5818291" y="1076057"/>
+                  </a:lnTo>
+                  <a:lnTo>
+                    <a:pt x="5740657" y="1066127"/>
+                  </a:lnTo>
+                  <a:lnTo>
+                    <a:pt x="5663023" y="1055761"/>
+                  </a:lnTo>
+                  <a:lnTo>
+                    <a:pt x="5585389" y="1044938"/>
+                  </a:lnTo>
+                  <a:lnTo>
+                    <a:pt x="5507755" y="1033639"/>
+                  </a:lnTo>
+                  <a:lnTo>
+                    <a:pt x="5430121" y="1021842"/>
+                  </a:lnTo>
+                  <a:lnTo>
+                    <a:pt x="5352487" y="1009527"/>
+                  </a:lnTo>
+                  <a:lnTo>
+                    <a:pt x="5274853" y="996669"/>
+                  </a:lnTo>
+                  <a:lnTo>
+                    <a:pt x="5197219" y="983246"/>
+                  </a:lnTo>
+                  <a:lnTo>
+                    <a:pt x="5119585" y="969232"/>
+                  </a:lnTo>
+                  <a:lnTo>
+                    <a:pt x="5041951" y="954601"/>
+                  </a:lnTo>
+                  <a:lnTo>
+                    <a:pt x="4964317" y="939327"/>
+                  </a:lnTo>
+                  <a:lnTo>
+                    <a:pt x="4886683" y="923380"/>
+                  </a:lnTo>
+                  <a:lnTo>
+                    <a:pt x="4809049" y="906731"/>
+                  </a:lnTo>
+                  <a:lnTo>
+                    <a:pt x="4731415" y="889350"/>
+                  </a:lnTo>
+                  <a:lnTo>
+                    <a:pt x="4653781" y="871204"/>
+                  </a:lnTo>
+                  <a:lnTo>
+                    <a:pt x="4576147" y="852260"/>
+                  </a:lnTo>
+                  <a:lnTo>
+                    <a:pt x="4498513" y="832482"/>
+                  </a:lnTo>
+                  <a:lnTo>
+                    <a:pt x="4420879" y="811834"/>
+                  </a:lnTo>
+                  <a:lnTo>
+                    <a:pt x="4343244" y="790276"/>
+                  </a:lnTo>
+                  <a:lnTo>
+                    <a:pt x="4265610" y="767771"/>
+                  </a:lnTo>
+                  <a:lnTo>
+                    <a:pt x="4187976" y="744275"/>
+                  </a:lnTo>
+                  <a:lnTo>
+                    <a:pt x="4110342" y="719745"/>
+                  </a:lnTo>
+                  <a:lnTo>
+                    <a:pt x="4032708" y="694135"/>
+                  </a:lnTo>
+                  <a:lnTo>
+                    <a:pt x="3955074" y="667399"/>
+                  </a:lnTo>
+                  <a:lnTo>
+                    <a:pt x="3877440" y="639486"/>
+                  </a:lnTo>
+                  <a:lnTo>
+                    <a:pt x="3799806" y="610344"/>
+                  </a:lnTo>
+                  <a:lnTo>
+                    <a:pt x="3722172" y="579921"/>
+                  </a:lnTo>
+                  <a:lnTo>
+                    <a:pt x="3644538" y="548158"/>
+                  </a:lnTo>
+                  <a:lnTo>
+                    <a:pt x="3566904" y="514998"/>
+                  </a:lnTo>
+                  <a:lnTo>
+                    <a:pt x="3489270" y="480379"/>
+                  </a:lnTo>
+                  <a:lnTo>
+                    <a:pt x="3411636" y="444236"/>
+                  </a:lnTo>
+                  <a:lnTo>
+                    <a:pt x="3334002" y="426611"/>
+                  </a:lnTo>
+                  <a:lnTo>
+                    <a:pt x="3256368" y="418481"/>
+                  </a:lnTo>
+                  <a:lnTo>
+                    <a:pt x="3178734" y="410277"/>
+                  </a:lnTo>
+                  <a:lnTo>
+                    <a:pt x="3101100" y="401996"/>
+                  </a:lnTo>
+                  <a:lnTo>
+                    <a:pt x="3023466" y="393638"/>
+                  </a:lnTo>
+                  <a:lnTo>
+                    <a:pt x="2945832" y="385203"/>
+                  </a:lnTo>
+                  <a:lnTo>
+                    <a:pt x="2868198" y="376689"/>
+                  </a:lnTo>
+                  <a:lnTo>
+                    <a:pt x="2790564" y="368096"/>
+                  </a:lnTo>
+                  <a:lnTo>
+                    <a:pt x="2712930" y="359423"/>
+                  </a:lnTo>
+                  <a:lnTo>
+                    <a:pt x="2635295" y="350670"/>
+                  </a:lnTo>
+                  <a:lnTo>
+                    <a:pt x="2557661" y="341835"/>
+                  </a:lnTo>
+                  <a:lnTo>
+                    <a:pt x="2480027" y="332918"/>
+                  </a:lnTo>
+                  <a:lnTo>
+                    <a:pt x="2402393" y="323919"/>
+                  </a:lnTo>
+                  <a:lnTo>
+                    <a:pt x="2324759" y="314836"/>
+                  </a:lnTo>
+                  <a:lnTo>
+                    <a:pt x="2247125" y="305668"/>
+                  </a:lnTo>
+                  <a:lnTo>
+                    <a:pt x="2169491" y="296415"/>
+                  </a:lnTo>
+                  <a:lnTo>
+                    <a:pt x="2091857" y="287077"/>
+                  </a:lnTo>
+                  <a:lnTo>
+                    <a:pt x="2014223" y="277651"/>
+                  </a:lnTo>
+                  <a:lnTo>
+                    <a:pt x="1936589" y="268138"/>
+                  </a:lnTo>
+                  <a:lnTo>
+                    <a:pt x="1858955" y="258537"/>
+                  </a:lnTo>
+                  <a:lnTo>
+                    <a:pt x="1781321" y="248847"/>
+                  </a:lnTo>
+                  <a:lnTo>
+                    <a:pt x="1703687" y="239066"/>
+                  </a:lnTo>
+                  <a:lnTo>
+                    <a:pt x="1626053" y="229195"/>
+                  </a:lnTo>
+                  <a:lnTo>
+                    <a:pt x="1548419" y="219232"/>
+                  </a:lnTo>
+                  <a:lnTo>
+                    <a:pt x="1470785" y="209176"/>
+                  </a:lnTo>
+                  <a:lnTo>
+                    <a:pt x="1393151" y="199027"/>
+                  </a:lnTo>
+                  <a:lnTo>
+                    <a:pt x="1315517" y="188784"/>
+                  </a:lnTo>
+                  <a:lnTo>
+                    <a:pt x="1237883" y="178445"/>
+                  </a:lnTo>
+                  <a:lnTo>
+                    <a:pt x="1160249" y="168011"/>
+                  </a:lnTo>
+                  <a:lnTo>
+                    <a:pt x="1082615" y="157479"/>
+                  </a:lnTo>
+                  <a:lnTo>
+                    <a:pt x="1004981" y="146850"/>
+                  </a:lnTo>
+                  <a:lnTo>
+                    <a:pt x="927346" y="136122"/>
+                  </a:lnTo>
+                  <a:lnTo>
+                    <a:pt x="849712" y="125294"/>
+                  </a:lnTo>
+                  <a:lnTo>
+                    <a:pt x="772078" y="114366"/>
+                  </a:lnTo>
+                  <a:lnTo>
+                    <a:pt x="694444" y="103336"/>
+                  </a:lnTo>
+                  <a:lnTo>
+                    <a:pt x="616810" y="92204"/>
+                  </a:lnTo>
+                  <a:lnTo>
+                    <a:pt x="539176" y="80968"/>
+                  </a:lnTo>
+                  <a:lnTo>
+                    <a:pt x="461542" y="69628"/>
+                  </a:lnTo>
+                  <a:lnTo>
+                    <a:pt x="383908" y="58183"/>
+                  </a:lnTo>
+                  <a:lnTo>
+                    <a:pt x="306274" y="46631"/>
+                  </a:lnTo>
+                  <a:lnTo>
+                    <a:pt x="228640" y="34972"/>
+                  </a:lnTo>
+                  <a:lnTo>
+                    <a:pt x="151006" y="23205"/>
+                  </a:lnTo>
+                  <a:lnTo>
+                    <a:pt x="73372" y="11328"/>
                   </a:lnTo>
                   <a:lnTo>
                     <a:pt x="0" y="0"/>
@@ -4175,300 +4175,300 @@
           </p:nvSpPr>
           <p:spPr>
             <a:xfrm>
-              <a:off x="817517" y="2658837"/>
-              <a:ext cx="7370972" cy="2678749"/>
+              <a:off x="817517" y="2827630"/>
+              <a:ext cx="7370972" cy="2494429"/>
             </a:xfrm>
             <a:custGeom>
               <a:avLst/>
               <a:pathLst>
-                <a:path w="7370972" h="2678749">
+                <a:path w="7370972" h="2494429">
                   <a:moveTo>
                     <a:pt x="0" y="0"/>
                   </a:moveTo>
                   <a:lnTo>
-                    <a:pt x="73372" y="74302"/>
-                  </a:lnTo>
-                  <a:lnTo>
-                    <a:pt x="151006" y="150785"/>
-                  </a:lnTo>
-                  <a:lnTo>
-                    <a:pt x="228640" y="225191"/>
-                  </a:lnTo>
-                  <a:lnTo>
-                    <a:pt x="306274" y="297576"/>
-                  </a:lnTo>
-                  <a:lnTo>
-                    <a:pt x="383908" y="367995"/>
-                  </a:lnTo>
-                  <a:lnTo>
-                    <a:pt x="461542" y="436502"/>
-                  </a:lnTo>
-                  <a:lnTo>
-                    <a:pt x="539176" y="503147"/>
-                  </a:lnTo>
-                  <a:lnTo>
-                    <a:pt x="616810" y="567983"/>
-                  </a:lnTo>
-                  <a:lnTo>
-                    <a:pt x="694444" y="631058"/>
-                  </a:lnTo>
-                  <a:lnTo>
-                    <a:pt x="772078" y="692420"/>
-                  </a:lnTo>
-                  <a:lnTo>
-                    <a:pt x="849712" y="752115"/>
-                  </a:lnTo>
-                  <a:lnTo>
-                    <a:pt x="927346" y="810189"/>
-                  </a:lnTo>
-                  <a:lnTo>
-                    <a:pt x="1004981" y="866686"/>
-                  </a:lnTo>
-                  <a:lnTo>
-                    <a:pt x="1082615" y="921648"/>
-                  </a:lnTo>
-                  <a:lnTo>
-                    <a:pt x="1160249" y="975118"/>
-                  </a:lnTo>
-                  <a:lnTo>
-                    <a:pt x="1237883" y="1027135"/>
-                  </a:lnTo>
-                  <a:lnTo>
-                    <a:pt x="1315517" y="1077740"/>
-                  </a:lnTo>
-                  <a:lnTo>
-                    <a:pt x="1393151" y="1126970"/>
-                  </a:lnTo>
-                  <a:lnTo>
-                    <a:pt x="1470785" y="1174863"/>
-                  </a:lnTo>
-                  <a:lnTo>
-                    <a:pt x="1548419" y="1221455"/>
-                  </a:lnTo>
-                  <a:lnTo>
-                    <a:pt x="1626053" y="1266782"/>
-                  </a:lnTo>
-                  <a:lnTo>
-                    <a:pt x="1703687" y="1310878"/>
-                  </a:lnTo>
-                  <a:lnTo>
-                    <a:pt x="1781321" y="1353776"/>
-                  </a:lnTo>
-                  <a:lnTo>
-                    <a:pt x="1858955" y="1395509"/>
-                  </a:lnTo>
-                  <a:lnTo>
-                    <a:pt x="1936589" y="1436109"/>
-                  </a:lnTo>
-                  <a:lnTo>
-                    <a:pt x="2014223" y="1475606"/>
-                  </a:lnTo>
-                  <a:lnTo>
-                    <a:pt x="2091857" y="1514030"/>
-                  </a:lnTo>
-                  <a:lnTo>
-                    <a:pt x="2169491" y="1551411"/>
-                  </a:lnTo>
-                  <a:lnTo>
-                    <a:pt x="2247125" y="1587776"/>
-                  </a:lnTo>
-                  <a:lnTo>
-                    <a:pt x="2324759" y="1623154"/>
-                  </a:lnTo>
-                  <a:lnTo>
-                    <a:pt x="2402393" y="1657571"/>
-                  </a:lnTo>
-                  <a:lnTo>
-                    <a:pt x="2480027" y="1691053"/>
-                  </a:lnTo>
-                  <a:lnTo>
-                    <a:pt x="2557661" y="1723626"/>
-                  </a:lnTo>
-                  <a:lnTo>
-                    <a:pt x="2635295" y="1755314"/>
-                  </a:lnTo>
-                  <a:lnTo>
-                    <a:pt x="2712930" y="1786142"/>
-                  </a:lnTo>
-                  <a:lnTo>
-                    <a:pt x="2790564" y="1816132"/>
-                  </a:lnTo>
-                  <a:lnTo>
-                    <a:pt x="2868198" y="1845308"/>
-                  </a:lnTo>
-                  <a:lnTo>
-                    <a:pt x="2945832" y="1873691"/>
-                  </a:lnTo>
-                  <a:lnTo>
-                    <a:pt x="3023466" y="1901304"/>
-                  </a:lnTo>
-                  <a:lnTo>
-                    <a:pt x="3101100" y="1928166"/>
-                  </a:lnTo>
-                  <a:lnTo>
-                    <a:pt x="3178734" y="1954299"/>
-                  </a:lnTo>
-                  <a:lnTo>
-                    <a:pt x="3256368" y="1979723"/>
-                  </a:lnTo>
-                  <a:lnTo>
-                    <a:pt x="3334002" y="2004455"/>
-                  </a:lnTo>
-                  <a:lnTo>
-                    <a:pt x="3411636" y="2028516"/>
-                  </a:lnTo>
-                  <a:lnTo>
-                    <a:pt x="3489270" y="2051924"/>
-                  </a:lnTo>
-                  <a:lnTo>
-                    <a:pt x="3566904" y="2074696"/>
-                  </a:lnTo>
-                  <a:lnTo>
-                    <a:pt x="3644538" y="2096849"/>
-                  </a:lnTo>
-                  <a:lnTo>
-                    <a:pt x="3722172" y="2118401"/>
-                  </a:lnTo>
-                  <a:lnTo>
-                    <a:pt x="3799806" y="2139367"/>
-                  </a:lnTo>
-                  <a:lnTo>
-                    <a:pt x="3877440" y="2159764"/>
-                  </a:lnTo>
-                  <a:lnTo>
-                    <a:pt x="3955074" y="2179607"/>
-                  </a:lnTo>
-                  <a:lnTo>
-                    <a:pt x="4032708" y="2198911"/>
-                  </a:lnTo>
-                  <a:lnTo>
-                    <a:pt x="4110342" y="2217690"/>
-                  </a:lnTo>
-                  <a:lnTo>
-                    <a:pt x="4187976" y="2235960"/>
-                  </a:lnTo>
-                  <a:lnTo>
-                    <a:pt x="4265610" y="2253733"/>
-                  </a:lnTo>
-                  <a:lnTo>
-                    <a:pt x="4343244" y="2271024"/>
-                  </a:lnTo>
-                  <a:lnTo>
-                    <a:pt x="4420879" y="2287845"/>
-                  </a:lnTo>
-                  <a:lnTo>
-                    <a:pt x="4498513" y="2304209"/>
-                  </a:lnTo>
-                  <a:lnTo>
-                    <a:pt x="4576147" y="2320129"/>
-                  </a:lnTo>
-                  <a:lnTo>
-                    <a:pt x="4653781" y="2335617"/>
-                  </a:lnTo>
-                  <a:lnTo>
-                    <a:pt x="4731415" y="2350684"/>
-                  </a:lnTo>
-                  <a:lnTo>
-                    <a:pt x="4809049" y="2365341"/>
-                  </a:lnTo>
-                  <a:lnTo>
-                    <a:pt x="4886683" y="2379601"/>
-                  </a:lnTo>
-                  <a:lnTo>
-                    <a:pt x="4964317" y="2393473"/>
-                  </a:lnTo>
-                  <a:lnTo>
-                    <a:pt x="5041951" y="2406968"/>
-                  </a:lnTo>
-                  <a:lnTo>
-                    <a:pt x="5119585" y="2420097"/>
-                  </a:lnTo>
-                  <a:lnTo>
-                    <a:pt x="5197219" y="2432870"/>
-                  </a:lnTo>
-                  <a:lnTo>
-                    <a:pt x="5274853" y="2445295"/>
-                  </a:lnTo>
-                  <a:lnTo>
-                    <a:pt x="5352487" y="2457383"/>
-                  </a:lnTo>
-                  <a:lnTo>
-                    <a:pt x="5430121" y="2469143"/>
-                  </a:lnTo>
-                  <a:lnTo>
-                    <a:pt x="5507755" y="2480583"/>
-                  </a:lnTo>
-                  <a:lnTo>
-                    <a:pt x="5585389" y="2491713"/>
-                  </a:lnTo>
-                  <a:lnTo>
-                    <a:pt x="5663023" y="2502540"/>
-                  </a:lnTo>
-                  <a:lnTo>
-                    <a:pt x="5740657" y="2513073"/>
-                  </a:lnTo>
-                  <a:lnTo>
-                    <a:pt x="5818291" y="2523320"/>
-                  </a:lnTo>
-                  <a:lnTo>
-                    <a:pt x="5895925" y="2533289"/>
-                  </a:lnTo>
-                  <a:lnTo>
-                    <a:pt x="5973559" y="2542987"/>
-                  </a:lnTo>
-                  <a:lnTo>
-                    <a:pt x="6051193" y="2552422"/>
-                  </a:lnTo>
-                  <a:lnTo>
-                    <a:pt x="6128827" y="2561601"/>
-                  </a:lnTo>
-                  <a:lnTo>
-                    <a:pt x="6206462" y="2570530"/>
-                  </a:lnTo>
-                  <a:lnTo>
-                    <a:pt x="6284096" y="2579216"/>
-                  </a:lnTo>
-                  <a:lnTo>
-                    <a:pt x="6361730" y="2587667"/>
-                  </a:lnTo>
-                  <a:lnTo>
-                    <a:pt x="6439364" y="2595888"/>
-                  </a:lnTo>
-                  <a:lnTo>
-                    <a:pt x="6516998" y="2603886"/>
-                  </a:lnTo>
-                  <a:lnTo>
-                    <a:pt x="6594632" y="2611667"/>
-                  </a:lnTo>
-                  <a:lnTo>
-                    <a:pt x="6672266" y="2619237"/>
-                  </a:lnTo>
-                  <a:lnTo>
-                    <a:pt x="6749900" y="2626600"/>
-                  </a:lnTo>
-                  <a:lnTo>
-                    <a:pt x="6827534" y="2633764"/>
-                  </a:lnTo>
-                  <a:lnTo>
-                    <a:pt x="6905168" y="2640734"/>
-                  </a:lnTo>
-                  <a:lnTo>
-                    <a:pt x="6982802" y="2647513"/>
-                  </a:lnTo>
-                  <a:lnTo>
-                    <a:pt x="7060436" y="2654109"/>
-                  </a:lnTo>
-                  <a:lnTo>
-                    <a:pt x="7138070" y="2660526"/>
-                  </a:lnTo>
-                  <a:lnTo>
-                    <a:pt x="7215704" y="2666768"/>
-                  </a:lnTo>
-                  <a:lnTo>
-                    <a:pt x="7293338" y="2672841"/>
-                  </a:lnTo>
-                  <a:lnTo>
-                    <a:pt x="7370972" y="2678749"/>
+                    <a:pt x="73372" y="66499"/>
+                  </a:lnTo>
+                  <a:lnTo>
+                    <a:pt x="151006" y="135043"/>
+                  </a:lnTo>
+                  <a:lnTo>
+                    <a:pt x="228640" y="201819"/>
+                  </a:lnTo>
+                  <a:lnTo>
+                    <a:pt x="306274" y="266870"/>
+                  </a:lnTo>
+                  <a:lnTo>
+                    <a:pt x="383908" y="330242"/>
+                  </a:lnTo>
+                  <a:lnTo>
+                    <a:pt x="461542" y="391978"/>
+                  </a:lnTo>
+                  <a:lnTo>
+                    <a:pt x="539176" y="452120"/>
+                  </a:lnTo>
+                  <a:lnTo>
+                    <a:pt x="616810" y="510710"/>
+                  </a:lnTo>
+                  <a:lnTo>
+                    <a:pt x="694444" y="567787"/>
+                  </a:lnTo>
+                  <a:lnTo>
+                    <a:pt x="772078" y="623390"/>
+                  </a:lnTo>
+                  <a:lnTo>
+                    <a:pt x="849712" y="677558"/>
+                  </a:lnTo>
+                  <a:lnTo>
+                    <a:pt x="927346" y="730328"/>
+                  </a:lnTo>
+                  <a:lnTo>
+                    <a:pt x="1004981" y="781735"/>
+                  </a:lnTo>
+                  <a:lnTo>
+                    <a:pt x="1082615" y="831815"/>
+                  </a:lnTo>
+                  <a:lnTo>
+                    <a:pt x="1160249" y="880602"/>
+                  </a:lnTo>
+                  <a:lnTo>
+                    <a:pt x="1237883" y="928129"/>
+                  </a:lnTo>
+                  <a:lnTo>
+                    <a:pt x="1315517" y="974430"/>
+                  </a:lnTo>
+                  <a:lnTo>
+                    <a:pt x="1393151" y="1019535"/>
+                  </a:lnTo>
+                  <a:lnTo>
+                    <a:pt x="1470785" y="1063476"/>
+                  </a:lnTo>
+                  <a:lnTo>
+                    <a:pt x="1548419" y="1106283"/>
+                  </a:lnTo>
+                  <a:lnTo>
+                    <a:pt x="1626053" y="1147984"/>
+                  </a:lnTo>
+                  <a:lnTo>
+                    <a:pt x="1703687" y="1188609"/>
+                  </a:lnTo>
+                  <a:lnTo>
+                    <a:pt x="1781321" y="1228185"/>
+                  </a:lnTo>
+                  <a:lnTo>
+                    <a:pt x="1858955" y="1266739"/>
+                  </a:lnTo>
+                  <a:lnTo>
+                    <a:pt x="1936589" y="1304298"/>
+                  </a:lnTo>
+                  <a:lnTo>
+                    <a:pt x="2014223" y="1340887"/>
+                  </a:lnTo>
+                  <a:lnTo>
+                    <a:pt x="2091857" y="1376531"/>
+                  </a:lnTo>
+                  <a:lnTo>
+                    <a:pt x="2169491" y="1411256"/>
+                  </a:lnTo>
+                  <a:lnTo>
+                    <a:pt x="2247125" y="1445084"/>
+                  </a:lnTo>
+                  <a:lnTo>
+                    <a:pt x="2324759" y="1478038"/>
+                  </a:lnTo>
+                  <a:lnTo>
+                    <a:pt x="2402393" y="1510142"/>
+                  </a:lnTo>
+                  <a:lnTo>
+                    <a:pt x="2480027" y="1541417"/>
+                  </a:lnTo>
+                  <a:lnTo>
+                    <a:pt x="2557661" y="1571885"/>
+                  </a:lnTo>
+                  <a:lnTo>
+                    <a:pt x="2635295" y="1601566"/>
+                  </a:lnTo>
+                  <a:lnTo>
+                    <a:pt x="2712930" y="1630481"/>
+                  </a:lnTo>
+                  <a:lnTo>
+                    <a:pt x="2790564" y="1658649"/>
+                  </a:lnTo>
+                  <a:lnTo>
+                    <a:pt x="2868198" y="1686090"/>
+                  </a:lnTo>
+                  <a:lnTo>
+                    <a:pt x="2945832" y="1712823"/>
+                  </a:lnTo>
+                  <a:lnTo>
+                    <a:pt x="3023466" y="1738865"/>
+                  </a:lnTo>
+                  <a:lnTo>
+                    <a:pt x="3101100" y="1764236"/>
+                  </a:lnTo>
+                  <a:lnTo>
+                    <a:pt x="3178734" y="1788951"/>
+                  </a:lnTo>
+                  <a:lnTo>
+                    <a:pt x="3256368" y="1813028"/>
+                  </a:lnTo>
+                  <a:lnTo>
+                    <a:pt x="3334002" y="1836484"/>
+                  </a:lnTo>
+                  <a:lnTo>
+                    <a:pt x="3411636" y="1859334"/>
+                  </a:lnTo>
+                  <a:lnTo>
+                    <a:pt x="3489270" y="1881594"/>
+                  </a:lnTo>
+                  <a:lnTo>
+                    <a:pt x="3566904" y="1903279"/>
+                  </a:lnTo>
+                  <a:lnTo>
+                    <a:pt x="3644538" y="1924405"/>
+                  </a:lnTo>
+                  <a:lnTo>
+                    <a:pt x="3722172" y="1944985"/>
+                  </a:lnTo>
+                  <a:lnTo>
+                    <a:pt x="3799806" y="1965034"/>
+                  </a:lnTo>
+                  <a:lnTo>
+                    <a:pt x="3877440" y="1984565"/>
+                  </a:lnTo>
+                  <a:lnTo>
+                    <a:pt x="3955074" y="2003592"/>
+                  </a:lnTo>
+                  <a:lnTo>
+                    <a:pt x="4032708" y="2022128"/>
+                  </a:lnTo>
+                  <a:lnTo>
+                    <a:pt x="4110342" y="2040186"/>
+                  </a:lnTo>
+                  <a:lnTo>
+                    <a:pt x="4187976" y="2057777"/>
+                  </a:lnTo>
+                  <a:lnTo>
+                    <a:pt x="4265610" y="2074914"/>
+                  </a:lnTo>
+                  <a:lnTo>
+                    <a:pt x="4343244" y="2091608"/>
+                  </a:lnTo>
+                  <a:lnTo>
+                    <a:pt x="4420879" y="2107872"/>
+                  </a:lnTo>
+                  <a:lnTo>
+                    <a:pt x="4498513" y="2123716"/>
+                  </a:lnTo>
+                  <a:lnTo>
+                    <a:pt x="4576147" y="2139150"/>
+                  </a:lnTo>
+                  <a:lnTo>
+                    <a:pt x="4653781" y="2154187"/>
+                  </a:lnTo>
+                  <a:lnTo>
+                    <a:pt x="4731415" y="2168835"/>
+                  </a:lnTo>
+                  <a:lnTo>
+                    <a:pt x="4809049" y="2183105"/>
+                  </a:lnTo>
+                  <a:lnTo>
+                    <a:pt x="4886683" y="2197006"/>
+                  </a:lnTo>
+                  <a:lnTo>
+                    <a:pt x="4964317" y="2210549"/>
+                  </a:lnTo>
+                  <a:lnTo>
+                    <a:pt x="5041951" y="2223742"/>
+                  </a:lnTo>
+                  <a:lnTo>
+                    <a:pt x="5119585" y="2236594"/>
+                  </a:lnTo>
+                  <a:lnTo>
+                    <a:pt x="5197219" y="2249115"/>
+                  </a:lnTo>
+                  <a:lnTo>
+                    <a:pt x="5274853" y="2261312"/>
+                  </a:lnTo>
+                  <a:lnTo>
+                    <a:pt x="5352487" y="2273194"/>
+                  </a:lnTo>
+                  <a:lnTo>
+                    <a:pt x="5430121" y="2284770"/>
+                  </a:lnTo>
+                  <a:lnTo>
+                    <a:pt x="5507755" y="2296047"/>
+                  </a:lnTo>
+                  <a:lnTo>
+                    <a:pt x="5585389" y="2307033"/>
+                  </a:lnTo>
+                  <a:lnTo>
+                    <a:pt x="5663023" y="2317735"/>
+                  </a:lnTo>
+                  <a:lnTo>
+                    <a:pt x="5740657" y="2328160"/>
+                  </a:lnTo>
+                  <a:lnTo>
+                    <a:pt x="5818291" y="2338317"/>
+                  </a:lnTo>
+                  <a:lnTo>
+                    <a:pt x="5895925" y="2348212"/>
+                  </a:lnTo>
+                  <a:lnTo>
+                    <a:pt x="5973559" y="2357851"/>
+                  </a:lnTo>
+                  <a:lnTo>
+                    <a:pt x="6051193" y="2367241"/>
+                  </a:lnTo>
+                  <a:lnTo>
+                    <a:pt x="6128827" y="2376388"/>
+                  </a:lnTo>
+                  <a:lnTo>
+                    <a:pt x="6206462" y="2385300"/>
+                  </a:lnTo>
+                  <a:lnTo>
+                    <a:pt x="6284096" y="2393982"/>
+                  </a:lnTo>
+                  <a:lnTo>
+                    <a:pt x="6361730" y="2402439"/>
+                  </a:lnTo>
+                  <a:lnTo>
+                    <a:pt x="6439364" y="2410678"/>
+                  </a:lnTo>
+                  <a:lnTo>
+                    <a:pt x="6516998" y="2418704"/>
+                  </a:lnTo>
+                  <a:lnTo>
+                    <a:pt x="6594632" y="2426523"/>
+                  </a:lnTo>
+                  <a:lnTo>
+                    <a:pt x="6672266" y="2434141"/>
+                  </a:lnTo>
+                  <a:lnTo>
+                    <a:pt x="6749900" y="2441561"/>
+                  </a:lnTo>
+                  <a:lnTo>
+                    <a:pt x="6827534" y="2448790"/>
+                  </a:lnTo>
+                  <a:lnTo>
+                    <a:pt x="6905168" y="2455833"/>
+                  </a:lnTo>
+                  <a:lnTo>
+                    <a:pt x="6982802" y="2462693"/>
+                  </a:lnTo>
+                  <a:lnTo>
+                    <a:pt x="7060436" y="2469377"/>
+                  </a:lnTo>
+                  <a:lnTo>
+                    <a:pt x="7138070" y="2475888"/>
+                  </a:lnTo>
+                  <a:lnTo>
+                    <a:pt x="7215704" y="2482230"/>
+                  </a:lnTo>
+                  <a:lnTo>
+                    <a:pt x="7293338" y="2488410"/>
+                  </a:lnTo>
+                  <a:lnTo>
+                    <a:pt x="7370972" y="2494429"/>
                   </a:lnTo>
                 </a:path>
               </a:pathLst>

--- a/docs/plots/carbo/jx_carbo_linsubhr_ratio_grade2.pptx
+++ b/docs/plots/carbo/jx_carbo_linsubhr_ratio_grade2.pptx
@@ -3003,557 +3003,557 @@
           <p:spPr>
             <a:xfrm>
               <a:off x="817517" y="1896563"/>
-              <a:ext cx="7370972" cy="3557280"/>
+              <a:ext cx="7370972" cy="3555375"/>
             </a:xfrm>
             <a:custGeom>
               <a:avLst/>
               <a:pathLst>
-                <a:path w="7370972" h="3557280">
+                <a:path w="7370972" h="3555375">
                   <a:moveTo>
-                    <a:pt x="799462" y="0"/>
+                    <a:pt x="775789" y="0"/>
                   </a:moveTo>
                   <a:lnTo>
-                    <a:pt x="849712" y="101157"/>
-                  </a:lnTo>
-                  <a:lnTo>
-                    <a:pt x="927346" y="250854"/>
-                  </a:lnTo>
-                  <a:lnTo>
-                    <a:pt x="1004981" y="394242"/>
-                  </a:lnTo>
-                  <a:lnTo>
-                    <a:pt x="1082615" y="531585"/>
-                  </a:lnTo>
-                  <a:lnTo>
-                    <a:pt x="1160249" y="663140"/>
-                  </a:lnTo>
-                  <a:lnTo>
-                    <a:pt x="1237883" y="789149"/>
-                  </a:lnTo>
-                  <a:lnTo>
-                    <a:pt x="1315517" y="909847"/>
-                  </a:lnTo>
-                  <a:lnTo>
-                    <a:pt x="1393151" y="1025457"/>
-                  </a:lnTo>
-                  <a:lnTo>
-                    <a:pt x="1470785" y="1136194"/>
-                  </a:lnTo>
-                  <a:lnTo>
-                    <a:pt x="1548419" y="1242264"/>
-                  </a:lnTo>
-                  <a:lnTo>
-                    <a:pt x="1626053" y="1343863"/>
-                  </a:lnTo>
-                  <a:lnTo>
-                    <a:pt x="1703687" y="1441179"/>
-                  </a:lnTo>
-                  <a:lnTo>
-                    <a:pt x="1781321" y="1534394"/>
-                  </a:lnTo>
-                  <a:lnTo>
-                    <a:pt x="1858955" y="1623679"/>
-                  </a:lnTo>
-                  <a:lnTo>
-                    <a:pt x="1936589" y="1709201"/>
-                  </a:lnTo>
-                  <a:lnTo>
-                    <a:pt x="2014223" y="1791118"/>
-                  </a:lnTo>
-                  <a:lnTo>
-                    <a:pt x="2091857" y="1869583"/>
-                  </a:lnTo>
-                  <a:lnTo>
-                    <a:pt x="2169491" y="1944740"/>
-                  </a:lnTo>
-                  <a:lnTo>
-                    <a:pt x="2247125" y="2016729"/>
-                  </a:lnTo>
-                  <a:lnTo>
-                    <a:pt x="2324759" y="2085683"/>
-                  </a:lnTo>
-                  <a:lnTo>
-                    <a:pt x="2402393" y="2151732"/>
-                  </a:lnTo>
-                  <a:lnTo>
-                    <a:pt x="2480027" y="2214996"/>
-                  </a:lnTo>
-                  <a:lnTo>
-                    <a:pt x="2557661" y="2275594"/>
-                  </a:lnTo>
-                  <a:lnTo>
-                    <a:pt x="2635295" y="2333637"/>
-                  </a:lnTo>
-                  <a:lnTo>
-                    <a:pt x="2712930" y="2389234"/>
-                  </a:lnTo>
-                  <a:lnTo>
-                    <a:pt x="2790564" y="2442487"/>
-                  </a:lnTo>
-                  <a:lnTo>
-                    <a:pt x="2868198" y="2493496"/>
-                  </a:lnTo>
-                  <a:lnTo>
-                    <a:pt x="2945832" y="2542355"/>
-                  </a:lnTo>
-                  <a:lnTo>
-                    <a:pt x="3023466" y="2589154"/>
-                  </a:lnTo>
-                  <a:lnTo>
-                    <a:pt x="3101100" y="2633981"/>
-                  </a:lnTo>
-                  <a:lnTo>
-                    <a:pt x="3178734" y="2676918"/>
-                  </a:lnTo>
-                  <a:lnTo>
-                    <a:pt x="3256368" y="2718045"/>
-                  </a:lnTo>
-                  <a:lnTo>
-                    <a:pt x="3334002" y="2757439"/>
-                  </a:lnTo>
-                  <a:lnTo>
-                    <a:pt x="3411636" y="2785602"/>
-                  </a:lnTo>
-                  <a:lnTo>
-                    <a:pt x="3489270" y="2793582"/>
-                  </a:lnTo>
-                  <a:lnTo>
-                    <a:pt x="3566904" y="2801489"/>
-                  </a:lnTo>
-                  <a:lnTo>
-                    <a:pt x="3644538" y="2809323"/>
-                  </a:lnTo>
-                  <a:lnTo>
-                    <a:pt x="3722172" y="2817085"/>
-                  </a:lnTo>
-                  <a:lnTo>
-                    <a:pt x="3799806" y="2824775"/>
-                  </a:lnTo>
-                  <a:lnTo>
-                    <a:pt x="3877440" y="2832395"/>
-                  </a:lnTo>
-                  <a:lnTo>
-                    <a:pt x="3955074" y="2839944"/>
-                  </a:lnTo>
-                  <a:lnTo>
-                    <a:pt x="4032708" y="2847424"/>
-                  </a:lnTo>
-                  <a:lnTo>
-                    <a:pt x="4110342" y="2854836"/>
-                  </a:lnTo>
-                  <a:lnTo>
-                    <a:pt x="4187976" y="2862179"/>
-                  </a:lnTo>
-                  <a:lnTo>
-                    <a:pt x="4265610" y="2869454"/>
-                  </a:lnTo>
-                  <a:lnTo>
-                    <a:pt x="4343244" y="2876662"/>
-                  </a:lnTo>
-                  <a:lnTo>
-                    <a:pt x="4420879" y="2883805"/>
-                  </a:lnTo>
-                  <a:lnTo>
-                    <a:pt x="4498513" y="2890881"/>
-                  </a:lnTo>
-                  <a:lnTo>
-                    <a:pt x="4576147" y="2897892"/>
-                  </a:lnTo>
-                  <a:lnTo>
-                    <a:pt x="4653781" y="2904839"/>
-                  </a:lnTo>
-                  <a:lnTo>
-                    <a:pt x="4731415" y="2911722"/>
-                  </a:lnTo>
-                  <a:lnTo>
-                    <a:pt x="4809049" y="2918541"/>
-                  </a:lnTo>
-                  <a:lnTo>
-                    <a:pt x="4886683" y="2925298"/>
-                  </a:lnTo>
-                  <a:lnTo>
-                    <a:pt x="4964317" y="2931992"/>
-                  </a:lnTo>
-                  <a:lnTo>
-                    <a:pt x="5041951" y="2938625"/>
-                  </a:lnTo>
-                  <a:lnTo>
-                    <a:pt x="5119585" y="2945197"/>
-                  </a:lnTo>
-                  <a:lnTo>
-                    <a:pt x="5197219" y="2951708"/>
-                  </a:lnTo>
-                  <a:lnTo>
-                    <a:pt x="5274853" y="2958160"/>
-                  </a:lnTo>
-                  <a:lnTo>
-                    <a:pt x="5352487" y="2964552"/>
-                  </a:lnTo>
-                  <a:lnTo>
-                    <a:pt x="5430121" y="2970885"/>
-                  </a:lnTo>
-                  <a:lnTo>
-                    <a:pt x="5507755" y="2977160"/>
-                  </a:lnTo>
-                  <a:lnTo>
-                    <a:pt x="5585389" y="2983377"/>
-                  </a:lnTo>
-                  <a:lnTo>
-                    <a:pt x="5663023" y="2989537"/>
-                  </a:lnTo>
-                  <a:lnTo>
-                    <a:pt x="5740657" y="2995640"/>
-                  </a:lnTo>
-                  <a:lnTo>
-                    <a:pt x="5818291" y="3001687"/>
-                  </a:lnTo>
-                  <a:lnTo>
-                    <a:pt x="5895925" y="3007678"/>
-                  </a:lnTo>
-                  <a:lnTo>
-                    <a:pt x="5973559" y="3013615"/>
-                  </a:lnTo>
-                  <a:lnTo>
-                    <a:pt x="6051193" y="3019496"/>
-                  </a:lnTo>
-                  <a:lnTo>
-                    <a:pt x="6128827" y="3025324"/>
-                  </a:lnTo>
-                  <a:lnTo>
-                    <a:pt x="6206462" y="3031097"/>
-                  </a:lnTo>
-                  <a:lnTo>
-                    <a:pt x="6284096" y="3036818"/>
-                  </a:lnTo>
-                  <a:lnTo>
-                    <a:pt x="6361730" y="3042486"/>
-                  </a:lnTo>
-                  <a:lnTo>
-                    <a:pt x="6439364" y="3048102"/>
-                  </a:lnTo>
-                  <a:lnTo>
-                    <a:pt x="6516998" y="3053666"/>
-                  </a:lnTo>
-                  <a:lnTo>
-                    <a:pt x="6594632" y="3059179"/>
-                  </a:lnTo>
-                  <a:lnTo>
-                    <a:pt x="6672266" y="3064641"/>
-                  </a:lnTo>
-                  <a:lnTo>
-                    <a:pt x="6749900" y="3070053"/>
-                  </a:lnTo>
-                  <a:lnTo>
-                    <a:pt x="6827534" y="3075416"/>
-                  </a:lnTo>
-                  <a:lnTo>
-                    <a:pt x="6905168" y="3080728"/>
-                  </a:lnTo>
-                  <a:lnTo>
-                    <a:pt x="6982802" y="3085992"/>
-                  </a:lnTo>
-                  <a:lnTo>
-                    <a:pt x="7060436" y="3091208"/>
-                  </a:lnTo>
-                  <a:lnTo>
-                    <a:pt x="7138070" y="3096375"/>
-                  </a:lnTo>
-                  <a:lnTo>
-                    <a:pt x="7215704" y="3101495"/>
-                  </a:lnTo>
-                  <a:lnTo>
-                    <a:pt x="7293338" y="3106568"/>
-                  </a:lnTo>
-                  <a:lnTo>
-                    <a:pt x="7370972" y="3111594"/>
-                  </a:lnTo>
-                  <a:lnTo>
-                    <a:pt x="7370972" y="3557280"/>
-                  </a:lnTo>
-                  <a:lnTo>
-                    <a:pt x="7293338" y="3553084"/>
-                  </a:lnTo>
-                  <a:lnTo>
-                    <a:pt x="7215704" y="3548703"/>
-                  </a:lnTo>
-                  <a:lnTo>
-                    <a:pt x="7138070" y="3544129"/>
-                  </a:lnTo>
-                  <a:lnTo>
-                    <a:pt x="7060436" y="3539354"/>
-                  </a:lnTo>
-                  <a:lnTo>
-                    <a:pt x="6982802" y="3534368"/>
-                  </a:lnTo>
-                  <a:lnTo>
-                    <a:pt x="6905168" y="3529164"/>
-                  </a:lnTo>
-                  <a:lnTo>
-                    <a:pt x="6827534" y="3523730"/>
-                  </a:lnTo>
-                  <a:lnTo>
-                    <a:pt x="6749900" y="3518057"/>
-                  </a:lnTo>
-                  <a:lnTo>
-                    <a:pt x="6672266" y="3512134"/>
-                  </a:lnTo>
-                  <a:lnTo>
-                    <a:pt x="6594632" y="3505951"/>
-                  </a:lnTo>
-                  <a:lnTo>
-                    <a:pt x="6516998" y="3499496"/>
-                  </a:lnTo>
-                  <a:lnTo>
-                    <a:pt x="6439364" y="3492757"/>
-                  </a:lnTo>
-                  <a:lnTo>
-                    <a:pt x="6361730" y="3485721"/>
-                  </a:lnTo>
-                  <a:lnTo>
-                    <a:pt x="6284096" y="3478375"/>
-                  </a:lnTo>
-                  <a:lnTo>
-                    <a:pt x="6206462" y="3470707"/>
-                  </a:lnTo>
-                  <a:lnTo>
-                    <a:pt x="6128827" y="3462700"/>
-                  </a:lnTo>
-                  <a:lnTo>
-                    <a:pt x="6051193" y="3454342"/>
-                  </a:lnTo>
-                  <a:lnTo>
-                    <a:pt x="5973559" y="3445615"/>
-                  </a:lnTo>
-                  <a:lnTo>
-                    <a:pt x="5895925" y="3436505"/>
-                  </a:lnTo>
-                  <a:lnTo>
-                    <a:pt x="5818291" y="3426994"/>
-                  </a:lnTo>
-                  <a:lnTo>
-                    <a:pt x="5740657" y="3417064"/>
-                  </a:lnTo>
-                  <a:lnTo>
-                    <a:pt x="5663023" y="3406697"/>
-                  </a:lnTo>
-                  <a:lnTo>
-                    <a:pt x="5585389" y="3395874"/>
-                  </a:lnTo>
-                  <a:lnTo>
-                    <a:pt x="5507755" y="3384575"/>
-                  </a:lnTo>
-                  <a:lnTo>
-                    <a:pt x="5430121" y="3372779"/>
-                  </a:lnTo>
-                  <a:lnTo>
-                    <a:pt x="5352487" y="3360463"/>
-                  </a:lnTo>
-                  <a:lnTo>
-                    <a:pt x="5274853" y="3347606"/>
-                  </a:lnTo>
-                  <a:lnTo>
-                    <a:pt x="5197219" y="3334182"/>
-                  </a:lnTo>
-                  <a:lnTo>
-                    <a:pt x="5119585" y="3320168"/>
-                  </a:lnTo>
-                  <a:lnTo>
-                    <a:pt x="5041951" y="3305538"/>
-                  </a:lnTo>
-                  <a:lnTo>
-                    <a:pt x="4964317" y="3290263"/>
-                  </a:lnTo>
-                  <a:lnTo>
-                    <a:pt x="4886683" y="3274316"/>
-                  </a:lnTo>
-                  <a:lnTo>
-                    <a:pt x="4809049" y="3257668"/>
-                  </a:lnTo>
-                  <a:lnTo>
-                    <a:pt x="4731415" y="3240287"/>
-                  </a:lnTo>
-                  <a:lnTo>
-                    <a:pt x="4653781" y="3222141"/>
-                  </a:lnTo>
-                  <a:lnTo>
-                    <a:pt x="4576147" y="3203197"/>
-                  </a:lnTo>
-                  <a:lnTo>
-                    <a:pt x="4498513" y="3183419"/>
-                  </a:lnTo>
-                  <a:lnTo>
-                    <a:pt x="4420879" y="3162770"/>
-                  </a:lnTo>
-                  <a:lnTo>
-                    <a:pt x="4343244" y="3141213"/>
-                  </a:lnTo>
-                  <a:lnTo>
-                    <a:pt x="4265610" y="3118707"/>
-                  </a:lnTo>
-                  <a:lnTo>
-                    <a:pt x="4187976" y="3095211"/>
-                  </a:lnTo>
-                  <a:lnTo>
-                    <a:pt x="4110342" y="3070681"/>
-                  </a:lnTo>
-                  <a:lnTo>
-                    <a:pt x="4032708" y="3045072"/>
-                  </a:lnTo>
-                  <a:lnTo>
-                    <a:pt x="3955074" y="3018335"/>
-                  </a:lnTo>
-                  <a:lnTo>
-                    <a:pt x="3877440" y="2990422"/>
-                  </a:lnTo>
-                  <a:lnTo>
-                    <a:pt x="3799806" y="2961281"/>
-                  </a:lnTo>
-                  <a:lnTo>
-                    <a:pt x="3722172" y="2930857"/>
-                  </a:lnTo>
-                  <a:lnTo>
-                    <a:pt x="3644538" y="2899095"/>
-                  </a:lnTo>
-                  <a:lnTo>
-                    <a:pt x="3566904" y="2865935"/>
-                  </a:lnTo>
-                  <a:lnTo>
-                    <a:pt x="3489270" y="2831315"/>
-                  </a:lnTo>
-                  <a:lnTo>
-                    <a:pt x="3411636" y="2795172"/>
-                  </a:lnTo>
-                  <a:lnTo>
-                    <a:pt x="3334002" y="2777547"/>
-                  </a:lnTo>
-                  <a:lnTo>
-                    <a:pt x="3256368" y="2769418"/>
-                  </a:lnTo>
-                  <a:lnTo>
-                    <a:pt x="3178734" y="2761213"/>
-                  </a:lnTo>
-                  <a:lnTo>
-                    <a:pt x="3101100" y="2752932"/>
-                  </a:lnTo>
-                  <a:lnTo>
-                    <a:pt x="3023466" y="2744575"/>
-                  </a:lnTo>
-                  <a:lnTo>
-                    <a:pt x="2945832" y="2736139"/>
-                  </a:lnTo>
-                  <a:lnTo>
-                    <a:pt x="2868198" y="2727625"/>
-                  </a:lnTo>
-                  <a:lnTo>
-                    <a:pt x="2790564" y="2719032"/>
-                  </a:lnTo>
-                  <a:lnTo>
-                    <a:pt x="2712930" y="2710360"/>
-                  </a:lnTo>
-                  <a:lnTo>
-                    <a:pt x="2635295" y="2701606"/>
-                  </a:lnTo>
-                  <a:lnTo>
-                    <a:pt x="2557661" y="2692772"/>
-                  </a:lnTo>
-                  <a:lnTo>
-                    <a:pt x="2480027" y="2683855"/>
-                  </a:lnTo>
-                  <a:lnTo>
-                    <a:pt x="2402393" y="2674855"/>
-                  </a:lnTo>
-                  <a:lnTo>
-                    <a:pt x="2324759" y="2665772"/>
-                  </a:lnTo>
-                  <a:lnTo>
-                    <a:pt x="2247125" y="2656605"/>
-                  </a:lnTo>
-                  <a:lnTo>
-                    <a:pt x="2169491" y="2647352"/>
-                  </a:lnTo>
-                  <a:lnTo>
-                    <a:pt x="2091857" y="2638013"/>
-                  </a:lnTo>
-                  <a:lnTo>
-                    <a:pt x="2014223" y="2628588"/>
-                  </a:lnTo>
-                  <a:lnTo>
-                    <a:pt x="1936589" y="2619075"/>
-                  </a:lnTo>
-                  <a:lnTo>
-                    <a:pt x="1858955" y="2609474"/>
-                  </a:lnTo>
-                  <a:lnTo>
-                    <a:pt x="1781321" y="2599783"/>
-                  </a:lnTo>
-                  <a:lnTo>
-                    <a:pt x="1703687" y="2590003"/>
-                  </a:lnTo>
-                  <a:lnTo>
-                    <a:pt x="1626053" y="2580131"/>
-                  </a:lnTo>
-                  <a:lnTo>
-                    <a:pt x="1548419" y="2570168"/>
-                  </a:lnTo>
-                  <a:lnTo>
-                    <a:pt x="1470785" y="2560113"/>
-                  </a:lnTo>
-                  <a:lnTo>
-                    <a:pt x="1393151" y="2549964"/>
-                  </a:lnTo>
-                  <a:lnTo>
-                    <a:pt x="1315517" y="2539720"/>
-                  </a:lnTo>
-                  <a:lnTo>
-                    <a:pt x="1237883" y="2529382"/>
-                  </a:lnTo>
-                  <a:lnTo>
-                    <a:pt x="1160249" y="2518947"/>
-                  </a:lnTo>
-                  <a:lnTo>
-                    <a:pt x="1082615" y="2508416"/>
-                  </a:lnTo>
-                  <a:lnTo>
-                    <a:pt x="1004981" y="2497787"/>
-                  </a:lnTo>
-                  <a:lnTo>
-                    <a:pt x="927346" y="2487059"/>
-                  </a:lnTo>
-                  <a:lnTo>
-                    <a:pt x="849712" y="2476231"/>
-                  </a:lnTo>
-                  <a:lnTo>
-                    <a:pt x="772078" y="2465303"/>
-                  </a:lnTo>
-                  <a:lnTo>
-                    <a:pt x="694444" y="2454273"/>
-                  </a:lnTo>
-                  <a:lnTo>
-                    <a:pt x="616810" y="2443141"/>
-                  </a:lnTo>
-                  <a:lnTo>
-                    <a:pt x="539176" y="2431905"/>
-                  </a:lnTo>
-                  <a:lnTo>
-                    <a:pt x="461542" y="2420565"/>
-                  </a:lnTo>
-                  <a:lnTo>
-                    <a:pt x="383908" y="2409120"/>
-                  </a:lnTo>
-                  <a:lnTo>
-                    <a:pt x="306274" y="2397568"/>
-                  </a:lnTo>
-                  <a:lnTo>
-                    <a:pt x="228640" y="2385909"/>
-                  </a:lnTo>
-                  <a:lnTo>
-                    <a:pt x="151006" y="2374142"/>
-                  </a:lnTo>
-                  <a:lnTo>
-                    <a:pt x="73372" y="2362265"/>
-                  </a:lnTo>
-                  <a:lnTo>
-                    <a:pt x="0" y="2350936"/>
+                    <a:pt x="849712" y="145608"/>
+                  </a:lnTo>
+                  <a:lnTo>
+                    <a:pt x="927346" y="292137"/>
+                  </a:lnTo>
+                  <a:lnTo>
+                    <a:pt x="1004981" y="432543"/>
+                  </a:lnTo>
+                  <a:lnTo>
+                    <a:pt x="1082615" y="567082"/>
+                  </a:lnTo>
+                  <a:lnTo>
+                    <a:pt x="1160249" y="696001"/>
+                  </a:lnTo>
+                  <a:lnTo>
+                    <a:pt x="1237883" y="819533"/>
+                  </a:lnTo>
+                  <a:lnTo>
+                    <a:pt x="1315517" y="937904"/>
+                  </a:lnTo>
+                  <a:lnTo>
+                    <a:pt x="1393151" y="1051329"/>
+                  </a:lnTo>
+                  <a:lnTo>
+                    <a:pt x="1470785" y="1160015"/>
+                  </a:lnTo>
+                  <a:lnTo>
+                    <a:pt x="1548419" y="1264160"/>
+                  </a:lnTo>
+                  <a:lnTo>
+                    <a:pt x="1626053" y="1363954"/>
+                  </a:lnTo>
+                  <a:lnTo>
+                    <a:pt x="1703687" y="1459578"/>
+                  </a:lnTo>
+                  <a:lnTo>
+                    <a:pt x="1781321" y="1551207"/>
+                  </a:lnTo>
+                  <a:lnTo>
+                    <a:pt x="1858955" y="1639008"/>
+                  </a:lnTo>
+                  <a:lnTo>
+                    <a:pt x="1936589" y="1723140"/>
+                  </a:lnTo>
+                  <a:lnTo>
+                    <a:pt x="2014223" y="1803757"/>
+                  </a:lnTo>
+                  <a:lnTo>
+                    <a:pt x="2091857" y="1881006"/>
+                  </a:lnTo>
+                  <a:lnTo>
+                    <a:pt x="2169491" y="1955027"/>
+                  </a:lnTo>
+                  <a:lnTo>
+                    <a:pt x="2247125" y="2025955"/>
+                  </a:lnTo>
+                  <a:lnTo>
+                    <a:pt x="2324759" y="2093920"/>
+                  </a:lnTo>
+                  <a:lnTo>
+                    <a:pt x="2402393" y="2159046"/>
+                  </a:lnTo>
+                  <a:lnTo>
+                    <a:pt x="2480027" y="2221450"/>
+                  </a:lnTo>
+                  <a:lnTo>
+                    <a:pt x="2557661" y="2281247"/>
+                  </a:lnTo>
+                  <a:lnTo>
+                    <a:pt x="2635295" y="2338546"/>
+                  </a:lnTo>
+                  <a:lnTo>
+                    <a:pt x="2712930" y="2393450"/>
+                  </a:lnTo>
+                  <a:lnTo>
+                    <a:pt x="2790564" y="2446061"/>
+                  </a:lnTo>
+                  <a:lnTo>
+                    <a:pt x="2868198" y="2496473"/>
+                  </a:lnTo>
+                  <a:lnTo>
+                    <a:pt x="2945832" y="2544780"/>
+                  </a:lnTo>
+                  <a:lnTo>
+                    <a:pt x="3023466" y="2591068"/>
+                  </a:lnTo>
+                  <a:lnTo>
+                    <a:pt x="3101100" y="2635422"/>
+                  </a:lnTo>
+                  <a:lnTo>
+                    <a:pt x="3178734" y="2677922"/>
+                  </a:lnTo>
+                  <a:lnTo>
+                    <a:pt x="3256368" y="2718647"/>
+                  </a:lnTo>
+                  <a:lnTo>
+                    <a:pt x="3334002" y="2757671"/>
+                  </a:lnTo>
+                  <a:lnTo>
+                    <a:pt x="3411636" y="2785274"/>
+                  </a:lnTo>
+                  <a:lnTo>
+                    <a:pt x="3489270" y="2792269"/>
+                  </a:lnTo>
+                  <a:lnTo>
+                    <a:pt x="3566904" y="2799208"/>
+                  </a:lnTo>
+                  <a:lnTo>
+                    <a:pt x="3644538" y="2806091"/>
+                  </a:lnTo>
+                  <a:lnTo>
+                    <a:pt x="3722172" y="2812918"/>
+                  </a:lnTo>
+                  <a:lnTo>
+                    <a:pt x="3799806" y="2819690"/>
+                  </a:lnTo>
+                  <a:lnTo>
+                    <a:pt x="3877440" y="2826407"/>
+                  </a:lnTo>
+                  <a:lnTo>
+                    <a:pt x="3955074" y="2833071"/>
+                  </a:lnTo>
+                  <a:lnTo>
+                    <a:pt x="4032708" y="2839680"/>
+                  </a:lnTo>
+                  <a:lnTo>
+                    <a:pt x="4110342" y="2846236"/>
+                  </a:lnTo>
+                  <a:lnTo>
+                    <a:pt x="4187976" y="2852740"/>
+                  </a:lnTo>
+                  <a:lnTo>
+                    <a:pt x="4265610" y="2859191"/>
+                  </a:lnTo>
+                  <a:lnTo>
+                    <a:pt x="4343244" y="2865590"/>
+                  </a:lnTo>
+                  <a:lnTo>
+                    <a:pt x="4420879" y="2871937"/>
+                  </a:lnTo>
+                  <a:lnTo>
+                    <a:pt x="4498513" y="2878233"/>
+                  </a:lnTo>
+                  <a:lnTo>
+                    <a:pt x="4576147" y="2884478"/>
+                  </a:lnTo>
+                  <a:lnTo>
+                    <a:pt x="4653781" y="2890673"/>
+                  </a:lnTo>
+                  <a:lnTo>
+                    <a:pt x="4731415" y="2896818"/>
+                  </a:lnTo>
+                  <a:lnTo>
+                    <a:pt x="4809049" y="2902914"/>
+                  </a:lnTo>
+                  <a:lnTo>
+                    <a:pt x="4886683" y="2908960"/>
+                  </a:lnTo>
+                  <a:lnTo>
+                    <a:pt x="4964317" y="2914957"/>
+                  </a:lnTo>
+                  <a:lnTo>
+                    <a:pt x="5041951" y="2920907"/>
+                  </a:lnTo>
+                  <a:lnTo>
+                    <a:pt x="5119585" y="2926808"/>
+                  </a:lnTo>
+                  <a:lnTo>
+                    <a:pt x="5197219" y="2932661"/>
+                  </a:lnTo>
+                  <a:lnTo>
+                    <a:pt x="5274853" y="2938468"/>
+                  </a:lnTo>
+                  <a:lnTo>
+                    <a:pt x="5352487" y="2944227"/>
+                  </a:lnTo>
+                  <a:lnTo>
+                    <a:pt x="5430121" y="2949940"/>
+                  </a:lnTo>
+                  <a:lnTo>
+                    <a:pt x="5507755" y="2955607"/>
+                  </a:lnTo>
+                  <a:lnTo>
+                    <a:pt x="5585389" y="2961229"/>
+                  </a:lnTo>
+                  <a:lnTo>
+                    <a:pt x="5663023" y="2966805"/>
+                  </a:lnTo>
+                  <a:lnTo>
+                    <a:pt x="5740657" y="2972336"/>
+                  </a:lnTo>
+                  <a:lnTo>
+                    <a:pt x="5818291" y="2977822"/>
+                  </a:lnTo>
+                  <a:lnTo>
+                    <a:pt x="5895925" y="2983264"/>
+                  </a:lnTo>
+                  <a:lnTo>
+                    <a:pt x="5973559" y="2988663"/>
+                  </a:lnTo>
+                  <a:lnTo>
+                    <a:pt x="6051193" y="2994017"/>
+                  </a:lnTo>
+                  <a:lnTo>
+                    <a:pt x="6128827" y="2999329"/>
+                  </a:lnTo>
+                  <a:lnTo>
+                    <a:pt x="6206462" y="3004598"/>
+                  </a:lnTo>
+                  <a:lnTo>
+                    <a:pt x="6284096" y="3009824"/>
+                  </a:lnTo>
+                  <a:lnTo>
+                    <a:pt x="6361730" y="3015008"/>
+                  </a:lnTo>
+                  <a:lnTo>
+                    <a:pt x="6439364" y="3020150"/>
+                  </a:lnTo>
+                  <a:lnTo>
+                    <a:pt x="6516998" y="3025251"/>
+                  </a:lnTo>
+                  <a:lnTo>
+                    <a:pt x="6594632" y="3030311"/>
+                  </a:lnTo>
+                  <a:lnTo>
+                    <a:pt x="6672266" y="3035330"/>
+                  </a:lnTo>
+                  <a:lnTo>
+                    <a:pt x="6749900" y="3040308"/>
+                  </a:lnTo>
+                  <a:lnTo>
+                    <a:pt x="6827534" y="3045246"/>
+                  </a:lnTo>
+                  <a:lnTo>
+                    <a:pt x="6905168" y="3050145"/>
+                  </a:lnTo>
+                  <a:lnTo>
+                    <a:pt x="6982802" y="3055004"/>
+                  </a:lnTo>
+                  <a:lnTo>
+                    <a:pt x="7060436" y="3059823"/>
+                  </a:lnTo>
+                  <a:lnTo>
+                    <a:pt x="7138070" y="3064604"/>
+                  </a:lnTo>
+                  <a:lnTo>
+                    <a:pt x="7215704" y="3069346"/>
+                  </a:lnTo>
+                  <a:lnTo>
+                    <a:pt x="7293338" y="3074051"/>
+                  </a:lnTo>
+                  <a:lnTo>
+                    <a:pt x="7370972" y="3078717"/>
+                  </a:lnTo>
+                  <a:lnTo>
+                    <a:pt x="7370972" y="3555375"/>
+                  </a:lnTo>
+                  <a:lnTo>
+                    <a:pt x="7293338" y="3551133"/>
+                  </a:lnTo>
+                  <a:lnTo>
+                    <a:pt x="7215704" y="3546707"/>
+                  </a:lnTo>
+                  <a:lnTo>
+                    <a:pt x="7138070" y="3542088"/>
+                  </a:lnTo>
+                  <a:lnTo>
+                    <a:pt x="7060436" y="3537268"/>
+                  </a:lnTo>
+                  <a:lnTo>
+                    <a:pt x="6982802" y="3532237"/>
+                  </a:lnTo>
+                  <a:lnTo>
+                    <a:pt x="6905168" y="3526987"/>
+                  </a:lnTo>
+                  <a:lnTo>
+                    <a:pt x="6827534" y="3521508"/>
+                  </a:lnTo>
+                  <a:lnTo>
+                    <a:pt x="6749900" y="3515790"/>
+                  </a:lnTo>
+                  <a:lnTo>
+                    <a:pt x="6672266" y="3509823"/>
+                  </a:lnTo>
+                  <a:lnTo>
+                    <a:pt x="6594632" y="3503595"/>
+                  </a:lnTo>
+                  <a:lnTo>
+                    <a:pt x="6516998" y="3497096"/>
+                  </a:lnTo>
+                  <a:lnTo>
+                    <a:pt x="6439364" y="3490314"/>
+                  </a:lnTo>
+                  <a:lnTo>
+                    <a:pt x="6361730" y="3483236"/>
+                  </a:lnTo>
+                  <a:lnTo>
+                    <a:pt x="6284096" y="3475849"/>
+                  </a:lnTo>
+                  <a:lnTo>
+                    <a:pt x="6206462" y="3468141"/>
+                  </a:lnTo>
+                  <a:lnTo>
+                    <a:pt x="6128827" y="3460096"/>
+                  </a:lnTo>
+                  <a:lnTo>
+                    <a:pt x="6051193" y="3451700"/>
+                  </a:lnTo>
+                  <a:lnTo>
+                    <a:pt x="5973559" y="3442938"/>
+                  </a:lnTo>
+                  <a:lnTo>
+                    <a:pt x="5895925" y="3433795"/>
+                  </a:lnTo>
+                  <a:lnTo>
+                    <a:pt x="5818291" y="3424252"/>
+                  </a:lnTo>
+                  <a:lnTo>
+                    <a:pt x="5740657" y="3414294"/>
+                  </a:lnTo>
+                  <a:lnTo>
+                    <a:pt x="5663023" y="3403901"/>
+                  </a:lnTo>
+                  <a:lnTo>
+                    <a:pt x="5585389" y="3393055"/>
+                  </a:lnTo>
+                  <a:lnTo>
+                    <a:pt x="5507755" y="3381736"/>
+                  </a:lnTo>
+                  <a:lnTo>
+                    <a:pt x="5430121" y="3369924"/>
+                  </a:lnTo>
+                  <a:lnTo>
+                    <a:pt x="5352487" y="3357596"/>
+                  </a:lnTo>
+                  <a:lnTo>
+                    <a:pt x="5274853" y="3344731"/>
+                  </a:lnTo>
+                  <a:lnTo>
+                    <a:pt x="5197219" y="3331305"/>
+                  </a:lnTo>
+                  <a:lnTo>
+                    <a:pt x="5119585" y="3317294"/>
+                  </a:lnTo>
+                  <a:lnTo>
+                    <a:pt x="5041951" y="3302672"/>
+                  </a:lnTo>
+                  <a:lnTo>
+                    <a:pt x="4964317" y="3287412"/>
+                  </a:lnTo>
+                  <a:lnTo>
+                    <a:pt x="4886683" y="3271487"/>
+                  </a:lnTo>
+                  <a:lnTo>
+                    <a:pt x="4809049" y="3254867"/>
+                  </a:lnTo>
+                  <a:lnTo>
+                    <a:pt x="4731415" y="3237523"/>
+                  </a:lnTo>
+                  <a:lnTo>
+                    <a:pt x="4653781" y="3219423"/>
+                  </a:lnTo>
+                  <a:lnTo>
+                    <a:pt x="4576147" y="3200533"/>
+                  </a:lnTo>
+                  <a:lnTo>
+                    <a:pt x="4498513" y="3180820"/>
+                  </a:lnTo>
+                  <a:lnTo>
+                    <a:pt x="4420879" y="3160247"/>
+                  </a:lnTo>
+                  <a:lnTo>
+                    <a:pt x="4343244" y="3138777"/>
+                  </a:lnTo>
+                  <a:lnTo>
+                    <a:pt x="4265610" y="3116370"/>
+                  </a:lnTo>
+                  <a:lnTo>
+                    <a:pt x="4187976" y="3092987"/>
+                  </a:lnTo>
+                  <a:lnTo>
+                    <a:pt x="4110342" y="3068585"/>
+                  </a:lnTo>
+                  <a:lnTo>
+                    <a:pt x="4032708" y="3043118"/>
+                  </a:lnTo>
+                  <a:lnTo>
+                    <a:pt x="3955074" y="3016541"/>
+                  </a:lnTo>
+                  <a:lnTo>
+                    <a:pt x="3877440" y="2988805"/>
+                  </a:lnTo>
+                  <a:lnTo>
+                    <a:pt x="3799806" y="2959859"/>
+                  </a:lnTo>
+                  <a:lnTo>
+                    <a:pt x="3722172" y="2929652"/>
+                  </a:lnTo>
+                  <a:lnTo>
+                    <a:pt x="3644538" y="2898127"/>
+                  </a:lnTo>
+                  <a:lnTo>
+                    <a:pt x="3566904" y="2865228"/>
+                  </a:lnTo>
+                  <a:lnTo>
+                    <a:pt x="3489270" y="2830895"/>
+                  </a:lnTo>
+                  <a:lnTo>
+                    <a:pt x="3411636" y="2795064"/>
+                  </a:lnTo>
+                  <a:lnTo>
+                    <a:pt x="3334002" y="2778223"/>
+                  </a:lnTo>
+                  <a:lnTo>
+                    <a:pt x="3256368" y="2771113"/>
+                  </a:lnTo>
+                  <a:lnTo>
+                    <a:pt x="3178734" y="2763946"/>
+                  </a:lnTo>
+                  <a:lnTo>
+                    <a:pt x="3101100" y="2756721"/>
+                  </a:lnTo>
+                  <a:lnTo>
+                    <a:pt x="3023466" y="2749437"/>
+                  </a:lnTo>
+                  <a:lnTo>
+                    <a:pt x="2945832" y="2742094"/>
+                  </a:lnTo>
+                  <a:lnTo>
+                    <a:pt x="2868198" y="2734691"/>
+                  </a:lnTo>
+                  <a:lnTo>
+                    <a:pt x="2790564" y="2727228"/>
+                  </a:lnTo>
+                  <a:lnTo>
+                    <a:pt x="2712930" y="2719704"/>
+                  </a:lnTo>
+                  <a:lnTo>
+                    <a:pt x="2635295" y="2712119"/>
+                  </a:lnTo>
+                  <a:lnTo>
+                    <a:pt x="2557661" y="2704472"/>
+                  </a:lnTo>
+                  <a:lnTo>
+                    <a:pt x="2480027" y="2696764"/>
+                  </a:lnTo>
+                  <a:lnTo>
+                    <a:pt x="2402393" y="2688992"/>
+                  </a:lnTo>
+                  <a:lnTo>
+                    <a:pt x="2324759" y="2681158"/>
+                  </a:lnTo>
+                  <a:lnTo>
+                    <a:pt x="2247125" y="2673259"/>
+                  </a:lnTo>
+                  <a:lnTo>
+                    <a:pt x="2169491" y="2665297"/>
+                  </a:lnTo>
+                  <a:lnTo>
+                    <a:pt x="2091857" y="2657269"/>
+                  </a:lnTo>
+                  <a:lnTo>
+                    <a:pt x="2014223" y="2649177"/>
+                  </a:lnTo>
+                  <a:lnTo>
+                    <a:pt x="1936589" y="2641018"/>
+                  </a:lnTo>
+                  <a:lnTo>
+                    <a:pt x="1858955" y="2632794"/>
+                  </a:lnTo>
+                  <a:lnTo>
+                    <a:pt x="1781321" y="2624502"/>
+                  </a:lnTo>
+                  <a:lnTo>
+                    <a:pt x="1703687" y="2616143"/>
+                  </a:lnTo>
+                  <a:lnTo>
+                    <a:pt x="1626053" y="2607716"/>
+                  </a:lnTo>
+                  <a:lnTo>
+                    <a:pt x="1548419" y="2599221"/>
+                  </a:lnTo>
+                  <a:lnTo>
+                    <a:pt x="1470785" y="2590656"/>
+                  </a:lnTo>
+                  <a:lnTo>
+                    <a:pt x="1393151" y="2582022"/>
+                  </a:lnTo>
+                  <a:lnTo>
+                    <a:pt x="1315517" y="2573318"/>
+                  </a:lnTo>
+                  <a:lnTo>
+                    <a:pt x="1237883" y="2564543"/>
+                  </a:lnTo>
+                  <a:lnTo>
+                    <a:pt x="1160249" y="2555696"/>
+                  </a:lnTo>
+                  <a:lnTo>
+                    <a:pt x="1082615" y="2546778"/>
+                  </a:lnTo>
+                  <a:lnTo>
+                    <a:pt x="1004981" y="2537787"/>
+                  </a:lnTo>
+                  <a:lnTo>
+                    <a:pt x="927346" y="2528723"/>
+                  </a:lnTo>
+                  <a:lnTo>
+                    <a:pt x="849712" y="2519585"/>
+                  </a:lnTo>
+                  <a:lnTo>
+                    <a:pt x="772078" y="2510373"/>
+                  </a:lnTo>
+                  <a:lnTo>
+                    <a:pt x="694444" y="2501087"/>
+                  </a:lnTo>
+                  <a:lnTo>
+                    <a:pt x="616810" y="2491724"/>
+                  </a:lnTo>
+                  <a:lnTo>
+                    <a:pt x="539176" y="2482286"/>
+                  </a:lnTo>
+                  <a:lnTo>
+                    <a:pt x="461542" y="2472770"/>
+                  </a:lnTo>
+                  <a:lnTo>
+                    <a:pt x="383908" y="2463178"/>
+                  </a:lnTo>
+                  <a:lnTo>
+                    <a:pt x="306274" y="2453507"/>
+                  </a:lnTo>
+                  <a:lnTo>
+                    <a:pt x="228640" y="2443758"/>
+                  </a:lnTo>
+                  <a:lnTo>
+                    <a:pt x="151006" y="2433930"/>
+                  </a:lnTo>
+                  <a:lnTo>
+                    <a:pt x="73372" y="2424021"/>
+                  </a:lnTo>
+                  <a:lnTo>
+                    <a:pt x="0" y="2414581"/>
                   </a:lnTo>
                   <a:close/>
                 </a:path>
@@ -3579,270 +3579,270 @@
           </p:nvSpPr>
           <p:spPr>
             <a:xfrm>
-              <a:off x="1616980" y="1896563"/>
-              <a:ext cx="6571509" cy="3111594"/>
+              <a:off x="1593307" y="1896563"/>
+              <a:ext cx="6595183" cy="3078717"/>
             </a:xfrm>
             <a:custGeom>
               <a:avLst/>
               <a:pathLst>
-                <a:path w="6571509" h="3111594">
+                <a:path w="6595183" h="3078717">
                   <a:moveTo>
                     <a:pt x="0" y="0"/>
                   </a:moveTo>
                   <a:lnTo>
-                    <a:pt x="50249" y="101157"/>
-                  </a:lnTo>
-                  <a:lnTo>
-                    <a:pt x="127884" y="250854"/>
-                  </a:lnTo>
-                  <a:lnTo>
-                    <a:pt x="205518" y="394242"/>
-                  </a:lnTo>
-                  <a:lnTo>
-                    <a:pt x="283152" y="531585"/>
-                  </a:lnTo>
-                  <a:lnTo>
-                    <a:pt x="360786" y="663140"/>
-                  </a:lnTo>
-                  <a:lnTo>
-                    <a:pt x="438420" y="789149"/>
-                  </a:lnTo>
-                  <a:lnTo>
-                    <a:pt x="516054" y="909847"/>
-                  </a:lnTo>
-                  <a:lnTo>
-                    <a:pt x="593688" y="1025457"/>
-                  </a:lnTo>
-                  <a:lnTo>
-                    <a:pt x="671322" y="1136194"/>
-                  </a:lnTo>
-                  <a:lnTo>
-                    <a:pt x="748956" y="1242264"/>
-                  </a:lnTo>
-                  <a:lnTo>
-                    <a:pt x="826590" y="1343863"/>
-                  </a:lnTo>
-                  <a:lnTo>
-                    <a:pt x="904224" y="1441179"/>
-                  </a:lnTo>
-                  <a:lnTo>
-                    <a:pt x="981858" y="1534394"/>
-                  </a:lnTo>
-                  <a:lnTo>
-                    <a:pt x="1059492" y="1623679"/>
-                  </a:lnTo>
-                  <a:lnTo>
-                    <a:pt x="1137126" y="1709201"/>
-                  </a:lnTo>
-                  <a:lnTo>
-                    <a:pt x="1214760" y="1791118"/>
-                  </a:lnTo>
-                  <a:lnTo>
-                    <a:pt x="1292394" y="1869583"/>
-                  </a:lnTo>
-                  <a:lnTo>
-                    <a:pt x="1370028" y="1944740"/>
-                  </a:lnTo>
-                  <a:lnTo>
-                    <a:pt x="1447662" y="2016729"/>
-                  </a:lnTo>
-                  <a:lnTo>
-                    <a:pt x="1525296" y="2085683"/>
-                  </a:lnTo>
-                  <a:lnTo>
-                    <a:pt x="1602930" y="2151732"/>
-                  </a:lnTo>
-                  <a:lnTo>
-                    <a:pt x="1680564" y="2214996"/>
-                  </a:lnTo>
-                  <a:lnTo>
-                    <a:pt x="1758198" y="2275594"/>
-                  </a:lnTo>
-                  <a:lnTo>
-                    <a:pt x="1835832" y="2333637"/>
-                  </a:lnTo>
-                  <a:lnTo>
-                    <a:pt x="1913467" y="2389234"/>
-                  </a:lnTo>
-                  <a:lnTo>
-                    <a:pt x="1991101" y="2442487"/>
-                  </a:lnTo>
-                  <a:lnTo>
-                    <a:pt x="2068735" y="2493496"/>
-                  </a:lnTo>
-                  <a:lnTo>
-                    <a:pt x="2146369" y="2542355"/>
-                  </a:lnTo>
-                  <a:lnTo>
-                    <a:pt x="2224003" y="2589154"/>
-                  </a:lnTo>
-                  <a:lnTo>
-                    <a:pt x="2301637" y="2633981"/>
-                  </a:lnTo>
-                  <a:lnTo>
-                    <a:pt x="2379271" y="2676918"/>
-                  </a:lnTo>
-                  <a:lnTo>
-                    <a:pt x="2456905" y="2718045"/>
-                  </a:lnTo>
-                  <a:lnTo>
-                    <a:pt x="2534539" y="2757439"/>
-                  </a:lnTo>
-                  <a:lnTo>
-                    <a:pt x="2612173" y="2785602"/>
-                  </a:lnTo>
-                  <a:lnTo>
-                    <a:pt x="2689807" y="2793582"/>
-                  </a:lnTo>
-                  <a:lnTo>
-                    <a:pt x="2767441" y="2801489"/>
-                  </a:lnTo>
-                  <a:lnTo>
-                    <a:pt x="2845075" y="2809323"/>
-                  </a:lnTo>
-                  <a:lnTo>
-                    <a:pt x="2922709" y="2817085"/>
-                  </a:lnTo>
-                  <a:lnTo>
-                    <a:pt x="3000343" y="2824775"/>
-                  </a:lnTo>
-                  <a:lnTo>
-                    <a:pt x="3077977" y="2832395"/>
-                  </a:lnTo>
-                  <a:lnTo>
-                    <a:pt x="3155611" y="2839944"/>
-                  </a:lnTo>
-                  <a:lnTo>
-                    <a:pt x="3233245" y="2847424"/>
-                  </a:lnTo>
-                  <a:lnTo>
-                    <a:pt x="3310879" y="2854836"/>
-                  </a:lnTo>
-                  <a:lnTo>
-                    <a:pt x="3388513" y="2862179"/>
-                  </a:lnTo>
-                  <a:lnTo>
-                    <a:pt x="3466147" y="2869454"/>
-                  </a:lnTo>
-                  <a:lnTo>
-                    <a:pt x="3543781" y="2876662"/>
-                  </a:lnTo>
-                  <a:lnTo>
-                    <a:pt x="3621416" y="2883805"/>
-                  </a:lnTo>
-                  <a:lnTo>
-                    <a:pt x="3699050" y="2890881"/>
-                  </a:lnTo>
-                  <a:lnTo>
-                    <a:pt x="3776684" y="2897892"/>
-                  </a:lnTo>
-                  <a:lnTo>
-                    <a:pt x="3854318" y="2904839"/>
-                  </a:lnTo>
-                  <a:lnTo>
-                    <a:pt x="3931952" y="2911722"/>
-                  </a:lnTo>
-                  <a:lnTo>
-                    <a:pt x="4009586" y="2918541"/>
-                  </a:lnTo>
-                  <a:lnTo>
-                    <a:pt x="4087220" y="2925298"/>
-                  </a:lnTo>
-                  <a:lnTo>
-                    <a:pt x="4164854" y="2931992"/>
-                  </a:lnTo>
-                  <a:lnTo>
-                    <a:pt x="4242488" y="2938625"/>
-                  </a:lnTo>
-                  <a:lnTo>
-                    <a:pt x="4320122" y="2945197"/>
-                  </a:lnTo>
-                  <a:lnTo>
-                    <a:pt x="4397756" y="2951708"/>
-                  </a:lnTo>
-                  <a:lnTo>
-                    <a:pt x="4475390" y="2958160"/>
-                  </a:lnTo>
-                  <a:lnTo>
-                    <a:pt x="4553024" y="2964552"/>
-                  </a:lnTo>
-                  <a:lnTo>
-                    <a:pt x="4630658" y="2970885"/>
-                  </a:lnTo>
-                  <a:lnTo>
-                    <a:pt x="4708292" y="2977160"/>
-                  </a:lnTo>
-                  <a:lnTo>
-                    <a:pt x="4785926" y="2983377"/>
-                  </a:lnTo>
-                  <a:lnTo>
-                    <a:pt x="4863560" y="2989537"/>
-                  </a:lnTo>
-                  <a:lnTo>
-                    <a:pt x="4941194" y="2995640"/>
-                  </a:lnTo>
-                  <a:lnTo>
-                    <a:pt x="5018828" y="3001687"/>
-                  </a:lnTo>
-                  <a:lnTo>
-                    <a:pt x="5096462" y="3007678"/>
-                  </a:lnTo>
-                  <a:lnTo>
-                    <a:pt x="5174096" y="3013615"/>
-                  </a:lnTo>
-                  <a:lnTo>
-                    <a:pt x="5251730" y="3019496"/>
-                  </a:lnTo>
-                  <a:lnTo>
-                    <a:pt x="5329365" y="3025324"/>
-                  </a:lnTo>
-                  <a:lnTo>
-                    <a:pt x="5406999" y="3031097"/>
-                  </a:lnTo>
-                  <a:lnTo>
-                    <a:pt x="5484633" y="3036818"/>
-                  </a:lnTo>
-                  <a:lnTo>
-                    <a:pt x="5562267" y="3042486"/>
-                  </a:lnTo>
-                  <a:lnTo>
-                    <a:pt x="5639901" y="3048102"/>
-                  </a:lnTo>
-                  <a:lnTo>
-                    <a:pt x="5717535" y="3053666"/>
-                  </a:lnTo>
-                  <a:lnTo>
-                    <a:pt x="5795169" y="3059179"/>
-                  </a:lnTo>
-                  <a:lnTo>
-                    <a:pt x="5872803" y="3064641"/>
-                  </a:lnTo>
-                  <a:lnTo>
-                    <a:pt x="5950437" y="3070053"/>
-                  </a:lnTo>
-                  <a:lnTo>
-                    <a:pt x="6028071" y="3075416"/>
-                  </a:lnTo>
-                  <a:lnTo>
-                    <a:pt x="6105705" y="3080728"/>
-                  </a:lnTo>
-                  <a:lnTo>
-                    <a:pt x="6183339" y="3085992"/>
-                  </a:lnTo>
-                  <a:lnTo>
-                    <a:pt x="6260973" y="3091208"/>
-                  </a:lnTo>
-                  <a:lnTo>
-                    <a:pt x="6338607" y="3096375"/>
-                  </a:lnTo>
-                  <a:lnTo>
-                    <a:pt x="6416241" y="3101495"/>
-                  </a:lnTo>
-                  <a:lnTo>
-                    <a:pt x="6493875" y="3106568"/>
-                  </a:lnTo>
-                  <a:lnTo>
-                    <a:pt x="6571509" y="3111594"/>
+                    <a:pt x="73923" y="145608"/>
+                  </a:lnTo>
+                  <a:lnTo>
+                    <a:pt x="151557" y="292137"/>
+                  </a:lnTo>
+                  <a:lnTo>
+                    <a:pt x="229191" y="432543"/>
+                  </a:lnTo>
+                  <a:lnTo>
+                    <a:pt x="306825" y="567082"/>
+                  </a:lnTo>
+                  <a:lnTo>
+                    <a:pt x="384459" y="696001"/>
+                  </a:lnTo>
+                  <a:lnTo>
+                    <a:pt x="462093" y="819533"/>
+                  </a:lnTo>
+                  <a:lnTo>
+                    <a:pt x="539727" y="937904"/>
+                  </a:lnTo>
+                  <a:lnTo>
+                    <a:pt x="617361" y="1051329"/>
+                  </a:lnTo>
+                  <a:lnTo>
+                    <a:pt x="694996" y="1160015"/>
+                  </a:lnTo>
+                  <a:lnTo>
+                    <a:pt x="772630" y="1264160"/>
+                  </a:lnTo>
+                  <a:lnTo>
+                    <a:pt x="850264" y="1363954"/>
+                  </a:lnTo>
+                  <a:lnTo>
+                    <a:pt x="927898" y="1459578"/>
+                  </a:lnTo>
+                  <a:lnTo>
+                    <a:pt x="1005532" y="1551207"/>
+                  </a:lnTo>
+                  <a:lnTo>
+                    <a:pt x="1083166" y="1639008"/>
+                  </a:lnTo>
+                  <a:lnTo>
+                    <a:pt x="1160800" y="1723140"/>
+                  </a:lnTo>
+                  <a:lnTo>
+                    <a:pt x="1238434" y="1803757"/>
+                  </a:lnTo>
+                  <a:lnTo>
+                    <a:pt x="1316068" y="1881006"/>
+                  </a:lnTo>
+                  <a:lnTo>
+                    <a:pt x="1393702" y="1955027"/>
+                  </a:lnTo>
+                  <a:lnTo>
+                    <a:pt x="1471336" y="2025955"/>
+                  </a:lnTo>
+                  <a:lnTo>
+                    <a:pt x="1548970" y="2093920"/>
+                  </a:lnTo>
+                  <a:lnTo>
+                    <a:pt x="1626604" y="2159046"/>
+                  </a:lnTo>
+                  <a:lnTo>
+                    <a:pt x="1704238" y="2221450"/>
+                  </a:lnTo>
+                  <a:lnTo>
+                    <a:pt x="1781872" y="2281247"/>
+                  </a:lnTo>
+                  <a:lnTo>
+                    <a:pt x="1859506" y="2338546"/>
+                  </a:lnTo>
+                  <a:lnTo>
+                    <a:pt x="1937140" y="2393450"/>
+                  </a:lnTo>
+                  <a:lnTo>
+                    <a:pt x="2014774" y="2446061"/>
+                  </a:lnTo>
+                  <a:lnTo>
+                    <a:pt x="2092408" y="2496473"/>
+                  </a:lnTo>
+                  <a:lnTo>
+                    <a:pt x="2170042" y="2544780"/>
+                  </a:lnTo>
+                  <a:lnTo>
+                    <a:pt x="2247676" y="2591068"/>
+                  </a:lnTo>
+                  <a:lnTo>
+                    <a:pt x="2325310" y="2635422"/>
+                  </a:lnTo>
+                  <a:lnTo>
+                    <a:pt x="2402945" y="2677922"/>
+                  </a:lnTo>
+                  <a:lnTo>
+                    <a:pt x="2480579" y="2718647"/>
+                  </a:lnTo>
+                  <a:lnTo>
+                    <a:pt x="2558213" y="2757671"/>
+                  </a:lnTo>
+                  <a:lnTo>
+                    <a:pt x="2635847" y="2785274"/>
+                  </a:lnTo>
+                  <a:lnTo>
+                    <a:pt x="2713481" y="2792269"/>
+                  </a:lnTo>
+                  <a:lnTo>
+                    <a:pt x="2791115" y="2799208"/>
+                  </a:lnTo>
+                  <a:lnTo>
+                    <a:pt x="2868749" y="2806091"/>
+                  </a:lnTo>
+                  <a:lnTo>
+                    <a:pt x="2946383" y="2812918"/>
+                  </a:lnTo>
+                  <a:lnTo>
+                    <a:pt x="3024017" y="2819690"/>
+                  </a:lnTo>
+                  <a:lnTo>
+                    <a:pt x="3101651" y="2826407"/>
+                  </a:lnTo>
+                  <a:lnTo>
+                    <a:pt x="3179285" y="2833071"/>
+                  </a:lnTo>
+                  <a:lnTo>
+                    <a:pt x="3256919" y="2839680"/>
+                  </a:lnTo>
+                  <a:lnTo>
+                    <a:pt x="3334553" y="2846236"/>
+                  </a:lnTo>
+                  <a:lnTo>
+                    <a:pt x="3412187" y="2852740"/>
+                  </a:lnTo>
+                  <a:lnTo>
+                    <a:pt x="3489821" y="2859191"/>
+                  </a:lnTo>
+                  <a:lnTo>
+                    <a:pt x="3567455" y="2865590"/>
+                  </a:lnTo>
+                  <a:lnTo>
+                    <a:pt x="3645089" y="2871937"/>
+                  </a:lnTo>
+                  <a:lnTo>
+                    <a:pt x="3722723" y="2878233"/>
+                  </a:lnTo>
+                  <a:lnTo>
+                    <a:pt x="3800357" y="2884478"/>
+                  </a:lnTo>
+                  <a:lnTo>
+                    <a:pt x="3877991" y="2890673"/>
+                  </a:lnTo>
+                  <a:lnTo>
+                    <a:pt x="3955625" y="2896818"/>
+                  </a:lnTo>
+                  <a:lnTo>
+                    <a:pt x="4033259" y="2902914"/>
+                  </a:lnTo>
+                  <a:lnTo>
+                    <a:pt x="4110893" y="2908960"/>
+                  </a:lnTo>
+                  <a:lnTo>
+                    <a:pt x="4188528" y="2914957"/>
+                  </a:lnTo>
+                  <a:lnTo>
+                    <a:pt x="4266162" y="2920907"/>
+                  </a:lnTo>
+                  <a:lnTo>
+                    <a:pt x="4343796" y="2926808"/>
+                  </a:lnTo>
+                  <a:lnTo>
+                    <a:pt x="4421430" y="2932661"/>
+                  </a:lnTo>
+                  <a:lnTo>
+                    <a:pt x="4499064" y="2938468"/>
+                  </a:lnTo>
+                  <a:lnTo>
+                    <a:pt x="4576698" y="2944227"/>
+                  </a:lnTo>
+                  <a:lnTo>
+                    <a:pt x="4654332" y="2949940"/>
+                  </a:lnTo>
+                  <a:lnTo>
+                    <a:pt x="4731966" y="2955607"/>
+                  </a:lnTo>
+                  <a:lnTo>
+                    <a:pt x="4809600" y="2961229"/>
+                  </a:lnTo>
+                  <a:lnTo>
+                    <a:pt x="4887234" y="2966805"/>
+                  </a:lnTo>
+                  <a:lnTo>
+                    <a:pt x="4964868" y="2972336"/>
+                  </a:lnTo>
+                  <a:lnTo>
+                    <a:pt x="5042502" y="2977822"/>
+                  </a:lnTo>
+                  <a:lnTo>
+                    <a:pt x="5120136" y="2983264"/>
+                  </a:lnTo>
+                  <a:lnTo>
+                    <a:pt x="5197770" y="2988663"/>
+                  </a:lnTo>
+                  <a:lnTo>
+                    <a:pt x="5275404" y="2994017"/>
+                  </a:lnTo>
+                  <a:lnTo>
+                    <a:pt x="5353038" y="2999329"/>
+                  </a:lnTo>
+                  <a:lnTo>
+                    <a:pt x="5430672" y="3004598"/>
+                  </a:lnTo>
+                  <a:lnTo>
+                    <a:pt x="5508306" y="3009824"/>
+                  </a:lnTo>
+                  <a:lnTo>
+                    <a:pt x="5585940" y="3015008"/>
+                  </a:lnTo>
+                  <a:lnTo>
+                    <a:pt x="5663574" y="3020150"/>
+                  </a:lnTo>
+                  <a:lnTo>
+                    <a:pt x="5741208" y="3025251"/>
+                  </a:lnTo>
+                  <a:lnTo>
+                    <a:pt x="5818842" y="3030311"/>
+                  </a:lnTo>
+                  <a:lnTo>
+                    <a:pt x="5896477" y="3035330"/>
+                  </a:lnTo>
+                  <a:lnTo>
+                    <a:pt x="5974111" y="3040308"/>
+                  </a:lnTo>
+                  <a:lnTo>
+                    <a:pt x="6051745" y="3045246"/>
+                  </a:lnTo>
+                  <a:lnTo>
+                    <a:pt x="6129379" y="3050145"/>
+                  </a:lnTo>
+                  <a:lnTo>
+                    <a:pt x="6207013" y="3055004"/>
+                  </a:lnTo>
+                  <a:lnTo>
+                    <a:pt x="6284647" y="3059823"/>
+                  </a:lnTo>
+                  <a:lnTo>
+                    <a:pt x="6362281" y="3064604"/>
+                  </a:lnTo>
+                  <a:lnTo>
+                    <a:pt x="6439915" y="3069346"/>
+                  </a:lnTo>
+                  <a:lnTo>
+                    <a:pt x="6517549" y="3074051"/>
+                  </a:lnTo>
+                  <a:lnTo>
+                    <a:pt x="6595183" y="3078717"/>
                   </a:lnTo>
                 </a:path>
               </a:pathLst>
@@ -3862,297 +3862,297 @@
           </p:nvSpPr>
           <p:spPr>
             <a:xfrm>
-              <a:off x="817517" y="4247500"/>
-              <a:ext cx="7370972" cy="1206344"/>
+              <a:off x="817517" y="4311144"/>
+              <a:ext cx="7370972" cy="1140793"/>
             </a:xfrm>
             <a:custGeom>
               <a:avLst/>
               <a:pathLst>
-                <a:path w="7370972" h="1206344">
+                <a:path w="7370972" h="1140793">
                   <a:moveTo>
-                    <a:pt x="7370972" y="1206344"/>
+                    <a:pt x="7370972" y="1140793"/>
                   </a:moveTo>
                   <a:lnTo>
-                    <a:pt x="7293338" y="1202147"/>
-                  </a:lnTo>
-                  <a:lnTo>
-                    <a:pt x="7215704" y="1197766"/>
-                  </a:lnTo>
-                  <a:lnTo>
-                    <a:pt x="7138070" y="1193192"/>
-                  </a:lnTo>
-                  <a:lnTo>
-                    <a:pt x="7060436" y="1188417"/>
-                  </a:lnTo>
-                  <a:lnTo>
-                    <a:pt x="6982802" y="1183432"/>
-                  </a:lnTo>
-                  <a:lnTo>
-                    <a:pt x="6905168" y="1178227"/>
-                  </a:lnTo>
-                  <a:lnTo>
-                    <a:pt x="6827534" y="1172793"/>
-                  </a:lnTo>
-                  <a:lnTo>
-                    <a:pt x="6749900" y="1167120"/>
-                  </a:lnTo>
-                  <a:lnTo>
-                    <a:pt x="6672266" y="1161198"/>
-                  </a:lnTo>
-                  <a:lnTo>
-                    <a:pt x="6594632" y="1155015"/>
-                  </a:lnTo>
-                  <a:lnTo>
-                    <a:pt x="6516998" y="1148559"/>
-                  </a:lnTo>
-                  <a:lnTo>
-                    <a:pt x="6439364" y="1141820"/>
-                  </a:lnTo>
-                  <a:lnTo>
-                    <a:pt x="6361730" y="1134784"/>
-                  </a:lnTo>
-                  <a:lnTo>
-                    <a:pt x="6284096" y="1127439"/>
-                  </a:lnTo>
-                  <a:lnTo>
-                    <a:pt x="6206462" y="1119770"/>
-                  </a:lnTo>
-                  <a:lnTo>
-                    <a:pt x="6128827" y="1111764"/>
-                  </a:lnTo>
-                  <a:lnTo>
-                    <a:pt x="6051193" y="1103405"/>
-                  </a:lnTo>
-                  <a:lnTo>
-                    <a:pt x="5973559" y="1094679"/>
-                  </a:lnTo>
-                  <a:lnTo>
-                    <a:pt x="5895925" y="1085569"/>
-                  </a:lnTo>
-                  <a:lnTo>
-                    <a:pt x="5818291" y="1076057"/>
-                  </a:lnTo>
-                  <a:lnTo>
-                    <a:pt x="5740657" y="1066127"/>
-                  </a:lnTo>
-                  <a:lnTo>
-                    <a:pt x="5663023" y="1055761"/>
-                  </a:lnTo>
-                  <a:lnTo>
-                    <a:pt x="5585389" y="1044938"/>
-                  </a:lnTo>
-                  <a:lnTo>
-                    <a:pt x="5507755" y="1033639"/>
-                  </a:lnTo>
-                  <a:lnTo>
-                    <a:pt x="5430121" y="1021842"/>
-                  </a:lnTo>
-                  <a:lnTo>
-                    <a:pt x="5352487" y="1009527"/>
-                  </a:lnTo>
-                  <a:lnTo>
-                    <a:pt x="5274853" y="996669"/>
-                  </a:lnTo>
-                  <a:lnTo>
-                    <a:pt x="5197219" y="983246"/>
-                  </a:lnTo>
-                  <a:lnTo>
-                    <a:pt x="5119585" y="969232"/>
-                  </a:lnTo>
-                  <a:lnTo>
-                    <a:pt x="5041951" y="954601"/>
-                  </a:lnTo>
-                  <a:lnTo>
-                    <a:pt x="4964317" y="939327"/>
-                  </a:lnTo>
-                  <a:lnTo>
-                    <a:pt x="4886683" y="923380"/>
-                  </a:lnTo>
-                  <a:lnTo>
-                    <a:pt x="4809049" y="906731"/>
-                  </a:lnTo>
-                  <a:lnTo>
-                    <a:pt x="4731415" y="889350"/>
-                  </a:lnTo>
-                  <a:lnTo>
-                    <a:pt x="4653781" y="871204"/>
-                  </a:lnTo>
-                  <a:lnTo>
-                    <a:pt x="4576147" y="852260"/>
-                  </a:lnTo>
-                  <a:lnTo>
-                    <a:pt x="4498513" y="832482"/>
-                  </a:lnTo>
-                  <a:lnTo>
-                    <a:pt x="4420879" y="811834"/>
-                  </a:lnTo>
-                  <a:lnTo>
-                    <a:pt x="4343244" y="790276"/>
-                  </a:lnTo>
-                  <a:lnTo>
-                    <a:pt x="4265610" y="767771"/>
-                  </a:lnTo>
-                  <a:lnTo>
-                    <a:pt x="4187976" y="744275"/>
-                  </a:lnTo>
-                  <a:lnTo>
-                    <a:pt x="4110342" y="719745"/>
-                  </a:lnTo>
-                  <a:lnTo>
-                    <a:pt x="4032708" y="694135"/>
-                  </a:lnTo>
-                  <a:lnTo>
-                    <a:pt x="3955074" y="667399"/>
-                  </a:lnTo>
-                  <a:lnTo>
-                    <a:pt x="3877440" y="639486"/>
-                  </a:lnTo>
-                  <a:lnTo>
-                    <a:pt x="3799806" y="610344"/>
-                  </a:lnTo>
-                  <a:lnTo>
-                    <a:pt x="3722172" y="579921"/>
-                  </a:lnTo>
-                  <a:lnTo>
-                    <a:pt x="3644538" y="548158"/>
-                  </a:lnTo>
-                  <a:lnTo>
-                    <a:pt x="3566904" y="514998"/>
-                  </a:lnTo>
-                  <a:lnTo>
-                    <a:pt x="3489270" y="480379"/>
-                  </a:lnTo>
-                  <a:lnTo>
-                    <a:pt x="3411636" y="444236"/>
-                  </a:lnTo>
-                  <a:lnTo>
-                    <a:pt x="3334002" y="426611"/>
-                  </a:lnTo>
-                  <a:lnTo>
-                    <a:pt x="3256368" y="418481"/>
-                  </a:lnTo>
-                  <a:lnTo>
-                    <a:pt x="3178734" y="410277"/>
-                  </a:lnTo>
-                  <a:lnTo>
-                    <a:pt x="3101100" y="401996"/>
-                  </a:lnTo>
-                  <a:lnTo>
-                    <a:pt x="3023466" y="393638"/>
-                  </a:lnTo>
-                  <a:lnTo>
-                    <a:pt x="2945832" y="385203"/>
-                  </a:lnTo>
-                  <a:lnTo>
-                    <a:pt x="2868198" y="376689"/>
-                  </a:lnTo>
-                  <a:lnTo>
-                    <a:pt x="2790564" y="368096"/>
-                  </a:lnTo>
-                  <a:lnTo>
-                    <a:pt x="2712930" y="359423"/>
-                  </a:lnTo>
-                  <a:lnTo>
-                    <a:pt x="2635295" y="350670"/>
-                  </a:lnTo>
-                  <a:lnTo>
-                    <a:pt x="2557661" y="341835"/>
-                  </a:lnTo>
-                  <a:lnTo>
-                    <a:pt x="2480027" y="332918"/>
-                  </a:lnTo>
-                  <a:lnTo>
-                    <a:pt x="2402393" y="323919"/>
-                  </a:lnTo>
-                  <a:lnTo>
-                    <a:pt x="2324759" y="314836"/>
-                  </a:lnTo>
-                  <a:lnTo>
-                    <a:pt x="2247125" y="305668"/>
-                  </a:lnTo>
-                  <a:lnTo>
-                    <a:pt x="2169491" y="296415"/>
-                  </a:lnTo>
-                  <a:lnTo>
-                    <a:pt x="2091857" y="287077"/>
-                  </a:lnTo>
-                  <a:lnTo>
-                    <a:pt x="2014223" y="277651"/>
-                  </a:lnTo>
-                  <a:lnTo>
-                    <a:pt x="1936589" y="268138"/>
-                  </a:lnTo>
-                  <a:lnTo>
-                    <a:pt x="1858955" y="258537"/>
-                  </a:lnTo>
-                  <a:lnTo>
-                    <a:pt x="1781321" y="248847"/>
-                  </a:lnTo>
-                  <a:lnTo>
-                    <a:pt x="1703687" y="239066"/>
-                  </a:lnTo>
-                  <a:lnTo>
-                    <a:pt x="1626053" y="229195"/>
-                  </a:lnTo>
-                  <a:lnTo>
-                    <a:pt x="1548419" y="219232"/>
-                  </a:lnTo>
-                  <a:lnTo>
-                    <a:pt x="1470785" y="209176"/>
-                  </a:lnTo>
-                  <a:lnTo>
-                    <a:pt x="1393151" y="199027"/>
-                  </a:lnTo>
-                  <a:lnTo>
-                    <a:pt x="1315517" y="188784"/>
-                  </a:lnTo>
-                  <a:lnTo>
-                    <a:pt x="1237883" y="178445"/>
-                  </a:lnTo>
-                  <a:lnTo>
-                    <a:pt x="1160249" y="168011"/>
-                  </a:lnTo>
-                  <a:lnTo>
-                    <a:pt x="1082615" y="157479"/>
-                  </a:lnTo>
-                  <a:lnTo>
-                    <a:pt x="1004981" y="146850"/>
-                  </a:lnTo>
-                  <a:lnTo>
-                    <a:pt x="927346" y="136122"/>
-                  </a:lnTo>
-                  <a:lnTo>
-                    <a:pt x="849712" y="125294"/>
-                  </a:lnTo>
-                  <a:lnTo>
-                    <a:pt x="772078" y="114366"/>
-                  </a:lnTo>
-                  <a:lnTo>
-                    <a:pt x="694444" y="103336"/>
-                  </a:lnTo>
-                  <a:lnTo>
-                    <a:pt x="616810" y="92204"/>
-                  </a:lnTo>
-                  <a:lnTo>
-                    <a:pt x="539176" y="80968"/>
-                  </a:lnTo>
-                  <a:lnTo>
-                    <a:pt x="461542" y="69628"/>
-                  </a:lnTo>
-                  <a:lnTo>
-                    <a:pt x="383908" y="58183"/>
-                  </a:lnTo>
-                  <a:lnTo>
-                    <a:pt x="306274" y="46631"/>
-                  </a:lnTo>
-                  <a:lnTo>
-                    <a:pt x="228640" y="34972"/>
-                  </a:lnTo>
-                  <a:lnTo>
-                    <a:pt x="151006" y="23205"/>
-                  </a:lnTo>
-                  <a:lnTo>
-                    <a:pt x="73372" y="11328"/>
+                    <a:pt x="7293338" y="1136552"/>
+                  </a:lnTo>
+                  <a:lnTo>
+                    <a:pt x="7215704" y="1132126"/>
+                  </a:lnTo>
+                  <a:lnTo>
+                    <a:pt x="7138070" y="1127507"/>
+                  </a:lnTo>
+                  <a:lnTo>
+                    <a:pt x="7060436" y="1122686"/>
+                  </a:lnTo>
+                  <a:lnTo>
+                    <a:pt x="6982802" y="1117656"/>
+                  </a:lnTo>
+                  <a:lnTo>
+                    <a:pt x="6905168" y="1112406"/>
+                  </a:lnTo>
+                  <a:lnTo>
+                    <a:pt x="6827534" y="1106927"/>
+                  </a:lnTo>
+                  <a:lnTo>
+                    <a:pt x="6749900" y="1101209"/>
+                  </a:lnTo>
+                  <a:lnTo>
+                    <a:pt x="6672266" y="1095242"/>
+                  </a:lnTo>
+                  <a:lnTo>
+                    <a:pt x="6594632" y="1089014"/>
+                  </a:lnTo>
+                  <a:lnTo>
+                    <a:pt x="6516998" y="1082515"/>
+                  </a:lnTo>
+                  <a:lnTo>
+                    <a:pt x="6439364" y="1075733"/>
+                  </a:lnTo>
+                  <a:lnTo>
+                    <a:pt x="6361730" y="1068655"/>
+                  </a:lnTo>
+                  <a:lnTo>
+                    <a:pt x="6284096" y="1061268"/>
+                  </a:lnTo>
+                  <a:lnTo>
+                    <a:pt x="6206462" y="1053559"/>
+                  </a:lnTo>
+                  <a:lnTo>
+                    <a:pt x="6128827" y="1045515"/>
+                  </a:lnTo>
+                  <a:lnTo>
+                    <a:pt x="6051193" y="1037119"/>
+                  </a:lnTo>
+                  <a:lnTo>
+                    <a:pt x="5973559" y="1028357"/>
+                  </a:lnTo>
+                  <a:lnTo>
+                    <a:pt x="5895925" y="1019213"/>
+                  </a:lnTo>
+                  <a:lnTo>
+                    <a:pt x="5818291" y="1009671"/>
+                  </a:lnTo>
+                  <a:lnTo>
+                    <a:pt x="5740657" y="999712"/>
+                  </a:lnTo>
+                  <a:lnTo>
+                    <a:pt x="5663023" y="989320"/>
+                  </a:lnTo>
+                  <a:lnTo>
+                    <a:pt x="5585389" y="978474"/>
+                  </a:lnTo>
+                  <a:lnTo>
+                    <a:pt x="5507755" y="967155"/>
+                  </a:lnTo>
+                  <a:lnTo>
+                    <a:pt x="5430121" y="955343"/>
+                  </a:lnTo>
+                  <a:lnTo>
+                    <a:pt x="5352487" y="943015"/>
+                  </a:lnTo>
+                  <a:lnTo>
+                    <a:pt x="5274853" y="930150"/>
+                  </a:lnTo>
+                  <a:lnTo>
+                    <a:pt x="5197219" y="916724"/>
+                  </a:lnTo>
+                  <a:lnTo>
+                    <a:pt x="5119585" y="902713"/>
+                  </a:lnTo>
+                  <a:lnTo>
+                    <a:pt x="5041951" y="888091"/>
+                  </a:lnTo>
+                  <a:lnTo>
+                    <a:pt x="4964317" y="872831"/>
+                  </a:lnTo>
+                  <a:lnTo>
+                    <a:pt x="4886683" y="856906"/>
+                  </a:lnTo>
+                  <a:lnTo>
+                    <a:pt x="4809049" y="840286"/>
+                  </a:lnTo>
+                  <a:lnTo>
+                    <a:pt x="4731415" y="822942"/>
+                  </a:lnTo>
+                  <a:lnTo>
+                    <a:pt x="4653781" y="804841"/>
+                  </a:lnTo>
+                  <a:lnTo>
+                    <a:pt x="4576147" y="785952"/>
+                  </a:lnTo>
+                  <a:lnTo>
+                    <a:pt x="4498513" y="766238"/>
+                  </a:lnTo>
+                  <a:lnTo>
+                    <a:pt x="4420879" y="745665"/>
+                  </a:lnTo>
+                  <a:lnTo>
+                    <a:pt x="4343244" y="724195"/>
+                  </a:lnTo>
+                  <a:lnTo>
+                    <a:pt x="4265610" y="701789"/>
+                  </a:lnTo>
+                  <a:lnTo>
+                    <a:pt x="4187976" y="678406"/>
+                  </a:lnTo>
+                  <a:lnTo>
+                    <a:pt x="4110342" y="654003"/>
+                  </a:lnTo>
+                  <a:lnTo>
+                    <a:pt x="4032708" y="628537"/>
+                  </a:lnTo>
+                  <a:lnTo>
+                    <a:pt x="3955074" y="601960"/>
+                  </a:lnTo>
+                  <a:lnTo>
+                    <a:pt x="3877440" y="574224"/>
+                  </a:lnTo>
+                  <a:lnTo>
+                    <a:pt x="3799806" y="545278"/>
+                  </a:lnTo>
+                  <a:lnTo>
+                    <a:pt x="3722172" y="515071"/>
+                  </a:lnTo>
+                  <a:lnTo>
+                    <a:pt x="3644538" y="483546"/>
+                  </a:lnTo>
+                  <a:lnTo>
+                    <a:pt x="3566904" y="450647"/>
+                  </a:lnTo>
+                  <a:lnTo>
+                    <a:pt x="3489270" y="416313"/>
+                  </a:lnTo>
+                  <a:lnTo>
+                    <a:pt x="3411636" y="380483"/>
+                  </a:lnTo>
+                  <a:lnTo>
+                    <a:pt x="3334002" y="363641"/>
+                  </a:lnTo>
+                  <a:lnTo>
+                    <a:pt x="3256368" y="356532"/>
+                  </a:lnTo>
+                  <a:lnTo>
+                    <a:pt x="3178734" y="349365"/>
+                  </a:lnTo>
+                  <a:lnTo>
+                    <a:pt x="3101100" y="342140"/>
+                  </a:lnTo>
+                  <a:lnTo>
+                    <a:pt x="3023466" y="334856"/>
+                  </a:lnTo>
+                  <a:lnTo>
+                    <a:pt x="2945832" y="327513"/>
+                  </a:lnTo>
+                  <a:lnTo>
+                    <a:pt x="2868198" y="320110"/>
+                  </a:lnTo>
+                  <a:lnTo>
+                    <a:pt x="2790564" y="312647"/>
+                  </a:lnTo>
+                  <a:lnTo>
+                    <a:pt x="2712930" y="305123"/>
+                  </a:lnTo>
+                  <a:lnTo>
+                    <a:pt x="2635295" y="297538"/>
+                  </a:lnTo>
+                  <a:lnTo>
+                    <a:pt x="2557661" y="289891"/>
+                  </a:lnTo>
+                  <a:lnTo>
+                    <a:pt x="2480027" y="282182"/>
+                  </a:lnTo>
+                  <a:lnTo>
+                    <a:pt x="2402393" y="274411"/>
+                  </a:lnTo>
+                  <a:lnTo>
+                    <a:pt x="2324759" y="266576"/>
+                  </a:lnTo>
+                  <a:lnTo>
+                    <a:pt x="2247125" y="258678"/>
+                  </a:lnTo>
+                  <a:lnTo>
+                    <a:pt x="2169491" y="250715"/>
+                  </a:lnTo>
+                  <a:lnTo>
+                    <a:pt x="2091857" y="242688"/>
+                  </a:lnTo>
+                  <a:lnTo>
+                    <a:pt x="2014223" y="234596"/>
+                  </a:lnTo>
+                  <a:lnTo>
+                    <a:pt x="1936589" y="226437"/>
+                  </a:lnTo>
+                  <a:lnTo>
+                    <a:pt x="1858955" y="218213"/>
+                  </a:lnTo>
+                  <a:lnTo>
+                    <a:pt x="1781321" y="209921"/>
+                  </a:lnTo>
+                  <a:lnTo>
+                    <a:pt x="1703687" y="201562"/>
+                  </a:lnTo>
+                  <a:lnTo>
+                    <a:pt x="1626053" y="193135"/>
+                  </a:lnTo>
+                  <a:lnTo>
+                    <a:pt x="1548419" y="184640"/>
+                  </a:lnTo>
+                  <a:lnTo>
+                    <a:pt x="1470785" y="176075"/>
+                  </a:lnTo>
+                  <a:lnTo>
+                    <a:pt x="1393151" y="167441"/>
+                  </a:lnTo>
+                  <a:lnTo>
+                    <a:pt x="1315517" y="158737"/>
+                  </a:lnTo>
+                  <a:lnTo>
+                    <a:pt x="1237883" y="149961"/>
+                  </a:lnTo>
+                  <a:lnTo>
+                    <a:pt x="1160249" y="141115"/>
+                  </a:lnTo>
+                  <a:lnTo>
+                    <a:pt x="1082615" y="132197"/>
+                  </a:lnTo>
+                  <a:lnTo>
+                    <a:pt x="1004981" y="123206"/>
+                  </a:lnTo>
+                  <a:lnTo>
+                    <a:pt x="927346" y="114142"/>
+                  </a:lnTo>
+                  <a:lnTo>
+                    <a:pt x="849712" y="105004"/>
+                  </a:lnTo>
+                  <a:lnTo>
+                    <a:pt x="772078" y="95792"/>
+                  </a:lnTo>
+                  <a:lnTo>
+                    <a:pt x="694444" y="86505"/>
+                  </a:lnTo>
+                  <a:lnTo>
+                    <a:pt x="616810" y="77143"/>
+                  </a:lnTo>
+                  <a:lnTo>
+                    <a:pt x="539176" y="67704"/>
+                  </a:lnTo>
+                  <a:lnTo>
+                    <a:pt x="461542" y="58189"/>
+                  </a:lnTo>
+                  <a:lnTo>
+                    <a:pt x="383908" y="48597"/>
+                  </a:lnTo>
+                  <a:lnTo>
+                    <a:pt x="306274" y="38926"/>
+                  </a:lnTo>
+                  <a:lnTo>
+                    <a:pt x="228640" y="29177"/>
+                  </a:lnTo>
+                  <a:lnTo>
+                    <a:pt x="151006" y="19348"/>
+                  </a:lnTo>
+                  <a:lnTo>
+                    <a:pt x="73372" y="9440"/>
                   </a:lnTo>
                   <a:lnTo>
                     <a:pt x="0" y="0"/>
@@ -4175,300 +4175,300 @@
           </p:nvSpPr>
           <p:spPr>
             <a:xfrm>
-              <a:off x="817517" y="2827630"/>
-              <a:ext cx="7370972" cy="2494429"/>
+              <a:off x="817517" y="2917220"/>
+              <a:ext cx="7370972" cy="2395713"/>
             </a:xfrm>
             <a:custGeom>
               <a:avLst/>
               <a:pathLst>
-                <a:path w="7370972" h="2494429">
+                <a:path w="7370972" h="2395713">
                   <a:moveTo>
                     <a:pt x="0" y="0"/>
                   </a:moveTo>
                   <a:lnTo>
-                    <a:pt x="73372" y="66499"/>
-                  </a:lnTo>
-                  <a:lnTo>
-                    <a:pt x="151006" y="135043"/>
-                  </a:lnTo>
-                  <a:lnTo>
-                    <a:pt x="228640" y="201819"/>
-                  </a:lnTo>
-                  <a:lnTo>
-                    <a:pt x="306274" y="266870"/>
-                  </a:lnTo>
-                  <a:lnTo>
-                    <a:pt x="383908" y="330242"/>
-                  </a:lnTo>
-                  <a:lnTo>
-                    <a:pt x="461542" y="391978"/>
-                  </a:lnTo>
-                  <a:lnTo>
-                    <a:pt x="539176" y="452120"/>
-                  </a:lnTo>
-                  <a:lnTo>
-                    <a:pt x="616810" y="510710"/>
-                  </a:lnTo>
-                  <a:lnTo>
-                    <a:pt x="694444" y="567787"/>
-                  </a:lnTo>
-                  <a:lnTo>
-                    <a:pt x="772078" y="623390"/>
-                  </a:lnTo>
-                  <a:lnTo>
-                    <a:pt x="849712" y="677558"/>
-                  </a:lnTo>
-                  <a:lnTo>
-                    <a:pt x="927346" y="730328"/>
-                  </a:lnTo>
-                  <a:lnTo>
-                    <a:pt x="1004981" y="781735"/>
-                  </a:lnTo>
-                  <a:lnTo>
-                    <a:pt x="1082615" y="831815"/>
-                  </a:lnTo>
-                  <a:lnTo>
-                    <a:pt x="1160249" y="880602"/>
-                  </a:lnTo>
-                  <a:lnTo>
-                    <a:pt x="1237883" y="928129"/>
-                  </a:lnTo>
-                  <a:lnTo>
-                    <a:pt x="1315517" y="974430"/>
-                  </a:lnTo>
-                  <a:lnTo>
-                    <a:pt x="1393151" y="1019535"/>
-                  </a:lnTo>
-                  <a:lnTo>
-                    <a:pt x="1470785" y="1063476"/>
-                  </a:lnTo>
-                  <a:lnTo>
-                    <a:pt x="1548419" y="1106283"/>
-                  </a:lnTo>
-                  <a:lnTo>
-                    <a:pt x="1626053" y="1147984"/>
-                  </a:lnTo>
-                  <a:lnTo>
-                    <a:pt x="1703687" y="1188609"/>
-                  </a:lnTo>
-                  <a:lnTo>
-                    <a:pt x="1781321" y="1228185"/>
-                  </a:lnTo>
-                  <a:lnTo>
-                    <a:pt x="1858955" y="1266739"/>
-                  </a:lnTo>
-                  <a:lnTo>
-                    <a:pt x="1936589" y="1304298"/>
-                  </a:lnTo>
-                  <a:lnTo>
-                    <a:pt x="2014223" y="1340887"/>
-                  </a:lnTo>
-                  <a:lnTo>
-                    <a:pt x="2091857" y="1376531"/>
-                  </a:lnTo>
-                  <a:lnTo>
-                    <a:pt x="2169491" y="1411256"/>
-                  </a:lnTo>
-                  <a:lnTo>
-                    <a:pt x="2247125" y="1445084"/>
-                  </a:lnTo>
-                  <a:lnTo>
-                    <a:pt x="2324759" y="1478038"/>
-                  </a:lnTo>
-                  <a:lnTo>
-                    <a:pt x="2402393" y="1510142"/>
-                  </a:lnTo>
-                  <a:lnTo>
-                    <a:pt x="2480027" y="1541417"/>
-                  </a:lnTo>
-                  <a:lnTo>
-                    <a:pt x="2557661" y="1571885"/>
-                  </a:lnTo>
-                  <a:lnTo>
-                    <a:pt x="2635295" y="1601566"/>
-                  </a:lnTo>
-                  <a:lnTo>
-                    <a:pt x="2712930" y="1630481"/>
-                  </a:lnTo>
-                  <a:lnTo>
-                    <a:pt x="2790564" y="1658649"/>
-                  </a:lnTo>
-                  <a:lnTo>
-                    <a:pt x="2868198" y="1686090"/>
-                  </a:lnTo>
-                  <a:lnTo>
-                    <a:pt x="2945832" y="1712823"/>
-                  </a:lnTo>
-                  <a:lnTo>
-                    <a:pt x="3023466" y="1738865"/>
-                  </a:lnTo>
-                  <a:lnTo>
-                    <a:pt x="3101100" y="1764236"/>
-                  </a:lnTo>
-                  <a:lnTo>
-                    <a:pt x="3178734" y="1788951"/>
-                  </a:lnTo>
-                  <a:lnTo>
-                    <a:pt x="3256368" y="1813028"/>
-                  </a:lnTo>
-                  <a:lnTo>
-                    <a:pt x="3334002" y="1836484"/>
-                  </a:lnTo>
-                  <a:lnTo>
-                    <a:pt x="3411636" y="1859334"/>
-                  </a:lnTo>
-                  <a:lnTo>
-                    <a:pt x="3489270" y="1881594"/>
-                  </a:lnTo>
-                  <a:lnTo>
-                    <a:pt x="3566904" y="1903279"/>
-                  </a:lnTo>
-                  <a:lnTo>
-                    <a:pt x="3644538" y="1924405"/>
-                  </a:lnTo>
-                  <a:lnTo>
-                    <a:pt x="3722172" y="1944985"/>
-                  </a:lnTo>
-                  <a:lnTo>
-                    <a:pt x="3799806" y="1965034"/>
-                  </a:lnTo>
-                  <a:lnTo>
-                    <a:pt x="3877440" y="1984565"/>
-                  </a:lnTo>
-                  <a:lnTo>
-                    <a:pt x="3955074" y="2003592"/>
-                  </a:lnTo>
-                  <a:lnTo>
-                    <a:pt x="4032708" y="2022128"/>
-                  </a:lnTo>
-                  <a:lnTo>
-                    <a:pt x="4110342" y="2040186"/>
-                  </a:lnTo>
-                  <a:lnTo>
-                    <a:pt x="4187976" y="2057777"/>
-                  </a:lnTo>
-                  <a:lnTo>
-                    <a:pt x="4265610" y="2074914"/>
-                  </a:lnTo>
-                  <a:lnTo>
-                    <a:pt x="4343244" y="2091608"/>
-                  </a:lnTo>
-                  <a:lnTo>
-                    <a:pt x="4420879" y="2107872"/>
-                  </a:lnTo>
-                  <a:lnTo>
-                    <a:pt x="4498513" y="2123716"/>
-                  </a:lnTo>
-                  <a:lnTo>
-                    <a:pt x="4576147" y="2139150"/>
-                  </a:lnTo>
-                  <a:lnTo>
-                    <a:pt x="4653781" y="2154187"/>
-                  </a:lnTo>
-                  <a:lnTo>
-                    <a:pt x="4731415" y="2168835"/>
-                  </a:lnTo>
-                  <a:lnTo>
-                    <a:pt x="4809049" y="2183105"/>
-                  </a:lnTo>
-                  <a:lnTo>
-                    <a:pt x="4886683" y="2197006"/>
-                  </a:lnTo>
-                  <a:lnTo>
-                    <a:pt x="4964317" y="2210549"/>
-                  </a:lnTo>
-                  <a:lnTo>
-                    <a:pt x="5041951" y="2223742"/>
-                  </a:lnTo>
-                  <a:lnTo>
-                    <a:pt x="5119585" y="2236594"/>
-                  </a:lnTo>
-                  <a:lnTo>
-                    <a:pt x="5197219" y="2249115"/>
-                  </a:lnTo>
-                  <a:lnTo>
-                    <a:pt x="5274853" y="2261312"/>
-                  </a:lnTo>
-                  <a:lnTo>
-                    <a:pt x="5352487" y="2273194"/>
-                  </a:lnTo>
-                  <a:lnTo>
-                    <a:pt x="5430121" y="2284770"/>
-                  </a:lnTo>
-                  <a:lnTo>
-                    <a:pt x="5507755" y="2296047"/>
-                  </a:lnTo>
-                  <a:lnTo>
-                    <a:pt x="5585389" y="2307033"/>
-                  </a:lnTo>
-                  <a:lnTo>
-                    <a:pt x="5663023" y="2317735"/>
-                  </a:lnTo>
-                  <a:lnTo>
-                    <a:pt x="5740657" y="2328160"/>
-                  </a:lnTo>
-                  <a:lnTo>
-                    <a:pt x="5818291" y="2338317"/>
-                  </a:lnTo>
-                  <a:lnTo>
-                    <a:pt x="5895925" y="2348212"/>
-                  </a:lnTo>
-                  <a:lnTo>
-                    <a:pt x="5973559" y="2357851"/>
-                  </a:lnTo>
-                  <a:lnTo>
-                    <a:pt x="6051193" y="2367241"/>
-                  </a:lnTo>
-                  <a:lnTo>
-                    <a:pt x="6128827" y="2376388"/>
-                  </a:lnTo>
-                  <a:lnTo>
-                    <a:pt x="6206462" y="2385300"/>
-                  </a:lnTo>
-                  <a:lnTo>
-                    <a:pt x="6284096" y="2393982"/>
-                  </a:lnTo>
-                  <a:lnTo>
-                    <a:pt x="6361730" y="2402439"/>
-                  </a:lnTo>
-                  <a:lnTo>
-                    <a:pt x="6439364" y="2410678"/>
-                  </a:lnTo>
-                  <a:lnTo>
-                    <a:pt x="6516998" y="2418704"/>
-                  </a:lnTo>
-                  <a:lnTo>
-                    <a:pt x="6594632" y="2426523"/>
-                  </a:lnTo>
-                  <a:lnTo>
-                    <a:pt x="6672266" y="2434141"/>
-                  </a:lnTo>
-                  <a:lnTo>
-                    <a:pt x="6749900" y="2441561"/>
-                  </a:lnTo>
-                  <a:lnTo>
-                    <a:pt x="6827534" y="2448790"/>
-                  </a:lnTo>
-                  <a:lnTo>
-                    <a:pt x="6905168" y="2455833"/>
-                  </a:lnTo>
-                  <a:lnTo>
-                    <a:pt x="6982802" y="2462693"/>
-                  </a:lnTo>
-                  <a:lnTo>
-                    <a:pt x="7060436" y="2469377"/>
-                  </a:lnTo>
-                  <a:lnTo>
-                    <a:pt x="7138070" y="2475888"/>
-                  </a:lnTo>
-                  <a:lnTo>
-                    <a:pt x="7215704" y="2482230"/>
-                  </a:lnTo>
-                  <a:lnTo>
-                    <a:pt x="7293338" y="2488410"/>
-                  </a:lnTo>
-                  <a:lnTo>
-                    <a:pt x="7370972" y="2494429"/>
+                    <a:pt x="73372" y="62444"/>
+                  </a:lnTo>
+                  <a:lnTo>
+                    <a:pt x="151006" y="126859"/>
+                  </a:lnTo>
+                  <a:lnTo>
+                    <a:pt x="228640" y="189659"/>
+                  </a:lnTo>
+                  <a:lnTo>
+                    <a:pt x="306274" y="250885"/>
+                  </a:lnTo>
+                  <a:lnTo>
+                    <a:pt x="383908" y="310576"/>
+                  </a:lnTo>
+                  <a:lnTo>
+                    <a:pt x="461542" y="368771"/>
+                  </a:lnTo>
+                  <a:lnTo>
+                    <a:pt x="539176" y="425507"/>
+                  </a:lnTo>
+                  <a:lnTo>
+                    <a:pt x="616810" y="480820"/>
+                  </a:lnTo>
+                  <a:lnTo>
+                    <a:pt x="694444" y="534747"/>
+                  </a:lnTo>
+                  <a:lnTo>
+                    <a:pt x="772078" y="587322"/>
+                  </a:lnTo>
+                  <a:lnTo>
+                    <a:pt x="849712" y="638579"/>
+                  </a:lnTo>
+                  <a:lnTo>
+                    <a:pt x="927346" y="688551"/>
+                  </a:lnTo>
+                  <a:lnTo>
+                    <a:pt x="1004981" y="737270"/>
+                  </a:lnTo>
+                  <a:lnTo>
+                    <a:pt x="1082615" y="784768"/>
+                  </a:lnTo>
+                  <a:lnTo>
+                    <a:pt x="1160249" y="831076"/>
+                  </a:lnTo>
+                  <a:lnTo>
+                    <a:pt x="1237883" y="876222"/>
+                  </a:lnTo>
+                  <a:lnTo>
+                    <a:pt x="1315517" y="920237"/>
+                  </a:lnTo>
+                  <a:lnTo>
+                    <a:pt x="1393151" y="963148"/>
+                  </a:lnTo>
+                  <a:lnTo>
+                    <a:pt x="1470785" y="1004984"/>
+                  </a:lnTo>
+                  <a:lnTo>
+                    <a:pt x="1548419" y="1045770"/>
+                  </a:lnTo>
+                  <a:lnTo>
+                    <a:pt x="1626053" y="1085535"/>
+                  </a:lnTo>
+                  <a:lnTo>
+                    <a:pt x="1703687" y="1124302"/>
+                  </a:lnTo>
+                  <a:lnTo>
+                    <a:pt x="1781321" y="1162098"/>
+                  </a:lnTo>
+                  <a:lnTo>
+                    <a:pt x="1858955" y="1198946"/>
+                  </a:lnTo>
+                  <a:lnTo>
+                    <a:pt x="1936589" y="1234870"/>
+                  </a:lnTo>
+                  <a:lnTo>
+                    <a:pt x="2014223" y="1269894"/>
+                  </a:lnTo>
+                  <a:lnTo>
+                    <a:pt x="2091857" y="1304040"/>
+                  </a:lnTo>
+                  <a:lnTo>
+                    <a:pt x="2169491" y="1337330"/>
+                  </a:lnTo>
+                  <a:lnTo>
+                    <a:pt x="2247125" y="1369785"/>
+                  </a:lnTo>
+                  <a:lnTo>
+                    <a:pt x="2324759" y="1401427"/>
+                  </a:lnTo>
+                  <a:lnTo>
+                    <a:pt x="2402393" y="1432275"/>
+                  </a:lnTo>
+                  <a:lnTo>
+                    <a:pt x="2480027" y="1462351"/>
+                  </a:lnTo>
+                  <a:lnTo>
+                    <a:pt x="2557661" y="1491672"/>
+                  </a:lnTo>
+                  <a:lnTo>
+                    <a:pt x="2635295" y="1520258"/>
+                  </a:lnTo>
+                  <a:lnTo>
+                    <a:pt x="2712930" y="1548127"/>
+                  </a:lnTo>
+                  <a:lnTo>
+                    <a:pt x="2790564" y="1575298"/>
+                  </a:lnTo>
+                  <a:lnTo>
+                    <a:pt x="2868198" y="1601788"/>
+                  </a:lnTo>
+                  <a:lnTo>
+                    <a:pt x="2945832" y="1627614"/>
+                  </a:lnTo>
+                  <a:lnTo>
+                    <a:pt x="3023466" y="1652792"/>
+                  </a:lnTo>
+                  <a:lnTo>
+                    <a:pt x="3101100" y="1677339"/>
+                  </a:lnTo>
+                  <a:lnTo>
+                    <a:pt x="3178734" y="1701271"/>
+                  </a:lnTo>
+                  <a:lnTo>
+                    <a:pt x="3256368" y="1724603"/>
+                  </a:lnTo>
+                  <a:lnTo>
+                    <a:pt x="3334002" y="1747350"/>
+                  </a:lnTo>
+                  <a:lnTo>
+                    <a:pt x="3411636" y="1769526"/>
+                  </a:lnTo>
+                  <a:lnTo>
+                    <a:pt x="3489270" y="1791147"/>
+                  </a:lnTo>
+                  <a:lnTo>
+                    <a:pt x="3566904" y="1812226"/>
+                  </a:lnTo>
+                  <a:lnTo>
+                    <a:pt x="3644538" y="1832776"/>
+                  </a:lnTo>
+                  <a:lnTo>
+                    <a:pt x="3722172" y="1852811"/>
+                  </a:lnTo>
+                  <a:lnTo>
+                    <a:pt x="3799806" y="1872344"/>
+                  </a:lnTo>
+                  <a:lnTo>
+                    <a:pt x="3877440" y="1891387"/>
+                  </a:lnTo>
+                  <a:lnTo>
+                    <a:pt x="3955074" y="1909953"/>
+                  </a:lnTo>
+                  <a:lnTo>
+                    <a:pt x="4032708" y="1928054"/>
+                  </a:lnTo>
+                  <a:lnTo>
+                    <a:pt x="4110342" y="1945700"/>
+                  </a:lnTo>
+                  <a:lnTo>
+                    <a:pt x="4187976" y="1962904"/>
+                  </a:lnTo>
+                  <a:lnTo>
+                    <a:pt x="4265610" y="1979677"/>
+                  </a:lnTo>
+                  <a:lnTo>
+                    <a:pt x="4343244" y="1996030"/>
+                  </a:lnTo>
+                  <a:lnTo>
+                    <a:pt x="4420879" y="2011973"/>
+                  </a:lnTo>
+                  <a:lnTo>
+                    <a:pt x="4498513" y="2027516"/>
+                  </a:lnTo>
+                  <a:lnTo>
+                    <a:pt x="4576147" y="2042669"/>
+                  </a:lnTo>
+                  <a:lnTo>
+                    <a:pt x="4653781" y="2057442"/>
+                  </a:lnTo>
+                  <a:lnTo>
+                    <a:pt x="4731415" y="2071845"/>
+                  </a:lnTo>
+                  <a:lnTo>
+                    <a:pt x="4809049" y="2085887"/>
+                  </a:lnTo>
+                  <a:lnTo>
+                    <a:pt x="4886683" y="2099577"/>
+                  </a:lnTo>
+                  <a:lnTo>
+                    <a:pt x="4964317" y="2112924"/>
+                  </a:lnTo>
+                  <a:lnTo>
+                    <a:pt x="5041951" y="2125936"/>
+                  </a:lnTo>
+                  <a:lnTo>
+                    <a:pt x="5119585" y="2138622"/>
+                  </a:lnTo>
+                  <a:lnTo>
+                    <a:pt x="5197219" y="2150990"/>
+                  </a:lnTo>
+                  <a:lnTo>
+                    <a:pt x="5274853" y="2163048"/>
+                  </a:lnTo>
+                  <a:lnTo>
+                    <a:pt x="5352487" y="2174804"/>
+                  </a:lnTo>
+                  <a:lnTo>
+                    <a:pt x="5430121" y="2186265"/>
+                  </a:lnTo>
+                  <a:lnTo>
+                    <a:pt x="5507755" y="2197438"/>
+                  </a:lnTo>
+                  <a:lnTo>
+                    <a:pt x="5585389" y="2208332"/>
+                  </a:lnTo>
+                  <a:lnTo>
+                    <a:pt x="5663023" y="2218952"/>
+                  </a:lnTo>
+                  <a:lnTo>
+                    <a:pt x="5740657" y="2229307"/>
+                  </a:lnTo>
+                  <a:lnTo>
+                    <a:pt x="5818291" y="2239401"/>
+                  </a:lnTo>
+                  <a:lnTo>
+                    <a:pt x="5895925" y="2249243"/>
+                  </a:lnTo>
+                  <a:lnTo>
+                    <a:pt x="5973559" y="2258838"/>
+                  </a:lnTo>
+                  <a:lnTo>
+                    <a:pt x="6051193" y="2268192"/>
+                  </a:lnTo>
+                  <a:lnTo>
+                    <a:pt x="6128827" y="2277312"/>
+                  </a:lnTo>
+                  <a:lnTo>
+                    <a:pt x="6206462" y="2286203"/>
+                  </a:lnTo>
+                  <a:lnTo>
+                    <a:pt x="6284096" y="2294871"/>
+                  </a:lnTo>
+                  <a:lnTo>
+                    <a:pt x="6361730" y="2303322"/>
+                  </a:lnTo>
+                  <a:lnTo>
+                    <a:pt x="6439364" y="2311562"/>
+                  </a:lnTo>
+                  <a:lnTo>
+                    <a:pt x="6516998" y="2319594"/>
+                  </a:lnTo>
+                  <a:lnTo>
+                    <a:pt x="6594632" y="2327426"/>
+                  </a:lnTo>
+                  <a:lnTo>
+                    <a:pt x="6672266" y="2335060"/>
+                  </a:lnTo>
+                  <a:lnTo>
+                    <a:pt x="6749900" y="2342504"/>
+                  </a:lnTo>
+                  <a:lnTo>
+                    <a:pt x="6827534" y="2349761"/>
+                  </a:lnTo>
+                  <a:lnTo>
+                    <a:pt x="6905168" y="2356836"/>
+                  </a:lnTo>
+                  <a:lnTo>
+                    <a:pt x="6982802" y="2363734"/>
+                  </a:lnTo>
+                  <a:lnTo>
+                    <a:pt x="7060436" y="2370458"/>
+                  </a:lnTo>
+                  <a:lnTo>
+                    <a:pt x="7138070" y="2377015"/>
+                  </a:lnTo>
+                  <a:lnTo>
+                    <a:pt x="7215704" y="2383406"/>
+                  </a:lnTo>
+                  <a:lnTo>
+                    <a:pt x="7293338" y="2389638"/>
+                  </a:lnTo>
+                  <a:lnTo>
+                    <a:pt x="7370972" y="2395713"/>
                   </a:lnTo>
                 </a:path>
               </a:pathLst>

--- a/docs/plots/carbo/jx_carbo_linsubhr_ratio_grade2.pptx
+++ b/docs/plots/carbo/jx_carbo_linsubhr_ratio_grade2.pptx
@@ -3003,557 +3003,557 @@
           <p:spPr>
             <a:xfrm>
               <a:off x="817517" y="1896563"/>
-              <a:ext cx="7370972" cy="3555375"/>
+              <a:ext cx="7370972" cy="3557280"/>
             </a:xfrm>
             <a:custGeom>
               <a:avLst/>
               <a:pathLst>
-                <a:path w="7370972" h="3555375">
+                <a:path w="7370972" h="3557280">
                   <a:moveTo>
-                    <a:pt x="775789" y="0"/>
+                    <a:pt x="799462" y="0"/>
                   </a:moveTo>
                   <a:lnTo>
-                    <a:pt x="849712" y="145608"/>
-                  </a:lnTo>
-                  <a:lnTo>
-                    <a:pt x="927346" y="292137"/>
-                  </a:lnTo>
-                  <a:lnTo>
-                    <a:pt x="1004981" y="432543"/>
-                  </a:lnTo>
-                  <a:lnTo>
-                    <a:pt x="1082615" y="567082"/>
-                  </a:lnTo>
-                  <a:lnTo>
-                    <a:pt x="1160249" y="696001"/>
-                  </a:lnTo>
-                  <a:lnTo>
-                    <a:pt x="1237883" y="819533"/>
-                  </a:lnTo>
-                  <a:lnTo>
-                    <a:pt x="1315517" y="937904"/>
-                  </a:lnTo>
-                  <a:lnTo>
-                    <a:pt x="1393151" y="1051329"/>
-                  </a:lnTo>
-                  <a:lnTo>
-                    <a:pt x="1470785" y="1160015"/>
-                  </a:lnTo>
-                  <a:lnTo>
-                    <a:pt x="1548419" y="1264160"/>
-                  </a:lnTo>
-                  <a:lnTo>
-                    <a:pt x="1626053" y="1363954"/>
-                  </a:lnTo>
-                  <a:lnTo>
-                    <a:pt x="1703687" y="1459578"/>
-                  </a:lnTo>
-                  <a:lnTo>
-                    <a:pt x="1781321" y="1551207"/>
-                  </a:lnTo>
-                  <a:lnTo>
-                    <a:pt x="1858955" y="1639008"/>
-                  </a:lnTo>
-                  <a:lnTo>
-                    <a:pt x="1936589" y="1723140"/>
-                  </a:lnTo>
-                  <a:lnTo>
-                    <a:pt x="2014223" y="1803757"/>
-                  </a:lnTo>
-                  <a:lnTo>
-                    <a:pt x="2091857" y="1881006"/>
-                  </a:lnTo>
-                  <a:lnTo>
-                    <a:pt x="2169491" y="1955027"/>
-                  </a:lnTo>
-                  <a:lnTo>
-                    <a:pt x="2247125" y="2025955"/>
-                  </a:lnTo>
-                  <a:lnTo>
-                    <a:pt x="2324759" y="2093920"/>
-                  </a:lnTo>
-                  <a:lnTo>
-                    <a:pt x="2402393" y="2159046"/>
-                  </a:lnTo>
-                  <a:lnTo>
-                    <a:pt x="2480027" y="2221450"/>
-                  </a:lnTo>
-                  <a:lnTo>
-                    <a:pt x="2557661" y="2281247"/>
-                  </a:lnTo>
-                  <a:lnTo>
-                    <a:pt x="2635295" y="2338546"/>
-                  </a:lnTo>
-                  <a:lnTo>
-                    <a:pt x="2712930" y="2393450"/>
-                  </a:lnTo>
-                  <a:lnTo>
-                    <a:pt x="2790564" y="2446061"/>
-                  </a:lnTo>
-                  <a:lnTo>
-                    <a:pt x="2868198" y="2496473"/>
-                  </a:lnTo>
-                  <a:lnTo>
-                    <a:pt x="2945832" y="2544780"/>
-                  </a:lnTo>
-                  <a:lnTo>
-                    <a:pt x="3023466" y="2591068"/>
-                  </a:lnTo>
-                  <a:lnTo>
-                    <a:pt x="3101100" y="2635422"/>
-                  </a:lnTo>
-                  <a:lnTo>
-                    <a:pt x="3178734" y="2677922"/>
-                  </a:lnTo>
-                  <a:lnTo>
-                    <a:pt x="3256368" y="2718647"/>
-                  </a:lnTo>
-                  <a:lnTo>
-                    <a:pt x="3334002" y="2757671"/>
-                  </a:lnTo>
-                  <a:lnTo>
-                    <a:pt x="3411636" y="2785274"/>
-                  </a:lnTo>
-                  <a:lnTo>
-                    <a:pt x="3489270" y="2792269"/>
-                  </a:lnTo>
-                  <a:lnTo>
-                    <a:pt x="3566904" y="2799208"/>
-                  </a:lnTo>
-                  <a:lnTo>
-                    <a:pt x="3644538" y="2806091"/>
-                  </a:lnTo>
-                  <a:lnTo>
-                    <a:pt x="3722172" y="2812918"/>
-                  </a:lnTo>
-                  <a:lnTo>
-                    <a:pt x="3799806" y="2819690"/>
-                  </a:lnTo>
-                  <a:lnTo>
-                    <a:pt x="3877440" y="2826407"/>
-                  </a:lnTo>
-                  <a:lnTo>
-                    <a:pt x="3955074" y="2833071"/>
-                  </a:lnTo>
-                  <a:lnTo>
-                    <a:pt x="4032708" y="2839680"/>
-                  </a:lnTo>
-                  <a:lnTo>
-                    <a:pt x="4110342" y="2846236"/>
-                  </a:lnTo>
-                  <a:lnTo>
-                    <a:pt x="4187976" y="2852740"/>
-                  </a:lnTo>
-                  <a:lnTo>
-                    <a:pt x="4265610" y="2859191"/>
-                  </a:lnTo>
-                  <a:lnTo>
-                    <a:pt x="4343244" y="2865590"/>
-                  </a:lnTo>
-                  <a:lnTo>
-                    <a:pt x="4420879" y="2871937"/>
-                  </a:lnTo>
-                  <a:lnTo>
-                    <a:pt x="4498513" y="2878233"/>
-                  </a:lnTo>
-                  <a:lnTo>
-                    <a:pt x="4576147" y="2884478"/>
-                  </a:lnTo>
-                  <a:lnTo>
-                    <a:pt x="4653781" y="2890673"/>
-                  </a:lnTo>
-                  <a:lnTo>
-                    <a:pt x="4731415" y="2896818"/>
-                  </a:lnTo>
-                  <a:lnTo>
-                    <a:pt x="4809049" y="2902914"/>
-                  </a:lnTo>
-                  <a:lnTo>
-                    <a:pt x="4886683" y="2908960"/>
-                  </a:lnTo>
-                  <a:lnTo>
-                    <a:pt x="4964317" y="2914957"/>
-                  </a:lnTo>
-                  <a:lnTo>
-                    <a:pt x="5041951" y="2920907"/>
-                  </a:lnTo>
-                  <a:lnTo>
-                    <a:pt x="5119585" y="2926808"/>
-                  </a:lnTo>
-                  <a:lnTo>
-                    <a:pt x="5197219" y="2932661"/>
-                  </a:lnTo>
-                  <a:lnTo>
-                    <a:pt x="5274853" y="2938468"/>
-                  </a:lnTo>
-                  <a:lnTo>
-                    <a:pt x="5352487" y="2944227"/>
-                  </a:lnTo>
-                  <a:lnTo>
-                    <a:pt x="5430121" y="2949940"/>
-                  </a:lnTo>
-                  <a:lnTo>
-                    <a:pt x="5507755" y="2955607"/>
-                  </a:lnTo>
-                  <a:lnTo>
-                    <a:pt x="5585389" y="2961229"/>
-                  </a:lnTo>
-                  <a:lnTo>
-                    <a:pt x="5663023" y="2966805"/>
-                  </a:lnTo>
-                  <a:lnTo>
-                    <a:pt x="5740657" y="2972336"/>
-                  </a:lnTo>
-                  <a:lnTo>
-                    <a:pt x="5818291" y="2977822"/>
-                  </a:lnTo>
-                  <a:lnTo>
-                    <a:pt x="5895925" y="2983264"/>
-                  </a:lnTo>
-                  <a:lnTo>
-                    <a:pt x="5973559" y="2988663"/>
-                  </a:lnTo>
-                  <a:lnTo>
-                    <a:pt x="6051193" y="2994017"/>
-                  </a:lnTo>
-                  <a:lnTo>
-                    <a:pt x="6128827" y="2999329"/>
-                  </a:lnTo>
-                  <a:lnTo>
-                    <a:pt x="6206462" y="3004598"/>
-                  </a:lnTo>
-                  <a:lnTo>
-                    <a:pt x="6284096" y="3009824"/>
-                  </a:lnTo>
-                  <a:lnTo>
-                    <a:pt x="6361730" y="3015008"/>
-                  </a:lnTo>
-                  <a:lnTo>
-                    <a:pt x="6439364" y="3020150"/>
-                  </a:lnTo>
-                  <a:lnTo>
-                    <a:pt x="6516998" y="3025251"/>
-                  </a:lnTo>
-                  <a:lnTo>
-                    <a:pt x="6594632" y="3030311"/>
-                  </a:lnTo>
-                  <a:lnTo>
-                    <a:pt x="6672266" y="3035330"/>
-                  </a:lnTo>
-                  <a:lnTo>
-                    <a:pt x="6749900" y="3040308"/>
-                  </a:lnTo>
-                  <a:lnTo>
-                    <a:pt x="6827534" y="3045246"/>
-                  </a:lnTo>
-                  <a:lnTo>
-                    <a:pt x="6905168" y="3050145"/>
-                  </a:lnTo>
-                  <a:lnTo>
-                    <a:pt x="6982802" y="3055004"/>
-                  </a:lnTo>
-                  <a:lnTo>
-                    <a:pt x="7060436" y="3059823"/>
-                  </a:lnTo>
-                  <a:lnTo>
-                    <a:pt x="7138070" y="3064604"/>
-                  </a:lnTo>
-                  <a:lnTo>
-                    <a:pt x="7215704" y="3069346"/>
-                  </a:lnTo>
-                  <a:lnTo>
-                    <a:pt x="7293338" y="3074051"/>
-                  </a:lnTo>
-                  <a:lnTo>
-                    <a:pt x="7370972" y="3078717"/>
-                  </a:lnTo>
-                  <a:lnTo>
-                    <a:pt x="7370972" y="3555375"/>
-                  </a:lnTo>
-                  <a:lnTo>
-                    <a:pt x="7293338" y="3551133"/>
-                  </a:lnTo>
-                  <a:lnTo>
-                    <a:pt x="7215704" y="3546707"/>
-                  </a:lnTo>
-                  <a:lnTo>
-                    <a:pt x="7138070" y="3542088"/>
-                  </a:lnTo>
-                  <a:lnTo>
-                    <a:pt x="7060436" y="3537268"/>
-                  </a:lnTo>
-                  <a:lnTo>
-                    <a:pt x="6982802" y="3532237"/>
-                  </a:lnTo>
-                  <a:lnTo>
-                    <a:pt x="6905168" y="3526987"/>
-                  </a:lnTo>
-                  <a:lnTo>
-                    <a:pt x="6827534" y="3521508"/>
-                  </a:lnTo>
-                  <a:lnTo>
-                    <a:pt x="6749900" y="3515790"/>
-                  </a:lnTo>
-                  <a:lnTo>
-                    <a:pt x="6672266" y="3509823"/>
-                  </a:lnTo>
-                  <a:lnTo>
-                    <a:pt x="6594632" y="3503595"/>
-                  </a:lnTo>
-                  <a:lnTo>
-                    <a:pt x="6516998" y="3497096"/>
-                  </a:lnTo>
-                  <a:lnTo>
-                    <a:pt x="6439364" y="3490314"/>
-                  </a:lnTo>
-                  <a:lnTo>
-                    <a:pt x="6361730" y="3483236"/>
-                  </a:lnTo>
-                  <a:lnTo>
-                    <a:pt x="6284096" y="3475849"/>
-                  </a:lnTo>
-                  <a:lnTo>
-                    <a:pt x="6206462" y="3468141"/>
-                  </a:lnTo>
-                  <a:lnTo>
-                    <a:pt x="6128827" y="3460096"/>
-                  </a:lnTo>
-                  <a:lnTo>
-                    <a:pt x="6051193" y="3451700"/>
-                  </a:lnTo>
-                  <a:lnTo>
-                    <a:pt x="5973559" y="3442938"/>
-                  </a:lnTo>
-                  <a:lnTo>
-                    <a:pt x="5895925" y="3433795"/>
-                  </a:lnTo>
-                  <a:lnTo>
-                    <a:pt x="5818291" y="3424252"/>
-                  </a:lnTo>
-                  <a:lnTo>
-                    <a:pt x="5740657" y="3414294"/>
-                  </a:lnTo>
-                  <a:lnTo>
-                    <a:pt x="5663023" y="3403901"/>
-                  </a:lnTo>
-                  <a:lnTo>
-                    <a:pt x="5585389" y="3393055"/>
-                  </a:lnTo>
-                  <a:lnTo>
-                    <a:pt x="5507755" y="3381736"/>
-                  </a:lnTo>
-                  <a:lnTo>
-                    <a:pt x="5430121" y="3369924"/>
-                  </a:lnTo>
-                  <a:lnTo>
-                    <a:pt x="5352487" y="3357596"/>
-                  </a:lnTo>
-                  <a:lnTo>
-                    <a:pt x="5274853" y="3344731"/>
-                  </a:lnTo>
-                  <a:lnTo>
-                    <a:pt x="5197219" y="3331305"/>
-                  </a:lnTo>
-                  <a:lnTo>
-                    <a:pt x="5119585" y="3317294"/>
-                  </a:lnTo>
-                  <a:lnTo>
-                    <a:pt x="5041951" y="3302672"/>
-                  </a:lnTo>
-                  <a:lnTo>
-                    <a:pt x="4964317" y="3287412"/>
-                  </a:lnTo>
-                  <a:lnTo>
-                    <a:pt x="4886683" y="3271487"/>
-                  </a:lnTo>
-                  <a:lnTo>
-                    <a:pt x="4809049" y="3254867"/>
-                  </a:lnTo>
-                  <a:lnTo>
-                    <a:pt x="4731415" y="3237523"/>
-                  </a:lnTo>
-                  <a:lnTo>
-                    <a:pt x="4653781" y="3219423"/>
-                  </a:lnTo>
-                  <a:lnTo>
-                    <a:pt x="4576147" y="3200533"/>
-                  </a:lnTo>
-                  <a:lnTo>
-                    <a:pt x="4498513" y="3180820"/>
-                  </a:lnTo>
-                  <a:lnTo>
-                    <a:pt x="4420879" y="3160247"/>
-                  </a:lnTo>
-                  <a:lnTo>
-                    <a:pt x="4343244" y="3138777"/>
-                  </a:lnTo>
-                  <a:lnTo>
-                    <a:pt x="4265610" y="3116370"/>
-                  </a:lnTo>
-                  <a:lnTo>
-                    <a:pt x="4187976" y="3092987"/>
-                  </a:lnTo>
-                  <a:lnTo>
-                    <a:pt x="4110342" y="3068585"/>
-                  </a:lnTo>
-                  <a:lnTo>
-                    <a:pt x="4032708" y="3043118"/>
-                  </a:lnTo>
-                  <a:lnTo>
-                    <a:pt x="3955074" y="3016541"/>
-                  </a:lnTo>
-                  <a:lnTo>
-                    <a:pt x="3877440" y="2988805"/>
-                  </a:lnTo>
-                  <a:lnTo>
-                    <a:pt x="3799806" y="2959859"/>
-                  </a:lnTo>
-                  <a:lnTo>
-                    <a:pt x="3722172" y="2929652"/>
-                  </a:lnTo>
-                  <a:lnTo>
-                    <a:pt x="3644538" y="2898127"/>
-                  </a:lnTo>
-                  <a:lnTo>
-                    <a:pt x="3566904" y="2865228"/>
-                  </a:lnTo>
-                  <a:lnTo>
-                    <a:pt x="3489270" y="2830895"/>
-                  </a:lnTo>
-                  <a:lnTo>
-                    <a:pt x="3411636" y="2795064"/>
-                  </a:lnTo>
-                  <a:lnTo>
-                    <a:pt x="3334002" y="2778223"/>
-                  </a:lnTo>
-                  <a:lnTo>
-                    <a:pt x="3256368" y="2771113"/>
-                  </a:lnTo>
-                  <a:lnTo>
-                    <a:pt x="3178734" y="2763946"/>
-                  </a:lnTo>
-                  <a:lnTo>
-                    <a:pt x="3101100" y="2756721"/>
-                  </a:lnTo>
-                  <a:lnTo>
-                    <a:pt x="3023466" y="2749437"/>
-                  </a:lnTo>
-                  <a:lnTo>
-                    <a:pt x="2945832" y="2742094"/>
-                  </a:lnTo>
-                  <a:lnTo>
-                    <a:pt x="2868198" y="2734691"/>
-                  </a:lnTo>
-                  <a:lnTo>
-                    <a:pt x="2790564" y="2727228"/>
-                  </a:lnTo>
-                  <a:lnTo>
-                    <a:pt x="2712930" y="2719704"/>
-                  </a:lnTo>
-                  <a:lnTo>
-                    <a:pt x="2635295" y="2712119"/>
-                  </a:lnTo>
-                  <a:lnTo>
-                    <a:pt x="2557661" y="2704472"/>
-                  </a:lnTo>
-                  <a:lnTo>
-                    <a:pt x="2480027" y="2696764"/>
-                  </a:lnTo>
-                  <a:lnTo>
-                    <a:pt x="2402393" y="2688992"/>
-                  </a:lnTo>
-                  <a:lnTo>
-                    <a:pt x="2324759" y="2681158"/>
-                  </a:lnTo>
-                  <a:lnTo>
-                    <a:pt x="2247125" y="2673259"/>
-                  </a:lnTo>
-                  <a:lnTo>
-                    <a:pt x="2169491" y="2665297"/>
-                  </a:lnTo>
-                  <a:lnTo>
-                    <a:pt x="2091857" y="2657269"/>
-                  </a:lnTo>
-                  <a:lnTo>
-                    <a:pt x="2014223" y="2649177"/>
-                  </a:lnTo>
-                  <a:lnTo>
-                    <a:pt x="1936589" y="2641018"/>
-                  </a:lnTo>
-                  <a:lnTo>
-                    <a:pt x="1858955" y="2632794"/>
-                  </a:lnTo>
-                  <a:lnTo>
-                    <a:pt x="1781321" y="2624502"/>
-                  </a:lnTo>
-                  <a:lnTo>
-                    <a:pt x="1703687" y="2616143"/>
-                  </a:lnTo>
-                  <a:lnTo>
-                    <a:pt x="1626053" y="2607716"/>
-                  </a:lnTo>
-                  <a:lnTo>
-                    <a:pt x="1548419" y="2599221"/>
-                  </a:lnTo>
-                  <a:lnTo>
-                    <a:pt x="1470785" y="2590656"/>
-                  </a:lnTo>
-                  <a:lnTo>
-                    <a:pt x="1393151" y="2582022"/>
-                  </a:lnTo>
-                  <a:lnTo>
-                    <a:pt x="1315517" y="2573318"/>
-                  </a:lnTo>
-                  <a:lnTo>
-                    <a:pt x="1237883" y="2564543"/>
-                  </a:lnTo>
-                  <a:lnTo>
-                    <a:pt x="1160249" y="2555696"/>
-                  </a:lnTo>
-                  <a:lnTo>
-                    <a:pt x="1082615" y="2546778"/>
-                  </a:lnTo>
-                  <a:lnTo>
-                    <a:pt x="1004981" y="2537787"/>
-                  </a:lnTo>
-                  <a:lnTo>
-                    <a:pt x="927346" y="2528723"/>
-                  </a:lnTo>
-                  <a:lnTo>
-                    <a:pt x="849712" y="2519585"/>
-                  </a:lnTo>
-                  <a:lnTo>
-                    <a:pt x="772078" y="2510373"/>
-                  </a:lnTo>
-                  <a:lnTo>
-                    <a:pt x="694444" y="2501087"/>
-                  </a:lnTo>
-                  <a:lnTo>
-                    <a:pt x="616810" y="2491724"/>
-                  </a:lnTo>
-                  <a:lnTo>
-                    <a:pt x="539176" y="2482286"/>
-                  </a:lnTo>
-                  <a:lnTo>
-                    <a:pt x="461542" y="2472770"/>
-                  </a:lnTo>
-                  <a:lnTo>
-                    <a:pt x="383908" y="2463178"/>
-                  </a:lnTo>
-                  <a:lnTo>
-                    <a:pt x="306274" y="2453507"/>
-                  </a:lnTo>
-                  <a:lnTo>
-                    <a:pt x="228640" y="2443758"/>
-                  </a:lnTo>
-                  <a:lnTo>
-                    <a:pt x="151006" y="2433930"/>
-                  </a:lnTo>
-                  <a:lnTo>
-                    <a:pt x="73372" y="2424021"/>
-                  </a:lnTo>
-                  <a:lnTo>
-                    <a:pt x="0" y="2414581"/>
+                    <a:pt x="849712" y="101157"/>
+                  </a:lnTo>
+                  <a:lnTo>
+                    <a:pt x="927346" y="250854"/>
+                  </a:lnTo>
+                  <a:lnTo>
+                    <a:pt x="1004981" y="394242"/>
+                  </a:lnTo>
+                  <a:lnTo>
+                    <a:pt x="1082615" y="531585"/>
+                  </a:lnTo>
+                  <a:lnTo>
+                    <a:pt x="1160249" y="663140"/>
+                  </a:lnTo>
+                  <a:lnTo>
+                    <a:pt x="1237883" y="789149"/>
+                  </a:lnTo>
+                  <a:lnTo>
+                    <a:pt x="1315517" y="909847"/>
+                  </a:lnTo>
+                  <a:lnTo>
+                    <a:pt x="1393151" y="1025457"/>
+                  </a:lnTo>
+                  <a:lnTo>
+                    <a:pt x="1470785" y="1136194"/>
+                  </a:lnTo>
+                  <a:lnTo>
+                    <a:pt x="1548419" y="1242264"/>
+                  </a:lnTo>
+                  <a:lnTo>
+                    <a:pt x="1626053" y="1343863"/>
+                  </a:lnTo>
+                  <a:lnTo>
+                    <a:pt x="1703687" y="1441179"/>
+                  </a:lnTo>
+                  <a:lnTo>
+                    <a:pt x="1781321" y="1534394"/>
+                  </a:lnTo>
+                  <a:lnTo>
+                    <a:pt x="1858955" y="1623679"/>
+                  </a:lnTo>
+                  <a:lnTo>
+                    <a:pt x="1936589" y="1709201"/>
+                  </a:lnTo>
+                  <a:lnTo>
+                    <a:pt x="2014223" y="1791118"/>
+                  </a:lnTo>
+                  <a:lnTo>
+                    <a:pt x="2091857" y="1869583"/>
+                  </a:lnTo>
+                  <a:lnTo>
+                    <a:pt x="2169491" y="1944740"/>
+                  </a:lnTo>
+                  <a:lnTo>
+                    <a:pt x="2247125" y="2016729"/>
+                  </a:lnTo>
+                  <a:lnTo>
+                    <a:pt x="2324759" y="2085683"/>
+                  </a:lnTo>
+                  <a:lnTo>
+                    <a:pt x="2402393" y="2151732"/>
+                  </a:lnTo>
+                  <a:lnTo>
+                    <a:pt x="2480027" y="2214996"/>
+                  </a:lnTo>
+                  <a:lnTo>
+                    <a:pt x="2557661" y="2275594"/>
+                  </a:lnTo>
+                  <a:lnTo>
+                    <a:pt x="2635295" y="2333637"/>
+                  </a:lnTo>
+                  <a:lnTo>
+                    <a:pt x="2712930" y="2389234"/>
+                  </a:lnTo>
+                  <a:lnTo>
+                    <a:pt x="2790564" y="2442487"/>
+                  </a:lnTo>
+                  <a:lnTo>
+                    <a:pt x="2868198" y="2493496"/>
+                  </a:lnTo>
+                  <a:lnTo>
+                    <a:pt x="2945832" y="2542355"/>
+                  </a:lnTo>
+                  <a:lnTo>
+                    <a:pt x="3023466" y="2589154"/>
+                  </a:lnTo>
+                  <a:lnTo>
+                    <a:pt x="3101100" y="2633981"/>
+                  </a:lnTo>
+                  <a:lnTo>
+                    <a:pt x="3178734" y="2676918"/>
+                  </a:lnTo>
+                  <a:lnTo>
+                    <a:pt x="3256368" y="2718045"/>
+                  </a:lnTo>
+                  <a:lnTo>
+                    <a:pt x="3334002" y="2757439"/>
+                  </a:lnTo>
+                  <a:lnTo>
+                    <a:pt x="3411636" y="2785602"/>
+                  </a:lnTo>
+                  <a:lnTo>
+                    <a:pt x="3489270" y="2793582"/>
+                  </a:lnTo>
+                  <a:lnTo>
+                    <a:pt x="3566904" y="2801489"/>
+                  </a:lnTo>
+                  <a:lnTo>
+                    <a:pt x="3644538" y="2809323"/>
+                  </a:lnTo>
+                  <a:lnTo>
+                    <a:pt x="3722172" y="2817085"/>
+                  </a:lnTo>
+                  <a:lnTo>
+                    <a:pt x="3799806" y="2824775"/>
+                  </a:lnTo>
+                  <a:lnTo>
+                    <a:pt x="3877440" y="2832395"/>
+                  </a:lnTo>
+                  <a:lnTo>
+                    <a:pt x="3955074" y="2839944"/>
+                  </a:lnTo>
+                  <a:lnTo>
+                    <a:pt x="4032708" y="2847424"/>
+                  </a:lnTo>
+                  <a:lnTo>
+                    <a:pt x="4110342" y="2854836"/>
+                  </a:lnTo>
+                  <a:lnTo>
+                    <a:pt x="4187976" y="2862179"/>
+                  </a:lnTo>
+                  <a:lnTo>
+                    <a:pt x="4265610" y="2869454"/>
+                  </a:lnTo>
+                  <a:lnTo>
+                    <a:pt x="4343244" y="2876662"/>
+                  </a:lnTo>
+                  <a:lnTo>
+                    <a:pt x="4420879" y="2883805"/>
+                  </a:lnTo>
+                  <a:lnTo>
+                    <a:pt x="4498513" y="2890881"/>
+                  </a:lnTo>
+                  <a:lnTo>
+                    <a:pt x="4576147" y="2897892"/>
+                  </a:lnTo>
+                  <a:lnTo>
+                    <a:pt x="4653781" y="2904839"/>
+                  </a:lnTo>
+                  <a:lnTo>
+                    <a:pt x="4731415" y="2911722"/>
+                  </a:lnTo>
+                  <a:lnTo>
+                    <a:pt x="4809049" y="2918541"/>
+                  </a:lnTo>
+                  <a:lnTo>
+                    <a:pt x="4886683" y="2925298"/>
+                  </a:lnTo>
+                  <a:lnTo>
+                    <a:pt x="4964317" y="2931992"/>
+                  </a:lnTo>
+                  <a:lnTo>
+                    <a:pt x="5041951" y="2938625"/>
+                  </a:lnTo>
+                  <a:lnTo>
+                    <a:pt x="5119585" y="2945197"/>
+                  </a:lnTo>
+                  <a:lnTo>
+                    <a:pt x="5197219" y="2951708"/>
+                  </a:lnTo>
+                  <a:lnTo>
+                    <a:pt x="5274853" y="2958160"/>
+                  </a:lnTo>
+                  <a:lnTo>
+                    <a:pt x="5352487" y="2964552"/>
+                  </a:lnTo>
+                  <a:lnTo>
+                    <a:pt x="5430121" y="2970885"/>
+                  </a:lnTo>
+                  <a:lnTo>
+                    <a:pt x="5507755" y="2977160"/>
+                  </a:lnTo>
+                  <a:lnTo>
+                    <a:pt x="5585389" y="2983377"/>
+                  </a:lnTo>
+                  <a:lnTo>
+                    <a:pt x="5663023" y="2989537"/>
+                  </a:lnTo>
+                  <a:lnTo>
+                    <a:pt x="5740657" y="2995640"/>
+                  </a:lnTo>
+                  <a:lnTo>
+                    <a:pt x="5818291" y="3001687"/>
+                  </a:lnTo>
+                  <a:lnTo>
+                    <a:pt x="5895925" y="3007678"/>
+                  </a:lnTo>
+                  <a:lnTo>
+                    <a:pt x="5973559" y="3013615"/>
+                  </a:lnTo>
+                  <a:lnTo>
+                    <a:pt x="6051193" y="3019496"/>
+                  </a:lnTo>
+                  <a:lnTo>
+                    <a:pt x="6128827" y="3025324"/>
+                  </a:lnTo>
+                  <a:lnTo>
+                    <a:pt x="6206462" y="3031097"/>
+                  </a:lnTo>
+                  <a:lnTo>
+                    <a:pt x="6284096" y="3036818"/>
+                  </a:lnTo>
+                  <a:lnTo>
+                    <a:pt x="6361730" y="3042486"/>
+                  </a:lnTo>
+                  <a:lnTo>
+                    <a:pt x="6439364" y="3048102"/>
+                  </a:lnTo>
+                  <a:lnTo>
+                    <a:pt x="6516998" y="3053666"/>
+                  </a:lnTo>
+                  <a:lnTo>
+                    <a:pt x="6594632" y="3059179"/>
+                  </a:lnTo>
+                  <a:lnTo>
+                    <a:pt x="6672266" y="3064641"/>
+                  </a:lnTo>
+                  <a:lnTo>
+                    <a:pt x="6749900" y="3070053"/>
+                  </a:lnTo>
+                  <a:lnTo>
+                    <a:pt x="6827534" y="3075416"/>
+                  </a:lnTo>
+                  <a:lnTo>
+                    <a:pt x="6905168" y="3080728"/>
+                  </a:lnTo>
+                  <a:lnTo>
+                    <a:pt x="6982802" y="3085992"/>
+                  </a:lnTo>
+                  <a:lnTo>
+                    <a:pt x="7060436" y="3091208"/>
+                  </a:lnTo>
+                  <a:lnTo>
+                    <a:pt x="7138070" y="3096375"/>
+                  </a:lnTo>
+                  <a:lnTo>
+                    <a:pt x="7215704" y="3101495"/>
+                  </a:lnTo>
+                  <a:lnTo>
+                    <a:pt x="7293338" y="3106568"/>
+                  </a:lnTo>
+                  <a:lnTo>
+                    <a:pt x="7370972" y="3111594"/>
+                  </a:lnTo>
+                  <a:lnTo>
+                    <a:pt x="7370972" y="3557280"/>
+                  </a:lnTo>
+                  <a:lnTo>
+                    <a:pt x="7293338" y="3553084"/>
+                  </a:lnTo>
+                  <a:lnTo>
+                    <a:pt x="7215704" y="3548703"/>
+                  </a:lnTo>
+                  <a:lnTo>
+                    <a:pt x="7138070" y="3544129"/>
+                  </a:lnTo>
+                  <a:lnTo>
+                    <a:pt x="7060436" y="3539354"/>
+                  </a:lnTo>
+                  <a:lnTo>
+                    <a:pt x="6982802" y="3534368"/>
+                  </a:lnTo>
+                  <a:lnTo>
+                    <a:pt x="6905168" y="3529164"/>
+                  </a:lnTo>
+                  <a:lnTo>
+                    <a:pt x="6827534" y="3523730"/>
+                  </a:lnTo>
+                  <a:lnTo>
+                    <a:pt x="6749900" y="3518057"/>
+                  </a:lnTo>
+                  <a:lnTo>
+                    <a:pt x="6672266" y="3512134"/>
+                  </a:lnTo>
+                  <a:lnTo>
+                    <a:pt x="6594632" y="3505951"/>
+                  </a:lnTo>
+                  <a:lnTo>
+                    <a:pt x="6516998" y="3499496"/>
+                  </a:lnTo>
+                  <a:lnTo>
+                    <a:pt x="6439364" y="3492757"/>
+                  </a:lnTo>
+                  <a:lnTo>
+                    <a:pt x="6361730" y="3485721"/>
+                  </a:lnTo>
+                  <a:lnTo>
+                    <a:pt x="6284096" y="3478375"/>
+                  </a:lnTo>
+                  <a:lnTo>
+                    <a:pt x="6206462" y="3470707"/>
+                  </a:lnTo>
+                  <a:lnTo>
+                    <a:pt x="6128827" y="3462700"/>
+                  </a:lnTo>
+                  <a:lnTo>
+                    <a:pt x="6051193" y="3454342"/>
+                  </a:lnTo>
+                  <a:lnTo>
+                    <a:pt x="5973559" y="3445615"/>
+                  </a:lnTo>
+                  <a:lnTo>
+                    <a:pt x="5895925" y="3436505"/>
+                  </a:lnTo>
+                  <a:lnTo>
+                    <a:pt x="5818291" y="3426994"/>
+                  </a:lnTo>
+                  <a:lnTo>
+                    <a:pt x="5740657" y="3417064"/>
+                  </a:lnTo>
+                  <a:lnTo>
+                    <a:pt x="5663023" y="3406697"/>
+                  </a:lnTo>
+                  <a:lnTo>
+                    <a:pt x="5585389" y="3395874"/>
+                  </a:lnTo>
+                  <a:lnTo>
+                    <a:pt x="5507755" y="3384575"/>
+                  </a:lnTo>
+                  <a:lnTo>
+                    <a:pt x="5430121" y="3372779"/>
+                  </a:lnTo>
+                  <a:lnTo>
+                    <a:pt x="5352487" y="3360463"/>
+                  </a:lnTo>
+                  <a:lnTo>
+                    <a:pt x="5274853" y="3347606"/>
+                  </a:lnTo>
+                  <a:lnTo>
+                    <a:pt x="5197219" y="3334182"/>
+                  </a:lnTo>
+                  <a:lnTo>
+                    <a:pt x="5119585" y="3320168"/>
+                  </a:lnTo>
+                  <a:lnTo>
+                    <a:pt x="5041951" y="3305538"/>
+                  </a:lnTo>
+                  <a:lnTo>
+                    <a:pt x="4964317" y="3290263"/>
+                  </a:lnTo>
+                  <a:lnTo>
+                    <a:pt x="4886683" y="3274316"/>
+                  </a:lnTo>
+                  <a:lnTo>
+                    <a:pt x="4809049" y="3257668"/>
+                  </a:lnTo>
+                  <a:lnTo>
+                    <a:pt x="4731415" y="3240287"/>
+                  </a:lnTo>
+                  <a:lnTo>
+                    <a:pt x="4653781" y="3222141"/>
+                  </a:lnTo>
+                  <a:lnTo>
+                    <a:pt x="4576147" y="3203197"/>
+                  </a:lnTo>
+                  <a:lnTo>
+                    <a:pt x="4498513" y="3183419"/>
+                  </a:lnTo>
+                  <a:lnTo>
+                    <a:pt x="4420879" y="3162770"/>
+                  </a:lnTo>
+                  <a:lnTo>
+                    <a:pt x="4343244" y="3141213"/>
+                  </a:lnTo>
+                  <a:lnTo>
+                    <a:pt x="4265610" y="3118707"/>
+                  </a:lnTo>
+                  <a:lnTo>
+                    <a:pt x="4187976" y="3095211"/>
+                  </a:lnTo>
+                  <a:lnTo>
+                    <a:pt x="4110342" y="3070681"/>
+                  </a:lnTo>
+                  <a:lnTo>
+                    <a:pt x="4032708" y="3045072"/>
+                  </a:lnTo>
+                  <a:lnTo>
+                    <a:pt x="3955074" y="3018335"/>
+                  </a:lnTo>
+                  <a:lnTo>
+                    <a:pt x="3877440" y="2990422"/>
+                  </a:lnTo>
+                  <a:lnTo>
+                    <a:pt x="3799806" y="2961281"/>
+                  </a:lnTo>
+                  <a:lnTo>
+                    <a:pt x="3722172" y="2930857"/>
+                  </a:lnTo>
+                  <a:lnTo>
+                    <a:pt x="3644538" y="2899095"/>
+                  </a:lnTo>
+                  <a:lnTo>
+                    <a:pt x="3566904" y="2865935"/>
+                  </a:lnTo>
+                  <a:lnTo>
+                    <a:pt x="3489270" y="2831315"/>
+                  </a:lnTo>
+                  <a:lnTo>
+                    <a:pt x="3411636" y="2795172"/>
+                  </a:lnTo>
+                  <a:lnTo>
+                    <a:pt x="3334002" y="2777547"/>
+                  </a:lnTo>
+                  <a:lnTo>
+                    <a:pt x="3256368" y="2769418"/>
+                  </a:lnTo>
+                  <a:lnTo>
+                    <a:pt x="3178734" y="2761213"/>
+                  </a:lnTo>
+                  <a:lnTo>
+                    <a:pt x="3101100" y="2752932"/>
+                  </a:lnTo>
+                  <a:lnTo>
+                    <a:pt x="3023466" y="2744575"/>
+                  </a:lnTo>
+                  <a:lnTo>
+                    <a:pt x="2945832" y="2736139"/>
+                  </a:lnTo>
+                  <a:lnTo>
+                    <a:pt x="2868198" y="2727625"/>
+                  </a:lnTo>
+                  <a:lnTo>
+                    <a:pt x="2790564" y="2719032"/>
+                  </a:lnTo>
+                  <a:lnTo>
+                    <a:pt x="2712930" y="2710360"/>
+                  </a:lnTo>
+                  <a:lnTo>
+                    <a:pt x="2635295" y="2701606"/>
+                  </a:lnTo>
+                  <a:lnTo>
+                    <a:pt x="2557661" y="2692772"/>
+                  </a:lnTo>
+                  <a:lnTo>
+                    <a:pt x="2480027" y="2683855"/>
+                  </a:lnTo>
+                  <a:lnTo>
+                    <a:pt x="2402393" y="2674855"/>
+                  </a:lnTo>
+                  <a:lnTo>
+                    <a:pt x="2324759" y="2665772"/>
+                  </a:lnTo>
+                  <a:lnTo>
+                    <a:pt x="2247125" y="2656605"/>
+                  </a:lnTo>
+                  <a:lnTo>
+                    <a:pt x="2169491" y="2647352"/>
+                  </a:lnTo>
+                  <a:lnTo>
+                    <a:pt x="2091857" y="2638013"/>
+                  </a:lnTo>
+                  <a:lnTo>
+                    <a:pt x="2014223" y="2628588"/>
+                  </a:lnTo>
+                  <a:lnTo>
+                    <a:pt x="1936589" y="2619075"/>
+                  </a:lnTo>
+                  <a:lnTo>
+                    <a:pt x="1858955" y="2609474"/>
+                  </a:lnTo>
+                  <a:lnTo>
+                    <a:pt x="1781321" y="2599783"/>
+                  </a:lnTo>
+                  <a:lnTo>
+                    <a:pt x="1703687" y="2590003"/>
+                  </a:lnTo>
+                  <a:lnTo>
+                    <a:pt x="1626053" y="2580131"/>
+                  </a:lnTo>
+                  <a:lnTo>
+                    <a:pt x="1548419" y="2570168"/>
+                  </a:lnTo>
+                  <a:lnTo>
+                    <a:pt x="1470785" y="2560113"/>
+                  </a:lnTo>
+                  <a:lnTo>
+                    <a:pt x="1393151" y="2549964"/>
+                  </a:lnTo>
+                  <a:lnTo>
+                    <a:pt x="1315517" y="2539720"/>
+                  </a:lnTo>
+                  <a:lnTo>
+                    <a:pt x="1237883" y="2529382"/>
+                  </a:lnTo>
+                  <a:lnTo>
+                    <a:pt x="1160249" y="2518947"/>
+                  </a:lnTo>
+                  <a:lnTo>
+                    <a:pt x="1082615" y="2508416"/>
+                  </a:lnTo>
+                  <a:lnTo>
+                    <a:pt x="1004981" y="2497787"/>
+                  </a:lnTo>
+                  <a:lnTo>
+                    <a:pt x="927346" y="2487059"/>
+                  </a:lnTo>
+                  <a:lnTo>
+                    <a:pt x="849712" y="2476231"/>
+                  </a:lnTo>
+                  <a:lnTo>
+                    <a:pt x="772078" y="2465303"/>
+                  </a:lnTo>
+                  <a:lnTo>
+                    <a:pt x="694444" y="2454273"/>
+                  </a:lnTo>
+                  <a:lnTo>
+                    <a:pt x="616810" y="2443141"/>
+                  </a:lnTo>
+                  <a:lnTo>
+                    <a:pt x="539176" y="2431905"/>
+                  </a:lnTo>
+                  <a:lnTo>
+                    <a:pt x="461542" y="2420565"/>
+                  </a:lnTo>
+                  <a:lnTo>
+                    <a:pt x="383908" y="2409120"/>
+                  </a:lnTo>
+                  <a:lnTo>
+                    <a:pt x="306274" y="2397568"/>
+                  </a:lnTo>
+                  <a:lnTo>
+                    <a:pt x="228640" y="2385909"/>
+                  </a:lnTo>
+                  <a:lnTo>
+                    <a:pt x="151006" y="2374142"/>
+                  </a:lnTo>
+                  <a:lnTo>
+                    <a:pt x="73372" y="2362265"/>
+                  </a:lnTo>
+                  <a:lnTo>
+                    <a:pt x="0" y="2350936"/>
                   </a:lnTo>
                   <a:close/>
                 </a:path>
@@ -3579,270 +3579,270 @@
           </p:nvSpPr>
           <p:spPr>
             <a:xfrm>
-              <a:off x="1593307" y="1896563"/>
-              <a:ext cx="6595183" cy="3078717"/>
+              <a:off x="1616980" y="1896563"/>
+              <a:ext cx="6571509" cy="3111594"/>
             </a:xfrm>
             <a:custGeom>
               <a:avLst/>
               <a:pathLst>
-                <a:path w="6595183" h="3078717">
+                <a:path w="6571509" h="3111594">
                   <a:moveTo>
                     <a:pt x="0" y="0"/>
                   </a:moveTo>
                   <a:lnTo>
-                    <a:pt x="73923" y="145608"/>
-                  </a:lnTo>
-                  <a:lnTo>
-                    <a:pt x="151557" y="292137"/>
-                  </a:lnTo>
-                  <a:lnTo>
-                    <a:pt x="229191" y="432543"/>
-                  </a:lnTo>
-                  <a:lnTo>
-                    <a:pt x="306825" y="567082"/>
-                  </a:lnTo>
-                  <a:lnTo>
-                    <a:pt x="384459" y="696001"/>
-                  </a:lnTo>
-                  <a:lnTo>
-                    <a:pt x="462093" y="819533"/>
-                  </a:lnTo>
-                  <a:lnTo>
-                    <a:pt x="539727" y="937904"/>
-                  </a:lnTo>
-                  <a:lnTo>
-                    <a:pt x="617361" y="1051329"/>
-                  </a:lnTo>
-                  <a:lnTo>
-                    <a:pt x="694996" y="1160015"/>
-                  </a:lnTo>
-                  <a:lnTo>
-                    <a:pt x="772630" y="1264160"/>
-                  </a:lnTo>
-                  <a:lnTo>
-                    <a:pt x="850264" y="1363954"/>
-                  </a:lnTo>
-                  <a:lnTo>
-                    <a:pt x="927898" y="1459578"/>
-                  </a:lnTo>
-                  <a:lnTo>
-                    <a:pt x="1005532" y="1551207"/>
-                  </a:lnTo>
-                  <a:lnTo>
-                    <a:pt x="1083166" y="1639008"/>
-                  </a:lnTo>
-                  <a:lnTo>
-                    <a:pt x="1160800" y="1723140"/>
-                  </a:lnTo>
-                  <a:lnTo>
-                    <a:pt x="1238434" y="1803757"/>
-                  </a:lnTo>
-                  <a:lnTo>
-                    <a:pt x="1316068" y="1881006"/>
-                  </a:lnTo>
-                  <a:lnTo>
-                    <a:pt x="1393702" y="1955027"/>
-                  </a:lnTo>
-                  <a:lnTo>
-                    <a:pt x="1471336" y="2025955"/>
-                  </a:lnTo>
-                  <a:lnTo>
-                    <a:pt x="1548970" y="2093920"/>
-                  </a:lnTo>
-                  <a:lnTo>
-                    <a:pt x="1626604" y="2159046"/>
-                  </a:lnTo>
-                  <a:lnTo>
-                    <a:pt x="1704238" y="2221450"/>
-                  </a:lnTo>
-                  <a:lnTo>
-                    <a:pt x="1781872" y="2281247"/>
-                  </a:lnTo>
-                  <a:lnTo>
-                    <a:pt x="1859506" y="2338546"/>
-                  </a:lnTo>
-                  <a:lnTo>
-                    <a:pt x="1937140" y="2393450"/>
-                  </a:lnTo>
-                  <a:lnTo>
-                    <a:pt x="2014774" y="2446061"/>
-                  </a:lnTo>
-                  <a:lnTo>
-                    <a:pt x="2092408" y="2496473"/>
-                  </a:lnTo>
-                  <a:lnTo>
-                    <a:pt x="2170042" y="2544780"/>
-                  </a:lnTo>
-                  <a:lnTo>
-                    <a:pt x="2247676" y="2591068"/>
-                  </a:lnTo>
-                  <a:lnTo>
-                    <a:pt x="2325310" y="2635422"/>
-                  </a:lnTo>
-                  <a:lnTo>
-                    <a:pt x="2402945" y="2677922"/>
-                  </a:lnTo>
-                  <a:lnTo>
-                    <a:pt x="2480579" y="2718647"/>
-                  </a:lnTo>
-                  <a:lnTo>
-                    <a:pt x="2558213" y="2757671"/>
-                  </a:lnTo>
-                  <a:lnTo>
-                    <a:pt x="2635847" y="2785274"/>
-                  </a:lnTo>
-                  <a:lnTo>
-                    <a:pt x="2713481" y="2792269"/>
-                  </a:lnTo>
-                  <a:lnTo>
-                    <a:pt x="2791115" y="2799208"/>
-                  </a:lnTo>
-                  <a:lnTo>
-                    <a:pt x="2868749" y="2806091"/>
-                  </a:lnTo>
-                  <a:lnTo>
-                    <a:pt x="2946383" y="2812918"/>
-                  </a:lnTo>
-                  <a:lnTo>
-                    <a:pt x="3024017" y="2819690"/>
-                  </a:lnTo>
-                  <a:lnTo>
-                    <a:pt x="3101651" y="2826407"/>
-                  </a:lnTo>
-                  <a:lnTo>
-                    <a:pt x="3179285" y="2833071"/>
-                  </a:lnTo>
-                  <a:lnTo>
-                    <a:pt x="3256919" y="2839680"/>
-                  </a:lnTo>
-                  <a:lnTo>
-                    <a:pt x="3334553" y="2846236"/>
-                  </a:lnTo>
-                  <a:lnTo>
-                    <a:pt x="3412187" y="2852740"/>
-                  </a:lnTo>
-                  <a:lnTo>
-                    <a:pt x="3489821" y="2859191"/>
-                  </a:lnTo>
-                  <a:lnTo>
-                    <a:pt x="3567455" y="2865590"/>
-                  </a:lnTo>
-                  <a:lnTo>
-                    <a:pt x="3645089" y="2871937"/>
-                  </a:lnTo>
-                  <a:lnTo>
-                    <a:pt x="3722723" y="2878233"/>
-                  </a:lnTo>
-                  <a:lnTo>
-                    <a:pt x="3800357" y="2884478"/>
-                  </a:lnTo>
-                  <a:lnTo>
-                    <a:pt x="3877991" y="2890673"/>
-                  </a:lnTo>
-                  <a:lnTo>
-                    <a:pt x="3955625" y="2896818"/>
-                  </a:lnTo>
-                  <a:lnTo>
-                    <a:pt x="4033259" y="2902914"/>
-                  </a:lnTo>
-                  <a:lnTo>
-                    <a:pt x="4110893" y="2908960"/>
-                  </a:lnTo>
-                  <a:lnTo>
-                    <a:pt x="4188528" y="2914957"/>
-                  </a:lnTo>
-                  <a:lnTo>
-                    <a:pt x="4266162" y="2920907"/>
-                  </a:lnTo>
-                  <a:lnTo>
-                    <a:pt x="4343796" y="2926808"/>
-                  </a:lnTo>
-                  <a:lnTo>
-                    <a:pt x="4421430" y="2932661"/>
-                  </a:lnTo>
-                  <a:lnTo>
-                    <a:pt x="4499064" y="2938468"/>
-                  </a:lnTo>
-                  <a:lnTo>
-                    <a:pt x="4576698" y="2944227"/>
-                  </a:lnTo>
-                  <a:lnTo>
-                    <a:pt x="4654332" y="2949940"/>
-                  </a:lnTo>
-                  <a:lnTo>
-                    <a:pt x="4731966" y="2955607"/>
-                  </a:lnTo>
-                  <a:lnTo>
-                    <a:pt x="4809600" y="2961229"/>
-                  </a:lnTo>
-                  <a:lnTo>
-                    <a:pt x="4887234" y="2966805"/>
-                  </a:lnTo>
-                  <a:lnTo>
-                    <a:pt x="4964868" y="2972336"/>
-                  </a:lnTo>
-                  <a:lnTo>
-                    <a:pt x="5042502" y="2977822"/>
-                  </a:lnTo>
-                  <a:lnTo>
-                    <a:pt x="5120136" y="2983264"/>
-                  </a:lnTo>
-                  <a:lnTo>
-                    <a:pt x="5197770" y="2988663"/>
-                  </a:lnTo>
-                  <a:lnTo>
-                    <a:pt x="5275404" y="2994017"/>
-                  </a:lnTo>
-                  <a:lnTo>
-                    <a:pt x="5353038" y="2999329"/>
-                  </a:lnTo>
-                  <a:lnTo>
-                    <a:pt x="5430672" y="3004598"/>
-                  </a:lnTo>
-                  <a:lnTo>
-                    <a:pt x="5508306" y="3009824"/>
-                  </a:lnTo>
-                  <a:lnTo>
-                    <a:pt x="5585940" y="3015008"/>
-                  </a:lnTo>
-                  <a:lnTo>
-                    <a:pt x="5663574" y="3020150"/>
-                  </a:lnTo>
-                  <a:lnTo>
-                    <a:pt x="5741208" y="3025251"/>
-                  </a:lnTo>
-                  <a:lnTo>
-                    <a:pt x="5818842" y="3030311"/>
-                  </a:lnTo>
-                  <a:lnTo>
-                    <a:pt x="5896477" y="3035330"/>
-                  </a:lnTo>
-                  <a:lnTo>
-                    <a:pt x="5974111" y="3040308"/>
-                  </a:lnTo>
-                  <a:lnTo>
-                    <a:pt x="6051745" y="3045246"/>
-                  </a:lnTo>
-                  <a:lnTo>
-                    <a:pt x="6129379" y="3050145"/>
-                  </a:lnTo>
-                  <a:lnTo>
-                    <a:pt x="6207013" y="3055004"/>
-                  </a:lnTo>
-                  <a:lnTo>
-                    <a:pt x="6284647" y="3059823"/>
-                  </a:lnTo>
-                  <a:lnTo>
-                    <a:pt x="6362281" y="3064604"/>
-                  </a:lnTo>
-                  <a:lnTo>
-                    <a:pt x="6439915" y="3069346"/>
-                  </a:lnTo>
-                  <a:lnTo>
-                    <a:pt x="6517549" y="3074051"/>
-                  </a:lnTo>
-                  <a:lnTo>
-                    <a:pt x="6595183" y="3078717"/>
+                    <a:pt x="50249" y="101157"/>
+                  </a:lnTo>
+                  <a:lnTo>
+                    <a:pt x="127884" y="250854"/>
+                  </a:lnTo>
+                  <a:lnTo>
+                    <a:pt x="205518" y="394242"/>
+                  </a:lnTo>
+                  <a:lnTo>
+                    <a:pt x="283152" y="531585"/>
+                  </a:lnTo>
+                  <a:lnTo>
+                    <a:pt x="360786" y="663140"/>
+                  </a:lnTo>
+                  <a:lnTo>
+                    <a:pt x="438420" y="789149"/>
+                  </a:lnTo>
+                  <a:lnTo>
+                    <a:pt x="516054" y="909847"/>
+                  </a:lnTo>
+                  <a:lnTo>
+                    <a:pt x="593688" y="1025457"/>
+                  </a:lnTo>
+                  <a:lnTo>
+                    <a:pt x="671322" y="1136194"/>
+                  </a:lnTo>
+                  <a:lnTo>
+                    <a:pt x="748956" y="1242264"/>
+                  </a:lnTo>
+                  <a:lnTo>
+                    <a:pt x="826590" y="1343863"/>
+                  </a:lnTo>
+                  <a:lnTo>
+                    <a:pt x="904224" y="1441179"/>
+                  </a:lnTo>
+                  <a:lnTo>
+                    <a:pt x="981858" y="1534394"/>
+                  </a:lnTo>
+                  <a:lnTo>
+                    <a:pt x="1059492" y="1623679"/>
+                  </a:lnTo>
+                  <a:lnTo>
+                    <a:pt x="1137126" y="1709201"/>
+                  </a:lnTo>
+                  <a:lnTo>
+                    <a:pt x="1214760" y="1791118"/>
+                  </a:lnTo>
+                  <a:lnTo>
+                    <a:pt x="1292394" y="1869583"/>
+                  </a:lnTo>
+                  <a:lnTo>
+                    <a:pt x="1370028" y="1944740"/>
+                  </a:lnTo>
+                  <a:lnTo>
+                    <a:pt x="1447662" y="2016729"/>
+                  </a:lnTo>
+                  <a:lnTo>
+                    <a:pt x="1525296" y="2085683"/>
+                  </a:lnTo>
+                  <a:lnTo>
+                    <a:pt x="1602930" y="2151732"/>
+                  </a:lnTo>
+                  <a:lnTo>
+                    <a:pt x="1680564" y="2214996"/>
+                  </a:lnTo>
+                  <a:lnTo>
+                    <a:pt x="1758198" y="2275594"/>
+                  </a:lnTo>
+                  <a:lnTo>
+                    <a:pt x="1835832" y="2333637"/>
+                  </a:lnTo>
+                  <a:lnTo>
+                    <a:pt x="1913467" y="2389234"/>
+                  </a:lnTo>
+                  <a:lnTo>
+                    <a:pt x="1991101" y="2442487"/>
+                  </a:lnTo>
+                  <a:lnTo>
+                    <a:pt x="2068735" y="2493496"/>
+                  </a:lnTo>
+                  <a:lnTo>
+                    <a:pt x="2146369" y="2542355"/>
+                  </a:lnTo>
+                  <a:lnTo>
+                    <a:pt x="2224003" y="2589154"/>
+                  </a:lnTo>
+                  <a:lnTo>
+                    <a:pt x="2301637" y="2633981"/>
+                  </a:lnTo>
+                  <a:lnTo>
+                    <a:pt x="2379271" y="2676918"/>
+                  </a:lnTo>
+                  <a:lnTo>
+                    <a:pt x="2456905" y="2718045"/>
+                  </a:lnTo>
+                  <a:lnTo>
+                    <a:pt x="2534539" y="2757439"/>
+                  </a:lnTo>
+                  <a:lnTo>
+                    <a:pt x="2612173" y="2785602"/>
+                  </a:lnTo>
+                  <a:lnTo>
+                    <a:pt x="2689807" y="2793582"/>
+                  </a:lnTo>
+                  <a:lnTo>
+                    <a:pt x="2767441" y="2801489"/>
+                  </a:lnTo>
+                  <a:lnTo>
+                    <a:pt x="2845075" y="2809323"/>
+                  </a:lnTo>
+                  <a:lnTo>
+                    <a:pt x="2922709" y="2817085"/>
+                  </a:lnTo>
+                  <a:lnTo>
+                    <a:pt x="3000343" y="2824775"/>
+                  </a:lnTo>
+                  <a:lnTo>
+                    <a:pt x="3077977" y="2832395"/>
+                  </a:lnTo>
+                  <a:lnTo>
+                    <a:pt x="3155611" y="2839944"/>
+                  </a:lnTo>
+                  <a:lnTo>
+                    <a:pt x="3233245" y="2847424"/>
+                  </a:lnTo>
+                  <a:lnTo>
+                    <a:pt x="3310879" y="2854836"/>
+                  </a:lnTo>
+                  <a:lnTo>
+                    <a:pt x="3388513" y="2862179"/>
+                  </a:lnTo>
+                  <a:lnTo>
+                    <a:pt x="3466147" y="2869454"/>
+                  </a:lnTo>
+                  <a:lnTo>
+                    <a:pt x="3543781" y="2876662"/>
+                  </a:lnTo>
+                  <a:lnTo>
+                    <a:pt x="3621416" y="2883805"/>
+                  </a:lnTo>
+                  <a:lnTo>
+                    <a:pt x="3699050" y="2890881"/>
+                  </a:lnTo>
+                  <a:lnTo>
+                    <a:pt x="3776684" y="2897892"/>
+                  </a:lnTo>
+                  <a:lnTo>
+                    <a:pt x="3854318" y="2904839"/>
+                  </a:lnTo>
+                  <a:lnTo>
+                    <a:pt x="3931952" y="2911722"/>
+                  </a:lnTo>
+                  <a:lnTo>
+                    <a:pt x="4009586" y="2918541"/>
+                  </a:lnTo>
+                  <a:lnTo>
+                    <a:pt x="4087220" y="2925298"/>
+                  </a:lnTo>
+                  <a:lnTo>
+                    <a:pt x="4164854" y="2931992"/>
+                  </a:lnTo>
+                  <a:lnTo>
+                    <a:pt x="4242488" y="2938625"/>
+                  </a:lnTo>
+                  <a:lnTo>
+                    <a:pt x="4320122" y="2945197"/>
+                  </a:lnTo>
+                  <a:lnTo>
+                    <a:pt x="4397756" y="2951708"/>
+                  </a:lnTo>
+                  <a:lnTo>
+                    <a:pt x="4475390" y="2958160"/>
+                  </a:lnTo>
+                  <a:lnTo>
+                    <a:pt x="4553024" y="2964552"/>
+                  </a:lnTo>
+                  <a:lnTo>
+                    <a:pt x="4630658" y="2970885"/>
+                  </a:lnTo>
+                  <a:lnTo>
+                    <a:pt x="4708292" y="2977160"/>
+                  </a:lnTo>
+                  <a:lnTo>
+                    <a:pt x="4785926" y="2983377"/>
+                  </a:lnTo>
+                  <a:lnTo>
+                    <a:pt x="4863560" y="2989537"/>
+                  </a:lnTo>
+                  <a:lnTo>
+                    <a:pt x="4941194" y="2995640"/>
+                  </a:lnTo>
+                  <a:lnTo>
+                    <a:pt x="5018828" y="3001687"/>
+                  </a:lnTo>
+                  <a:lnTo>
+                    <a:pt x="5096462" y="3007678"/>
+                  </a:lnTo>
+                  <a:lnTo>
+                    <a:pt x="5174096" y="3013615"/>
+                  </a:lnTo>
+                  <a:lnTo>
+                    <a:pt x="5251730" y="3019496"/>
+                  </a:lnTo>
+                  <a:lnTo>
+                    <a:pt x="5329365" y="3025324"/>
+                  </a:lnTo>
+                  <a:lnTo>
+                    <a:pt x="5406999" y="3031097"/>
+                  </a:lnTo>
+                  <a:lnTo>
+                    <a:pt x="5484633" y="3036818"/>
+                  </a:lnTo>
+                  <a:lnTo>
+                    <a:pt x="5562267" y="3042486"/>
+                  </a:lnTo>
+                  <a:lnTo>
+                    <a:pt x="5639901" y="3048102"/>
+                  </a:lnTo>
+                  <a:lnTo>
+                    <a:pt x="5717535" y="3053666"/>
+                  </a:lnTo>
+                  <a:lnTo>
+                    <a:pt x="5795169" y="3059179"/>
+                  </a:lnTo>
+                  <a:lnTo>
+                    <a:pt x="5872803" y="3064641"/>
+                  </a:lnTo>
+                  <a:lnTo>
+                    <a:pt x="5950437" y="3070053"/>
+                  </a:lnTo>
+                  <a:lnTo>
+                    <a:pt x="6028071" y="3075416"/>
+                  </a:lnTo>
+                  <a:lnTo>
+                    <a:pt x="6105705" y="3080728"/>
+                  </a:lnTo>
+                  <a:lnTo>
+                    <a:pt x="6183339" y="3085992"/>
+                  </a:lnTo>
+                  <a:lnTo>
+                    <a:pt x="6260973" y="3091208"/>
+                  </a:lnTo>
+                  <a:lnTo>
+                    <a:pt x="6338607" y="3096375"/>
+                  </a:lnTo>
+                  <a:lnTo>
+                    <a:pt x="6416241" y="3101495"/>
+                  </a:lnTo>
+                  <a:lnTo>
+                    <a:pt x="6493875" y="3106568"/>
+                  </a:lnTo>
+                  <a:lnTo>
+                    <a:pt x="6571509" y="3111594"/>
                   </a:lnTo>
                 </a:path>
               </a:pathLst>
@@ -3862,297 +3862,297 @@
           </p:nvSpPr>
           <p:spPr>
             <a:xfrm>
-              <a:off x="817517" y="4311144"/>
-              <a:ext cx="7370972" cy="1140793"/>
+              <a:off x="817517" y="4247500"/>
+              <a:ext cx="7370972" cy="1206344"/>
             </a:xfrm>
             <a:custGeom>
               <a:avLst/>
               <a:pathLst>
-                <a:path w="7370972" h="1140793">
+                <a:path w="7370972" h="1206344">
                   <a:moveTo>
-                    <a:pt x="7370972" y="1140793"/>
+                    <a:pt x="7370972" y="1206344"/>
                   </a:moveTo>
                   <a:lnTo>
-                    <a:pt x="7293338" y="1136552"/>
-                  </a:lnTo>
-                  <a:lnTo>
-                    <a:pt x="7215704" y="1132126"/>
-                  </a:lnTo>
-                  <a:lnTo>
-                    <a:pt x="7138070" y="1127507"/>
-                  </a:lnTo>
-                  <a:lnTo>
-                    <a:pt x="7060436" y="1122686"/>
-                  </a:lnTo>
-                  <a:lnTo>
-                    <a:pt x="6982802" y="1117656"/>
-                  </a:lnTo>
-                  <a:lnTo>
-                    <a:pt x="6905168" y="1112406"/>
-                  </a:lnTo>
-                  <a:lnTo>
-                    <a:pt x="6827534" y="1106927"/>
-                  </a:lnTo>
-                  <a:lnTo>
-                    <a:pt x="6749900" y="1101209"/>
-                  </a:lnTo>
-                  <a:lnTo>
-                    <a:pt x="6672266" y="1095242"/>
-                  </a:lnTo>
-                  <a:lnTo>
-                    <a:pt x="6594632" y="1089014"/>
-                  </a:lnTo>
-                  <a:lnTo>
-                    <a:pt x="6516998" y="1082515"/>
-                  </a:lnTo>
-                  <a:lnTo>
-                    <a:pt x="6439364" y="1075733"/>
-                  </a:lnTo>
-                  <a:lnTo>
-                    <a:pt x="6361730" y="1068655"/>
-                  </a:lnTo>
-                  <a:lnTo>
-                    <a:pt x="6284096" y="1061268"/>
-                  </a:lnTo>
-                  <a:lnTo>
-                    <a:pt x="6206462" y="1053559"/>
-                  </a:lnTo>
-                  <a:lnTo>
-                    <a:pt x="6128827" y="1045515"/>
-                  </a:lnTo>
-                  <a:lnTo>
-                    <a:pt x="6051193" y="1037119"/>
-                  </a:lnTo>
-                  <a:lnTo>
-                    <a:pt x="5973559" y="1028357"/>
-                  </a:lnTo>
-                  <a:lnTo>
-                    <a:pt x="5895925" y="1019213"/>
-                  </a:lnTo>
-                  <a:lnTo>
-                    <a:pt x="5818291" y="1009671"/>
-                  </a:lnTo>
-                  <a:lnTo>
-                    <a:pt x="5740657" y="999712"/>
-                  </a:lnTo>
-                  <a:lnTo>
-                    <a:pt x="5663023" y="989320"/>
-                  </a:lnTo>
-                  <a:lnTo>
-                    <a:pt x="5585389" y="978474"/>
-                  </a:lnTo>
-                  <a:lnTo>
-                    <a:pt x="5507755" y="967155"/>
-                  </a:lnTo>
-                  <a:lnTo>
-                    <a:pt x="5430121" y="955343"/>
-                  </a:lnTo>
-                  <a:lnTo>
-                    <a:pt x="5352487" y="943015"/>
-                  </a:lnTo>
-                  <a:lnTo>
-                    <a:pt x="5274853" y="930150"/>
-                  </a:lnTo>
-                  <a:lnTo>
-                    <a:pt x="5197219" y="916724"/>
-                  </a:lnTo>
-                  <a:lnTo>
-                    <a:pt x="5119585" y="902713"/>
-                  </a:lnTo>
-                  <a:lnTo>
-                    <a:pt x="5041951" y="888091"/>
-                  </a:lnTo>
-                  <a:lnTo>
-                    <a:pt x="4964317" y="872831"/>
-                  </a:lnTo>
-                  <a:lnTo>
-                    <a:pt x="4886683" y="856906"/>
-                  </a:lnTo>
-                  <a:lnTo>
-                    <a:pt x="4809049" y="840286"/>
-                  </a:lnTo>
-                  <a:lnTo>
-                    <a:pt x="4731415" y="822942"/>
-                  </a:lnTo>
-                  <a:lnTo>
-                    <a:pt x="4653781" y="804841"/>
-                  </a:lnTo>
-                  <a:lnTo>
-                    <a:pt x="4576147" y="785952"/>
-                  </a:lnTo>
-                  <a:lnTo>
-                    <a:pt x="4498513" y="766238"/>
-                  </a:lnTo>
-                  <a:lnTo>
-                    <a:pt x="4420879" y="745665"/>
-                  </a:lnTo>
-                  <a:lnTo>
-                    <a:pt x="4343244" y="724195"/>
-                  </a:lnTo>
-                  <a:lnTo>
-                    <a:pt x="4265610" y="701789"/>
-                  </a:lnTo>
-                  <a:lnTo>
-                    <a:pt x="4187976" y="678406"/>
-                  </a:lnTo>
-                  <a:lnTo>
-                    <a:pt x="4110342" y="654003"/>
-                  </a:lnTo>
-                  <a:lnTo>
-                    <a:pt x="4032708" y="628537"/>
-                  </a:lnTo>
-                  <a:lnTo>
-                    <a:pt x="3955074" y="601960"/>
-                  </a:lnTo>
-                  <a:lnTo>
-                    <a:pt x="3877440" y="574224"/>
-                  </a:lnTo>
-                  <a:lnTo>
-                    <a:pt x="3799806" y="545278"/>
-                  </a:lnTo>
-                  <a:lnTo>
-                    <a:pt x="3722172" y="515071"/>
-                  </a:lnTo>
-                  <a:lnTo>
-                    <a:pt x="3644538" y="483546"/>
-                  </a:lnTo>
-                  <a:lnTo>
-                    <a:pt x="3566904" y="450647"/>
-                  </a:lnTo>
-                  <a:lnTo>
-                    <a:pt x="3489270" y="416313"/>
-                  </a:lnTo>
-                  <a:lnTo>
-                    <a:pt x="3411636" y="380483"/>
-                  </a:lnTo>
-                  <a:lnTo>
-                    <a:pt x="3334002" y="363641"/>
-                  </a:lnTo>
-                  <a:lnTo>
-                    <a:pt x="3256368" y="356532"/>
-                  </a:lnTo>
-                  <a:lnTo>
-                    <a:pt x="3178734" y="349365"/>
-                  </a:lnTo>
-                  <a:lnTo>
-                    <a:pt x="3101100" y="342140"/>
-                  </a:lnTo>
-                  <a:lnTo>
-                    <a:pt x="3023466" y="334856"/>
-                  </a:lnTo>
-                  <a:lnTo>
-                    <a:pt x="2945832" y="327513"/>
-                  </a:lnTo>
-                  <a:lnTo>
-                    <a:pt x="2868198" y="320110"/>
-                  </a:lnTo>
-                  <a:lnTo>
-                    <a:pt x="2790564" y="312647"/>
-                  </a:lnTo>
-                  <a:lnTo>
-                    <a:pt x="2712930" y="305123"/>
-                  </a:lnTo>
-                  <a:lnTo>
-                    <a:pt x="2635295" y="297538"/>
-                  </a:lnTo>
-                  <a:lnTo>
-                    <a:pt x="2557661" y="289891"/>
-                  </a:lnTo>
-                  <a:lnTo>
-                    <a:pt x="2480027" y="282182"/>
-                  </a:lnTo>
-                  <a:lnTo>
-                    <a:pt x="2402393" y="274411"/>
-                  </a:lnTo>
-                  <a:lnTo>
-                    <a:pt x="2324759" y="266576"/>
-                  </a:lnTo>
-                  <a:lnTo>
-                    <a:pt x="2247125" y="258678"/>
-                  </a:lnTo>
-                  <a:lnTo>
-                    <a:pt x="2169491" y="250715"/>
-                  </a:lnTo>
-                  <a:lnTo>
-                    <a:pt x="2091857" y="242688"/>
-                  </a:lnTo>
-                  <a:lnTo>
-                    <a:pt x="2014223" y="234596"/>
-                  </a:lnTo>
-                  <a:lnTo>
-                    <a:pt x="1936589" y="226437"/>
-                  </a:lnTo>
-                  <a:lnTo>
-                    <a:pt x="1858955" y="218213"/>
-                  </a:lnTo>
-                  <a:lnTo>
-                    <a:pt x="1781321" y="209921"/>
-                  </a:lnTo>
-                  <a:lnTo>
-                    <a:pt x="1703687" y="201562"/>
-                  </a:lnTo>
-                  <a:lnTo>
-                    <a:pt x="1626053" y="193135"/>
-                  </a:lnTo>
-                  <a:lnTo>
-                    <a:pt x="1548419" y="184640"/>
-                  </a:lnTo>
-                  <a:lnTo>
-                    <a:pt x="1470785" y="176075"/>
-                  </a:lnTo>
-                  <a:lnTo>
-                    <a:pt x="1393151" y="167441"/>
-                  </a:lnTo>
-                  <a:lnTo>
-                    <a:pt x="1315517" y="158737"/>
-                  </a:lnTo>
-                  <a:lnTo>
-                    <a:pt x="1237883" y="149961"/>
-                  </a:lnTo>
-                  <a:lnTo>
-                    <a:pt x="1160249" y="141115"/>
-                  </a:lnTo>
-                  <a:lnTo>
-                    <a:pt x="1082615" y="132197"/>
-                  </a:lnTo>
-                  <a:lnTo>
-                    <a:pt x="1004981" y="123206"/>
-                  </a:lnTo>
-                  <a:lnTo>
-                    <a:pt x="927346" y="114142"/>
-                  </a:lnTo>
-                  <a:lnTo>
-                    <a:pt x="849712" y="105004"/>
-                  </a:lnTo>
-                  <a:lnTo>
-                    <a:pt x="772078" y="95792"/>
-                  </a:lnTo>
-                  <a:lnTo>
-                    <a:pt x="694444" y="86505"/>
-                  </a:lnTo>
-                  <a:lnTo>
-                    <a:pt x="616810" y="77143"/>
-                  </a:lnTo>
-                  <a:lnTo>
-                    <a:pt x="539176" y="67704"/>
-                  </a:lnTo>
-                  <a:lnTo>
-                    <a:pt x="461542" y="58189"/>
-                  </a:lnTo>
-                  <a:lnTo>
-                    <a:pt x="383908" y="48597"/>
-                  </a:lnTo>
-                  <a:lnTo>
-                    <a:pt x="306274" y="38926"/>
-                  </a:lnTo>
-                  <a:lnTo>
-                    <a:pt x="228640" y="29177"/>
-                  </a:lnTo>
-                  <a:lnTo>
-                    <a:pt x="151006" y="19348"/>
-                  </a:lnTo>
-                  <a:lnTo>
-                    <a:pt x="73372" y="9440"/>
+                    <a:pt x="7293338" y="1202147"/>
+                  </a:lnTo>
+                  <a:lnTo>
+                    <a:pt x="7215704" y="1197766"/>
+                  </a:lnTo>
+                  <a:lnTo>
+                    <a:pt x="7138070" y="1193192"/>
+                  </a:lnTo>
+                  <a:lnTo>
+                    <a:pt x="7060436" y="1188417"/>
+                  </a:lnTo>
+                  <a:lnTo>
+                    <a:pt x="6982802" y="1183432"/>
+                  </a:lnTo>
+                  <a:lnTo>
+                    <a:pt x="6905168" y="1178227"/>
+                  </a:lnTo>
+                  <a:lnTo>
+                    <a:pt x="6827534" y="1172793"/>
+                  </a:lnTo>
+                  <a:lnTo>
+                    <a:pt x="6749900" y="1167120"/>
+                  </a:lnTo>
+                  <a:lnTo>
+                    <a:pt x="6672266" y="1161198"/>
+                  </a:lnTo>
+                  <a:lnTo>
+                    <a:pt x="6594632" y="1155015"/>
+                  </a:lnTo>
+                  <a:lnTo>
+                    <a:pt x="6516998" y="1148559"/>
+                  </a:lnTo>
+                  <a:lnTo>
+                    <a:pt x="6439364" y="1141820"/>
+                  </a:lnTo>
+                  <a:lnTo>
+                    <a:pt x="6361730" y="1134784"/>
+                  </a:lnTo>
+                  <a:lnTo>
+                    <a:pt x="6284096" y="1127439"/>
+                  </a:lnTo>
+                  <a:lnTo>
+                    <a:pt x="6206462" y="1119770"/>
+                  </a:lnTo>
+                  <a:lnTo>
+                    <a:pt x="6128827" y="1111764"/>
+                  </a:lnTo>
+                  <a:lnTo>
+                    <a:pt x="6051193" y="1103405"/>
+                  </a:lnTo>
+                  <a:lnTo>
+                    <a:pt x="5973559" y="1094679"/>
+                  </a:lnTo>
+                  <a:lnTo>
+                    <a:pt x="5895925" y="1085569"/>
+                  </a:lnTo>
+                  <a:lnTo>
+                    <a:pt x="5818291" y="1076057"/>
+                  </a:lnTo>
+                  <a:lnTo>
+                    <a:pt x="5740657" y="1066127"/>
+                  </a:lnTo>
+                  <a:lnTo>
+                    <a:pt x="5663023" y="1055761"/>
+                  </a:lnTo>
+                  <a:lnTo>
+                    <a:pt x="5585389" y="1044938"/>
+                  </a:lnTo>
+                  <a:lnTo>
+                    <a:pt x="5507755" y="1033639"/>
+                  </a:lnTo>
+                  <a:lnTo>
+                    <a:pt x="5430121" y="1021842"/>
+                  </a:lnTo>
+                  <a:lnTo>
+                    <a:pt x="5352487" y="1009527"/>
+                  </a:lnTo>
+                  <a:lnTo>
+                    <a:pt x="5274853" y="996669"/>
+                  </a:lnTo>
+                  <a:lnTo>
+                    <a:pt x="5197219" y="983246"/>
+                  </a:lnTo>
+                  <a:lnTo>
+                    <a:pt x="5119585" y="969232"/>
+                  </a:lnTo>
+                  <a:lnTo>
+                    <a:pt x="5041951" y="954601"/>
+                  </a:lnTo>
+                  <a:lnTo>
+                    <a:pt x="4964317" y="939327"/>
+                  </a:lnTo>
+                  <a:lnTo>
+                    <a:pt x="4886683" y="923380"/>
+                  </a:lnTo>
+                  <a:lnTo>
+                    <a:pt x="4809049" y="906731"/>
+                  </a:lnTo>
+                  <a:lnTo>
+                    <a:pt x="4731415" y="889350"/>
+                  </a:lnTo>
+                  <a:lnTo>
+                    <a:pt x="4653781" y="871204"/>
+                  </a:lnTo>
+                  <a:lnTo>
+                    <a:pt x="4576147" y="852260"/>
+                  </a:lnTo>
+                  <a:lnTo>
+                    <a:pt x="4498513" y="832482"/>
+                  </a:lnTo>
+                  <a:lnTo>
+                    <a:pt x="4420879" y="811834"/>
+                  </a:lnTo>
+                  <a:lnTo>
+                    <a:pt x="4343244" y="790276"/>
+                  </a:lnTo>
+                  <a:lnTo>
+                    <a:pt x="4265610" y="767771"/>
+                  </a:lnTo>
+                  <a:lnTo>
+                    <a:pt x="4187976" y="744275"/>
+                  </a:lnTo>
+                  <a:lnTo>
+                    <a:pt x="4110342" y="719745"/>
+                  </a:lnTo>
+                  <a:lnTo>
+                    <a:pt x="4032708" y="694135"/>
+                  </a:lnTo>
+                  <a:lnTo>
+                    <a:pt x="3955074" y="667399"/>
+                  </a:lnTo>
+                  <a:lnTo>
+                    <a:pt x="3877440" y="639486"/>
+                  </a:lnTo>
+                  <a:lnTo>
+                    <a:pt x="3799806" y="610344"/>
+                  </a:lnTo>
+                  <a:lnTo>
+                    <a:pt x="3722172" y="579921"/>
+                  </a:lnTo>
+                  <a:lnTo>
+                    <a:pt x="3644538" y="548158"/>
+                  </a:lnTo>
+                  <a:lnTo>
+                    <a:pt x="3566904" y="514998"/>
+                  </a:lnTo>
+                  <a:lnTo>
+                    <a:pt x="3489270" y="480379"/>
+                  </a:lnTo>
+                  <a:lnTo>
+                    <a:pt x="3411636" y="444236"/>
+                  </a:lnTo>
+                  <a:lnTo>
+                    <a:pt x="3334002" y="426611"/>
+                  </a:lnTo>
+                  <a:lnTo>
+                    <a:pt x="3256368" y="418481"/>
+                  </a:lnTo>
+                  <a:lnTo>
+                    <a:pt x="3178734" y="410277"/>
+                  </a:lnTo>
+                  <a:lnTo>
+                    <a:pt x="3101100" y="401996"/>
+                  </a:lnTo>
+                  <a:lnTo>
+                    <a:pt x="3023466" y="393638"/>
+                  </a:lnTo>
+                  <a:lnTo>
+                    <a:pt x="2945832" y="385203"/>
+                  </a:lnTo>
+                  <a:lnTo>
+                    <a:pt x="2868198" y="376689"/>
+                  </a:lnTo>
+                  <a:lnTo>
+                    <a:pt x="2790564" y="368096"/>
+                  </a:lnTo>
+                  <a:lnTo>
+                    <a:pt x="2712930" y="359423"/>
+                  </a:lnTo>
+                  <a:lnTo>
+                    <a:pt x="2635295" y="350670"/>
+                  </a:lnTo>
+                  <a:lnTo>
+                    <a:pt x="2557661" y="341835"/>
+                  </a:lnTo>
+                  <a:lnTo>
+                    <a:pt x="2480027" y="332918"/>
+                  </a:lnTo>
+                  <a:lnTo>
+                    <a:pt x="2402393" y="323919"/>
+                  </a:lnTo>
+                  <a:lnTo>
+                    <a:pt x="2324759" y="314836"/>
+                  </a:lnTo>
+                  <a:lnTo>
+                    <a:pt x="2247125" y="305668"/>
+                  </a:lnTo>
+                  <a:lnTo>
+                    <a:pt x="2169491" y="296415"/>
+                  </a:lnTo>
+                  <a:lnTo>
+                    <a:pt x="2091857" y="287077"/>
+                  </a:lnTo>
+                  <a:lnTo>
+                    <a:pt x="2014223" y="277651"/>
+                  </a:lnTo>
+                  <a:lnTo>
+                    <a:pt x="1936589" y="268138"/>
+                  </a:lnTo>
+                  <a:lnTo>
+                    <a:pt x="1858955" y="258537"/>
+                  </a:lnTo>
+                  <a:lnTo>
+                    <a:pt x="1781321" y="248847"/>
+                  </a:lnTo>
+                  <a:lnTo>
+                    <a:pt x="1703687" y="239066"/>
+                  </a:lnTo>
+                  <a:lnTo>
+                    <a:pt x="1626053" y="229195"/>
+                  </a:lnTo>
+                  <a:lnTo>
+                    <a:pt x="1548419" y="219232"/>
+                  </a:lnTo>
+                  <a:lnTo>
+                    <a:pt x="1470785" y="209176"/>
+                  </a:lnTo>
+                  <a:lnTo>
+                    <a:pt x="1393151" y="199027"/>
+                  </a:lnTo>
+                  <a:lnTo>
+                    <a:pt x="1315517" y="188784"/>
+                  </a:lnTo>
+                  <a:lnTo>
+                    <a:pt x="1237883" y="178445"/>
+                  </a:lnTo>
+                  <a:lnTo>
+                    <a:pt x="1160249" y="168011"/>
+                  </a:lnTo>
+                  <a:lnTo>
+                    <a:pt x="1082615" y="157479"/>
+                  </a:lnTo>
+                  <a:lnTo>
+                    <a:pt x="1004981" y="146850"/>
+                  </a:lnTo>
+                  <a:lnTo>
+                    <a:pt x="927346" y="136122"/>
+                  </a:lnTo>
+                  <a:lnTo>
+                    <a:pt x="849712" y="125294"/>
+                  </a:lnTo>
+                  <a:lnTo>
+                    <a:pt x="772078" y="114366"/>
+                  </a:lnTo>
+                  <a:lnTo>
+                    <a:pt x="694444" y="103336"/>
+                  </a:lnTo>
+                  <a:lnTo>
+                    <a:pt x="616810" y="92204"/>
+                  </a:lnTo>
+                  <a:lnTo>
+                    <a:pt x="539176" y="80968"/>
+                  </a:lnTo>
+                  <a:lnTo>
+                    <a:pt x="461542" y="69628"/>
+                  </a:lnTo>
+                  <a:lnTo>
+                    <a:pt x="383908" y="58183"/>
+                  </a:lnTo>
+                  <a:lnTo>
+                    <a:pt x="306274" y="46631"/>
+                  </a:lnTo>
+                  <a:lnTo>
+                    <a:pt x="228640" y="34972"/>
+                  </a:lnTo>
+                  <a:lnTo>
+                    <a:pt x="151006" y="23205"/>
+                  </a:lnTo>
+                  <a:lnTo>
+                    <a:pt x="73372" y="11328"/>
                   </a:lnTo>
                   <a:lnTo>
                     <a:pt x="0" y="0"/>
@@ -4175,300 +4175,300 @@
           </p:nvSpPr>
           <p:spPr>
             <a:xfrm>
-              <a:off x="817517" y="2917220"/>
-              <a:ext cx="7370972" cy="2395713"/>
+              <a:off x="817517" y="2827630"/>
+              <a:ext cx="7370972" cy="2494429"/>
             </a:xfrm>
             <a:custGeom>
               <a:avLst/>
               <a:pathLst>
-                <a:path w="7370972" h="2395713">
+                <a:path w="7370972" h="2494429">
                   <a:moveTo>
                     <a:pt x="0" y="0"/>
                   </a:moveTo>
                   <a:lnTo>
-                    <a:pt x="73372" y="62444"/>
-                  </a:lnTo>
-                  <a:lnTo>
-                    <a:pt x="151006" y="126859"/>
-                  </a:lnTo>
-                  <a:lnTo>
-                    <a:pt x="228640" y="189659"/>
-                  </a:lnTo>
-                  <a:lnTo>
-                    <a:pt x="306274" y="250885"/>
-                  </a:lnTo>
-                  <a:lnTo>
-                    <a:pt x="383908" y="310576"/>
-                  </a:lnTo>
-                  <a:lnTo>
-                    <a:pt x="461542" y="368771"/>
-                  </a:lnTo>
-                  <a:lnTo>
-                    <a:pt x="539176" y="425507"/>
-                  </a:lnTo>
-                  <a:lnTo>
-                    <a:pt x="616810" y="480820"/>
-                  </a:lnTo>
-                  <a:lnTo>
-                    <a:pt x="694444" y="534747"/>
-                  </a:lnTo>
-                  <a:lnTo>
-                    <a:pt x="772078" y="587322"/>
-                  </a:lnTo>
-                  <a:lnTo>
-                    <a:pt x="849712" y="638579"/>
-                  </a:lnTo>
-                  <a:lnTo>
-                    <a:pt x="927346" y="688551"/>
-                  </a:lnTo>
-                  <a:lnTo>
-                    <a:pt x="1004981" y="737270"/>
-                  </a:lnTo>
-                  <a:lnTo>
-                    <a:pt x="1082615" y="784768"/>
-                  </a:lnTo>
-                  <a:lnTo>
-                    <a:pt x="1160249" y="831076"/>
-                  </a:lnTo>
-                  <a:lnTo>
-                    <a:pt x="1237883" y="876222"/>
-                  </a:lnTo>
-                  <a:lnTo>
-                    <a:pt x="1315517" y="920237"/>
-                  </a:lnTo>
-                  <a:lnTo>
-                    <a:pt x="1393151" y="963148"/>
-                  </a:lnTo>
-                  <a:lnTo>
-                    <a:pt x="1470785" y="1004984"/>
-                  </a:lnTo>
-                  <a:lnTo>
-                    <a:pt x="1548419" y="1045770"/>
-                  </a:lnTo>
-                  <a:lnTo>
-                    <a:pt x="1626053" y="1085535"/>
-                  </a:lnTo>
-                  <a:lnTo>
-                    <a:pt x="1703687" y="1124302"/>
-                  </a:lnTo>
-                  <a:lnTo>
-                    <a:pt x="1781321" y="1162098"/>
-                  </a:lnTo>
-                  <a:lnTo>
-                    <a:pt x="1858955" y="1198946"/>
-                  </a:lnTo>
-                  <a:lnTo>
-                    <a:pt x="1936589" y="1234870"/>
-                  </a:lnTo>
-                  <a:lnTo>
-                    <a:pt x="2014223" y="1269894"/>
-                  </a:lnTo>
-                  <a:lnTo>
-                    <a:pt x="2091857" y="1304040"/>
-                  </a:lnTo>
-                  <a:lnTo>
-                    <a:pt x="2169491" y="1337330"/>
-                  </a:lnTo>
-                  <a:lnTo>
-                    <a:pt x="2247125" y="1369785"/>
-                  </a:lnTo>
-                  <a:lnTo>
-                    <a:pt x="2324759" y="1401427"/>
-                  </a:lnTo>
-                  <a:lnTo>
-                    <a:pt x="2402393" y="1432275"/>
-                  </a:lnTo>
-                  <a:lnTo>
-                    <a:pt x="2480027" y="1462351"/>
-                  </a:lnTo>
-                  <a:lnTo>
-                    <a:pt x="2557661" y="1491672"/>
-                  </a:lnTo>
-                  <a:lnTo>
-                    <a:pt x="2635295" y="1520258"/>
-                  </a:lnTo>
-                  <a:lnTo>
-                    <a:pt x="2712930" y="1548127"/>
-                  </a:lnTo>
-                  <a:lnTo>
-                    <a:pt x="2790564" y="1575298"/>
-                  </a:lnTo>
-                  <a:lnTo>
-                    <a:pt x="2868198" y="1601788"/>
-                  </a:lnTo>
-                  <a:lnTo>
-                    <a:pt x="2945832" y="1627614"/>
-                  </a:lnTo>
-                  <a:lnTo>
-                    <a:pt x="3023466" y="1652792"/>
-                  </a:lnTo>
-                  <a:lnTo>
-                    <a:pt x="3101100" y="1677339"/>
-                  </a:lnTo>
-                  <a:lnTo>
-                    <a:pt x="3178734" y="1701271"/>
-                  </a:lnTo>
-                  <a:lnTo>
-                    <a:pt x="3256368" y="1724603"/>
-                  </a:lnTo>
-                  <a:lnTo>
-                    <a:pt x="3334002" y="1747350"/>
-                  </a:lnTo>
-                  <a:lnTo>
-                    <a:pt x="3411636" y="1769526"/>
-                  </a:lnTo>
-                  <a:lnTo>
-                    <a:pt x="3489270" y="1791147"/>
-                  </a:lnTo>
-                  <a:lnTo>
-                    <a:pt x="3566904" y="1812226"/>
-                  </a:lnTo>
-                  <a:lnTo>
-                    <a:pt x="3644538" y="1832776"/>
-                  </a:lnTo>
-                  <a:lnTo>
-                    <a:pt x="3722172" y="1852811"/>
-                  </a:lnTo>
-                  <a:lnTo>
-                    <a:pt x="3799806" y="1872344"/>
-                  </a:lnTo>
-                  <a:lnTo>
-                    <a:pt x="3877440" y="1891387"/>
-                  </a:lnTo>
-                  <a:lnTo>
-                    <a:pt x="3955074" y="1909953"/>
-                  </a:lnTo>
-                  <a:lnTo>
-                    <a:pt x="4032708" y="1928054"/>
-                  </a:lnTo>
-                  <a:lnTo>
-                    <a:pt x="4110342" y="1945700"/>
-                  </a:lnTo>
-                  <a:lnTo>
-                    <a:pt x="4187976" y="1962904"/>
-                  </a:lnTo>
-                  <a:lnTo>
-                    <a:pt x="4265610" y="1979677"/>
-                  </a:lnTo>
-                  <a:lnTo>
-                    <a:pt x="4343244" y="1996030"/>
-                  </a:lnTo>
-                  <a:lnTo>
-                    <a:pt x="4420879" y="2011973"/>
-                  </a:lnTo>
-                  <a:lnTo>
-                    <a:pt x="4498513" y="2027516"/>
-                  </a:lnTo>
-                  <a:lnTo>
-                    <a:pt x="4576147" y="2042669"/>
-                  </a:lnTo>
-                  <a:lnTo>
-                    <a:pt x="4653781" y="2057442"/>
-                  </a:lnTo>
-                  <a:lnTo>
-                    <a:pt x="4731415" y="2071845"/>
-                  </a:lnTo>
-                  <a:lnTo>
-                    <a:pt x="4809049" y="2085887"/>
-                  </a:lnTo>
-                  <a:lnTo>
-                    <a:pt x="4886683" y="2099577"/>
-                  </a:lnTo>
-                  <a:lnTo>
-                    <a:pt x="4964317" y="2112924"/>
-                  </a:lnTo>
-                  <a:lnTo>
-                    <a:pt x="5041951" y="2125936"/>
-                  </a:lnTo>
-                  <a:lnTo>
-                    <a:pt x="5119585" y="2138622"/>
-                  </a:lnTo>
-                  <a:lnTo>
-                    <a:pt x="5197219" y="2150990"/>
-                  </a:lnTo>
-                  <a:lnTo>
-                    <a:pt x="5274853" y="2163048"/>
-                  </a:lnTo>
-                  <a:lnTo>
-                    <a:pt x="5352487" y="2174804"/>
-                  </a:lnTo>
-                  <a:lnTo>
-                    <a:pt x="5430121" y="2186265"/>
-                  </a:lnTo>
-                  <a:lnTo>
-                    <a:pt x="5507755" y="2197438"/>
-                  </a:lnTo>
-                  <a:lnTo>
-                    <a:pt x="5585389" y="2208332"/>
-                  </a:lnTo>
-                  <a:lnTo>
-                    <a:pt x="5663023" y="2218952"/>
-                  </a:lnTo>
-                  <a:lnTo>
-                    <a:pt x="5740657" y="2229307"/>
-                  </a:lnTo>
-                  <a:lnTo>
-                    <a:pt x="5818291" y="2239401"/>
-                  </a:lnTo>
-                  <a:lnTo>
-                    <a:pt x="5895925" y="2249243"/>
-                  </a:lnTo>
-                  <a:lnTo>
-                    <a:pt x="5973559" y="2258838"/>
-                  </a:lnTo>
-                  <a:lnTo>
-                    <a:pt x="6051193" y="2268192"/>
-                  </a:lnTo>
-                  <a:lnTo>
-                    <a:pt x="6128827" y="2277312"/>
-                  </a:lnTo>
-                  <a:lnTo>
-                    <a:pt x="6206462" y="2286203"/>
-                  </a:lnTo>
-                  <a:lnTo>
-                    <a:pt x="6284096" y="2294871"/>
-                  </a:lnTo>
-                  <a:lnTo>
-                    <a:pt x="6361730" y="2303322"/>
-                  </a:lnTo>
-                  <a:lnTo>
-                    <a:pt x="6439364" y="2311562"/>
-                  </a:lnTo>
-                  <a:lnTo>
-                    <a:pt x="6516998" y="2319594"/>
-                  </a:lnTo>
-                  <a:lnTo>
-                    <a:pt x="6594632" y="2327426"/>
-                  </a:lnTo>
-                  <a:lnTo>
-                    <a:pt x="6672266" y="2335060"/>
-                  </a:lnTo>
-                  <a:lnTo>
-                    <a:pt x="6749900" y="2342504"/>
-                  </a:lnTo>
-                  <a:lnTo>
-                    <a:pt x="6827534" y="2349761"/>
-                  </a:lnTo>
-                  <a:lnTo>
-                    <a:pt x="6905168" y="2356836"/>
-                  </a:lnTo>
-                  <a:lnTo>
-                    <a:pt x="6982802" y="2363734"/>
-                  </a:lnTo>
-                  <a:lnTo>
-                    <a:pt x="7060436" y="2370458"/>
-                  </a:lnTo>
-                  <a:lnTo>
-                    <a:pt x="7138070" y="2377015"/>
-                  </a:lnTo>
-                  <a:lnTo>
-                    <a:pt x="7215704" y="2383406"/>
-                  </a:lnTo>
-                  <a:lnTo>
-                    <a:pt x="7293338" y="2389638"/>
-                  </a:lnTo>
-                  <a:lnTo>
-                    <a:pt x="7370972" y="2395713"/>
+                    <a:pt x="73372" y="66499"/>
+                  </a:lnTo>
+                  <a:lnTo>
+                    <a:pt x="151006" y="135043"/>
+                  </a:lnTo>
+                  <a:lnTo>
+                    <a:pt x="228640" y="201819"/>
+                  </a:lnTo>
+                  <a:lnTo>
+                    <a:pt x="306274" y="266870"/>
+                  </a:lnTo>
+                  <a:lnTo>
+                    <a:pt x="383908" y="330242"/>
+                  </a:lnTo>
+                  <a:lnTo>
+                    <a:pt x="461542" y="391978"/>
+                  </a:lnTo>
+                  <a:lnTo>
+                    <a:pt x="539176" y="452120"/>
+                  </a:lnTo>
+                  <a:lnTo>
+                    <a:pt x="616810" y="510710"/>
+                  </a:lnTo>
+                  <a:lnTo>
+                    <a:pt x="694444" y="567787"/>
+                  </a:lnTo>
+                  <a:lnTo>
+                    <a:pt x="772078" y="623390"/>
+                  </a:lnTo>
+                  <a:lnTo>
+                    <a:pt x="849712" y="677558"/>
+                  </a:lnTo>
+                  <a:lnTo>
+                    <a:pt x="927346" y="730328"/>
+                  </a:lnTo>
+                  <a:lnTo>
+                    <a:pt x="1004981" y="781735"/>
+                  </a:lnTo>
+                  <a:lnTo>
+                    <a:pt x="1082615" y="831815"/>
+                  </a:lnTo>
+                  <a:lnTo>
+                    <a:pt x="1160249" y="880602"/>
+                  </a:lnTo>
+                  <a:lnTo>
+                    <a:pt x="1237883" y="928129"/>
+                  </a:lnTo>
+                  <a:lnTo>
+                    <a:pt x="1315517" y="974430"/>
+                  </a:lnTo>
+                  <a:lnTo>
+                    <a:pt x="1393151" y="1019535"/>
+                  </a:lnTo>
+                  <a:lnTo>
+                    <a:pt x="1470785" y="1063476"/>
+                  </a:lnTo>
+                  <a:lnTo>
+                    <a:pt x="1548419" y="1106283"/>
+                  </a:lnTo>
+                  <a:lnTo>
+                    <a:pt x="1626053" y="1147984"/>
+                  </a:lnTo>
+                  <a:lnTo>
+                    <a:pt x="1703687" y="1188609"/>
+                  </a:lnTo>
+                  <a:lnTo>
+                    <a:pt x="1781321" y="1228185"/>
+                  </a:lnTo>
+                  <a:lnTo>
+                    <a:pt x="1858955" y="1266739"/>
+                  </a:lnTo>
+                  <a:lnTo>
+                    <a:pt x="1936589" y="1304298"/>
+                  </a:lnTo>
+                  <a:lnTo>
+                    <a:pt x="2014223" y="1340887"/>
+                  </a:lnTo>
+                  <a:lnTo>
+                    <a:pt x="2091857" y="1376531"/>
+                  </a:lnTo>
+                  <a:lnTo>
+                    <a:pt x="2169491" y="1411256"/>
+                  </a:lnTo>
+                  <a:lnTo>
+                    <a:pt x="2247125" y="1445084"/>
+                  </a:lnTo>
+                  <a:lnTo>
+                    <a:pt x="2324759" y="1478038"/>
+                  </a:lnTo>
+                  <a:lnTo>
+                    <a:pt x="2402393" y="1510142"/>
+                  </a:lnTo>
+                  <a:lnTo>
+                    <a:pt x="2480027" y="1541417"/>
+                  </a:lnTo>
+                  <a:lnTo>
+                    <a:pt x="2557661" y="1571885"/>
+                  </a:lnTo>
+                  <a:lnTo>
+                    <a:pt x="2635295" y="1601566"/>
+                  </a:lnTo>
+                  <a:lnTo>
+                    <a:pt x="2712930" y="1630481"/>
+                  </a:lnTo>
+                  <a:lnTo>
+                    <a:pt x="2790564" y="1658649"/>
+                  </a:lnTo>
+                  <a:lnTo>
+                    <a:pt x="2868198" y="1686090"/>
+                  </a:lnTo>
+                  <a:lnTo>
+                    <a:pt x="2945832" y="1712823"/>
+                  </a:lnTo>
+                  <a:lnTo>
+                    <a:pt x="3023466" y="1738865"/>
+                  </a:lnTo>
+                  <a:lnTo>
+                    <a:pt x="3101100" y="1764236"/>
+                  </a:lnTo>
+                  <a:lnTo>
+                    <a:pt x="3178734" y="1788951"/>
+                  </a:lnTo>
+                  <a:lnTo>
+                    <a:pt x="3256368" y="1813028"/>
+                  </a:lnTo>
+                  <a:lnTo>
+                    <a:pt x="3334002" y="1836484"/>
+                  </a:lnTo>
+                  <a:lnTo>
+                    <a:pt x="3411636" y="1859334"/>
+                  </a:lnTo>
+                  <a:lnTo>
+                    <a:pt x="3489270" y="1881594"/>
+                  </a:lnTo>
+                  <a:lnTo>
+                    <a:pt x="3566904" y="1903279"/>
+                  </a:lnTo>
+                  <a:lnTo>
+                    <a:pt x="3644538" y="1924405"/>
+                  </a:lnTo>
+                  <a:lnTo>
+                    <a:pt x="3722172" y="1944985"/>
+                  </a:lnTo>
+                  <a:lnTo>
+                    <a:pt x="3799806" y="1965034"/>
+                  </a:lnTo>
+                  <a:lnTo>
+                    <a:pt x="3877440" y="1984565"/>
+                  </a:lnTo>
+                  <a:lnTo>
+                    <a:pt x="3955074" y="2003592"/>
+                  </a:lnTo>
+                  <a:lnTo>
+                    <a:pt x="4032708" y="2022128"/>
+                  </a:lnTo>
+                  <a:lnTo>
+                    <a:pt x="4110342" y="2040186"/>
+                  </a:lnTo>
+                  <a:lnTo>
+                    <a:pt x="4187976" y="2057777"/>
+                  </a:lnTo>
+                  <a:lnTo>
+                    <a:pt x="4265610" y="2074914"/>
+                  </a:lnTo>
+                  <a:lnTo>
+                    <a:pt x="4343244" y="2091608"/>
+                  </a:lnTo>
+                  <a:lnTo>
+                    <a:pt x="4420879" y="2107872"/>
+                  </a:lnTo>
+                  <a:lnTo>
+                    <a:pt x="4498513" y="2123716"/>
+                  </a:lnTo>
+                  <a:lnTo>
+                    <a:pt x="4576147" y="2139150"/>
+                  </a:lnTo>
+                  <a:lnTo>
+                    <a:pt x="4653781" y="2154187"/>
+                  </a:lnTo>
+                  <a:lnTo>
+                    <a:pt x="4731415" y="2168835"/>
+                  </a:lnTo>
+                  <a:lnTo>
+                    <a:pt x="4809049" y="2183105"/>
+                  </a:lnTo>
+                  <a:lnTo>
+                    <a:pt x="4886683" y="2197006"/>
+                  </a:lnTo>
+                  <a:lnTo>
+                    <a:pt x="4964317" y="2210549"/>
+                  </a:lnTo>
+                  <a:lnTo>
+                    <a:pt x="5041951" y="2223742"/>
+                  </a:lnTo>
+                  <a:lnTo>
+                    <a:pt x="5119585" y="2236594"/>
+                  </a:lnTo>
+                  <a:lnTo>
+                    <a:pt x="5197219" y="2249115"/>
+                  </a:lnTo>
+                  <a:lnTo>
+                    <a:pt x="5274853" y="2261312"/>
+                  </a:lnTo>
+                  <a:lnTo>
+                    <a:pt x="5352487" y="2273194"/>
+                  </a:lnTo>
+                  <a:lnTo>
+                    <a:pt x="5430121" y="2284770"/>
+                  </a:lnTo>
+                  <a:lnTo>
+                    <a:pt x="5507755" y="2296047"/>
+                  </a:lnTo>
+                  <a:lnTo>
+                    <a:pt x="5585389" y="2307033"/>
+                  </a:lnTo>
+                  <a:lnTo>
+                    <a:pt x="5663023" y="2317735"/>
+                  </a:lnTo>
+                  <a:lnTo>
+                    <a:pt x="5740657" y="2328160"/>
+                  </a:lnTo>
+                  <a:lnTo>
+                    <a:pt x="5818291" y="2338317"/>
+                  </a:lnTo>
+                  <a:lnTo>
+                    <a:pt x="5895925" y="2348212"/>
+                  </a:lnTo>
+                  <a:lnTo>
+                    <a:pt x="5973559" y="2357851"/>
+                  </a:lnTo>
+                  <a:lnTo>
+                    <a:pt x="6051193" y="2367241"/>
+                  </a:lnTo>
+                  <a:lnTo>
+                    <a:pt x="6128827" y="2376388"/>
+                  </a:lnTo>
+                  <a:lnTo>
+                    <a:pt x="6206462" y="2385300"/>
+                  </a:lnTo>
+                  <a:lnTo>
+                    <a:pt x="6284096" y="2393982"/>
+                  </a:lnTo>
+                  <a:lnTo>
+                    <a:pt x="6361730" y="2402439"/>
+                  </a:lnTo>
+                  <a:lnTo>
+                    <a:pt x="6439364" y="2410678"/>
+                  </a:lnTo>
+                  <a:lnTo>
+                    <a:pt x="6516998" y="2418704"/>
+                  </a:lnTo>
+                  <a:lnTo>
+                    <a:pt x="6594632" y="2426523"/>
+                  </a:lnTo>
+                  <a:lnTo>
+                    <a:pt x="6672266" y="2434141"/>
+                  </a:lnTo>
+                  <a:lnTo>
+                    <a:pt x="6749900" y="2441561"/>
+                  </a:lnTo>
+                  <a:lnTo>
+                    <a:pt x="6827534" y="2448790"/>
+                  </a:lnTo>
+                  <a:lnTo>
+                    <a:pt x="6905168" y="2455833"/>
+                  </a:lnTo>
+                  <a:lnTo>
+                    <a:pt x="6982802" y="2462693"/>
+                  </a:lnTo>
+                  <a:lnTo>
+                    <a:pt x="7060436" y="2469377"/>
+                  </a:lnTo>
+                  <a:lnTo>
+                    <a:pt x="7138070" y="2475888"/>
+                  </a:lnTo>
+                  <a:lnTo>
+                    <a:pt x="7215704" y="2482230"/>
+                  </a:lnTo>
+                  <a:lnTo>
+                    <a:pt x="7293338" y="2488410"/>
+                  </a:lnTo>
+                  <a:lnTo>
+                    <a:pt x="7370972" y="2494429"/>
                   </a:lnTo>
                 </a:path>
               </a:pathLst>

--- a/docs/plots/carbo/jx_carbo_linsubhr_ratio_grade2.pptx
+++ b/docs/plots/carbo/jx_carbo_linsubhr_ratio_grade2.pptx
@@ -3010,7 +3010,7 @@
               <a:pathLst>
                 <a:path w="7370972" h="3557280">
                   <a:moveTo>
-                    <a:pt x="799462" y="0"/>
+                    <a:pt x="799463" y="0"/>
                   </a:moveTo>
                   <a:lnTo>
                     <a:pt x="849712" y="101157"/>
@@ -3025,7 +3025,7 @@
                     <a:pt x="1082615" y="531585"/>
                   </a:lnTo>
                   <a:lnTo>
-                    <a:pt x="1160249" y="663140"/>
+                    <a:pt x="1160249" y="663139"/>
                   </a:lnTo>
                   <a:lnTo>
                     <a:pt x="1237883" y="789149"/>
@@ -3220,7 +3220,7 @@
                     <a:pt x="6128827" y="3025324"/>
                   </a:lnTo>
                   <a:lnTo>
-                    <a:pt x="6206462" y="3031097"/>
+                    <a:pt x="6206462" y="3031098"/>
                   </a:lnTo>
                   <a:lnTo>
                     <a:pt x="6284096" y="3036818"/>
@@ -3238,10 +3238,10 @@
                     <a:pt x="6594632" y="3059179"/>
                   </a:lnTo>
                   <a:lnTo>
-                    <a:pt x="6672266" y="3064641"/>
-                  </a:lnTo>
-                  <a:lnTo>
-                    <a:pt x="6749900" y="3070053"/>
+                    <a:pt x="6672266" y="3064642"/>
+                  </a:lnTo>
+                  <a:lnTo>
+                    <a:pt x="6749900" y="3070054"/>
                   </a:lnTo>
                   <a:lnTo>
                     <a:pt x="6827534" y="3075416"/>
@@ -3538,7 +3538,7 @@
                     <a:pt x="461542" y="2420565"/>
                   </a:lnTo>
                   <a:lnTo>
-                    <a:pt x="383908" y="2409120"/>
+                    <a:pt x="383908" y="2409119"/>
                   </a:lnTo>
                   <a:lnTo>
                     <a:pt x="306274" y="2397568"/>
@@ -3593,16 +3593,16 @@
                     <a:pt x="50249" y="101157"/>
                   </a:lnTo>
                   <a:lnTo>
-                    <a:pt x="127884" y="250854"/>
-                  </a:lnTo>
-                  <a:lnTo>
-                    <a:pt x="205518" y="394242"/>
+                    <a:pt x="127883" y="250854"/>
+                  </a:lnTo>
+                  <a:lnTo>
+                    <a:pt x="205517" y="394242"/>
                   </a:lnTo>
                   <a:lnTo>
                     <a:pt x="283152" y="531585"/>
                   </a:lnTo>
                   <a:lnTo>
-                    <a:pt x="360786" y="663140"/>
+                    <a:pt x="360786" y="663139"/>
                   </a:lnTo>
                   <a:lnTo>
                     <a:pt x="438420" y="789149"/>
@@ -3662,7 +3662,7 @@
                     <a:pt x="1835832" y="2333637"/>
                   </a:lnTo>
                   <a:lnTo>
-                    <a:pt x="1913467" y="2389234"/>
+                    <a:pt x="1913466" y="2389234"/>
                   </a:lnTo>
                   <a:lnTo>
                     <a:pt x="1991101" y="2442487"/>
@@ -3728,10 +3728,10 @@
                     <a:pt x="3543781" y="2876662"/>
                   </a:lnTo>
                   <a:lnTo>
-                    <a:pt x="3621416" y="2883805"/>
-                  </a:lnTo>
-                  <a:lnTo>
-                    <a:pt x="3699050" y="2890881"/>
+                    <a:pt x="3621415" y="2883805"/>
+                  </a:lnTo>
+                  <a:lnTo>
+                    <a:pt x="3699049" y="2890881"/>
                   </a:lnTo>
                   <a:lnTo>
                     <a:pt x="3776684" y="2897892"/>
@@ -3794,10 +3794,10 @@
                     <a:pt x="5251730" y="3019496"/>
                   </a:lnTo>
                   <a:lnTo>
-                    <a:pt x="5329365" y="3025324"/>
-                  </a:lnTo>
-                  <a:lnTo>
-                    <a:pt x="5406999" y="3031097"/>
+                    <a:pt x="5329364" y="3025324"/>
+                  </a:lnTo>
+                  <a:lnTo>
+                    <a:pt x="5406998" y="3031098"/>
                   </a:lnTo>
                   <a:lnTo>
                     <a:pt x="5484633" y="3036818"/>
@@ -3815,10 +3815,10 @@
                     <a:pt x="5795169" y="3059179"/>
                   </a:lnTo>
                   <a:lnTo>
-                    <a:pt x="5872803" y="3064641"/>
-                  </a:lnTo>
-                  <a:lnTo>
-                    <a:pt x="5950437" y="3070053"/>
+                    <a:pt x="5872803" y="3064642"/>
+                  </a:lnTo>
+                  <a:lnTo>
+                    <a:pt x="5950437" y="3070054"/>
                   </a:lnTo>
                   <a:lnTo>
                     <a:pt x="6028071" y="3075416"/>
@@ -3862,7 +3862,7 @@
           </p:nvSpPr>
           <p:spPr>
             <a:xfrm>
-              <a:off x="817517" y="4247500"/>
+              <a:off x="817517" y="4247499"/>
               <a:ext cx="7370972" cy="1206344"/>
             </a:xfrm>
             <a:custGeom>
@@ -3873,7 +3873,7 @@
                     <a:pt x="7370972" y="1206344"/>
                   </a:moveTo>
                   <a:lnTo>
-                    <a:pt x="7293338" y="1202147"/>
+                    <a:pt x="7293338" y="1202148"/>
                   </a:lnTo>
                   <a:lnTo>
                     <a:pt x="7215704" y="1197766"/>
@@ -3903,7 +3903,7 @@
                     <a:pt x="6594632" y="1155015"/>
                   </a:lnTo>
                   <a:lnTo>
-                    <a:pt x="6516998" y="1148559"/>
+                    <a:pt x="6516998" y="1148560"/>
                   </a:lnTo>
                   <a:lnTo>
                     <a:pt x="6439364" y="1141820"/>
@@ -3933,7 +3933,7 @@
                     <a:pt x="5818291" y="1076057"/>
                   </a:lnTo>
                   <a:lnTo>
-                    <a:pt x="5740657" y="1066127"/>
+                    <a:pt x="5740657" y="1066128"/>
                   </a:lnTo>
                   <a:lnTo>
                     <a:pt x="5663023" y="1055761"/>
@@ -3969,13 +3969,13 @@
                     <a:pt x="4886683" y="923380"/>
                   </a:lnTo>
                   <a:lnTo>
-                    <a:pt x="4809049" y="906731"/>
-                  </a:lnTo>
-                  <a:lnTo>
-                    <a:pt x="4731415" y="889350"/>
-                  </a:lnTo>
-                  <a:lnTo>
-                    <a:pt x="4653781" y="871204"/>
+                    <a:pt x="4809049" y="906732"/>
+                  </a:lnTo>
+                  <a:lnTo>
+                    <a:pt x="4731415" y="889351"/>
+                  </a:lnTo>
+                  <a:lnTo>
+                    <a:pt x="4653781" y="871205"/>
                   </a:lnTo>
                   <a:lnTo>
                     <a:pt x="4576147" y="852260"/>
@@ -3987,7 +3987,7 @@
                     <a:pt x="4420879" y="811834"/>
                   </a:lnTo>
                   <a:lnTo>
-                    <a:pt x="4343244" y="790276"/>
+                    <a:pt x="4343244" y="790277"/>
                   </a:lnTo>
                   <a:lnTo>
                     <a:pt x="4265610" y="767771"/>
@@ -4008,7 +4008,7 @@
                     <a:pt x="3877440" y="639486"/>
                   </a:lnTo>
                   <a:lnTo>
-                    <a:pt x="3799806" y="610344"/>
+                    <a:pt x="3799806" y="610345"/>
                   </a:lnTo>
                   <a:lnTo>
                     <a:pt x="3722172" y="579921"/>
@@ -4029,7 +4029,7 @@
                     <a:pt x="3334002" y="426611"/>
                   </a:lnTo>
                   <a:lnTo>
-                    <a:pt x="3256368" y="418481"/>
+                    <a:pt x="3256368" y="418482"/>
                   </a:lnTo>
                   <a:lnTo>
                     <a:pt x="3178734" y="410277"/>
@@ -4071,16 +4071,16 @@
                     <a:pt x="2247125" y="305668"/>
                   </a:lnTo>
                   <a:lnTo>
-                    <a:pt x="2169491" y="296415"/>
+                    <a:pt x="2169491" y="296416"/>
                   </a:lnTo>
                   <a:lnTo>
                     <a:pt x="2091857" y="287077"/>
                   </a:lnTo>
                   <a:lnTo>
-                    <a:pt x="2014223" y="277651"/>
-                  </a:lnTo>
-                  <a:lnTo>
-                    <a:pt x="1936589" y="268138"/>
+                    <a:pt x="2014223" y="277652"/>
+                  </a:lnTo>
+                  <a:lnTo>
+                    <a:pt x="1936589" y="268139"/>
                   </a:lnTo>
                   <a:lnTo>
                     <a:pt x="1858955" y="258537"/>
@@ -4175,7 +4175,7 @@
           </p:nvSpPr>
           <p:spPr>
             <a:xfrm>
-              <a:off x="817517" y="2827630"/>
+              <a:off x="817517" y="2827629"/>
               <a:ext cx="7370972" cy="2494429"/>
             </a:xfrm>
             <a:custGeom>
@@ -4189,7 +4189,7 @@
                     <a:pt x="73372" y="66499"/>
                   </a:lnTo>
                   <a:lnTo>
-                    <a:pt x="151006" y="135043"/>
+                    <a:pt x="151006" y="135044"/>
                   </a:lnTo>
                   <a:lnTo>
                     <a:pt x="228640" y="201819"/>
@@ -4231,13 +4231,13 @@
                     <a:pt x="1160249" y="880602"/>
                   </a:lnTo>
                   <a:lnTo>
-                    <a:pt x="1237883" y="928129"/>
+                    <a:pt x="1237883" y="928130"/>
                   </a:lnTo>
                   <a:lnTo>
                     <a:pt x="1315517" y="974430"/>
                   </a:lnTo>
                   <a:lnTo>
-                    <a:pt x="1393151" y="1019535"/>
+                    <a:pt x="1393151" y="1019536"/>
                   </a:lnTo>
                   <a:lnTo>
                     <a:pt x="1470785" y="1063476"/>
@@ -4264,7 +4264,7 @@
                     <a:pt x="2014223" y="1340887"/>
                   </a:lnTo>
                   <a:lnTo>
-                    <a:pt x="2091857" y="1376531"/>
+                    <a:pt x="2091857" y="1376532"/>
                   </a:lnTo>
                   <a:lnTo>
                     <a:pt x="2169491" y="1411256"/>
@@ -4273,13 +4273,13 @@
                     <a:pt x="2247125" y="1445084"/>
                   </a:lnTo>
                   <a:lnTo>
-                    <a:pt x="2324759" y="1478038"/>
-                  </a:lnTo>
-                  <a:lnTo>
-                    <a:pt x="2402393" y="1510142"/>
-                  </a:lnTo>
-                  <a:lnTo>
-                    <a:pt x="2480027" y="1541417"/>
+                    <a:pt x="2324759" y="1478039"/>
+                  </a:lnTo>
+                  <a:lnTo>
+                    <a:pt x="2402393" y="1510143"/>
+                  </a:lnTo>
+                  <a:lnTo>
+                    <a:pt x="2480027" y="1541418"/>
                   </a:lnTo>
                   <a:lnTo>
                     <a:pt x="2557661" y="1571885"/>
@@ -4294,13 +4294,13 @@
                     <a:pt x="2790564" y="1658649"/>
                   </a:lnTo>
                   <a:lnTo>
-                    <a:pt x="2868198" y="1686090"/>
+                    <a:pt x="2868198" y="1686091"/>
                   </a:lnTo>
                   <a:lnTo>
                     <a:pt x="2945832" y="1712823"/>
                   </a:lnTo>
                   <a:lnTo>
-                    <a:pt x="3023466" y="1738865"/>
+                    <a:pt x="3023466" y="1738866"/>
                   </a:lnTo>
                   <a:lnTo>
                     <a:pt x="3101100" y="1764236"/>
@@ -4321,7 +4321,7 @@
                     <a:pt x="3489270" y="1881594"/>
                   </a:lnTo>
                   <a:lnTo>
-                    <a:pt x="3566904" y="1903279"/>
+                    <a:pt x="3566904" y="1903280"/>
                   </a:lnTo>
                   <a:lnTo>
                     <a:pt x="3644538" y="1924405"/>
@@ -4333,13 +4333,13 @@
                     <a:pt x="3799806" y="1965034"/>
                   </a:lnTo>
                   <a:lnTo>
-                    <a:pt x="3877440" y="1984565"/>
-                  </a:lnTo>
-                  <a:lnTo>
-                    <a:pt x="3955074" y="2003592"/>
-                  </a:lnTo>
-                  <a:lnTo>
-                    <a:pt x="4032708" y="2022128"/>
+                    <a:pt x="3877440" y="1984566"/>
+                  </a:lnTo>
+                  <a:lnTo>
+                    <a:pt x="3955074" y="2003593"/>
+                  </a:lnTo>
+                  <a:lnTo>
+                    <a:pt x="4032708" y="2022129"/>
                   </a:lnTo>
                   <a:lnTo>
                     <a:pt x="4110342" y="2040186"/>
@@ -4351,7 +4351,7 @@
                     <a:pt x="4265610" y="2074914"/>
                   </a:lnTo>
                   <a:lnTo>
-                    <a:pt x="4343244" y="2091608"/>
+                    <a:pt x="4343244" y="2091609"/>
                   </a:lnTo>
                   <a:lnTo>
                     <a:pt x="4420879" y="2107872"/>
@@ -4360,7 +4360,7 @@
                     <a:pt x="4498513" y="2123716"/>
                   </a:lnTo>
                   <a:lnTo>
-                    <a:pt x="4576147" y="2139150"/>
+                    <a:pt x="4576147" y="2139151"/>
                   </a:lnTo>
                   <a:lnTo>
                     <a:pt x="4653781" y="2154187"/>
@@ -4390,7 +4390,7 @@
                     <a:pt x="5274853" y="2261312"/>
                   </a:lnTo>
                   <a:lnTo>
-                    <a:pt x="5352487" y="2273194"/>
+                    <a:pt x="5352487" y="2273195"/>
                   </a:lnTo>
                   <a:lnTo>
                     <a:pt x="5430121" y="2284770"/>
@@ -4405,7 +4405,7 @@
                     <a:pt x="5663023" y="2317735"/>
                   </a:lnTo>
                   <a:lnTo>
-                    <a:pt x="5740657" y="2328160"/>
+                    <a:pt x="5740657" y="2328161"/>
                   </a:lnTo>
                   <a:lnTo>
                     <a:pt x="5818291" y="2338317"/>
@@ -4420,7 +4420,7 @@
                     <a:pt x="6051193" y="2367241"/>
                   </a:lnTo>
                   <a:lnTo>
-                    <a:pt x="6128827" y="2376388"/>
+                    <a:pt x="6128827" y="2376389"/>
                   </a:lnTo>
                   <a:lnTo>
                     <a:pt x="6206462" y="2385300"/>
@@ -4435,25 +4435,25 @@
                     <a:pt x="6439364" y="2410678"/>
                   </a:lnTo>
                   <a:lnTo>
-                    <a:pt x="6516998" y="2418704"/>
-                  </a:lnTo>
-                  <a:lnTo>
-                    <a:pt x="6594632" y="2426523"/>
+                    <a:pt x="6516998" y="2418705"/>
+                  </a:lnTo>
+                  <a:lnTo>
+                    <a:pt x="6594632" y="2426524"/>
                   </a:lnTo>
                   <a:lnTo>
                     <a:pt x="6672266" y="2434141"/>
                   </a:lnTo>
                   <a:lnTo>
-                    <a:pt x="6749900" y="2441561"/>
-                  </a:lnTo>
-                  <a:lnTo>
-                    <a:pt x="6827534" y="2448790"/>
+                    <a:pt x="6749900" y="2441562"/>
+                  </a:lnTo>
+                  <a:lnTo>
+                    <a:pt x="6827534" y="2448791"/>
                   </a:lnTo>
                   <a:lnTo>
                     <a:pt x="6905168" y="2455833"/>
                   </a:lnTo>
                   <a:lnTo>
-                    <a:pt x="6982802" y="2462693"/>
+                    <a:pt x="6982802" y="2462694"/>
                   </a:lnTo>
                   <a:lnTo>
                     <a:pt x="7060436" y="2469377"/>
@@ -4462,7 +4462,7 @@
                     <a:pt x="7138070" y="2475888"/>
                   </a:lnTo>
                   <a:lnTo>
-                    <a:pt x="7215704" y="2482230"/>
+                    <a:pt x="7215704" y="2482231"/>
                   </a:lnTo>
                   <a:lnTo>
                     <a:pt x="7293338" y="2488410"/>

--- a/docs/plots/carbo/jx_carbo_linsubhr_ratio_grade2.pptx
+++ b/docs/plots/carbo/jx_carbo_linsubhr_ratio_grade2.pptx
@@ -3002,558 +3002,588 @@
           </p:nvSpPr>
           <p:spPr>
             <a:xfrm>
-              <a:off x="817517" y="1896563"/>
-              <a:ext cx="7370972" cy="3557280"/>
+              <a:off x="817517" y="1998086"/>
+              <a:ext cx="7370972" cy="3385032"/>
             </a:xfrm>
             <a:custGeom>
               <a:avLst/>
               <a:pathLst>
-                <a:path w="7370972" h="3557280">
+                <a:path w="7370972" h="3385032">
                   <a:moveTo>
-                    <a:pt x="799463" y="0"/>
+                    <a:pt x="0" y="0"/>
                   </a:moveTo>
                   <a:lnTo>
-                    <a:pt x="849712" y="101157"/>
-                  </a:lnTo>
-                  <a:lnTo>
-                    <a:pt x="927346" y="250854"/>
-                  </a:lnTo>
-                  <a:lnTo>
-                    <a:pt x="1004981" y="394242"/>
-                  </a:lnTo>
-                  <a:lnTo>
-                    <a:pt x="1082615" y="531585"/>
-                  </a:lnTo>
-                  <a:lnTo>
-                    <a:pt x="1160249" y="663139"/>
-                  </a:lnTo>
-                  <a:lnTo>
-                    <a:pt x="1237883" y="789149"/>
-                  </a:lnTo>
-                  <a:lnTo>
-                    <a:pt x="1315517" y="909847"/>
-                  </a:lnTo>
-                  <a:lnTo>
-                    <a:pt x="1393151" y="1025457"/>
-                  </a:lnTo>
-                  <a:lnTo>
-                    <a:pt x="1470785" y="1136194"/>
-                  </a:lnTo>
-                  <a:lnTo>
-                    <a:pt x="1548419" y="1242264"/>
-                  </a:lnTo>
-                  <a:lnTo>
-                    <a:pt x="1626053" y="1343863"/>
-                  </a:lnTo>
-                  <a:lnTo>
-                    <a:pt x="1703687" y="1441179"/>
-                  </a:lnTo>
-                  <a:lnTo>
-                    <a:pt x="1781321" y="1534394"/>
-                  </a:lnTo>
-                  <a:lnTo>
-                    <a:pt x="1858955" y="1623679"/>
-                  </a:lnTo>
-                  <a:lnTo>
-                    <a:pt x="1936589" y="1709201"/>
-                  </a:lnTo>
-                  <a:lnTo>
-                    <a:pt x="2014223" y="1791118"/>
-                  </a:lnTo>
-                  <a:lnTo>
-                    <a:pt x="2091857" y="1869583"/>
-                  </a:lnTo>
-                  <a:lnTo>
-                    <a:pt x="2169491" y="1944740"/>
-                  </a:lnTo>
-                  <a:lnTo>
-                    <a:pt x="2247125" y="2016729"/>
-                  </a:lnTo>
-                  <a:lnTo>
-                    <a:pt x="2324759" y="2085683"/>
-                  </a:lnTo>
-                  <a:lnTo>
-                    <a:pt x="2402393" y="2151732"/>
-                  </a:lnTo>
-                  <a:lnTo>
-                    <a:pt x="2480027" y="2214996"/>
-                  </a:lnTo>
-                  <a:lnTo>
-                    <a:pt x="2557661" y="2275594"/>
-                  </a:lnTo>
-                  <a:lnTo>
-                    <a:pt x="2635295" y="2333637"/>
-                  </a:lnTo>
-                  <a:lnTo>
-                    <a:pt x="2712930" y="2389234"/>
-                  </a:lnTo>
-                  <a:lnTo>
-                    <a:pt x="2790564" y="2442487"/>
-                  </a:lnTo>
-                  <a:lnTo>
-                    <a:pt x="2868198" y="2493496"/>
-                  </a:lnTo>
-                  <a:lnTo>
-                    <a:pt x="2945832" y="2542355"/>
-                  </a:lnTo>
-                  <a:lnTo>
-                    <a:pt x="3023466" y="2589154"/>
-                  </a:lnTo>
-                  <a:lnTo>
-                    <a:pt x="3101100" y="2633981"/>
-                  </a:lnTo>
-                  <a:lnTo>
-                    <a:pt x="3178734" y="2676918"/>
-                  </a:lnTo>
-                  <a:lnTo>
-                    <a:pt x="3256368" y="2718045"/>
-                  </a:lnTo>
-                  <a:lnTo>
-                    <a:pt x="3334002" y="2757439"/>
-                  </a:lnTo>
-                  <a:lnTo>
-                    <a:pt x="3411636" y="2785602"/>
-                  </a:lnTo>
-                  <a:lnTo>
-                    <a:pt x="3489270" y="2793582"/>
-                  </a:lnTo>
-                  <a:lnTo>
-                    <a:pt x="3566904" y="2801489"/>
-                  </a:lnTo>
-                  <a:lnTo>
-                    <a:pt x="3644538" y="2809323"/>
-                  </a:lnTo>
-                  <a:lnTo>
-                    <a:pt x="3722172" y="2817085"/>
-                  </a:lnTo>
-                  <a:lnTo>
-                    <a:pt x="3799806" y="2824775"/>
-                  </a:lnTo>
-                  <a:lnTo>
-                    <a:pt x="3877440" y="2832395"/>
-                  </a:lnTo>
-                  <a:lnTo>
-                    <a:pt x="3955074" y="2839944"/>
-                  </a:lnTo>
-                  <a:lnTo>
-                    <a:pt x="4032708" y="2847424"/>
-                  </a:lnTo>
-                  <a:lnTo>
-                    <a:pt x="4110342" y="2854836"/>
-                  </a:lnTo>
-                  <a:lnTo>
-                    <a:pt x="4187976" y="2862179"/>
-                  </a:lnTo>
-                  <a:lnTo>
-                    <a:pt x="4265610" y="2869454"/>
-                  </a:lnTo>
-                  <a:lnTo>
-                    <a:pt x="4343244" y="2876662"/>
-                  </a:lnTo>
-                  <a:lnTo>
-                    <a:pt x="4420879" y="2883805"/>
-                  </a:lnTo>
-                  <a:lnTo>
-                    <a:pt x="4498513" y="2890881"/>
-                  </a:lnTo>
-                  <a:lnTo>
-                    <a:pt x="4576147" y="2897892"/>
-                  </a:lnTo>
-                  <a:lnTo>
-                    <a:pt x="4653781" y="2904839"/>
-                  </a:lnTo>
-                  <a:lnTo>
-                    <a:pt x="4731415" y="2911722"/>
-                  </a:lnTo>
-                  <a:lnTo>
-                    <a:pt x="4809049" y="2918541"/>
-                  </a:lnTo>
-                  <a:lnTo>
-                    <a:pt x="4886683" y="2925298"/>
-                  </a:lnTo>
-                  <a:lnTo>
-                    <a:pt x="4964317" y="2931992"/>
-                  </a:lnTo>
-                  <a:lnTo>
-                    <a:pt x="5041951" y="2938625"/>
-                  </a:lnTo>
-                  <a:lnTo>
-                    <a:pt x="5119585" y="2945197"/>
-                  </a:lnTo>
-                  <a:lnTo>
-                    <a:pt x="5197219" y="2951708"/>
-                  </a:lnTo>
-                  <a:lnTo>
-                    <a:pt x="5274853" y="2958160"/>
-                  </a:lnTo>
-                  <a:lnTo>
-                    <a:pt x="5352487" y="2964552"/>
-                  </a:lnTo>
-                  <a:lnTo>
-                    <a:pt x="5430121" y="2970885"/>
-                  </a:lnTo>
-                  <a:lnTo>
-                    <a:pt x="5507755" y="2977160"/>
-                  </a:lnTo>
-                  <a:lnTo>
-                    <a:pt x="5585389" y="2983377"/>
-                  </a:lnTo>
-                  <a:lnTo>
-                    <a:pt x="5663023" y="2989537"/>
-                  </a:lnTo>
-                  <a:lnTo>
-                    <a:pt x="5740657" y="2995640"/>
-                  </a:lnTo>
-                  <a:lnTo>
-                    <a:pt x="5818291" y="3001687"/>
-                  </a:lnTo>
-                  <a:lnTo>
-                    <a:pt x="5895925" y="3007678"/>
-                  </a:lnTo>
-                  <a:lnTo>
-                    <a:pt x="5973559" y="3013615"/>
-                  </a:lnTo>
-                  <a:lnTo>
-                    <a:pt x="6051193" y="3019496"/>
-                  </a:lnTo>
-                  <a:lnTo>
-                    <a:pt x="6128827" y="3025324"/>
-                  </a:lnTo>
-                  <a:lnTo>
-                    <a:pt x="6206462" y="3031098"/>
-                  </a:lnTo>
-                  <a:lnTo>
-                    <a:pt x="6284096" y="3036818"/>
-                  </a:lnTo>
-                  <a:lnTo>
-                    <a:pt x="6361730" y="3042486"/>
-                  </a:lnTo>
-                  <a:lnTo>
-                    <a:pt x="6439364" y="3048102"/>
-                  </a:lnTo>
-                  <a:lnTo>
-                    <a:pt x="6516998" y="3053666"/>
-                  </a:lnTo>
-                  <a:lnTo>
-                    <a:pt x="6594632" y="3059179"/>
-                  </a:lnTo>
-                  <a:lnTo>
-                    <a:pt x="6672266" y="3064642"/>
-                  </a:lnTo>
-                  <a:lnTo>
-                    <a:pt x="6749900" y="3070054"/>
-                  </a:lnTo>
-                  <a:lnTo>
-                    <a:pt x="6827534" y="3075416"/>
-                  </a:lnTo>
-                  <a:lnTo>
-                    <a:pt x="6905168" y="3080728"/>
-                  </a:lnTo>
-                  <a:lnTo>
-                    <a:pt x="6982802" y="3085992"/>
-                  </a:lnTo>
-                  <a:lnTo>
-                    <a:pt x="7060436" y="3091208"/>
-                  </a:lnTo>
-                  <a:lnTo>
-                    <a:pt x="7138070" y="3096375"/>
-                  </a:lnTo>
-                  <a:lnTo>
-                    <a:pt x="7215704" y="3101495"/>
-                  </a:lnTo>
-                  <a:lnTo>
-                    <a:pt x="7293338" y="3106568"/>
-                  </a:lnTo>
-                  <a:lnTo>
-                    <a:pt x="7370972" y="3111594"/>
-                  </a:lnTo>
-                  <a:lnTo>
-                    <a:pt x="7370972" y="3557280"/>
-                  </a:lnTo>
-                  <a:lnTo>
-                    <a:pt x="7293338" y="3553084"/>
-                  </a:lnTo>
-                  <a:lnTo>
-                    <a:pt x="7215704" y="3548703"/>
-                  </a:lnTo>
-                  <a:lnTo>
-                    <a:pt x="7138070" y="3544129"/>
-                  </a:lnTo>
-                  <a:lnTo>
-                    <a:pt x="7060436" y="3539354"/>
-                  </a:lnTo>
-                  <a:lnTo>
-                    <a:pt x="6982802" y="3534368"/>
-                  </a:lnTo>
-                  <a:lnTo>
-                    <a:pt x="6905168" y="3529164"/>
-                  </a:lnTo>
-                  <a:lnTo>
-                    <a:pt x="6827534" y="3523730"/>
-                  </a:lnTo>
-                  <a:lnTo>
-                    <a:pt x="6749900" y="3518057"/>
-                  </a:lnTo>
-                  <a:lnTo>
-                    <a:pt x="6672266" y="3512134"/>
-                  </a:lnTo>
-                  <a:lnTo>
-                    <a:pt x="6594632" y="3505951"/>
-                  </a:lnTo>
-                  <a:lnTo>
-                    <a:pt x="6516998" y="3499496"/>
-                  </a:lnTo>
-                  <a:lnTo>
-                    <a:pt x="6439364" y="3492757"/>
-                  </a:lnTo>
-                  <a:lnTo>
-                    <a:pt x="6361730" y="3485721"/>
-                  </a:lnTo>
-                  <a:lnTo>
-                    <a:pt x="6284096" y="3478375"/>
-                  </a:lnTo>
-                  <a:lnTo>
-                    <a:pt x="6206462" y="3470707"/>
-                  </a:lnTo>
-                  <a:lnTo>
-                    <a:pt x="6128827" y="3462700"/>
-                  </a:lnTo>
-                  <a:lnTo>
-                    <a:pt x="6051193" y="3454342"/>
-                  </a:lnTo>
-                  <a:lnTo>
-                    <a:pt x="5973559" y="3445615"/>
-                  </a:lnTo>
-                  <a:lnTo>
-                    <a:pt x="5895925" y="3436505"/>
-                  </a:lnTo>
-                  <a:lnTo>
-                    <a:pt x="5818291" y="3426994"/>
-                  </a:lnTo>
-                  <a:lnTo>
-                    <a:pt x="5740657" y="3417064"/>
-                  </a:lnTo>
-                  <a:lnTo>
-                    <a:pt x="5663023" y="3406697"/>
-                  </a:lnTo>
-                  <a:lnTo>
-                    <a:pt x="5585389" y="3395874"/>
-                  </a:lnTo>
-                  <a:lnTo>
-                    <a:pt x="5507755" y="3384575"/>
-                  </a:lnTo>
-                  <a:lnTo>
-                    <a:pt x="5430121" y="3372779"/>
-                  </a:lnTo>
-                  <a:lnTo>
-                    <a:pt x="5352487" y="3360463"/>
-                  </a:lnTo>
-                  <a:lnTo>
-                    <a:pt x="5274853" y="3347606"/>
-                  </a:lnTo>
-                  <a:lnTo>
-                    <a:pt x="5197219" y="3334182"/>
-                  </a:lnTo>
-                  <a:lnTo>
-                    <a:pt x="5119585" y="3320168"/>
-                  </a:lnTo>
-                  <a:lnTo>
-                    <a:pt x="5041951" y="3305538"/>
-                  </a:lnTo>
-                  <a:lnTo>
-                    <a:pt x="4964317" y="3290263"/>
-                  </a:lnTo>
-                  <a:lnTo>
-                    <a:pt x="4886683" y="3274316"/>
-                  </a:lnTo>
-                  <a:lnTo>
-                    <a:pt x="4809049" y="3257668"/>
-                  </a:lnTo>
-                  <a:lnTo>
-                    <a:pt x="4731415" y="3240287"/>
-                  </a:lnTo>
-                  <a:lnTo>
-                    <a:pt x="4653781" y="3222141"/>
-                  </a:lnTo>
-                  <a:lnTo>
-                    <a:pt x="4576147" y="3203197"/>
-                  </a:lnTo>
-                  <a:lnTo>
-                    <a:pt x="4498513" y="3183419"/>
-                  </a:lnTo>
-                  <a:lnTo>
-                    <a:pt x="4420879" y="3162770"/>
-                  </a:lnTo>
-                  <a:lnTo>
-                    <a:pt x="4343244" y="3141213"/>
-                  </a:lnTo>
-                  <a:lnTo>
-                    <a:pt x="4265610" y="3118707"/>
-                  </a:lnTo>
-                  <a:lnTo>
-                    <a:pt x="4187976" y="3095211"/>
-                  </a:lnTo>
-                  <a:lnTo>
-                    <a:pt x="4110342" y="3070681"/>
-                  </a:lnTo>
-                  <a:lnTo>
-                    <a:pt x="4032708" y="3045072"/>
-                  </a:lnTo>
-                  <a:lnTo>
-                    <a:pt x="3955074" y="3018335"/>
-                  </a:lnTo>
-                  <a:lnTo>
-                    <a:pt x="3877440" y="2990422"/>
-                  </a:lnTo>
-                  <a:lnTo>
-                    <a:pt x="3799806" y="2961281"/>
-                  </a:lnTo>
-                  <a:lnTo>
-                    <a:pt x="3722172" y="2930857"/>
-                  </a:lnTo>
-                  <a:lnTo>
-                    <a:pt x="3644538" y="2899095"/>
-                  </a:lnTo>
-                  <a:lnTo>
-                    <a:pt x="3566904" y="2865935"/>
-                  </a:lnTo>
-                  <a:lnTo>
-                    <a:pt x="3489270" y="2831315"/>
-                  </a:lnTo>
-                  <a:lnTo>
-                    <a:pt x="3411636" y="2795172"/>
-                  </a:lnTo>
-                  <a:lnTo>
-                    <a:pt x="3334002" y="2777547"/>
-                  </a:lnTo>
-                  <a:lnTo>
-                    <a:pt x="3256368" y="2769418"/>
-                  </a:lnTo>
-                  <a:lnTo>
-                    <a:pt x="3178734" y="2761213"/>
-                  </a:lnTo>
-                  <a:lnTo>
-                    <a:pt x="3101100" y="2752932"/>
-                  </a:lnTo>
-                  <a:lnTo>
-                    <a:pt x="3023466" y="2744575"/>
-                  </a:lnTo>
-                  <a:lnTo>
-                    <a:pt x="2945832" y="2736139"/>
-                  </a:lnTo>
-                  <a:lnTo>
-                    <a:pt x="2868198" y="2727625"/>
-                  </a:lnTo>
-                  <a:lnTo>
-                    <a:pt x="2790564" y="2719032"/>
-                  </a:lnTo>
-                  <a:lnTo>
-                    <a:pt x="2712930" y="2710360"/>
-                  </a:lnTo>
-                  <a:lnTo>
-                    <a:pt x="2635295" y="2701606"/>
-                  </a:lnTo>
-                  <a:lnTo>
-                    <a:pt x="2557661" y="2692772"/>
-                  </a:lnTo>
-                  <a:lnTo>
-                    <a:pt x="2480027" y="2683855"/>
-                  </a:lnTo>
-                  <a:lnTo>
-                    <a:pt x="2402393" y="2674855"/>
-                  </a:lnTo>
-                  <a:lnTo>
-                    <a:pt x="2324759" y="2665772"/>
-                  </a:lnTo>
-                  <a:lnTo>
-                    <a:pt x="2247125" y="2656605"/>
-                  </a:lnTo>
-                  <a:lnTo>
-                    <a:pt x="2169491" y="2647352"/>
-                  </a:lnTo>
-                  <a:lnTo>
-                    <a:pt x="2091857" y="2638013"/>
-                  </a:lnTo>
-                  <a:lnTo>
-                    <a:pt x="2014223" y="2628588"/>
-                  </a:lnTo>
-                  <a:lnTo>
-                    <a:pt x="1936589" y="2619075"/>
-                  </a:lnTo>
-                  <a:lnTo>
-                    <a:pt x="1858955" y="2609474"/>
-                  </a:lnTo>
-                  <a:lnTo>
-                    <a:pt x="1781321" y="2599783"/>
-                  </a:lnTo>
-                  <a:lnTo>
-                    <a:pt x="1703687" y="2590003"/>
-                  </a:lnTo>
-                  <a:lnTo>
-                    <a:pt x="1626053" y="2580131"/>
-                  </a:lnTo>
-                  <a:lnTo>
-                    <a:pt x="1548419" y="2570168"/>
-                  </a:lnTo>
-                  <a:lnTo>
-                    <a:pt x="1470785" y="2560113"/>
-                  </a:lnTo>
-                  <a:lnTo>
-                    <a:pt x="1393151" y="2549964"/>
-                  </a:lnTo>
-                  <a:lnTo>
-                    <a:pt x="1315517" y="2539720"/>
-                  </a:lnTo>
-                  <a:lnTo>
-                    <a:pt x="1237883" y="2529382"/>
-                  </a:lnTo>
-                  <a:lnTo>
-                    <a:pt x="1160249" y="2518947"/>
-                  </a:lnTo>
-                  <a:lnTo>
-                    <a:pt x="1082615" y="2508416"/>
-                  </a:lnTo>
-                  <a:lnTo>
-                    <a:pt x="1004981" y="2497787"/>
-                  </a:lnTo>
-                  <a:lnTo>
-                    <a:pt x="927346" y="2487059"/>
-                  </a:lnTo>
-                  <a:lnTo>
-                    <a:pt x="849712" y="2476231"/>
-                  </a:lnTo>
-                  <a:lnTo>
-                    <a:pt x="772078" y="2465303"/>
-                  </a:lnTo>
-                  <a:lnTo>
-                    <a:pt x="694444" y="2454273"/>
-                  </a:lnTo>
-                  <a:lnTo>
-                    <a:pt x="616810" y="2443141"/>
-                  </a:lnTo>
-                  <a:lnTo>
-                    <a:pt x="539176" y="2431905"/>
-                  </a:lnTo>
-                  <a:lnTo>
-                    <a:pt x="461542" y="2420565"/>
-                  </a:lnTo>
-                  <a:lnTo>
-                    <a:pt x="383908" y="2409119"/>
-                  </a:lnTo>
-                  <a:lnTo>
-                    <a:pt x="306274" y="2397568"/>
-                  </a:lnTo>
-                  <a:lnTo>
-                    <a:pt x="228640" y="2385909"/>
-                  </a:lnTo>
-                  <a:lnTo>
-                    <a:pt x="151006" y="2374142"/>
-                  </a:lnTo>
-                  <a:lnTo>
-                    <a:pt x="73372" y="2362265"/>
-                  </a:lnTo>
-                  <a:lnTo>
-                    <a:pt x="0" y="2350936"/>
+                    <a:pt x="73372" y="106713"/>
+                  </a:lnTo>
+                  <a:lnTo>
+                    <a:pt x="151006" y="216040"/>
+                  </a:lnTo>
+                  <a:lnTo>
+                    <a:pt x="228640" y="321897"/>
+                  </a:lnTo>
+                  <a:lnTo>
+                    <a:pt x="306274" y="424394"/>
+                  </a:lnTo>
+                  <a:lnTo>
+                    <a:pt x="383908" y="523638"/>
+                  </a:lnTo>
+                  <a:lnTo>
+                    <a:pt x="461542" y="619732"/>
+                  </a:lnTo>
+                  <a:lnTo>
+                    <a:pt x="539176" y="712776"/>
+                  </a:lnTo>
+                  <a:lnTo>
+                    <a:pt x="616810" y="802866"/>
+                  </a:lnTo>
+                  <a:lnTo>
+                    <a:pt x="694444" y="890097"/>
+                  </a:lnTo>
+                  <a:lnTo>
+                    <a:pt x="772078" y="974560"/>
+                  </a:lnTo>
+                  <a:lnTo>
+                    <a:pt x="849712" y="1056341"/>
+                  </a:lnTo>
+                  <a:lnTo>
+                    <a:pt x="927346" y="1135527"/>
+                  </a:lnTo>
+                  <a:lnTo>
+                    <a:pt x="1004981" y="1212199"/>
+                  </a:lnTo>
+                  <a:lnTo>
+                    <a:pt x="1082615" y="1286437"/>
+                  </a:lnTo>
+                  <a:lnTo>
+                    <a:pt x="1160249" y="1358320"/>
+                  </a:lnTo>
+                  <a:lnTo>
+                    <a:pt x="1237883" y="1427920"/>
+                  </a:lnTo>
+                  <a:lnTo>
+                    <a:pt x="1315517" y="1495312"/>
+                  </a:lnTo>
+                  <a:lnTo>
+                    <a:pt x="1393151" y="1560564"/>
+                  </a:lnTo>
+                  <a:lnTo>
+                    <a:pt x="1470785" y="1623745"/>
+                  </a:lnTo>
+                  <a:lnTo>
+                    <a:pt x="1548419" y="1684921"/>
+                  </a:lnTo>
+                  <a:lnTo>
+                    <a:pt x="1626053" y="1744155"/>
+                  </a:lnTo>
+                  <a:lnTo>
+                    <a:pt x="1703687" y="1801509"/>
+                  </a:lnTo>
+                  <a:lnTo>
+                    <a:pt x="1781321" y="1857043"/>
+                  </a:lnTo>
+                  <a:lnTo>
+                    <a:pt x="1858955" y="1910814"/>
+                  </a:lnTo>
+                  <a:lnTo>
+                    <a:pt x="1936589" y="1962878"/>
+                  </a:lnTo>
+                  <a:lnTo>
+                    <a:pt x="2014223" y="2013290"/>
+                  </a:lnTo>
+                  <a:lnTo>
+                    <a:pt x="2091857" y="2062101"/>
+                  </a:lnTo>
+                  <a:lnTo>
+                    <a:pt x="2169491" y="2109364"/>
+                  </a:lnTo>
+                  <a:lnTo>
+                    <a:pt x="2247125" y="2155126"/>
+                  </a:lnTo>
+                  <a:lnTo>
+                    <a:pt x="2324759" y="2199435"/>
+                  </a:lnTo>
+                  <a:lnTo>
+                    <a:pt x="2402393" y="2242338"/>
+                  </a:lnTo>
+                  <a:lnTo>
+                    <a:pt x="2480027" y="2283880"/>
+                  </a:lnTo>
+                  <a:lnTo>
+                    <a:pt x="2557661" y="2324103"/>
+                  </a:lnTo>
+                  <a:lnTo>
+                    <a:pt x="2635295" y="2363049"/>
+                  </a:lnTo>
+                  <a:lnTo>
+                    <a:pt x="2712930" y="2400759"/>
+                  </a:lnTo>
+                  <a:lnTo>
+                    <a:pt x="2790564" y="2437272"/>
+                  </a:lnTo>
+                  <a:lnTo>
+                    <a:pt x="2868198" y="2472626"/>
+                  </a:lnTo>
+                  <a:lnTo>
+                    <a:pt x="2945832" y="2506858"/>
+                  </a:lnTo>
+                  <a:lnTo>
+                    <a:pt x="3023466" y="2540004"/>
+                  </a:lnTo>
+                  <a:lnTo>
+                    <a:pt x="3101100" y="2572097"/>
+                  </a:lnTo>
+                  <a:lnTo>
+                    <a:pt x="3178734" y="2603172"/>
+                  </a:lnTo>
+                  <a:lnTo>
+                    <a:pt x="3256368" y="2633260"/>
+                  </a:lnTo>
+                  <a:lnTo>
+                    <a:pt x="3334002" y="2662393"/>
+                  </a:lnTo>
+                  <a:lnTo>
+                    <a:pt x="3411636" y="2679984"/>
+                  </a:lnTo>
+                  <a:lnTo>
+                    <a:pt x="3489270" y="2675521"/>
+                  </a:lnTo>
+                  <a:lnTo>
+                    <a:pt x="3566904" y="2671036"/>
+                  </a:lnTo>
+                  <a:lnTo>
+                    <a:pt x="3644538" y="2666528"/>
+                  </a:lnTo>
+                  <a:lnTo>
+                    <a:pt x="3722172" y="2661997"/>
+                  </a:lnTo>
+                  <a:lnTo>
+                    <a:pt x="3799806" y="2657442"/>
+                  </a:lnTo>
+                  <a:lnTo>
+                    <a:pt x="3877440" y="2652864"/>
+                  </a:lnTo>
+                  <a:lnTo>
+                    <a:pt x="3955074" y="2648263"/>
+                  </a:lnTo>
+                  <a:lnTo>
+                    <a:pt x="4032708" y="2643638"/>
+                  </a:lnTo>
+                  <a:lnTo>
+                    <a:pt x="4110342" y="2638989"/>
+                  </a:lnTo>
+                  <a:lnTo>
+                    <a:pt x="4187976" y="2634317"/>
+                  </a:lnTo>
+                  <a:lnTo>
+                    <a:pt x="4265610" y="2629620"/>
+                  </a:lnTo>
+                  <a:lnTo>
+                    <a:pt x="4343244" y="2624900"/>
+                  </a:lnTo>
+                  <a:lnTo>
+                    <a:pt x="4420879" y="2620155"/>
+                  </a:lnTo>
+                  <a:lnTo>
+                    <a:pt x="4498513" y="2615387"/>
+                  </a:lnTo>
+                  <a:lnTo>
+                    <a:pt x="4576147" y="2610593"/>
+                  </a:lnTo>
+                  <a:lnTo>
+                    <a:pt x="4653781" y="2605775"/>
+                  </a:lnTo>
+                  <a:lnTo>
+                    <a:pt x="4731415" y="2600933"/>
+                  </a:lnTo>
+                  <a:lnTo>
+                    <a:pt x="4809049" y="2596066"/>
+                  </a:lnTo>
+                  <a:lnTo>
+                    <a:pt x="4886683" y="2591173"/>
+                  </a:lnTo>
+                  <a:lnTo>
+                    <a:pt x="4964317" y="2586256"/>
+                  </a:lnTo>
+                  <a:lnTo>
+                    <a:pt x="5041951" y="2581313"/>
+                  </a:lnTo>
+                  <a:lnTo>
+                    <a:pt x="5119585" y="2576345"/>
+                  </a:lnTo>
+                  <a:lnTo>
+                    <a:pt x="5197219" y="2571352"/>
+                  </a:lnTo>
+                  <a:lnTo>
+                    <a:pt x="5274853" y="2566333"/>
+                  </a:lnTo>
+                  <a:lnTo>
+                    <a:pt x="5352487" y="2561289"/>
+                  </a:lnTo>
+                  <a:lnTo>
+                    <a:pt x="5430121" y="2556218"/>
+                  </a:lnTo>
+                  <a:lnTo>
+                    <a:pt x="5507755" y="2551122"/>
+                  </a:lnTo>
+                  <a:lnTo>
+                    <a:pt x="5585389" y="2545999"/>
+                  </a:lnTo>
+                  <a:lnTo>
+                    <a:pt x="5663023" y="2540851"/>
+                  </a:lnTo>
+                  <a:lnTo>
+                    <a:pt x="5740657" y="2535675"/>
+                  </a:lnTo>
+                  <a:lnTo>
+                    <a:pt x="5818291" y="2530474"/>
+                  </a:lnTo>
+                  <a:lnTo>
+                    <a:pt x="5895925" y="2525246"/>
+                  </a:lnTo>
+                  <a:lnTo>
+                    <a:pt x="5973559" y="2519990"/>
+                  </a:lnTo>
+                  <a:lnTo>
+                    <a:pt x="6051193" y="2514709"/>
+                  </a:lnTo>
+                  <a:lnTo>
+                    <a:pt x="6128827" y="2509399"/>
+                  </a:lnTo>
+                  <a:lnTo>
+                    <a:pt x="6206462" y="2504063"/>
+                  </a:lnTo>
+                  <a:lnTo>
+                    <a:pt x="6284096" y="2498700"/>
+                  </a:lnTo>
+                  <a:lnTo>
+                    <a:pt x="6361730" y="2493309"/>
+                  </a:lnTo>
+                  <a:lnTo>
+                    <a:pt x="6439364" y="2487890"/>
+                  </a:lnTo>
+                  <a:lnTo>
+                    <a:pt x="6516998" y="2482444"/>
+                  </a:lnTo>
+                  <a:lnTo>
+                    <a:pt x="6594632" y="2476969"/>
+                  </a:lnTo>
+                  <a:lnTo>
+                    <a:pt x="6672266" y="2471467"/>
+                  </a:lnTo>
+                  <a:lnTo>
+                    <a:pt x="6749900" y="2465936"/>
+                  </a:lnTo>
+                  <a:lnTo>
+                    <a:pt x="6827534" y="2460377"/>
+                  </a:lnTo>
+                  <a:lnTo>
+                    <a:pt x="6905168" y="2454790"/>
+                  </a:lnTo>
+                  <a:lnTo>
+                    <a:pt x="6982802" y="2449174"/>
+                  </a:lnTo>
+                  <a:lnTo>
+                    <a:pt x="7060436" y="2443529"/>
+                  </a:lnTo>
+                  <a:lnTo>
+                    <a:pt x="7138070" y="2437856"/>
+                  </a:lnTo>
+                  <a:lnTo>
+                    <a:pt x="7215704" y="2432153"/>
+                  </a:lnTo>
+                  <a:lnTo>
+                    <a:pt x="7293338" y="2426421"/>
+                  </a:lnTo>
+                  <a:lnTo>
+                    <a:pt x="7370972" y="2420660"/>
+                  </a:lnTo>
+                  <a:lnTo>
+                    <a:pt x="7370972" y="3385032"/>
+                  </a:lnTo>
+                  <a:lnTo>
+                    <a:pt x="7293338" y="3379587"/>
+                  </a:lnTo>
+                  <a:lnTo>
+                    <a:pt x="7215704" y="3373964"/>
+                  </a:lnTo>
+                  <a:lnTo>
+                    <a:pt x="7138070" y="3368157"/>
+                  </a:lnTo>
+                  <a:lnTo>
+                    <a:pt x="7060436" y="3362159"/>
+                  </a:lnTo>
+                  <a:lnTo>
+                    <a:pt x="6982802" y="3355965"/>
+                  </a:lnTo>
+                  <a:lnTo>
+                    <a:pt x="6905168" y="3349568"/>
+                  </a:lnTo>
+                  <a:lnTo>
+                    <a:pt x="6827534" y="3342960"/>
+                  </a:lnTo>
+                  <a:lnTo>
+                    <a:pt x="6749900" y="3336137"/>
+                  </a:lnTo>
+                  <a:lnTo>
+                    <a:pt x="6672266" y="3329089"/>
+                  </a:lnTo>
+                  <a:lnTo>
+                    <a:pt x="6594632" y="3321811"/>
+                  </a:lnTo>
+                  <a:lnTo>
+                    <a:pt x="6516998" y="3314294"/>
+                  </a:lnTo>
+                  <a:lnTo>
+                    <a:pt x="6439364" y="3306530"/>
+                  </a:lnTo>
+                  <a:lnTo>
+                    <a:pt x="6361730" y="3298513"/>
+                  </a:lnTo>
+                  <a:lnTo>
+                    <a:pt x="6284096" y="3290232"/>
+                  </a:lnTo>
+                  <a:lnTo>
+                    <a:pt x="6206462" y="3281680"/>
+                  </a:lnTo>
+                  <a:lnTo>
+                    <a:pt x="6128827" y="3272847"/>
+                  </a:lnTo>
+                  <a:lnTo>
+                    <a:pt x="6051193" y="3263725"/>
+                  </a:lnTo>
+                  <a:lnTo>
+                    <a:pt x="5973559" y="3254304"/>
+                  </a:lnTo>
+                  <a:lnTo>
+                    <a:pt x="5895925" y="3244574"/>
+                  </a:lnTo>
+                  <a:lnTo>
+                    <a:pt x="5818291" y="3234525"/>
+                  </a:lnTo>
+                  <a:lnTo>
+                    <a:pt x="5740657" y="3224147"/>
+                  </a:lnTo>
+                  <a:lnTo>
+                    <a:pt x="5663023" y="3213428"/>
+                  </a:lnTo>
+                  <a:lnTo>
+                    <a:pt x="5585389" y="3202358"/>
+                  </a:lnTo>
+                  <a:lnTo>
+                    <a:pt x="5507755" y="3190926"/>
+                  </a:lnTo>
+                  <a:lnTo>
+                    <a:pt x="5430121" y="3179118"/>
+                  </a:lnTo>
+                  <a:lnTo>
+                    <a:pt x="5352487" y="3166923"/>
+                  </a:lnTo>
+                  <a:lnTo>
+                    <a:pt x="5274853" y="3154329"/>
+                  </a:lnTo>
+                  <a:lnTo>
+                    <a:pt x="5197219" y="3141322"/>
+                  </a:lnTo>
+                  <a:lnTo>
+                    <a:pt x="5119585" y="3127888"/>
+                  </a:lnTo>
+                  <a:lnTo>
+                    <a:pt x="5041951" y="3114014"/>
+                  </a:lnTo>
+                  <a:lnTo>
+                    <a:pt x="4964317" y="3099685"/>
+                  </a:lnTo>
+                  <a:lnTo>
+                    <a:pt x="4886683" y="3084887"/>
+                  </a:lnTo>
+                  <a:lnTo>
+                    <a:pt x="4809049" y="3069603"/>
+                  </a:lnTo>
+                  <a:lnTo>
+                    <a:pt x="4731415" y="3053819"/>
+                  </a:lnTo>
+                  <a:lnTo>
+                    <a:pt x="4653781" y="3037517"/>
+                  </a:lnTo>
+                  <a:lnTo>
+                    <a:pt x="4576147" y="3020680"/>
+                  </a:lnTo>
+                  <a:lnTo>
+                    <a:pt x="4498513" y="3003292"/>
+                  </a:lnTo>
+                  <a:lnTo>
+                    <a:pt x="4420879" y="2985333"/>
+                  </a:lnTo>
+                  <a:lnTo>
+                    <a:pt x="4343244" y="2966786"/>
+                  </a:lnTo>
+                  <a:lnTo>
+                    <a:pt x="4265610" y="2947631"/>
+                  </a:lnTo>
+                  <a:lnTo>
+                    <a:pt x="4187976" y="2927848"/>
+                  </a:lnTo>
+                  <a:lnTo>
+                    <a:pt x="4110342" y="2907417"/>
+                  </a:lnTo>
+                  <a:lnTo>
+                    <a:pt x="4032708" y="2886316"/>
+                  </a:lnTo>
+                  <a:lnTo>
+                    <a:pt x="3955074" y="2864523"/>
+                  </a:lnTo>
+                  <a:lnTo>
+                    <a:pt x="3877440" y="2842015"/>
+                  </a:lnTo>
+                  <a:lnTo>
+                    <a:pt x="3799806" y="2818770"/>
+                  </a:lnTo>
+                  <a:lnTo>
+                    <a:pt x="3722172" y="2794763"/>
+                  </a:lnTo>
+                  <a:lnTo>
+                    <a:pt x="3644538" y="2769969"/>
+                  </a:lnTo>
+                  <a:lnTo>
+                    <a:pt x="3566904" y="2744362"/>
+                  </a:lnTo>
+                  <a:lnTo>
+                    <a:pt x="3489270" y="2717915"/>
+                  </a:lnTo>
+                  <a:lnTo>
+                    <a:pt x="3411636" y="2690602"/>
+                  </a:lnTo>
+                  <a:lnTo>
+                    <a:pt x="3334002" y="2684423"/>
+                  </a:lnTo>
+                  <a:lnTo>
+                    <a:pt x="3256368" y="2688841"/>
+                  </a:lnTo>
+                  <a:lnTo>
+                    <a:pt x="3178734" y="2693235"/>
+                  </a:lnTo>
+                  <a:lnTo>
+                    <a:pt x="3101100" y="2697607"/>
+                  </a:lnTo>
+                  <a:lnTo>
+                    <a:pt x="3023466" y="2701957"/>
+                  </a:lnTo>
+                  <a:lnTo>
+                    <a:pt x="2945832" y="2706285"/>
+                  </a:lnTo>
+                  <a:lnTo>
+                    <a:pt x="2868198" y="2710590"/>
+                  </a:lnTo>
+                  <a:lnTo>
+                    <a:pt x="2790564" y="2714874"/>
+                  </a:lnTo>
+                  <a:lnTo>
+                    <a:pt x="2712930" y="2719136"/>
+                  </a:lnTo>
+                  <a:lnTo>
+                    <a:pt x="2635295" y="2723376"/>
+                  </a:lnTo>
+                  <a:lnTo>
+                    <a:pt x="2557661" y="2727595"/>
+                  </a:lnTo>
+                  <a:lnTo>
+                    <a:pt x="2480027" y="2731792"/>
+                  </a:lnTo>
+                  <a:lnTo>
+                    <a:pt x="2402393" y="2735967"/>
+                  </a:lnTo>
+                  <a:lnTo>
+                    <a:pt x="2324759" y="2740122"/>
+                  </a:lnTo>
+                  <a:lnTo>
+                    <a:pt x="2247125" y="2744255"/>
+                  </a:lnTo>
+                  <a:lnTo>
+                    <a:pt x="2169491" y="2748367"/>
+                  </a:lnTo>
+                  <a:lnTo>
+                    <a:pt x="2091857" y="2752458"/>
+                  </a:lnTo>
+                  <a:lnTo>
+                    <a:pt x="2014223" y="2756528"/>
+                  </a:lnTo>
+                  <a:lnTo>
+                    <a:pt x="1936589" y="2760578"/>
+                  </a:lnTo>
+                  <a:lnTo>
+                    <a:pt x="1858955" y="2764607"/>
+                  </a:lnTo>
+                  <a:lnTo>
+                    <a:pt x="1781321" y="2768615"/>
+                  </a:lnTo>
+                  <a:lnTo>
+                    <a:pt x="1703687" y="2772603"/>
+                  </a:lnTo>
+                  <a:lnTo>
+                    <a:pt x="1626053" y="2776571"/>
+                  </a:lnTo>
+                  <a:lnTo>
+                    <a:pt x="1548419" y="2780518"/>
+                  </a:lnTo>
+                  <a:lnTo>
+                    <a:pt x="1470785" y="2784446"/>
+                  </a:lnTo>
+                  <a:lnTo>
+                    <a:pt x="1393151" y="2788353"/>
+                  </a:lnTo>
+                  <a:lnTo>
+                    <a:pt x="1315517" y="2792240"/>
+                  </a:lnTo>
+                  <a:lnTo>
+                    <a:pt x="1237883" y="2796108"/>
+                  </a:lnTo>
+                  <a:lnTo>
+                    <a:pt x="1160249" y="2799956"/>
+                  </a:lnTo>
+                  <a:lnTo>
+                    <a:pt x="1082615" y="2803784"/>
+                  </a:lnTo>
+                  <a:lnTo>
+                    <a:pt x="1004981" y="2807593"/>
+                  </a:lnTo>
+                  <a:lnTo>
+                    <a:pt x="927346" y="2811382"/>
+                  </a:lnTo>
+                  <a:lnTo>
+                    <a:pt x="849712" y="2815152"/>
+                  </a:lnTo>
+                  <a:lnTo>
+                    <a:pt x="772078" y="2818903"/>
+                  </a:lnTo>
+                  <a:lnTo>
+                    <a:pt x="694444" y="2822635"/>
+                  </a:lnTo>
+                  <a:lnTo>
+                    <a:pt x="616810" y="2826347"/>
+                  </a:lnTo>
+                  <a:lnTo>
+                    <a:pt x="539176" y="2830041"/>
+                  </a:lnTo>
+                  <a:lnTo>
+                    <a:pt x="461542" y="2833716"/>
+                  </a:lnTo>
+                  <a:lnTo>
+                    <a:pt x="383908" y="2837372"/>
+                  </a:lnTo>
+                  <a:lnTo>
+                    <a:pt x="306274" y="2841010"/>
+                  </a:lnTo>
+                  <a:lnTo>
+                    <a:pt x="228640" y="2844629"/>
+                  </a:lnTo>
+                  <a:lnTo>
+                    <a:pt x="151006" y="2848229"/>
+                  </a:lnTo>
+                  <a:lnTo>
+                    <a:pt x="73372" y="2851811"/>
+                  </a:lnTo>
+                  <a:lnTo>
+                    <a:pt x="0" y="2855180"/>
                   </a:lnTo>
                   <a:close/>
                 </a:path>
@@ -3579,270 +3609,300 @@
           </p:nvSpPr>
           <p:spPr>
             <a:xfrm>
-              <a:off x="1616980" y="1896563"/>
-              <a:ext cx="6571509" cy="3111594"/>
+              <a:off x="817517" y="1998086"/>
+              <a:ext cx="7370972" cy="2679984"/>
             </a:xfrm>
             <a:custGeom>
               <a:avLst/>
               <a:pathLst>
-                <a:path w="6571509" h="3111594">
+                <a:path w="7370972" h="2679984">
                   <a:moveTo>
                     <a:pt x="0" y="0"/>
                   </a:moveTo>
                   <a:lnTo>
-                    <a:pt x="50249" y="101157"/>
-                  </a:lnTo>
-                  <a:lnTo>
-                    <a:pt x="127883" y="250854"/>
-                  </a:lnTo>
-                  <a:lnTo>
-                    <a:pt x="205517" y="394242"/>
-                  </a:lnTo>
-                  <a:lnTo>
-                    <a:pt x="283152" y="531585"/>
-                  </a:lnTo>
-                  <a:lnTo>
-                    <a:pt x="360786" y="663139"/>
-                  </a:lnTo>
-                  <a:lnTo>
-                    <a:pt x="438420" y="789149"/>
-                  </a:lnTo>
-                  <a:lnTo>
-                    <a:pt x="516054" y="909847"/>
-                  </a:lnTo>
-                  <a:lnTo>
-                    <a:pt x="593688" y="1025457"/>
-                  </a:lnTo>
-                  <a:lnTo>
-                    <a:pt x="671322" y="1136194"/>
-                  </a:lnTo>
-                  <a:lnTo>
-                    <a:pt x="748956" y="1242264"/>
-                  </a:lnTo>
-                  <a:lnTo>
-                    <a:pt x="826590" y="1343863"/>
-                  </a:lnTo>
-                  <a:lnTo>
-                    <a:pt x="904224" y="1441179"/>
-                  </a:lnTo>
-                  <a:lnTo>
-                    <a:pt x="981858" y="1534394"/>
-                  </a:lnTo>
-                  <a:lnTo>
-                    <a:pt x="1059492" y="1623679"/>
-                  </a:lnTo>
-                  <a:lnTo>
-                    <a:pt x="1137126" y="1709201"/>
-                  </a:lnTo>
-                  <a:lnTo>
-                    <a:pt x="1214760" y="1791118"/>
-                  </a:lnTo>
-                  <a:lnTo>
-                    <a:pt x="1292394" y="1869583"/>
-                  </a:lnTo>
-                  <a:lnTo>
-                    <a:pt x="1370028" y="1944740"/>
-                  </a:lnTo>
-                  <a:lnTo>
-                    <a:pt x="1447662" y="2016729"/>
-                  </a:lnTo>
-                  <a:lnTo>
-                    <a:pt x="1525296" y="2085683"/>
-                  </a:lnTo>
-                  <a:lnTo>
-                    <a:pt x="1602930" y="2151732"/>
-                  </a:lnTo>
-                  <a:lnTo>
-                    <a:pt x="1680564" y="2214996"/>
-                  </a:lnTo>
-                  <a:lnTo>
-                    <a:pt x="1758198" y="2275594"/>
-                  </a:lnTo>
-                  <a:lnTo>
-                    <a:pt x="1835832" y="2333637"/>
-                  </a:lnTo>
-                  <a:lnTo>
-                    <a:pt x="1913466" y="2389234"/>
-                  </a:lnTo>
-                  <a:lnTo>
-                    <a:pt x="1991101" y="2442487"/>
-                  </a:lnTo>
-                  <a:lnTo>
-                    <a:pt x="2068735" y="2493496"/>
-                  </a:lnTo>
-                  <a:lnTo>
-                    <a:pt x="2146369" y="2542355"/>
-                  </a:lnTo>
-                  <a:lnTo>
-                    <a:pt x="2224003" y="2589154"/>
-                  </a:lnTo>
-                  <a:lnTo>
-                    <a:pt x="2301637" y="2633981"/>
-                  </a:lnTo>
-                  <a:lnTo>
-                    <a:pt x="2379271" y="2676918"/>
-                  </a:lnTo>
-                  <a:lnTo>
-                    <a:pt x="2456905" y="2718045"/>
-                  </a:lnTo>
-                  <a:lnTo>
-                    <a:pt x="2534539" y="2757439"/>
-                  </a:lnTo>
-                  <a:lnTo>
-                    <a:pt x="2612173" y="2785602"/>
-                  </a:lnTo>
-                  <a:lnTo>
-                    <a:pt x="2689807" y="2793582"/>
-                  </a:lnTo>
-                  <a:lnTo>
-                    <a:pt x="2767441" y="2801489"/>
-                  </a:lnTo>
-                  <a:lnTo>
-                    <a:pt x="2845075" y="2809323"/>
-                  </a:lnTo>
-                  <a:lnTo>
-                    <a:pt x="2922709" y="2817085"/>
-                  </a:lnTo>
-                  <a:lnTo>
-                    <a:pt x="3000343" y="2824775"/>
-                  </a:lnTo>
-                  <a:lnTo>
-                    <a:pt x="3077977" y="2832395"/>
-                  </a:lnTo>
-                  <a:lnTo>
-                    <a:pt x="3155611" y="2839944"/>
-                  </a:lnTo>
-                  <a:lnTo>
-                    <a:pt x="3233245" y="2847424"/>
-                  </a:lnTo>
-                  <a:lnTo>
-                    <a:pt x="3310879" y="2854836"/>
-                  </a:lnTo>
-                  <a:lnTo>
-                    <a:pt x="3388513" y="2862179"/>
-                  </a:lnTo>
-                  <a:lnTo>
-                    <a:pt x="3466147" y="2869454"/>
-                  </a:lnTo>
-                  <a:lnTo>
-                    <a:pt x="3543781" y="2876662"/>
-                  </a:lnTo>
-                  <a:lnTo>
-                    <a:pt x="3621415" y="2883805"/>
-                  </a:lnTo>
-                  <a:lnTo>
-                    <a:pt x="3699049" y="2890881"/>
-                  </a:lnTo>
-                  <a:lnTo>
-                    <a:pt x="3776684" y="2897892"/>
-                  </a:lnTo>
-                  <a:lnTo>
-                    <a:pt x="3854318" y="2904839"/>
-                  </a:lnTo>
-                  <a:lnTo>
-                    <a:pt x="3931952" y="2911722"/>
-                  </a:lnTo>
-                  <a:lnTo>
-                    <a:pt x="4009586" y="2918541"/>
-                  </a:lnTo>
-                  <a:lnTo>
-                    <a:pt x="4087220" y="2925298"/>
-                  </a:lnTo>
-                  <a:lnTo>
-                    <a:pt x="4164854" y="2931992"/>
-                  </a:lnTo>
-                  <a:lnTo>
-                    <a:pt x="4242488" y="2938625"/>
-                  </a:lnTo>
-                  <a:lnTo>
-                    <a:pt x="4320122" y="2945197"/>
-                  </a:lnTo>
-                  <a:lnTo>
-                    <a:pt x="4397756" y="2951708"/>
-                  </a:lnTo>
-                  <a:lnTo>
-                    <a:pt x="4475390" y="2958160"/>
-                  </a:lnTo>
-                  <a:lnTo>
-                    <a:pt x="4553024" y="2964552"/>
-                  </a:lnTo>
-                  <a:lnTo>
-                    <a:pt x="4630658" y="2970885"/>
-                  </a:lnTo>
-                  <a:lnTo>
-                    <a:pt x="4708292" y="2977160"/>
-                  </a:lnTo>
-                  <a:lnTo>
-                    <a:pt x="4785926" y="2983377"/>
-                  </a:lnTo>
-                  <a:lnTo>
-                    <a:pt x="4863560" y="2989537"/>
-                  </a:lnTo>
-                  <a:lnTo>
-                    <a:pt x="4941194" y="2995640"/>
-                  </a:lnTo>
-                  <a:lnTo>
-                    <a:pt x="5018828" y="3001687"/>
-                  </a:lnTo>
-                  <a:lnTo>
-                    <a:pt x="5096462" y="3007678"/>
-                  </a:lnTo>
-                  <a:lnTo>
-                    <a:pt x="5174096" y="3013615"/>
-                  </a:lnTo>
-                  <a:lnTo>
-                    <a:pt x="5251730" y="3019496"/>
-                  </a:lnTo>
-                  <a:lnTo>
-                    <a:pt x="5329364" y="3025324"/>
-                  </a:lnTo>
-                  <a:lnTo>
-                    <a:pt x="5406998" y="3031098"/>
-                  </a:lnTo>
-                  <a:lnTo>
-                    <a:pt x="5484633" y="3036818"/>
-                  </a:lnTo>
-                  <a:lnTo>
-                    <a:pt x="5562267" y="3042486"/>
-                  </a:lnTo>
-                  <a:lnTo>
-                    <a:pt x="5639901" y="3048102"/>
-                  </a:lnTo>
-                  <a:lnTo>
-                    <a:pt x="5717535" y="3053666"/>
-                  </a:lnTo>
-                  <a:lnTo>
-                    <a:pt x="5795169" y="3059179"/>
-                  </a:lnTo>
-                  <a:lnTo>
-                    <a:pt x="5872803" y="3064642"/>
-                  </a:lnTo>
-                  <a:lnTo>
-                    <a:pt x="5950437" y="3070054"/>
-                  </a:lnTo>
-                  <a:lnTo>
-                    <a:pt x="6028071" y="3075416"/>
-                  </a:lnTo>
-                  <a:lnTo>
-                    <a:pt x="6105705" y="3080728"/>
-                  </a:lnTo>
-                  <a:lnTo>
-                    <a:pt x="6183339" y="3085992"/>
-                  </a:lnTo>
-                  <a:lnTo>
-                    <a:pt x="6260973" y="3091208"/>
-                  </a:lnTo>
-                  <a:lnTo>
-                    <a:pt x="6338607" y="3096375"/>
-                  </a:lnTo>
-                  <a:lnTo>
-                    <a:pt x="6416241" y="3101495"/>
-                  </a:lnTo>
-                  <a:lnTo>
-                    <a:pt x="6493875" y="3106568"/>
-                  </a:lnTo>
-                  <a:lnTo>
-                    <a:pt x="6571509" y="3111594"/>
+                    <a:pt x="73372" y="106713"/>
+                  </a:lnTo>
+                  <a:lnTo>
+                    <a:pt x="151006" y="216040"/>
+                  </a:lnTo>
+                  <a:lnTo>
+                    <a:pt x="228640" y="321897"/>
+                  </a:lnTo>
+                  <a:lnTo>
+                    <a:pt x="306274" y="424394"/>
+                  </a:lnTo>
+                  <a:lnTo>
+                    <a:pt x="383908" y="523638"/>
+                  </a:lnTo>
+                  <a:lnTo>
+                    <a:pt x="461542" y="619732"/>
+                  </a:lnTo>
+                  <a:lnTo>
+                    <a:pt x="539176" y="712776"/>
+                  </a:lnTo>
+                  <a:lnTo>
+                    <a:pt x="616810" y="802866"/>
+                  </a:lnTo>
+                  <a:lnTo>
+                    <a:pt x="694444" y="890097"/>
+                  </a:lnTo>
+                  <a:lnTo>
+                    <a:pt x="772078" y="974560"/>
+                  </a:lnTo>
+                  <a:lnTo>
+                    <a:pt x="849712" y="1056341"/>
+                  </a:lnTo>
+                  <a:lnTo>
+                    <a:pt x="927346" y="1135527"/>
+                  </a:lnTo>
+                  <a:lnTo>
+                    <a:pt x="1004981" y="1212199"/>
+                  </a:lnTo>
+                  <a:lnTo>
+                    <a:pt x="1082615" y="1286437"/>
+                  </a:lnTo>
+                  <a:lnTo>
+                    <a:pt x="1160249" y="1358320"/>
+                  </a:lnTo>
+                  <a:lnTo>
+                    <a:pt x="1237883" y="1427920"/>
+                  </a:lnTo>
+                  <a:lnTo>
+                    <a:pt x="1315517" y="1495312"/>
+                  </a:lnTo>
+                  <a:lnTo>
+                    <a:pt x="1393151" y="1560564"/>
+                  </a:lnTo>
+                  <a:lnTo>
+                    <a:pt x="1470785" y="1623745"/>
+                  </a:lnTo>
+                  <a:lnTo>
+                    <a:pt x="1548419" y="1684921"/>
+                  </a:lnTo>
+                  <a:lnTo>
+                    <a:pt x="1626053" y="1744155"/>
+                  </a:lnTo>
+                  <a:lnTo>
+                    <a:pt x="1703687" y="1801509"/>
+                  </a:lnTo>
+                  <a:lnTo>
+                    <a:pt x="1781321" y="1857043"/>
+                  </a:lnTo>
+                  <a:lnTo>
+                    <a:pt x="1858955" y="1910814"/>
+                  </a:lnTo>
+                  <a:lnTo>
+                    <a:pt x="1936589" y="1962878"/>
+                  </a:lnTo>
+                  <a:lnTo>
+                    <a:pt x="2014223" y="2013290"/>
+                  </a:lnTo>
+                  <a:lnTo>
+                    <a:pt x="2091857" y="2062101"/>
+                  </a:lnTo>
+                  <a:lnTo>
+                    <a:pt x="2169491" y="2109364"/>
+                  </a:lnTo>
+                  <a:lnTo>
+                    <a:pt x="2247125" y="2155126"/>
+                  </a:lnTo>
+                  <a:lnTo>
+                    <a:pt x="2324759" y="2199435"/>
+                  </a:lnTo>
+                  <a:lnTo>
+                    <a:pt x="2402393" y="2242338"/>
+                  </a:lnTo>
+                  <a:lnTo>
+                    <a:pt x="2480027" y="2283880"/>
+                  </a:lnTo>
+                  <a:lnTo>
+                    <a:pt x="2557661" y="2324103"/>
+                  </a:lnTo>
+                  <a:lnTo>
+                    <a:pt x="2635295" y="2363049"/>
+                  </a:lnTo>
+                  <a:lnTo>
+                    <a:pt x="2712930" y="2400759"/>
+                  </a:lnTo>
+                  <a:lnTo>
+                    <a:pt x="2790564" y="2437272"/>
+                  </a:lnTo>
+                  <a:lnTo>
+                    <a:pt x="2868198" y="2472626"/>
+                  </a:lnTo>
+                  <a:lnTo>
+                    <a:pt x="2945832" y="2506858"/>
+                  </a:lnTo>
+                  <a:lnTo>
+                    <a:pt x="3023466" y="2540004"/>
+                  </a:lnTo>
+                  <a:lnTo>
+                    <a:pt x="3101100" y="2572097"/>
+                  </a:lnTo>
+                  <a:lnTo>
+                    <a:pt x="3178734" y="2603172"/>
+                  </a:lnTo>
+                  <a:lnTo>
+                    <a:pt x="3256368" y="2633260"/>
+                  </a:lnTo>
+                  <a:lnTo>
+                    <a:pt x="3334002" y="2662393"/>
+                  </a:lnTo>
+                  <a:lnTo>
+                    <a:pt x="3411636" y="2679984"/>
+                  </a:lnTo>
+                  <a:lnTo>
+                    <a:pt x="3489270" y="2675521"/>
+                  </a:lnTo>
+                  <a:lnTo>
+                    <a:pt x="3566904" y="2671036"/>
+                  </a:lnTo>
+                  <a:lnTo>
+                    <a:pt x="3644538" y="2666528"/>
+                  </a:lnTo>
+                  <a:lnTo>
+                    <a:pt x="3722172" y="2661997"/>
+                  </a:lnTo>
+                  <a:lnTo>
+                    <a:pt x="3799806" y="2657442"/>
+                  </a:lnTo>
+                  <a:lnTo>
+                    <a:pt x="3877440" y="2652864"/>
+                  </a:lnTo>
+                  <a:lnTo>
+                    <a:pt x="3955074" y="2648263"/>
+                  </a:lnTo>
+                  <a:lnTo>
+                    <a:pt x="4032708" y="2643638"/>
+                  </a:lnTo>
+                  <a:lnTo>
+                    <a:pt x="4110342" y="2638989"/>
+                  </a:lnTo>
+                  <a:lnTo>
+                    <a:pt x="4187976" y="2634317"/>
+                  </a:lnTo>
+                  <a:lnTo>
+                    <a:pt x="4265610" y="2629620"/>
+                  </a:lnTo>
+                  <a:lnTo>
+                    <a:pt x="4343244" y="2624900"/>
+                  </a:lnTo>
+                  <a:lnTo>
+                    <a:pt x="4420879" y="2620155"/>
+                  </a:lnTo>
+                  <a:lnTo>
+                    <a:pt x="4498513" y="2615387"/>
+                  </a:lnTo>
+                  <a:lnTo>
+                    <a:pt x="4576147" y="2610593"/>
+                  </a:lnTo>
+                  <a:lnTo>
+                    <a:pt x="4653781" y="2605775"/>
+                  </a:lnTo>
+                  <a:lnTo>
+                    <a:pt x="4731415" y="2600933"/>
+                  </a:lnTo>
+                  <a:lnTo>
+                    <a:pt x="4809049" y="2596066"/>
+                  </a:lnTo>
+                  <a:lnTo>
+                    <a:pt x="4886683" y="2591173"/>
+                  </a:lnTo>
+                  <a:lnTo>
+                    <a:pt x="4964317" y="2586256"/>
+                  </a:lnTo>
+                  <a:lnTo>
+                    <a:pt x="5041951" y="2581313"/>
+                  </a:lnTo>
+                  <a:lnTo>
+                    <a:pt x="5119585" y="2576345"/>
+                  </a:lnTo>
+                  <a:lnTo>
+                    <a:pt x="5197219" y="2571352"/>
+                  </a:lnTo>
+                  <a:lnTo>
+                    <a:pt x="5274853" y="2566333"/>
+                  </a:lnTo>
+                  <a:lnTo>
+                    <a:pt x="5352487" y="2561289"/>
+                  </a:lnTo>
+                  <a:lnTo>
+                    <a:pt x="5430121" y="2556218"/>
+                  </a:lnTo>
+                  <a:lnTo>
+                    <a:pt x="5507755" y="2551122"/>
+                  </a:lnTo>
+                  <a:lnTo>
+                    <a:pt x="5585389" y="2545999"/>
+                  </a:lnTo>
+                  <a:lnTo>
+                    <a:pt x="5663023" y="2540851"/>
+                  </a:lnTo>
+                  <a:lnTo>
+                    <a:pt x="5740657" y="2535675"/>
+                  </a:lnTo>
+                  <a:lnTo>
+                    <a:pt x="5818291" y="2530474"/>
+                  </a:lnTo>
+                  <a:lnTo>
+                    <a:pt x="5895925" y="2525246"/>
+                  </a:lnTo>
+                  <a:lnTo>
+                    <a:pt x="5973559" y="2519990"/>
+                  </a:lnTo>
+                  <a:lnTo>
+                    <a:pt x="6051193" y="2514709"/>
+                  </a:lnTo>
+                  <a:lnTo>
+                    <a:pt x="6128827" y="2509399"/>
+                  </a:lnTo>
+                  <a:lnTo>
+                    <a:pt x="6206462" y="2504063"/>
+                  </a:lnTo>
+                  <a:lnTo>
+                    <a:pt x="6284096" y="2498700"/>
+                  </a:lnTo>
+                  <a:lnTo>
+                    <a:pt x="6361730" y="2493309"/>
+                  </a:lnTo>
+                  <a:lnTo>
+                    <a:pt x="6439364" y="2487890"/>
+                  </a:lnTo>
+                  <a:lnTo>
+                    <a:pt x="6516998" y="2482444"/>
+                  </a:lnTo>
+                  <a:lnTo>
+                    <a:pt x="6594632" y="2476969"/>
+                  </a:lnTo>
+                  <a:lnTo>
+                    <a:pt x="6672266" y="2471467"/>
+                  </a:lnTo>
+                  <a:lnTo>
+                    <a:pt x="6749900" y="2465936"/>
+                  </a:lnTo>
+                  <a:lnTo>
+                    <a:pt x="6827534" y="2460377"/>
+                  </a:lnTo>
+                  <a:lnTo>
+                    <a:pt x="6905168" y="2454790"/>
+                  </a:lnTo>
+                  <a:lnTo>
+                    <a:pt x="6982802" y="2449174"/>
+                  </a:lnTo>
+                  <a:lnTo>
+                    <a:pt x="7060436" y="2443529"/>
+                  </a:lnTo>
+                  <a:lnTo>
+                    <a:pt x="7138070" y="2437856"/>
+                  </a:lnTo>
+                  <a:lnTo>
+                    <a:pt x="7215704" y="2432153"/>
+                  </a:lnTo>
+                  <a:lnTo>
+                    <a:pt x="7293338" y="2426421"/>
+                  </a:lnTo>
+                  <a:lnTo>
+                    <a:pt x="7370972" y="2420660"/>
                   </a:lnTo>
                 </a:path>
               </a:pathLst>
@@ -3862,300 +3922,300 @@
           </p:nvSpPr>
           <p:spPr>
             <a:xfrm>
-              <a:off x="817517" y="4247499"/>
-              <a:ext cx="7370972" cy="1206344"/>
+              <a:off x="817517" y="4682510"/>
+              <a:ext cx="7370972" cy="700608"/>
             </a:xfrm>
             <a:custGeom>
               <a:avLst/>
               <a:pathLst>
-                <a:path w="7370972" h="1206344">
+                <a:path w="7370972" h="700608">
                   <a:moveTo>
-                    <a:pt x="7370972" y="1206344"/>
+                    <a:pt x="7370972" y="700608"/>
                   </a:moveTo>
                   <a:lnTo>
-                    <a:pt x="7293338" y="1202148"/>
-                  </a:lnTo>
-                  <a:lnTo>
-                    <a:pt x="7215704" y="1197766"/>
-                  </a:lnTo>
-                  <a:lnTo>
-                    <a:pt x="7138070" y="1193192"/>
-                  </a:lnTo>
-                  <a:lnTo>
-                    <a:pt x="7060436" y="1188417"/>
-                  </a:lnTo>
-                  <a:lnTo>
-                    <a:pt x="6982802" y="1183432"/>
-                  </a:lnTo>
-                  <a:lnTo>
-                    <a:pt x="6905168" y="1178227"/>
-                  </a:lnTo>
-                  <a:lnTo>
-                    <a:pt x="6827534" y="1172793"/>
-                  </a:lnTo>
-                  <a:lnTo>
-                    <a:pt x="6749900" y="1167120"/>
-                  </a:lnTo>
-                  <a:lnTo>
-                    <a:pt x="6672266" y="1161198"/>
-                  </a:lnTo>
-                  <a:lnTo>
-                    <a:pt x="6594632" y="1155015"/>
-                  </a:lnTo>
-                  <a:lnTo>
-                    <a:pt x="6516998" y="1148560"/>
-                  </a:lnTo>
-                  <a:lnTo>
-                    <a:pt x="6439364" y="1141820"/>
-                  </a:lnTo>
-                  <a:lnTo>
-                    <a:pt x="6361730" y="1134784"/>
-                  </a:lnTo>
-                  <a:lnTo>
-                    <a:pt x="6284096" y="1127439"/>
-                  </a:lnTo>
-                  <a:lnTo>
-                    <a:pt x="6206462" y="1119770"/>
-                  </a:lnTo>
-                  <a:lnTo>
-                    <a:pt x="6128827" y="1111764"/>
-                  </a:lnTo>
-                  <a:lnTo>
-                    <a:pt x="6051193" y="1103405"/>
-                  </a:lnTo>
-                  <a:lnTo>
-                    <a:pt x="5973559" y="1094679"/>
-                  </a:lnTo>
-                  <a:lnTo>
-                    <a:pt x="5895925" y="1085569"/>
-                  </a:lnTo>
-                  <a:lnTo>
-                    <a:pt x="5818291" y="1076057"/>
-                  </a:lnTo>
-                  <a:lnTo>
-                    <a:pt x="5740657" y="1066128"/>
-                  </a:lnTo>
-                  <a:lnTo>
-                    <a:pt x="5663023" y="1055761"/>
-                  </a:lnTo>
-                  <a:lnTo>
-                    <a:pt x="5585389" y="1044938"/>
-                  </a:lnTo>
-                  <a:lnTo>
-                    <a:pt x="5507755" y="1033639"/>
-                  </a:lnTo>
-                  <a:lnTo>
-                    <a:pt x="5430121" y="1021842"/>
-                  </a:lnTo>
-                  <a:lnTo>
-                    <a:pt x="5352487" y="1009527"/>
-                  </a:lnTo>
-                  <a:lnTo>
-                    <a:pt x="5274853" y="996669"/>
-                  </a:lnTo>
-                  <a:lnTo>
-                    <a:pt x="5197219" y="983246"/>
-                  </a:lnTo>
-                  <a:lnTo>
-                    <a:pt x="5119585" y="969232"/>
-                  </a:lnTo>
-                  <a:lnTo>
-                    <a:pt x="5041951" y="954601"/>
-                  </a:lnTo>
-                  <a:lnTo>
-                    <a:pt x="4964317" y="939327"/>
-                  </a:lnTo>
-                  <a:lnTo>
-                    <a:pt x="4886683" y="923380"/>
-                  </a:lnTo>
-                  <a:lnTo>
-                    <a:pt x="4809049" y="906732"/>
-                  </a:lnTo>
-                  <a:lnTo>
-                    <a:pt x="4731415" y="889351"/>
-                  </a:lnTo>
-                  <a:lnTo>
-                    <a:pt x="4653781" y="871205"/>
-                  </a:lnTo>
-                  <a:lnTo>
-                    <a:pt x="4576147" y="852260"/>
-                  </a:lnTo>
-                  <a:lnTo>
-                    <a:pt x="4498513" y="832482"/>
-                  </a:lnTo>
-                  <a:lnTo>
-                    <a:pt x="4420879" y="811834"/>
-                  </a:lnTo>
-                  <a:lnTo>
-                    <a:pt x="4343244" y="790277"/>
-                  </a:lnTo>
-                  <a:lnTo>
-                    <a:pt x="4265610" y="767771"/>
-                  </a:lnTo>
-                  <a:lnTo>
-                    <a:pt x="4187976" y="744275"/>
-                  </a:lnTo>
-                  <a:lnTo>
-                    <a:pt x="4110342" y="719745"/>
-                  </a:lnTo>
-                  <a:lnTo>
-                    <a:pt x="4032708" y="694135"/>
-                  </a:lnTo>
-                  <a:lnTo>
-                    <a:pt x="3955074" y="667399"/>
-                  </a:lnTo>
-                  <a:lnTo>
-                    <a:pt x="3877440" y="639486"/>
-                  </a:lnTo>
-                  <a:lnTo>
-                    <a:pt x="3799806" y="610345"/>
-                  </a:lnTo>
-                  <a:lnTo>
-                    <a:pt x="3722172" y="579921"/>
-                  </a:lnTo>
-                  <a:lnTo>
-                    <a:pt x="3644538" y="548158"/>
-                  </a:lnTo>
-                  <a:lnTo>
-                    <a:pt x="3566904" y="514998"/>
-                  </a:lnTo>
-                  <a:lnTo>
-                    <a:pt x="3489270" y="480379"/>
-                  </a:lnTo>
-                  <a:lnTo>
-                    <a:pt x="3411636" y="444236"/>
-                  </a:lnTo>
-                  <a:lnTo>
-                    <a:pt x="3334002" y="426611"/>
-                  </a:lnTo>
-                  <a:lnTo>
-                    <a:pt x="3256368" y="418482"/>
-                  </a:lnTo>
-                  <a:lnTo>
-                    <a:pt x="3178734" y="410277"/>
-                  </a:lnTo>
-                  <a:lnTo>
-                    <a:pt x="3101100" y="401996"/>
-                  </a:lnTo>
-                  <a:lnTo>
-                    <a:pt x="3023466" y="393638"/>
-                  </a:lnTo>
-                  <a:lnTo>
-                    <a:pt x="2945832" y="385203"/>
-                  </a:lnTo>
-                  <a:lnTo>
-                    <a:pt x="2868198" y="376689"/>
-                  </a:lnTo>
-                  <a:lnTo>
-                    <a:pt x="2790564" y="368096"/>
-                  </a:lnTo>
-                  <a:lnTo>
-                    <a:pt x="2712930" y="359423"/>
-                  </a:lnTo>
-                  <a:lnTo>
-                    <a:pt x="2635295" y="350670"/>
-                  </a:lnTo>
-                  <a:lnTo>
-                    <a:pt x="2557661" y="341835"/>
-                  </a:lnTo>
-                  <a:lnTo>
-                    <a:pt x="2480027" y="332918"/>
-                  </a:lnTo>
-                  <a:lnTo>
-                    <a:pt x="2402393" y="323919"/>
-                  </a:lnTo>
-                  <a:lnTo>
-                    <a:pt x="2324759" y="314836"/>
-                  </a:lnTo>
-                  <a:lnTo>
-                    <a:pt x="2247125" y="305668"/>
-                  </a:lnTo>
-                  <a:lnTo>
-                    <a:pt x="2169491" y="296416"/>
-                  </a:lnTo>
-                  <a:lnTo>
-                    <a:pt x="2091857" y="287077"/>
-                  </a:lnTo>
-                  <a:lnTo>
-                    <a:pt x="2014223" y="277652"/>
-                  </a:lnTo>
-                  <a:lnTo>
-                    <a:pt x="1936589" y="268139"/>
-                  </a:lnTo>
-                  <a:lnTo>
-                    <a:pt x="1858955" y="258537"/>
-                  </a:lnTo>
-                  <a:lnTo>
-                    <a:pt x="1781321" y="248847"/>
-                  </a:lnTo>
-                  <a:lnTo>
-                    <a:pt x="1703687" y="239066"/>
-                  </a:lnTo>
-                  <a:lnTo>
-                    <a:pt x="1626053" y="229195"/>
-                  </a:lnTo>
-                  <a:lnTo>
-                    <a:pt x="1548419" y="219232"/>
-                  </a:lnTo>
-                  <a:lnTo>
-                    <a:pt x="1470785" y="209176"/>
-                  </a:lnTo>
-                  <a:lnTo>
-                    <a:pt x="1393151" y="199027"/>
-                  </a:lnTo>
-                  <a:lnTo>
-                    <a:pt x="1315517" y="188784"/>
-                  </a:lnTo>
-                  <a:lnTo>
-                    <a:pt x="1237883" y="178445"/>
-                  </a:lnTo>
-                  <a:lnTo>
-                    <a:pt x="1160249" y="168011"/>
-                  </a:lnTo>
-                  <a:lnTo>
-                    <a:pt x="1082615" y="157479"/>
-                  </a:lnTo>
-                  <a:lnTo>
-                    <a:pt x="1004981" y="146850"/>
-                  </a:lnTo>
-                  <a:lnTo>
-                    <a:pt x="927346" y="136122"/>
-                  </a:lnTo>
-                  <a:lnTo>
-                    <a:pt x="849712" y="125294"/>
-                  </a:lnTo>
-                  <a:lnTo>
-                    <a:pt x="772078" y="114366"/>
-                  </a:lnTo>
-                  <a:lnTo>
-                    <a:pt x="694444" y="103336"/>
-                  </a:lnTo>
-                  <a:lnTo>
-                    <a:pt x="616810" y="92204"/>
-                  </a:lnTo>
-                  <a:lnTo>
-                    <a:pt x="539176" y="80968"/>
-                  </a:lnTo>
-                  <a:lnTo>
-                    <a:pt x="461542" y="69628"/>
-                  </a:lnTo>
-                  <a:lnTo>
-                    <a:pt x="383908" y="58183"/>
-                  </a:lnTo>
-                  <a:lnTo>
-                    <a:pt x="306274" y="46631"/>
-                  </a:lnTo>
-                  <a:lnTo>
-                    <a:pt x="228640" y="34972"/>
-                  </a:lnTo>
-                  <a:lnTo>
-                    <a:pt x="151006" y="23205"/>
-                  </a:lnTo>
-                  <a:lnTo>
-                    <a:pt x="73372" y="11328"/>
-                  </a:lnTo>
-                  <a:lnTo>
-                    <a:pt x="0" y="0"/>
+                    <a:pt x="7293338" y="695163"/>
+                  </a:lnTo>
+                  <a:lnTo>
+                    <a:pt x="7215704" y="689540"/>
+                  </a:lnTo>
+                  <a:lnTo>
+                    <a:pt x="7138070" y="683733"/>
+                  </a:lnTo>
+                  <a:lnTo>
+                    <a:pt x="7060436" y="677735"/>
+                  </a:lnTo>
+                  <a:lnTo>
+                    <a:pt x="6982802" y="671541"/>
+                  </a:lnTo>
+                  <a:lnTo>
+                    <a:pt x="6905168" y="665144"/>
+                  </a:lnTo>
+                  <a:lnTo>
+                    <a:pt x="6827534" y="658536"/>
+                  </a:lnTo>
+                  <a:lnTo>
+                    <a:pt x="6749900" y="651713"/>
+                  </a:lnTo>
+                  <a:lnTo>
+                    <a:pt x="6672266" y="644665"/>
+                  </a:lnTo>
+                  <a:lnTo>
+                    <a:pt x="6594632" y="637387"/>
+                  </a:lnTo>
+                  <a:lnTo>
+                    <a:pt x="6516998" y="629870"/>
+                  </a:lnTo>
+                  <a:lnTo>
+                    <a:pt x="6439364" y="622107"/>
+                  </a:lnTo>
+                  <a:lnTo>
+                    <a:pt x="6361730" y="614089"/>
+                  </a:lnTo>
+                  <a:lnTo>
+                    <a:pt x="6284096" y="605808"/>
+                  </a:lnTo>
+                  <a:lnTo>
+                    <a:pt x="6206462" y="597256"/>
+                  </a:lnTo>
+                  <a:lnTo>
+                    <a:pt x="6128827" y="588423"/>
+                  </a:lnTo>
+                  <a:lnTo>
+                    <a:pt x="6051193" y="579301"/>
+                  </a:lnTo>
+                  <a:lnTo>
+                    <a:pt x="5973559" y="569880"/>
+                  </a:lnTo>
+                  <a:lnTo>
+                    <a:pt x="5895925" y="560150"/>
+                  </a:lnTo>
+                  <a:lnTo>
+                    <a:pt x="5818291" y="550101"/>
+                  </a:lnTo>
+                  <a:lnTo>
+                    <a:pt x="5740657" y="539723"/>
+                  </a:lnTo>
+                  <a:lnTo>
+                    <a:pt x="5663023" y="529004"/>
+                  </a:lnTo>
+                  <a:lnTo>
+                    <a:pt x="5585389" y="517934"/>
+                  </a:lnTo>
+                  <a:lnTo>
+                    <a:pt x="5507755" y="506502"/>
+                  </a:lnTo>
+                  <a:lnTo>
+                    <a:pt x="5430121" y="494694"/>
+                  </a:lnTo>
+                  <a:lnTo>
+                    <a:pt x="5352487" y="482499"/>
+                  </a:lnTo>
+                  <a:lnTo>
+                    <a:pt x="5274853" y="469905"/>
+                  </a:lnTo>
+                  <a:lnTo>
+                    <a:pt x="5197219" y="456898"/>
+                  </a:lnTo>
+                  <a:lnTo>
+                    <a:pt x="5119585" y="443464"/>
+                  </a:lnTo>
+                  <a:lnTo>
+                    <a:pt x="5041951" y="429590"/>
+                  </a:lnTo>
+                  <a:lnTo>
+                    <a:pt x="4964317" y="415261"/>
+                  </a:lnTo>
+                  <a:lnTo>
+                    <a:pt x="4886683" y="400463"/>
+                  </a:lnTo>
+                  <a:lnTo>
+                    <a:pt x="4809049" y="385179"/>
+                  </a:lnTo>
+                  <a:lnTo>
+                    <a:pt x="4731415" y="369395"/>
+                  </a:lnTo>
+                  <a:lnTo>
+                    <a:pt x="4653781" y="353093"/>
+                  </a:lnTo>
+                  <a:lnTo>
+                    <a:pt x="4576147" y="336256"/>
+                  </a:lnTo>
+                  <a:lnTo>
+                    <a:pt x="4498513" y="318868"/>
+                  </a:lnTo>
+                  <a:lnTo>
+                    <a:pt x="4420879" y="300909"/>
+                  </a:lnTo>
+                  <a:lnTo>
+                    <a:pt x="4343244" y="282362"/>
+                  </a:lnTo>
+                  <a:lnTo>
+                    <a:pt x="4265610" y="263207"/>
+                  </a:lnTo>
+                  <a:lnTo>
+                    <a:pt x="4187976" y="243424"/>
+                  </a:lnTo>
+                  <a:lnTo>
+                    <a:pt x="4110342" y="222993"/>
+                  </a:lnTo>
+                  <a:lnTo>
+                    <a:pt x="4032708" y="201892"/>
+                  </a:lnTo>
+                  <a:lnTo>
+                    <a:pt x="3955074" y="180099"/>
+                  </a:lnTo>
+                  <a:lnTo>
+                    <a:pt x="3877440" y="157591"/>
+                  </a:lnTo>
+                  <a:lnTo>
+                    <a:pt x="3799806" y="134346"/>
+                  </a:lnTo>
+                  <a:lnTo>
+                    <a:pt x="3722172" y="110339"/>
+                  </a:lnTo>
+                  <a:lnTo>
+                    <a:pt x="3644538" y="85545"/>
+                  </a:lnTo>
+                  <a:lnTo>
+                    <a:pt x="3566904" y="59938"/>
+                  </a:lnTo>
+                  <a:lnTo>
+                    <a:pt x="3489270" y="33491"/>
+                  </a:lnTo>
+                  <a:lnTo>
+                    <a:pt x="3411636" y="6178"/>
+                  </a:lnTo>
+                  <a:lnTo>
+                    <a:pt x="3334002" y="0"/>
+                  </a:lnTo>
+                  <a:lnTo>
+                    <a:pt x="3256368" y="4417"/>
+                  </a:lnTo>
+                  <a:lnTo>
+                    <a:pt x="3178734" y="8811"/>
+                  </a:lnTo>
+                  <a:lnTo>
+                    <a:pt x="3101100" y="13183"/>
+                  </a:lnTo>
+                  <a:lnTo>
+                    <a:pt x="3023466" y="17533"/>
+                  </a:lnTo>
+                  <a:lnTo>
+                    <a:pt x="2945832" y="21861"/>
+                  </a:lnTo>
+                  <a:lnTo>
+                    <a:pt x="2868198" y="26166"/>
+                  </a:lnTo>
+                  <a:lnTo>
+                    <a:pt x="2790564" y="30450"/>
+                  </a:lnTo>
+                  <a:lnTo>
+                    <a:pt x="2712930" y="34712"/>
+                  </a:lnTo>
+                  <a:lnTo>
+                    <a:pt x="2635295" y="38952"/>
+                  </a:lnTo>
+                  <a:lnTo>
+                    <a:pt x="2557661" y="43171"/>
+                  </a:lnTo>
+                  <a:lnTo>
+                    <a:pt x="2480027" y="47368"/>
+                  </a:lnTo>
+                  <a:lnTo>
+                    <a:pt x="2402393" y="51543"/>
+                  </a:lnTo>
+                  <a:lnTo>
+                    <a:pt x="2324759" y="55698"/>
+                  </a:lnTo>
+                  <a:lnTo>
+                    <a:pt x="2247125" y="59831"/>
+                  </a:lnTo>
+                  <a:lnTo>
+                    <a:pt x="2169491" y="63943"/>
+                  </a:lnTo>
+                  <a:lnTo>
+                    <a:pt x="2091857" y="68034"/>
+                  </a:lnTo>
+                  <a:lnTo>
+                    <a:pt x="2014223" y="72104"/>
+                  </a:lnTo>
+                  <a:lnTo>
+                    <a:pt x="1936589" y="76154"/>
+                  </a:lnTo>
+                  <a:lnTo>
+                    <a:pt x="1858955" y="80183"/>
+                  </a:lnTo>
+                  <a:lnTo>
+                    <a:pt x="1781321" y="84191"/>
+                  </a:lnTo>
+                  <a:lnTo>
+                    <a:pt x="1703687" y="88179"/>
+                  </a:lnTo>
+                  <a:lnTo>
+                    <a:pt x="1626053" y="92147"/>
+                  </a:lnTo>
+                  <a:lnTo>
+                    <a:pt x="1548419" y="96094"/>
+                  </a:lnTo>
+                  <a:lnTo>
+                    <a:pt x="1470785" y="100022"/>
+                  </a:lnTo>
+                  <a:lnTo>
+                    <a:pt x="1393151" y="103929"/>
+                  </a:lnTo>
+                  <a:lnTo>
+                    <a:pt x="1315517" y="107816"/>
+                  </a:lnTo>
+                  <a:lnTo>
+                    <a:pt x="1237883" y="111684"/>
+                  </a:lnTo>
+                  <a:lnTo>
+                    <a:pt x="1160249" y="115532"/>
+                  </a:lnTo>
+                  <a:lnTo>
+                    <a:pt x="1082615" y="119360"/>
+                  </a:lnTo>
+                  <a:lnTo>
+                    <a:pt x="1004981" y="123169"/>
+                  </a:lnTo>
+                  <a:lnTo>
+                    <a:pt x="927346" y="126958"/>
+                  </a:lnTo>
+                  <a:lnTo>
+                    <a:pt x="849712" y="130728"/>
+                  </a:lnTo>
+                  <a:lnTo>
+                    <a:pt x="772078" y="134479"/>
+                  </a:lnTo>
+                  <a:lnTo>
+                    <a:pt x="694444" y="138211"/>
+                  </a:lnTo>
+                  <a:lnTo>
+                    <a:pt x="616810" y="141923"/>
+                  </a:lnTo>
+                  <a:lnTo>
+                    <a:pt x="539176" y="145617"/>
+                  </a:lnTo>
+                  <a:lnTo>
+                    <a:pt x="461542" y="149292"/>
+                  </a:lnTo>
+                  <a:lnTo>
+                    <a:pt x="383908" y="152948"/>
+                  </a:lnTo>
+                  <a:lnTo>
+                    <a:pt x="306274" y="156586"/>
+                  </a:lnTo>
+                  <a:lnTo>
+                    <a:pt x="228640" y="160205"/>
+                  </a:lnTo>
+                  <a:lnTo>
+                    <a:pt x="151006" y="163805"/>
+                  </a:lnTo>
+                  <a:lnTo>
+                    <a:pt x="73372" y="167387"/>
+                  </a:lnTo>
+                  <a:lnTo>
+                    <a:pt x="0" y="170756"/>
                   </a:lnTo>
                 </a:path>
               </a:pathLst>
@@ -4175,300 +4235,300 @@
           </p:nvSpPr>
           <p:spPr>
             <a:xfrm>
-              <a:off x="817517" y="2827629"/>
-              <a:ext cx="7370972" cy="2494429"/>
+              <a:off x="817517" y="3977162"/>
+              <a:ext cx="7370972" cy="1138736"/>
             </a:xfrm>
             <a:custGeom>
               <a:avLst/>
               <a:pathLst>
-                <a:path w="7370972" h="2494429">
+                <a:path w="7370972" h="1138736">
                   <a:moveTo>
                     <a:pt x="0" y="0"/>
                   </a:moveTo>
                   <a:lnTo>
-                    <a:pt x="73372" y="66499"/>
-                  </a:lnTo>
-                  <a:lnTo>
-                    <a:pt x="151006" y="135044"/>
-                  </a:lnTo>
-                  <a:lnTo>
-                    <a:pt x="228640" y="201819"/>
-                  </a:lnTo>
-                  <a:lnTo>
-                    <a:pt x="306274" y="266870"/>
-                  </a:lnTo>
-                  <a:lnTo>
-                    <a:pt x="383908" y="330242"/>
-                  </a:lnTo>
-                  <a:lnTo>
-                    <a:pt x="461542" y="391978"/>
-                  </a:lnTo>
-                  <a:lnTo>
-                    <a:pt x="539176" y="452120"/>
-                  </a:lnTo>
-                  <a:lnTo>
-                    <a:pt x="616810" y="510710"/>
-                  </a:lnTo>
-                  <a:lnTo>
-                    <a:pt x="694444" y="567787"/>
-                  </a:lnTo>
-                  <a:lnTo>
-                    <a:pt x="772078" y="623390"/>
-                  </a:lnTo>
-                  <a:lnTo>
-                    <a:pt x="849712" y="677558"/>
-                  </a:lnTo>
-                  <a:lnTo>
-                    <a:pt x="927346" y="730328"/>
-                  </a:lnTo>
-                  <a:lnTo>
-                    <a:pt x="1004981" y="781735"/>
-                  </a:lnTo>
-                  <a:lnTo>
-                    <a:pt x="1082615" y="831815"/>
-                  </a:lnTo>
-                  <a:lnTo>
-                    <a:pt x="1160249" y="880602"/>
-                  </a:lnTo>
-                  <a:lnTo>
-                    <a:pt x="1237883" y="928130"/>
-                  </a:lnTo>
-                  <a:lnTo>
-                    <a:pt x="1315517" y="974430"/>
-                  </a:lnTo>
-                  <a:lnTo>
-                    <a:pt x="1393151" y="1019536"/>
-                  </a:lnTo>
-                  <a:lnTo>
-                    <a:pt x="1470785" y="1063476"/>
-                  </a:lnTo>
-                  <a:lnTo>
-                    <a:pt x="1548419" y="1106283"/>
-                  </a:lnTo>
-                  <a:lnTo>
-                    <a:pt x="1626053" y="1147984"/>
-                  </a:lnTo>
-                  <a:lnTo>
-                    <a:pt x="1703687" y="1188609"/>
-                  </a:lnTo>
-                  <a:lnTo>
-                    <a:pt x="1781321" y="1228185"/>
-                  </a:lnTo>
-                  <a:lnTo>
-                    <a:pt x="1858955" y="1266739"/>
-                  </a:lnTo>
-                  <a:lnTo>
-                    <a:pt x="1936589" y="1304298"/>
-                  </a:lnTo>
-                  <a:lnTo>
-                    <a:pt x="2014223" y="1340887"/>
-                  </a:lnTo>
-                  <a:lnTo>
-                    <a:pt x="2091857" y="1376532"/>
-                  </a:lnTo>
-                  <a:lnTo>
-                    <a:pt x="2169491" y="1411256"/>
-                  </a:lnTo>
-                  <a:lnTo>
-                    <a:pt x="2247125" y="1445084"/>
-                  </a:lnTo>
-                  <a:lnTo>
-                    <a:pt x="2324759" y="1478039"/>
-                  </a:lnTo>
-                  <a:lnTo>
-                    <a:pt x="2402393" y="1510143"/>
-                  </a:lnTo>
-                  <a:lnTo>
-                    <a:pt x="2480027" y="1541418"/>
-                  </a:lnTo>
-                  <a:lnTo>
-                    <a:pt x="2557661" y="1571885"/>
-                  </a:lnTo>
-                  <a:lnTo>
-                    <a:pt x="2635295" y="1601566"/>
-                  </a:lnTo>
-                  <a:lnTo>
-                    <a:pt x="2712930" y="1630481"/>
-                  </a:lnTo>
-                  <a:lnTo>
-                    <a:pt x="2790564" y="1658649"/>
-                  </a:lnTo>
-                  <a:lnTo>
-                    <a:pt x="2868198" y="1686091"/>
-                  </a:lnTo>
-                  <a:lnTo>
-                    <a:pt x="2945832" y="1712823"/>
-                  </a:lnTo>
-                  <a:lnTo>
-                    <a:pt x="3023466" y="1738866"/>
-                  </a:lnTo>
-                  <a:lnTo>
-                    <a:pt x="3101100" y="1764236"/>
-                  </a:lnTo>
-                  <a:lnTo>
-                    <a:pt x="3178734" y="1788951"/>
-                  </a:lnTo>
-                  <a:lnTo>
-                    <a:pt x="3256368" y="1813028"/>
-                  </a:lnTo>
-                  <a:lnTo>
-                    <a:pt x="3334002" y="1836484"/>
-                  </a:lnTo>
-                  <a:lnTo>
-                    <a:pt x="3411636" y="1859334"/>
-                  </a:lnTo>
-                  <a:lnTo>
-                    <a:pt x="3489270" y="1881594"/>
-                  </a:lnTo>
-                  <a:lnTo>
-                    <a:pt x="3566904" y="1903280"/>
-                  </a:lnTo>
-                  <a:lnTo>
-                    <a:pt x="3644538" y="1924405"/>
-                  </a:lnTo>
-                  <a:lnTo>
-                    <a:pt x="3722172" y="1944985"/>
-                  </a:lnTo>
-                  <a:lnTo>
-                    <a:pt x="3799806" y="1965034"/>
-                  </a:lnTo>
-                  <a:lnTo>
-                    <a:pt x="3877440" y="1984566"/>
-                  </a:lnTo>
-                  <a:lnTo>
-                    <a:pt x="3955074" y="2003593"/>
-                  </a:lnTo>
-                  <a:lnTo>
-                    <a:pt x="4032708" y="2022129"/>
-                  </a:lnTo>
-                  <a:lnTo>
-                    <a:pt x="4110342" y="2040186"/>
-                  </a:lnTo>
-                  <a:lnTo>
-                    <a:pt x="4187976" y="2057777"/>
-                  </a:lnTo>
-                  <a:lnTo>
-                    <a:pt x="4265610" y="2074914"/>
-                  </a:lnTo>
-                  <a:lnTo>
-                    <a:pt x="4343244" y="2091609"/>
-                  </a:lnTo>
-                  <a:lnTo>
-                    <a:pt x="4420879" y="2107872"/>
-                  </a:lnTo>
-                  <a:lnTo>
-                    <a:pt x="4498513" y="2123716"/>
-                  </a:lnTo>
-                  <a:lnTo>
-                    <a:pt x="4576147" y="2139151"/>
-                  </a:lnTo>
-                  <a:lnTo>
-                    <a:pt x="4653781" y="2154187"/>
-                  </a:lnTo>
-                  <a:lnTo>
-                    <a:pt x="4731415" y="2168835"/>
-                  </a:lnTo>
-                  <a:lnTo>
-                    <a:pt x="4809049" y="2183105"/>
-                  </a:lnTo>
-                  <a:lnTo>
-                    <a:pt x="4886683" y="2197006"/>
-                  </a:lnTo>
-                  <a:lnTo>
-                    <a:pt x="4964317" y="2210549"/>
-                  </a:lnTo>
-                  <a:lnTo>
-                    <a:pt x="5041951" y="2223742"/>
-                  </a:lnTo>
-                  <a:lnTo>
-                    <a:pt x="5119585" y="2236594"/>
-                  </a:lnTo>
-                  <a:lnTo>
-                    <a:pt x="5197219" y="2249115"/>
-                  </a:lnTo>
-                  <a:lnTo>
-                    <a:pt x="5274853" y="2261312"/>
-                  </a:lnTo>
-                  <a:lnTo>
-                    <a:pt x="5352487" y="2273195"/>
-                  </a:lnTo>
-                  <a:lnTo>
-                    <a:pt x="5430121" y="2284770"/>
-                  </a:lnTo>
-                  <a:lnTo>
-                    <a:pt x="5507755" y="2296047"/>
-                  </a:lnTo>
-                  <a:lnTo>
-                    <a:pt x="5585389" y="2307033"/>
-                  </a:lnTo>
-                  <a:lnTo>
-                    <a:pt x="5663023" y="2317735"/>
-                  </a:lnTo>
-                  <a:lnTo>
-                    <a:pt x="5740657" y="2328161"/>
-                  </a:lnTo>
-                  <a:lnTo>
-                    <a:pt x="5818291" y="2338317"/>
-                  </a:lnTo>
-                  <a:lnTo>
-                    <a:pt x="5895925" y="2348212"/>
-                  </a:lnTo>
-                  <a:lnTo>
-                    <a:pt x="5973559" y="2357851"/>
-                  </a:lnTo>
-                  <a:lnTo>
-                    <a:pt x="6051193" y="2367241"/>
-                  </a:lnTo>
-                  <a:lnTo>
-                    <a:pt x="6128827" y="2376389"/>
-                  </a:lnTo>
-                  <a:lnTo>
-                    <a:pt x="6206462" y="2385300"/>
-                  </a:lnTo>
-                  <a:lnTo>
-                    <a:pt x="6284096" y="2393982"/>
-                  </a:lnTo>
-                  <a:lnTo>
-                    <a:pt x="6361730" y="2402439"/>
-                  </a:lnTo>
-                  <a:lnTo>
-                    <a:pt x="6439364" y="2410678"/>
-                  </a:lnTo>
-                  <a:lnTo>
-                    <a:pt x="6516998" y="2418705"/>
-                  </a:lnTo>
-                  <a:lnTo>
-                    <a:pt x="6594632" y="2426524"/>
-                  </a:lnTo>
-                  <a:lnTo>
-                    <a:pt x="6672266" y="2434141"/>
-                  </a:lnTo>
-                  <a:lnTo>
-                    <a:pt x="6749900" y="2441562"/>
-                  </a:lnTo>
-                  <a:lnTo>
-                    <a:pt x="6827534" y="2448791"/>
-                  </a:lnTo>
-                  <a:lnTo>
-                    <a:pt x="6905168" y="2455833"/>
-                  </a:lnTo>
-                  <a:lnTo>
-                    <a:pt x="6982802" y="2462694"/>
-                  </a:lnTo>
-                  <a:lnTo>
-                    <a:pt x="7060436" y="2469377"/>
-                  </a:lnTo>
-                  <a:lnTo>
-                    <a:pt x="7138070" y="2475888"/>
-                  </a:lnTo>
-                  <a:lnTo>
-                    <a:pt x="7215704" y="2482231"/>
-                  </a:lnTo>
-                  <a:lnTo>
-                    <a:pt x="7293338" y="2488410"/>
-                  </a:lnTo>
-                  <a:lnTo>
-                    <a:pt x="7370972" y="2494429"/>
+                    <a:pt x="73372" y="20044"/>
+                  </a:lnTo>
+                  <a:lnTo>
+                    <a:pt x="151006" y="40967"/>
+                  </a:lnTo>
+                  <a:lnTo>
+                    <a:pt x="228640" y="61607"/>
+                  </a:lnTo>
+                  <a:lnTo>
+                    <a:pt x="306274" y="81970"/>
+                  </a:lnTo>
+                  <a:lnTo>
+                    <a:pt x="383908" y="102058"/>
+                  </a:lnTo>
+                  <a:lnTo>
+                    <a:pt x="461542" y="121875"/>
+                  </a:lnTo>
+                  <a:lnTo>
+                    <a:pt x="539176" y="141425"/>
+                  </a:lnTo>
+                  <a:lnTo>
+                    <a:pt x="616810" y="160711"/>
+                  </a:lnTo>
+                  <a:lnTo>
+                    <a:pt x="694444" y="179738"/>
+                  </a:lnTo>
+                  <a:lnTo>
+                    <a:pt x="772078" y="198508"/>
+                  </a:lnTo>
+                  <a:lnTo>
+                    <a:pt x="849712" y="217025"/>
+                  </a:lnTo>
+                  <a:lnTo>
+                    <a:pt x="927346" y="235292"/>
+                  </a:lnTo>
+                  <a:lnTo>
+                    <a:pt x="1004981" y="253313"/>
+                  </a:lnTo>
+                  <a:lnTo>
+                    <a:pt x="1082615" y="271091"/>
+                  </a:lnTo>
+                  <a:lnTo>
+                    <a:pt x="1160249" y="288629"/>
+                  </a:lnTo>
+                  <a:lnTo>
+                    <a:pt x="1237883" y="305931"/>
+                  </a:lnTo>
+                  <a:lnTo>
+                    <a:pt x="1315517" y="323000"/>
+                  </a:lnTo>
+                  <a:lnTo>
+                    <a:pt x="1393151" y="339838"/>
+                  </a:lnTo>
+                  <a:lnTo>
+                    <a:pt x="1470785" y="356450"/>
+                  </a:lnTo>
+                  <a:lnTo>
+                    <a:pt x="1548419" y="372838"/>
+                  </a:lnTo>
+                  <a:lnTo>
+                    <a:pt x="1626053" y="389004"/>
+                  </a:lnTo>
+                  <a:lnTo>
+                    <a:pt x="1703687" y="404953"/>
+                  </a:lnTo>
+                  <a:lnTo>
+                    <a:pt x="1781321" y="420687"/>
+                  </a:lnTo>
+                  <a:lnTo>
+                    <a:pt x="1858955" y="436209"/>
+                  </a:lnTo>
+                  <a:lnTo>
+                    <a:pt x="1936589" y="451521"/>
+                  </a:lnTo>
+                  <a:lnTo>
+                    <a:pt x="2014223" y="466627"/>
+                  </a:lnTo>
+                  <a:lnTo>
+                    <a:pt x="2091857" y="481529"/>
+                  </a:lnTo>
+                  <a:lnTo>
+                    <a:pt x="2169491" y="496231"/>
+                  </a:lnTo>
+                  <a:lnTo>
+                    <a:pt x="2247125" y="510734"/>
+                  </a:lnTo>
+                  <a:lnTo>
+                    <a:pt x="2324759" y="525042"/>
+                  </a:lnTo>
+                  <a:lnTo>
+                    <a:pt x="2402393" y="539156"/>
+                  </a:lnTo>
+                  <a:lnTo>
+                    <a:pt x="2480027" y="553081"/>
+                  </a:lnTo>
+                  <a:lnTo>
+                    <a:pt x="2557661" y="566818"/>
+                  </a:lnTo>
+                  <a:lnTo>
+                    <a:pt x="2635295" y="580369"/>
+                  </a:lnTo>
+                  <a:lnTo>
+                    <a:pt x="2712930" y="593738"/>
+                  </a:lnTo>
+                  <a:lnTo>
+                    <a:pt x="2790564" y="606927"/>
+                  </a:lnTo>
+                  <a:lnTo>
+                    <a:pt x="2868198" y="619938"/>
+                  </a:lnTo>
+                  <a:lnTo>
+                    <a:pt x="2945832" y="632773"/>
+                  </a:lnTo>
+                  <a:lnTo>
+                    <a:pt x="3023466" y="645436"/>
+                  </a:lnTo>
+                  <a:lnTo>
+                    <a:pt x="3101100" y="657928"/>
+                  </a:lnTo>
+                  <a:lnTo>
+                    <a:pt x="3178734" y="670251"/>
+                  </a:lnTo>
+                  <a:lnTo>
+                    <a:pt x="3256368" y="682408"/>
+                  </a:lnTo>
+                  <a:lnTo>
+                    <a:pt x="3334002" y="694402"/>
+                  </a:lnTo>
+                  <a:lnTo>
+                    <a:pt x="3411636" y="706233"/>
+                  </a:lnTo>
+                  <a:lnTo>
+                    <a:pt x="3489270" y="717905"/>
+                  </a:lnTo>
+                  <a:lnTo>
+                    <a:pt x="3566904" y="729420"/>
+                  </a:lnTo>
+                  <a:lnTo>
+                    <a:pt x="3644538" y="740780"/>
+                  </a:lnTo>
+                  <a:lnTo>
+                    <a:pt x="3722172" y="751986"/>
+                  </a:lnTo>
+                  <a:lnTo>
+                    <a:pt x="3799806" y="763042"/>
+                  </a:lnTo>
+                  <a:lnTo>
+                    <a:pt x="3877440" y="773948"/>
+                  </a:lnTo>
+                  <a:lnTo>
+                    <a:pt x="3955074" y="784707"/>
+                  </a:lnTo>
+                  <a:lnTo>
+                    <a:pt x="4032708" y="795321"/>
+                  </a:lnTo>
+                  <a:lnTo>
+                    <a:pt x="4110342" y="805792"/>
+                  </a:lnTo>
+                  <a:lnTo>
+                    <a:pt x="4187976" y="816122"/>
+                  </a:lnTo>
+                  <a:lnTo>
+                    <a:pt x="4265610" y="826313"/>
+                  </a:lnTo>
+                  <a:lnTo>
+                    <a:pt x="4343244" y="836366"/>
+                  </a:lnTo>
+                  <a:lnTo>
+                    <a:pt x="4420879" y="846284"/>
+                  </a:lnTo>
+                  <a:lnTo>
+                    <a:pt x="4498513" y="856068"/>
+                  </a:lnTo>
+                  <a:lnTo>
+                    <a:pt x="4576147" y="865721"/>
+                  </a:lnTo>
+                  <a:lnTo>
+                    <a:pt x="4653781" y="875243"/>
+                  </a:lnTo>
+                  <a:lnTo>
+                    <a:pt x="4731415" y="884636"/>
+                  </a:lnTo>
+                  <a:lnTo>
+                    <a:pt x="4809049" y="893903"/>
+                  </a:lnTo>
+                  <a:lnTo>
+                    <a:pt x="4886683" y="903046"/>
+                  </a:lnTo>
+                  <a:lnTo>
+                    <a:pt x="4964317" y="912064"/>
+                  </a:lnTo>
+                  <a:lnTo>
+                    <a:pt x="5041951" y="920962"/>
+                  </a:lnTo>
+                  <a:lnTo>
+                    <a:pt x="5119585" y="929739"/>
+                  </a:lnTo>
+                  <a:lnTo>
+                    <a:pt x="5197219" y="938398"/>
+                  </a:lnTo>
+                  <a:lnTo>
+                    <a:pt x="5274853" y="946940"/>
+                  </a:lnTo>
+                  <a:lnTo>
+                    <a:pt x="5352487" y="955368"/>
+                  </a:lnTo>
+                  <a:lnTo>
+                    <a:pt x="5430121" y="963681"/>
+                  </a:lnTo>
+                  <a:lnTo>
+                    <a:pt x="5507755" y="971883"/>
+                  </a:lnTo>
+                  <a:lnTo>
+                    <a:pt x="5585389" y="979973"/>
+                  </a:lnTo>
+                  <a:lnTo>
+                    <a:pt x="5663023" y="987955"/>
+                  </a:lnTo>
+                  <a:lnTo>
+                    <a:pt x="5740657" y="995829"/>
+                  </a:lnTo>
+                  <a:lnTo>
+                    <a:pt x="5818291" y="1003597"/>
+                  </a:lnTo>
+                  <a:lnTo>
+                    <a:pt x="5895925" y="1011261"/>
+                  </a:lnTo>
+                  <a:lnTo>
+                    <a:pt x="5973559" y="1018821"/>
+                  </a:lnTo>
+                  <a:lnTo>
+                    <a:pt x="6051193" y="1026279"/>
+                  </a:lnTo>
+                  <a:lnTo>
+                    <a:pt x="6128827" y="1033636"/>
+                  </a:lnTo>
+                  <a:lnTo>
+                    <a:pt x="6206462" y="1040895"/>
+                  </a:lnTo>
+                  <a:lnTo>
+                    <a:pt x="6284096" y="1048055"/>
+                  </a:lnTo>
+                  <a:lnTo>
+                    <a:pt x="6361730" y="1055119"/>
+                  </a:lnTo>
+                  <a:lnTo>
+                    <a:pt x="6439364" y="1062088"/>
+                  </a:lnTo>
+                  <a:lnTo>
+                    <a:pt x="6516998" y="1068963"/>
+                  </a:lnTo>
+                  <a:lnTo>
+                    <a:pt x="6594632" y="1075745"/>
+                  </a:lnTo>
+                  <a:lnTo>
+                    <a:pt x="6672266" y="1082436"/>
+                  </a:lnTo>
+                  <a:lnTo>
+                    <a:pt x="6749900" y="1089036"/>
+                  </a:lnTo>
+                  <a:lnTo>
+                    <a:pt x="6827534" y="1095548"/>
+                  </a:lnTo>
+                  <a:lnTo>
+                    <a:pt x="6905168" y="1101971"/>
+                  </a:lnTo>
+                  <a:lnTo>
+                    <a:pt x="6982802" y="1108309"/>
+                  </a:lnTo>
+                  <a:lnTo>
+                    <a:pt x="7060436" y="1114560"/>
+                  </a:lnTo>
+                  <a:lnTo>
+                    <a:pt x="7138070" y="1120728"/>
+                  </a:lnTo>
+                  <a:lnTo>
+                    <a:pt x="7215704" y="1126812"/>
+                  </a:lnTo>
+                  <a:lnTo>
+                    <a:pt x="7293338" y="1132814"/>
+                  </a:lnTo>
+                  <a:lnTo>
+                    <a:pt x="7370972" y="1138736"/>
                   </a:lnTo>
                 </a:path>
               </a:pathLst>

--- a/docs/plots/carbo/jx_carbo_linsubhr_ratio_grade2.pptx
+++ b/docs/plots/carbo/jx_carbo_linsubhr_ratio_grade2.pptx
@@ -2271,7 +2271,7 @@
           </p:nvSpPr>
           <p:spPr>
             <a:xfrm>
-              <a:off x="817517" y="5114368"/>
+              <a:off x="817517" y="5142518"/>
               <a:ext cx="7799693" cy="0"/>
             </a:xfrm>
             <a:custGeom>
@@ -2314,7 +2314,7 @@
           </p:nvSpPr>
           <p:spPr>
             <a:xfrm>
-              <a:off x="817517" y="4244691"/>
+              <a:off x="817517" y="4313054"/>
               <a:ext cx="7799693" cy="0"/>
             </a:xfrm>
             <a:custGeom>
@@ -2357,7 +2357,7 @@
           </p:nvSpPr>
           <p:spPr>
             <a:xfrm>
-              <a:off x="817517" y="3375014"/>
+              <a:off x="817517" y="3483591"/>
               <a:ext cx="7799693" cy="0"/>
             </a:xfrm>
             <a:custGeom>
@@ -2400,7 +2400,7 @@
           </p:nvSpPr>
           <p:spPr>
             <a:xfrm>
-              <a:off x="817517" y="2505337"/>
+              <a:off x="817517" y="2654127"/>
               <a:ext cx="7799693" cy="0"/>
             </a:xfrm>
             <a:custGeom>
@@ -2443,15 +2443,15 @@
           </p:nvSpPr>
           <p:spPr>
             <a:xfrm>
-              <a:off x="1615213" y="1896563"/>
-              <a:ext cx="0" cy="3826579"/>
+              <a:off x="1615213" y="2073503"/>
+              <a:ext cx="0" cy="3649639"/>
             </a:xfrm>
             <a:custGeom>
               <a:avLst/>
               <a:pathLst>
-                <a:path w="0" h="3826579">
+                <a:path w="0" h="3649639">
                   <a:moveTo>
-                    <a:pt x="0" y="3826579"/>
+                    <a:pt x="0" y="3649639"/>
                   </a:moveTo>
                   <a:lnTo>
                     <a:pt x="0" y="0"/>
@@ -2486,15 +2486,15 @@
           </p:nvSpPr>
           <p:spPr>
             <a:xfrm>
-              <a:off x="3387871" y="1896563"/>
-              <a:ext cx="0" cy="3826579"/>
+              <a:off x="3387871" y="2073503"/>
+              <a:ext cx="0" cy="3649639"/>
             </a:xfrm>
             <a:custGeom>
               <a:avLst/>
               <a:pathLst>
-                <a:path w="0" h="3826579">
+                <a:path w="0" h="3649639">
                   <a:moveTo>
-                    <a:pt x="0" y="3826579"/>
+                    <a:pt x="0" y="3649639"/>
                   </a:moveTo>
                   <a:lnTo>
                     <a:pt x="0" y="0"/>
@@ -2529,15 +2529,15 @@
           </p:nvSpPr>
           <p:spPr>
             <a:xfrm>
-              <a:off x="5160528" y="1896563"/>
-              <a:ext cx="0" cy="3826579"/>
+              <a:off x="5160528" y="2073503"/>
+              <a:ext cx="0" cy="3649639"/>
             </a:xfrm>
             <a:custGeom>
               <a:avLst/>
               <a:pathLst>
-                <a:path w="0" h="3826579">
+                <a:path w="0" h="3649639">
                   <a:moveTo>
-                    <a:pt x="0" y="3826579"/>
+                    <a:pt x="0" y="3649639"/>
                   </a:moveTo>
                   <a:lnTo>
                     <a:pt x="0" y="0"/>
@@ -2572,15 +2572,15 @@
           </p:nvSpPr>
           <p:spPr>
             <a:xfrm>
-              <a:off x="6933186" y="1896563"/>
-              <a:ext cx="0" cy="3826579"/>
+              <a:off x="6933186" y="2073503"/>
+              <a:ext cx="0" cy="3649639"/>
             </a:xfrm>
             <a:custGeom>
               <a:avLst/>
               <a:pathLst>
-                <a:path w="0" h="3826579">
+                <a:path w="0" h="3649639">
                   <a:moveTo>
-                    <a:pt x="0" y="3826579"/>
+                    <a:pt x="0" y="3649639"/>
                   </a:moveTo>
                   <a:lnTo>
                     <a:pt x="0" y="0"/>
@@ -2615,7 +2615,7 @@
           </p:nvSpPr>
           <p:spPr>
             <a:xfrm>
-              <a:off x="817517" y="5549207"/>
+              <a:off x="817517" y="5557249"/>
               <a:ext cx="7799693" cy="0"/>
             </a:xfrm>
             <a:custGeom>
@@ -2658,7 +2658,7 @@
           </p:nvSpPr>
           <p:spPr>
             <a:xfrm>
-              <a:off x="817517" y="4679530"/>
+              <a:off x="817517" y="4727786"/>
               <a:ext cx="7799693" cy="0"/>
             </a:xfrm>
             <a:custGeom>
@@ -2701,7 +2701,7 @@
           </p:nvSpPr>
           <p:spPr>
             <a:xfrm>
-              <a:off x="817517" y="3809853"/>
+              <a:off x="817517" y="3898322"/>
               <a:ext cx="7799693" cy="0"/>
             </a:xfrm>
             <a:custGeom>
@@ -2744,7 +2744,7 @@
           </p:nvSpPr>
           <p:spPr>
             <a:xfrm>
-              <a:off x="817517" y="2940175"/>
+              <a:off x="817517" y="3068859"/>
               <a:ext cx="7799693" cy="0"/>
             </a:xfrm>
             <a:custGeom>
@@ -2787,7 +2787,7 @@
           </p:nvSpPr>
           <p:spPr>
             <a:xfrm>
-              <a:off x="817517" y="2070498"/>
+              <a:off x="817517" y="2239395"/>
               <a:ext cx="7799693" cy="0"/>
             </a:xfrm>
             <a:custGeom>
@@ -2830,15 +2830,15 @@
           </p:nvSpPr>
           <p:spPr>
             <a:xfrm>
-              <a:off x="2501542" y="1896563"/>
-              <a:ext cx="0" cy="3826579"/>
+              <a:off x="2501542" y="2073503"/>
+              <a:ext cx="0" cy="3649639"/>
             </a:xfrm>
             <a:custGeom>
               <a:avLst/>
               <a:pathLst>
-                <a:path w="0" h="3826579">
+                <a:path w="0" h="3649639">
                   <a:moveTo>
-                    <a:pt x="0" y="3826579"/>
+                    <a:pt x="0" y="3649639"/>
                   </a:moveTo>
                   <a:lnTo>
                     <a:pt x="0" y="0"/>
@@ -2873,15 +2873,15 @@
           </p:nvSpPr>
           <p:spPr>
             <a:xfrm>
-              <a:off x="4274200" y="1896563"/>
-              <a:ext cx="0" cy="3826579"/>
+              <a:off x="4274200" y="2073503"/>
+              <a:ext cx="0" cy="3649639"/>
             </a:xfrm>
             <a:custGeom>
               <a:avLst/>
               <a:pathLst>
-                <a:path w="0" h="3826579">
+                <a:path w="0" h="3649639">
                   <a:moveTo>
-                    <a:pt x="0" y="3826579"/>
+                    <a:pt x="0" y="3649639"/>
                   </a:moveTo>
                   <a:lnTo>
                     <a:pt x="0" y="0"/>
@@ -2916,15 +2916,15 @@
           </p:nvSpPr>
           <p:spPr>
             <a:xfrm>
-              <a:off x="6046857" y="1896563"/>
-              <a:ext cx="0" cy="3826579"/>
+              <a:off x="6046857" y="2073503"/>
+              <a:ext cx="0" cy="3649639"/>
             </a:xfrm>
             <a:custGeom>
               <a:avLst/>
               <a:pathLst>
-                <a:path w="0" h="3826579">
+                <a:path w="0" h="3649639">
                   <a:moveTo>
-                    <a:pt x="0" y="3826579"/>
+                    <a:pt x="0" y="3649639"/>
                   </a:moveTo>
                   <a:lnTo>
                     <a:pt x="0" y="0"/>
@@ -2959,15 +2959,15 @@
           </p:nvSpPr>
           <p:spPr>
             <a:xfrm>
-              <a:off x="7819515" y="1896563"/>
-              <a:ext cx="0" cy="3826579"/>
+              <a:off x="7819515" y="2073503"/>
+              <a:ext cx="0" cy="3649639"/>
             </a:xfrm>
             <a:custGeom>
               <a:avLst/>
               <a:pathLst>
-                <a:path w="0" h="3826579">
+                <a:path w="0" h="3649639">
                   <a:moveTo>
-                    <a:pt x="0" y="3826579"/>
+                    <a:pt x="0" y="3649639"/>
                   </a:moveTo>
                   <a:lnTo>
                     <a:pt x="0" y="0"/>
@@ -3002,588 +3002,588 @@
           </p:nvSpPr>
           <p:spPr>
             <a:xfrm>
-              <a:off x="817517" y="1998086"/>
-              <a:ext cx="7370972" cy="3385032"/>
+              <a:off x="817517" y="2170331"/>
+              <a:ext cx="7370972" cy="3228509"/>
             </a:xfrm>
             <a:custGeom>
               <a:avLst/>
               <a:pathLst>
-                <a:path w="7370972" h="3385032">
+                <a:path w="7370972" h="3228509">
                   <a:moveTo>
                     <a:pt x="0" y="0"/>
                   </a:moveTo>
                   <a:lnTo>
-                    <a:pt x="73372" y="106713"/>
-                  </a:lnTo>
-                  <a:lnTo>
-                    <a:pt x="151006" y="216040"/>
-                  </a:lnTo>
-                  <a:lnTo>
-                    <a:pt x="228640" y="321897"/>
-                  </a:lnTo>
-                  <a:lnTo>
-                    <a:pt x="306274" y="424394"/>
-                  </a:lnTo>
-                  <a:lnTo>
-                    <a:pt x="383908" y="523638"/>
-                  </a:lnTo>
-                  <a:lnTo>
-                    <a:pt x="461542" y="619732"/>
-                  </a:lnTo>
-                  <a:lnTo>
-                    <a:pt x="539176" y="712776"/>
-                  </a:lnTo>
-                  <a:lnTo>
-                    <a:pt x="616810" y="802866"/>
-                  </a:lnTo>
-                  <a:lnTo>
-                    <a:pt x="694444" y="890097"/>
-                  </a:lnTo>
-                  <a:lnTo>
-                    <a:pt x="772078" y="974560"/>
-                  </a:lnTo>
-                  <a:lnTo>
-                    <a:pt x="849712" y="1056341"/>
-                  </a:lnTo>
-                  <a:lnTo>
-                    <a:pt x="927346" y="1135527"/>
-                  </a:lnTo>
-                  <a:lnTo>
-                    <a:pt x="1004981" y="1212199"/>
-                  </a:lnTo>
-                  <a:lnTo>
-                    <a:pt x="1082615" y="1286437"/>
-                  </a:lnTo>
-                  <a:lnTo>
-                    <a:pt x="1160249" y="1358320"/>
-                  </a:lnTo>
-                  <a:lnTo>
-                    <a:pt x="1237883" y="1427920"/>
-                  </a:lnTo>
-                  <a:lnTo>
-                    <a:pt x="1315517" y="1495312"/>
-                  </a:lnTo>
-                  <a:lnTo>
-                    <a:pt x="1393151" y="1560564"/>
-                  </a:lnTo>
-                  <a:lnTo>
-                    <a:pt x="1470785" y="1623745"/>
-                  </a:lnTo>
-                  <a:lnTo>
-                    <a:pt x="1548419" y="1684921"/>
-                  </a:lnTo>
-                  <a:lnTo>
-                    <a:pt x="1626053" y="1744155"/>
-                  </a:lnTo>
-                  <a:lnTo>
-                    <a:pt x="1703687" y="1801509"/>
-                  </a:lnTo>
-                  <a:lnTo>
-                    <a:pt x="1781321" y="1857043"/>
-                  </a:lnTo>
-                  <a:lnTo>
-                    <a:pt x="1858955" y="1910814"/>
-                  </a:lnTo>
-                  <a:lnTo>
-                    <a:pt x="1936589" y="1962878"/>
-                  </a:lnTo>
-                  <a:lnTo>
-                    <a:pt x="2014223" y="2013290"/>
-                  </a:lnTo>
-                  <a:lnTo>
-                    <a:pt x="2091857" y="2062101"/>
-                  </a:lnTo>
-                  <a:lnTo>
-                    <a:pt x="2169491" y="2109364"/>
-                  </a:lnTo>
-                  <a:lnTo>
-                    <a:pt x="2247125" y="2155126"/>
-                  </a:lnTo>
-                  <a:lnTo>
-                    <a:pt x="2324759" y="2199435"/>
-                  </a:lnTo>
-                  <a:lnTo>
-                    <a:pt x="2402393" y="2242338"/>
-                  </a:lnTo>
-                  <a:lnTo>
-                    <a:pt x="2480027" y="2283880"/>
-                  </a:lnTo>
-                  <a:lnTo>
-                    <a:pt x="2557661" y="2324103"/>
-                  </a:lnTo>
-                  <a:lnTo>
-                    <a:pt x="2635295" y="2363049"/>
-                  </a:lnTo>
-                  <a:lnTo>
-                    <a:pt x="2712930" y="2400759"/>
-                  </a:lnTo>
-                  <a:lnTo>
-                    <a:pt x="2790564" y="2437272"/>
-                  </a:lnTo>
-                  <a:lnTo>
-                    <a:pt x="2868198" y="2472626"/>
-                  </a:lnTo>
-                  <a:lnTo>
-                    <a:pt x="2945832" y="2506858"/>
-                  </a:lnTo>
-                  <a:lnTo>
-                    <a:pt x="3023466" y="2540004"/>
-                  </a:lnTo>
-                  <a:lnTo>
-                    <a:pt x="3101100" y="2572097"/>
-                  </a:lnTo>
-                  <a:lnTo>
-                    <a:pt x="3178734" y="2603172"/>
-                  </a:lnTo>
-                  <a:lnTo>
-                    <a:pt x="3256368" y="2633260"/>
-                  </a:lnTo>
-                  <a:lnTo>
-                    <a:pt x="3334002" y="2662393"/>
-                  </a:lnTo>
-                  <a:lnTo>
-                    <a:pt x="3411636" y="2679984"/>
-                  </a:lnTo>
-                  <a:lnTo>
-                    <a:pt x="3489270" y="2675521"/>
-                  </a:lnTo>
-                  <a:lnTo>
-                    <a:pt x="3566904" y="2671036"/>
-                  </a:lnTo>
-                  <a:lnTo>
-                    <a:pt x="3644538" y="2666528"/>
-                  </a:lnTo>
-                  <a:lnTo>
-                    <a:pt x="3722172" y="2661997"/>
-                  </a:lnTo>
-                  <a:lnTo>
-                    <a:pt x="3799806" y="2657442"/>
-                  </a:lnTo>
-                  <a:lnTo>
-                    <a:pt x="3877440" y="2652864"/>
-                  </a:lnTo>
-                  <a:lnTo>
-                    <a:pt x="3955074" y="2648263"/>
-                  </a:lnTo>
-                  <a:lnTo>
-                    <a:pt x="4032708" y="2643638"/>
-                  </a:lnTo>
-                  <a:lnTo>
-                    <a:pt x="4110342" y="2638989"/>
-                  </a:lnTo>
-                  <a:lnTo>
-                    <a:pt x="4187976" y="2634317"/>
-                  </a:lnTo>
-                  <a:lnTo>
-                    <a:pt x="4265610" y="2629620"/>
-                  </a:lnTo>
-                  <a:lnTo>
-                    <a:pt x="4343244" y="2624900"/>
-                  </a:lnTo>
-                  <a:lnTo>
-                    <a:pt x="4420879" y="2620155"/>
-                  </a:lnTo>
-                  <a:lnTo>
-                    <a:pt x="4498513" y="2615387"/>
-                  </a:lnTo>
-                  <a:lnTo>
-                    <a:pt x="4576147" y="2610593"/>
-                  </a:lnTo>
-                  <a:lnTo>
-                    <a:pt x="4653781" y="2605775"/>
-                  </a:lnTo>
-                  <a:lnTo>
-                    <a:pt x="4731415" y="2600933"/>
-                  </a:lnTo>
-                  <a:lnTo>
-                    <a:pt x="4809049" y="2596066"/>
-                  </a:lnTo>
-                  <a:lnTo>
-                    <a:pt x="4886683" y="2591173"/>
-                  </a:lnTo>
-                  <a:lnTo>
-                    <a:pt x="4964317" y="2586256"/>
-                  </a:lnTo>
-                  <a:lnTo>
-                    <a:pt x="5041951" y="2581313"/>
-                  </a:lnTo>
-                  <a:lnTo>
-                    <a:pt x="5119585" y="2576345"/>
-                  </a:lnTo>
-                  <a:lnTo>
-                    <a:pt x="5197219" y="2571352"/>
-                  </a:lnTo>
-                  <a:lnTo>
-                    <a:pt x="5274853" y="2566333"/>
-                  </a:lnTo>
-                  <a:lnTo>
-                    <a:pt x="5352487" y="2561289"/>
-                  </a:lnTo>
-                  <a:lnTo>
-                    <a:pt x="5430121" y="2556218"/>
-                  </a:lnTo>
-                  <a:lnTo>
-                    <a:pt x="5507755" y="2551122"/>
-                  </a:lnTo>
-                  <a:lnTo>
-                    <a:pt x="5585389" y="2545999"/>
-                  </a:lnTo>
-                  <a:lnTo>
-                    <a:pt x="5663023" y="2540851"/>
-                  </a:lnTo>
-                  <a:lnTo>
-                    <a:pt x="5740657" y="2535675"/>
-                  </a:lnTo>
-                  <a:lnTo>
-                    <a:pt x="5818291" y="2530474"/>
-                  </a:lnTo>
-                  <a:lnTo>
-                    <a:pt x="5895925" y="2525246"/>
-                  </a:lnTo>
-                  <a:lnTo>
-                    <a:pt x="5973559" y="2519990"/>
-                  </a:lnTo>
-                  <a:lnTo>
-                    <a:pt x="6051193" y="2514709"/>
-                  </a:lnTo>
-                  <a:lnTo>
-                    <a:pt x="6128827" y="2509399"/>
-                  </a:lnTo>
-                  <a:lnTo>
-                    <a:pt x="6206462" y="2504063"/>
-                  </a:lnTo>
-                  <a:lnTo>
-                    <a:pt x="6284096" y="2498700"/>
-                  </a:lnTo>
-                  <a:lnTo>
-                    <a:pt x="6361730" y="2493309"/>
-                  </a:lnTo>
-                  <a:lnTo>
-                    <a:pt x="6439364" y="2487890"/>
-                  </a:lnTo>
-                  <a:lnTo>
-                    <a:pt x="6516998" y="2482444"/>
-                  </a:lnTo>
-                  <a:lnTo>
-                    <a:pt x="6594632" y="2476969"/>
-                  </a:lnTo>
-                  <a:lnTo>
-                    <a:pt x="6672266" y="2471467"/>
-                  </a:lnTo>
-                  <a:lnTo>
-                    <a:pt x="6749900" y="2465936"/>
-                  </a:lnTo>
-                  <a:lnTo>
-                    <a:pt x="6827534" y="2460377"/>
-                  </a:lnTo>
-                  <a:lnTo>
-                    <a:pt x="6905168" y="2454790"/>
-                  </a:lnTo>
-                  <a:lnTo>
-                    <a:pt x="6982802" y="2449174"/>
-                  </a:lnTo>
-                  <a:lnTo>
-                    <a:pt x="7060436" y="2443529"/>
-                  </a:lnTo>
-                  <a:lnTo>
-                    <a:pt x="7138070" y="2437856"/>
-                  </a:lnTo>
-                  <a:lnTo>
-                    <a:pt x="7215704" y="2432153"/>
-                  </a:lnTo>
-                  <a:lnTo>
-                    <a:pt x="7293338" y="2426421"/>
-                  </a:lnTo>
-                  <a:lnTo>
-                    <a:pt x="7370972" y="2420660"/>
-                  </a:lnTo>
-                  <a:lnTo>
-                    <a:pt x="7370972" y="3385032"/>
-                  </a:lnTo>
-                  <a:lnTo>
-                    <a:pt x="7293338" y="3379587"/>
-                  </a:lnTo>
-                  <a:lnTo>
-                    <a:pt x="7215704" y="3373964"/>
-                  </a:lnTo>
-                  <a:lnTo>
-                    <a:pt x="7138070" y="3368157"/>
-                  </a:lnTo>
-                  <a:lnTo>
-                    <a:pt x="7060436" y="3362159"/>
-                  </a:lnTo>
-                  <a:lnTo>
-                    <a:pt x="6982802" y="3355965"/>
-                  </a:lnTo>
-                  <a:lnTo>
-                    <a:pt x="6905168" y="3349568"/>
-                  </a:lnTo>
-                  <a:lnTo>
-                    <a:pt x="6827534" y="3342960"/>
-                  </a:lnTo>
-                  <a:lnTo>
-                    <a:pt x="6749900" y="3336137"/>
-                  </a:lnTo>
-                  <a:lnTo>
-                    <a:pt x="6672266" y="3329089"/>
-                  </a:lnTo>
-                  <a:lnTo>
-                    <a:pt x="6594632" y="3321811"/>
-                  </a:lnTo>
-                  <a:lnTo>
-                    <a:pt x="6516998" y="3314294"/>
-                  </a:lnTo>
-                  <a:lnTo>
-                    <a:pt x="6439364" y="3306530"/>
-                  </a:lnTo>
-                  <a:lnTo>
-                    <a:pt x="6361730" y="3298513"/>
-                  </a:lnTo>
-                  <a:lnTo>
-                    <a:pt x="6284096" y="3290232"/>
-                  </a:lnTo>
-                  <a:lnTo>
-                    <a:pt x="6206462" y="3281680"/>
-                  </a:lnTo>
-                  <a:lnTo>
-                    <a:pt x="6128827" y="3272847"/>
-                  </a:lnTo>
-                  <a:lnTo>
-                    <a:pt x="6051193" y="3263725"/>
-                  </a:lnTo>
-                  <a:lnTo>
-                    <a:pt x="5973559" y="3254304"/>
-                  </a:lnTo>
-                  <a:lnTo>
-                    <a:pt x="5895925" y="3244574"/>
-                  </a:lnTo>
-                  <a:lnTo>
-                    <a:pt x="5818291" y="3234525"/>
-                  </a:lnTo>
-                  <a:lnTo>
-                    <a:pt x="5740657" y="3224147"/>
-                  </a:lnTo>
-                  <a:lnTo>
-                    <a:pt x="5663023" y="3213428"/>
-                  </a:lnTo>
-                  <a:lnTo>
-                    <a:pt x="5585389" y="3202358"/>
-                  </a:lnTo>
-                  <a:lnTo>
-                    <a:pt x="5507755" y="3190926"/>
-                  </a:lnTo>
-                  <a:lnTo>
-                    <a:pt x="5430121" y="3179118"/>
-                  </a:lnTo>
-                  <a:lnTo>
-                    <a:pt x="5352487" y="3166923"/>
-                  </a:lnTo>
-                  <a:lnTo>
-                    <a:pt x="5274853" y="3154329"/>
-                  </a:lnTo>
-                  <a:lnTo>
-                    <a:pt x="5197219" y="3141322"/>
-                  </a:lnTo>
-                  <a:lnTo>
-                    <a:pt x="5119585" y="3127888"/>
-                  </a:lnTo>
-                  <a:lnTo>
-                    <a:pt x="5041951" y="3114014"/>
-                  </a:lnTo>
-                  <a:lnTo>
-                    <a:pt x="4964317" y="3099685"/>
-                  </a:lnTo>
-                  <a:lnTo>
-                    <a:pt x="4886683" y="3084887"/>
-                  </a:lnTo>
-                  <a:lnTo>
-                    <a:pt x="4809049" y="3069603"/>
-                  </a:lnTo>
-                  <a:lnTo>
-                    <a:pt x="4731415" y="3053819"/>
-                  </a:lnTo>
-                  <a:lnTo>
-                    <a:pt x="4653781" y="3037517"/>
-                  </a:lnTo>
-                  <a:lnTo>
-                    <a:pt x="4576147" y="3020680"/>
-                  </a:lnTo>
-                  <a:lnTo>
-                    <a:pt x="4498513" y="3003292"/>
-                  </a:lnTo>
-                  <a:lnTo>
-                    <a:pt x="4420879" y="2985333"/>
-                  </a:lnTo>
-                  <a:lnTo>
-                    <a:pt x="4343244" y="2966786"/>
-                  </a:lnTo>
-                  <a:lnTo>
-                    <a:pt x="4265610" y="2947631"/>
-                  </a:lnTo>
-                  <a:lnTo>
-                    <a:pt x="4187976" y="2927848"/>
-                  </a:lnTo>
-                  <a:lnTo>
-                    <a:pt x="4110342" y="2907417"/>
-                  </a:lnTo>
-                  <a:lnTo>
-                    <a:pt x="4032708" y="2886316"/>
-                  </a:lnTo>
-                  <a:lnTo>
-                    <a:pt x="3955074" y="2864523"/>
-                  </a:lnTo>
-                  <a:lnTo>
-                    <a:pt x="3877440" y="2842015"/>
-                  </a:lnTo>
-                  <a:lnTo>
-                    <a:pt x="3799806" y="2818770"/>
-                  </a:lnTo>
-                  <a:lnTo>
-                    <a:pt x="3722172" y="2794763"/>
-                  </a:lnTo>
-                  <a:lnTo>
-                    <a:pt x="3644538" y="2769969"/>
-                  </a:lnTo>
-                  <a:lnTo>
-                    <a:pt x="3566904" y="2744362"/>
-                  </a:lnTo>
-                  <a:lnTo>
-                    <a:pt x="3489270" y="2717915"/>
-                  </a:lnTo>
-                  <a:lnTo>
-                    <a:pt x="3411636" y="2690602"/>
-                  </a:lnTo>
-                  <a:lnTo>
-                    <a:pt x="3334002" y="2684423"/>
-                  </a:lnTo>
-                  <a:lnTo>
-                    <a:pt x="3256368" y="2688841"/>
-                  </a:lnTo>
-                  <a:lnTo>
-                    <a:pt x="3178734" y="2693235"/>
-                  </a:lnTo>
-                  <a:lnTo>
-                    <a:pt x="3101100" y="2697607"/>
-                  </a:lnTo>
-                  <a:lnTo>
-                    <a:pt x="3023466" y="2701957"/>
-                  </a:lnTo>
-                  <a:lnTo>
-                    <a:pt x="2945832" y="2706285"/>
-                  </a:lnTo>
-                  <a:lnTo>
-                    <a:pt x="2868198" y="2710590"/>
-                  </a:lnTo>
-                  <a:lnTo>
-                    <a:pt x="2790564" y="2714874"/>
-                  </a:lnTo>
-                  <a:lnTo>
-                    <a:pt x="2712930" y="2719136"/>
-                  </a:lnTo>
-                  <a:lnTo>
-                    <a:pt x="2635295" y="2723376"/>
-                  </a:lnTo>
-                  <a:lnTo>
-                    <a:pt x="2557661" y="2727595"/>
-                  </a:lnTo>
-                  <a:lnTo>
-                    <a:pt x="2480027" y="2731792"/>
-                  </a:lnTo>
-                  <a:lnTo>
-                    <a:pt x="2402393" y="2735967"/>
-                  </a:lnTo>
-                  <a:lnTo>
-                    <a:pt x="2324759" y="2740122"/>
-                  </a:lnTo>
-                  <a:lnTo>
-                    <a:pt x="2247125" y="2744255"/>
-                  </a:lnTo>
-                  <a:lnTo>
-                    <a:pt x="2169491" y="2748367"/>
-                  </a:lnTo>
-                  <a:lnTo>
-                    <a:pt x="2091857" y="2752458"/>
-                  </a:lnTo>
-                  <a:lnTo>
-                    <a:pt x="2014223" y="2756528"/>
-                  </a:lnTo>
-                  <a:lnTo>
-                    <a:pt x="1936589" y="2760578"/>
-                  </a:lnTo>
-                  <a:lnTo>
-                    <a:pt x="1858955" y="2764607"/>
-                  </a:lnTo>
-                  <a:lnTo>
-                    <a:pt x="1781321" y="2768615"/>
-                  </a:lnTo>
-                  <a:lnTo>
-                    <a:pt x="1703687" y="2772603"/>
-                  </a:lnTo>
-                  <a:lnTo>
-                    <a:pt x="1626053" y="2776571"/>
-                  </a:lnTo>
-                  <a:lnTo>
-                    <a:pt x="1548419" y="2780518"/>
-                  </a:lnTo>
-                  <a:lnTo>
-                    <a:pt x="1470785" y="2784446"/>
-                  </a:lnTo>
-                  <a:lnTo>
-                    <a:pt x="1393151" y="2788353"/>
-                  </a:lnTo>
-                  <a:lnTo>
-                    <a:pt x="1315517" y="2792240"/>
-                  </a:lnTo>
-                  <a:lnTo>
-                    <a:pt x="1237883" y="2796108"/>
-                  </a:lnTo>
-                  <a:lnTo>
-                    <a:pt x="1160249" y="2799956"/>
-                  </a:lnTo>
-                  <a:lnTo>
-                    <a:pt x="1082615" y="2803784"/>
-                  </a:lnTo>
-                  <a:lnTo>
-                    <a:pt x="1004981" y="2807593"/>
-                  </a:lnTo>
-                  <a:lnTo>
-                    <a:pt x="927346" y="2811382"/>
-                  </a:lnTo>
-                  <a:lnTo>
-                    <a:pt x="849712" y="2815152"/>
-                  </a:lnTo>
-                  <a:lnTo>
-                    <a:pt x="772078" y="2818903"/>
-                  </a:lnTo>
-                  <a:lnTo>
-                    <a:pt x="694444" y="2822635"/>
-                  </a:lnTo>
-                  <a:lnTo>
-                    <a:pt x="616810" y="2826347"/>
-                  </a:lnTo>
-                  <a:lnTo>
-                    <a:pt x="539176" y="2830041"/>
-                  </a:lnTo>
-                  <a:lnTo>
-                    <a:pt x="461542" y="2833716"/>
-                  </a:lnTo>
-                  <a:lnTo>
-                    <a:pt x="383908" y="2837372"/>
-                  </a:lnTo>
-                  <a:lnTo>
-                    <a:pt x="306274" y="2841010"/>
-                  </a:lnTo>
-                  <a:lnTo>
-                    <a:pt x="228640" y="2844629"/>
-                  </a:lnTo>
-                  <a:lnTo>
-                    <a:pt x="151006" y="2848229"/>
-                  </a:lnTo>
-                  <a:lnTo>
-                    <a:pt x="73372" y="2851811"/>
-                  </a:lnTo>
-                  <a:lnTo>
-                    <a:pt x="0" y="2855180"/>
+                    <a:pt x="73372" y="101778"/>
+                  </a:lnTo>
+                  <a:lnTo>
+                    <a:pt x="151006" y="206050"/>
+                  </a:lnTo>
+                  <a:lnTo>
+                    <a:pt x="228640" y="307013"/>
+                  </a:lnTo>
+                  <a:lnTo>
+                    <a:pt x="306274" y="404770"/>
+                  </a:lnTo>
+                  <a:lnTo>
+                    <a:pt x="383908" y="499425"/>
+                  </a:lnTo>
+                  <a:lnTo>
+                    <a:pt x="461542" y="591076"/>
+                  </a:lnTo>
+                  <a:lnTo>
+                    <a:pt x="539176" y="679817"/>
+                  </a:lnTo>
+                  <a:lnTo>
+                    <a:pt x="616810" y="765742"/>
+                  </a:lnTo>
+                  <a:lnTo>
+                    <a:pt x="694444" y="848940"/>
+                  </a:lnTo>
+                  <a:lnTo>
+                    <a:pt x="772078" y="929496"/>
+                  </a:lnTo>
+                  <a:lnTo>
+                    <a:pt x="849712" y="1007496"/>
+                  </a:lnTo>
+                  <a:lnTo>
+                    <a:pt x="927346" y="1083020"/>
+                  </a:lnTo>
+                  <a:lnTo>
+                    <a:pt x="1004981" y="1156147"/>
+                  </a:lnTo>
+                  <a:lnTo>
+                    <a:pt x="1082615" y="1226953"/>
+                  </a:lnTo>
+                  <a:lnTo>
+                    <a:pt x="1160249" y="1295511"/>
+                  </a:lnTo>
+                  <a:lnTo>
+                    <a:pt x="1237883" y="1361894"/>
+                  </a:lnTo>
+                  <a:lnTo>
+                    <a:pt x="1315517" y="1426169"/>
+                  </a:lnTo>
+                  <a:lnTo>
+                    <a:pt x="1393151" y="1488404"/>
+                  </a:lnTo>
+                  <a:lnTo>
+                    <a:pt x="1470785" y="1548664"/>
+                  </a:lnTo>
+                  <a:lnTo>
+                    <a:pt x="1548419" y="1607011"/>
+                  </a:lnTo>
+                  <a:lnTo>
+                    <a:pt x="1626053" y="1663506"/>
+                  </a:lnTo>
+                  <a:lnTo>
+                    <a:pt x="1703687" y="1718208"/>
+                  </a:lnTo>
+                  <a:lnTo>
+                    <a:pt x="1781321" y="1771174"/>
+                  </a:lnTo>
+                  <a:lnTo>
+                    <a:pt x="1858955" y="1822459"/>
+                  </a:lnTo>
+                  <a:lnTo>
+                    <a:pt x="1936589" y="1872115"/>
+                  </a:lnTo>
+                  <a:lnTo>
+                    <a:pt x="2014223" y="1920196"/>
+                  </a:lnTo>
+                  <a:lnTo>
+                    <a:pt x="2091857" y="1966750"/>
+                  </a:lnTo>
+                  <a:lnTo>
+                    <a:pt x="2169491" y="2011827"/>
+                  </a:lnTo>
+                  <a:lnTo>
+                    <a:pt x="2247125" y="2055473"/>
+                  </a:lnTo>
+                  <a:lnTo>
+                    <a:pt x="2324759" y="2097734"/>
+                  </a:lnTo>
+                  <a:lnTo>
+                    <a:pt x="2402393" y="2138654"/>
+                  </a:lnTo>
+                  <a:lnTo>
+                    <a:pt x="2480027" y="2178274"/>
+                  </a:lnTo>
+                  <a:lnTo>
+                    <a:pt x="2557661" y="2216637"/>
+                  </a:lnTo>
+                  <a:lnTo>
+                    <a:pt x="2635295" y="2253782"/>
+                  </a:lnTo>
+                  <a:lnTo>
+                    <a:pt x="2712930" y="2289749"/>
+                  </a:lnTo>
+                  <a:lnTo>
+                    <a:pt x="2790564" y="2324573"/>
+                  </a:lnTo>
+                  <a:lnTo>
+                    <a:pt x="2868198" y="2358293"/>
+                  </a:lnTo>
+                  <a:lnTo>
+                    <a:pt x="2945832" y="2390942"/>
+                  </a:lnTo>
+                  <a:lnTo>
+                    <a:pt x="3023466" y="2422555"/>
+                  </a:lnTo>
+                  <a:lnTo>
+                    <a:pt x="3101100" y="2453164"/>
+                  </a:lnTo>
+                  <a:lnTo>
+                    <a:pt x="3178734" y="2482802"/>
+                  </a:lnTo>
+                  <a:lnTo>
+                    <a:pt x="3256368" y="2511499"/>
+                  </a:lnTo>
+                  <a:lnTo>
+                    <a:pt x="3334002" y="2539285"/>
+                  </a:lnTo>
+                  <a:lnTo>
+                    <a:pt x="3411636" y="2556062"/>
+                  </a:lnTo>
+                  <a:lnTo>
+                    <a:pt x="3489270" y="2551806"/>
+                  </a:lnTo>
+                  <a:lnTo>
+                    <a:pt x="3566904" y="2547528"/>
+                  </a:lnTo>
+                  <a:lnTo>
+                    <a:pt x="3644538" y="2543229"/>
+                  </a:lnTo>
+                  <a:lnTo>
+                    <a:pt x="3722172" y="2538907"/>
+                  </a:lnTo>
+                  <a:lnTo>
+                    <a:pt x="3799806" y="2534563"/>
+                  </a:lnTo>
+                  <a:lnTo>
+                    <a:pt x="3877440" y="2530197"/>
+                  </a:lnTo>
+                  <a:lnTo>
+                    <a:pt x="3955074" y="2525808"/>
+                  </a:lnTo>
+                  <a:lnTo>
+                    <a:pt x="4032708" y="2521397"/>
+                  </a:lnTo>
+                  <a:lnTo>
+                    <a:pt x="4110342" y="2516963"/>
+                  </a:lnTo>
+                  <a:lnTo>
+                    <a:pt x="4187976" y="2512507"/>
+                  </a:lnTo>
+                  <a:lnTo>
+                    <a:pt x="4265610" y="2508028"/>
+                  </a:lnTo>
+                  <a:lnTo>
+                    <a:pt x="4343244" y="2503526"/>
+                  </a:lnTo>
+                  <a:lnTo>
+                    <a:pt x="4420879" y="2499000"/>
+                  </a:lnTo>
+                  <a:lnTo>
+                    <a:pt x="4498513" y="2494452"/>
+                  </a:lnTo>
+                  <a:lnTo>
+                    <a:pt x="4576147" y="2489880"/>
+                  </a:lnTo>
+                  <a:lnTo>
+                    <a:pt x="4653781" y="2485285"/>
+                  </a:lnTo>
+                  <a:lnTo>
+                    <a:pt x="4731415" y="2480667"/>
+                  </a:lnTo>
+                  <a:lnTo>
+                    <a:pt x="4809049" y="2476024"/>
+                  </a:lnTo>
+                  <a:lnTo>
+                    <a:pt x="4886683" y="2471358"/>
+                  </a:lnTo>
+                  <a:lnTo>
+                    <a:pt x="4964317" y="2466668"/>
+                  </a:lnTo>
+                  <a:lnTo>
+                    <a:pt x="5041951" y="2461954"/>
+                  </a:lnTo>
+                  <a:lnTo>
+                    <a:pt x="5119585" y="2457216"/>
+                  </a:lnTo>
+                  <a:lnTo>
+                    <a:pt x="5197219" y="2452454"/>
+                  </a:lnTo>
+                  <a:lnTo>
+                    <a:pt x="5274853" y="2447667"/>
+                  </a:lnTo>
+                  <a:lnTo>
+                    <a:pt x="5352487" y="2442856"/>
+                  </a:lnTo>
+                  <a:lnTo>
+                    <a:pt x="5430121" y="2438020"/>
+                  </a:lnTo>
+                  <a:lnTo>
+                    <a:pt x="5507755" y="2433159"/>
+                  </a:lnTo>
+                  <a:lnTo>
+                    <a:pt x="5585389" y="2428273"/>
+                  </a:lnTo>
+                  <a:lnTo>
+                    <a:pt x="5663023" y="2423363"/>
+                  </a:lnTo>
+                  <a:lnTo>
+                    <a:pt x="5740657" y="2418427"/>
+                  </a:lnTo>
+                  <a:lnTo>
+                    <a:pt x="5818291" y="2413466"/>
+                  </a:lnTo>
+                  <a:lnTo>
+                    <a:pt x="5895925" y="2408479"/>
+                  </a:lnTo>
+                  <a:lnTo>
+                    <a:pt x="5973559" y="2403467"/>
+                  </a:lnTo>
+                  <a:lnTo>
+                    <a:pt x="6051193" y="2398429"/>
+                  </a:lnTo>
+                  <a:lnTo>
+                    <a:pt x="6128827" y="2393366"/>
+                  </a:lnTo>
+                  <a:lnTo>
+                    <a:pt x="6206462" y="2388276"/>
+                  </a:lnTo>
+                  <a:lnTo>
+                    <a:pt x="6284096" y="2383161"/>
+                  </a:lnTo>
+                  <a:lnTo>
+                    <a:pt x="6361730" y="2378019"/>
+                  </a:lnTo>
+                  <a:lnTo>
+                    <a:pt x="6439364" y="2372851"/>
+                  </a:lnTo>
+                  <a:lnTo>
+                    <a:pt x="6516998" y="2367656"/>
+                  </a:lnTo>
+                  <a:lnTo>
+                    <a:pt x="6594632" y="2362435"/>
+                  </a:lnTo>
+                  <a:lnTo>
+                    <a:pt x="6672266" y="2357187"/>
+                  </a:lnTo>
+                  <a:lnTo>
+                    <a:pt x="6749900" y="2351912"/>
+                  </a:lnTo>
+                  <a:lnTo>
+                    <a:pt x="6827534" y="2346610"/>
+                  </a:lnTo>
+                  <a:lnTo>
+                    <a:pt x="6905168" y="2341281"/>
+                  </a:lnTo>
+                  <a:lnTo>
+                    <a:pt x="6982802" y="2335925"/>
+                  </a:lnTo>
+                  <a:lnTo>
+                    <a:pt x="7060436" y="2330541"/>
+                  </a:lnTo>
+                  <a:lnTo>
+                    <a:pt x="7138070" y="2325130"/>
+                  </a:lnTo>
+                  <a:lnTo>
+                    <a:pt x="7215704" y="2319691"/>
+                  </a:lnTo>
+                  <a:lnTo>
+                    <a:pt x="7293338" y="2314224"/>
+                  </a:lnTo>
+                  <a:lnTo>
+                    <a:pt x="7370972" y="2308729"/>
+                  </a:lnTo>
+                  <a:lnTo>
+                    <a:pt x="7370972" y="3228509"/>
+                  </a:lnTo>
+                  <a:lnTo>
+                    <a:pt x="7293338" y="3223316"/>
+                  </a:lnTo>
+                  <a:lnTo>
+                    <a:pt x="7215704" y="3217953"/>
+                  </a:lnTo>
+                  <a:lnTo>
+                    <a:pt x="7138070" y="3212415"/>
+                  </a:lnTo>
+                  <a:lnTo>
+                    <a:pt x="7060436" y="3206694"/>
+                  </a:lnTo>
+                  <a:lnTo>
+                    <a:pt x="6982802" y="3200786"/>
+                  </a:lnTo>
+                  <a:lnTo>
+                    <a:pt x="6905168" y="3194685"/>
+                  </a:lnTo>
+                  <a:lnTo>
+                    <a:pt x="6827534" y="3188383"/>
+                  </a:lnTo>
+                  <a:lnTo>
+                    <a:pt x="6749900" y="3181875"/>
+                  </a:lnTo>
+                  <a:lnTo>
+                    <a:pt x="6672266" y="3175153"/>
+                  </a:lnTo>
+                  <a:lnTo>
+                    <a:pt x="6594632" y="3168212"/>
+                  </a:lnTo>
+                  <a:lnTo>
+                    <a:pt x="6516998" y="3161042"/>
+                  </a:lnTo>
+                  <a:lnTo>
+                    <a:pt x="6439364" y="3153638"/>
+                  </a:lnTo>
+                  <a:lnTo>
+                    <a:pt x="6361730" y="3145991"/>
+                  </a:lnTo>
+                  <a:lnTo>
+                    <a:pt x="6284096" y="3138093"/>
+                  </a:lnTo>
+                  <a:lnTo>
+                    <a:pt x="6206462" y="3129936"/>
+                  </a:lnTo>
+                  <a:lnTo>
+                    <a:pt x="6128827" y="3121512"/>
+                  </a:lnTo>
+                  <a:lnTo>
+                    <a:pt x="6051193" y="3112812"/>
+                  </a:lnTo>
+                  <a:lnTo>
+                    <a:pt x="5973559" y="3103826"/>
+                  </a:lnTo>
+                  <a:lnTo>
+                    <a:pt x="5895925" y="3094546"/>
+                  </a:lnTo>
+                  <a:lnTo>
+                    <a:pt x="5818291" y="3084962"/>
+                  </a:lnTo>
+                  <a:lnTo>
+                    <a:pt x="5740657" y="3075063"/>
+                  </a:lnTo>
+                  <a:lnTo>
+                    <a:pt x="5663023" y="3064840"/>
+                  </a:lnTo>
+                  <a:lnTo>
+                    <a:pt x="5585389" y="3054282"/>
+                  </a:lnTo>
+                  <a:lnTo>
+                    <a:pt x="5507755" y="3043378"/>
+                  </a:lnTo>
+                  <a:lnTo>
+                    <a:pt x="5430121" y="3032117"/>
+                  </a:lnTo>
+                  <a:lnTo>
+                    <a:pt x="5352487" y="3020486"/>
+                  </a:lnTo>
+                  <a:lnTo>
+                    <a:pt x="5274853" y="3008474"/>
+                  </a:lnTo>
+                  <a:lnTo>
+                    <a:pt x="5197219" y="2996068"/>
+                  </a:lnTo>
+                  <a:lnTo>
+                    <a:pt x="5119585" y="2983256"/>
+                  </a:lnTo>
+                  <a:lnTo>
+                    <a:pt x="5041951" y="2970023"/>
+                  </a:lnTo>
+                  <a:lnTo>
+                    <a:pt x="4964317" y="2956357"/>
+                  </a:lnTo>
+                  <a:lnTo>
+                    <a:pt x="4886683" y="2942243"/>
+                  </a:lnTo>
+                  <a:lnTo>
+                    <a:pt x="4809049" y="2927666"/>
+                  </a:lnTo>
+                  <a:lnTo>
+                    <a:pt x="4731415" y="2912611"/>
+                  </a:lnTo>
+                  <a:lnTo>
+                    <a:pt x="4653781" y="2897063"/>
+                  </a:lnTo>
+                  <a:lnTo>
+                    <a:pt x="4576147" y="2881005"/>
+                  </a:lnTo>
+                  <a:lnTo>
+                    <a:pt x="4498513" y="2864421"/>
+                  </a:lnTo>
+                  <a:lnTo>
+                    <a:pt x="4420879" y="2847293"/>
+                  </a:lnTo>
+                  <a:lnTo>
+                    <a:pt x="4343244" y="2829603"/>
+                  </a:lnTo>
+                  <a:lnTo>
+                    <a:pt x="4265610" y="2811334"/>
+                  </a:lnTo>
+                  <a:lnTo>
+                    <a:pt x="4187976" y="2792466"/>
+                  </a:lnTo>
+                  <a:lnTo>
+                    <a:pt x="4110342" y="2772979"/>
+                  </a:lnTo>
+                  <a:lnTo>
+                    <a:pt x="4032708" y="2752853"/>
+                  </a:lnTo>
+                  <a:lnTo>
+                    <a:pt x="3955074" y="2732068"/>
+                  </a:lnTo>
+                  <a:lnTo>
+                    <a:pt x="3877440" y="2710601"/>
+                  </a:lnTo>
+                  <a:lnTo>
+                    <a:pt x="3799806" y="2688431"/>
+                  </a:lnTo>
+                  <a:lnTo>
+                    <a:pt x="3722172" y="2665534"/>
+                  </a:lnTo>
+                  <a:lnTo>
+                    <a:pt x="3644538" y="2641886"/>
+                  </a:lnTo>
+                  <a:lnTo>
+                    <a:pt x="3566904" y="2617463"/>
+                  </a:lnTo>
+                  <a:lnTo>
+                    <a:pt x="3489270" y="2592240"/>
+                  </a:lnTo>
+                  <a:lnTo>
+                    <a:pt x="3411636" y="2566190"/>
+                  </a:lnTo>
+                  <a:lnTo>
+                    <a:pt x="3334002" y="2560297"/>
+                  </a:lnTo>
+                  <a:lnTo>
+                    <a:pt x="3256368" y="2564510"/>
+                  </a:lnTo>
+                  <a:lnTo>
+                    <a:pt x="3178734" y="2568701"/>
+                  </a:lnTo>
+                  <a:lnTo>
+                    <a:pt x="3101100" y="2572871"/>
+                  </a:lnTo>
+                  <a:lnTo>
+                    <a:pt x="3023466" y="2577020"/>
+                  </a:lnTo>
+                  <a:lnTo>
+                    <a:pt x="2945832" y="2581147"/>
+                  </a:lnTo>
+                  <a:lnTo>
+                    <a:pt x="2868198" y="2585254"/>
+                  </a:lnTo>
+                  <a:lnTo>
+                    <a:pt x="2790564" y="2589339"/>
+                  </a:lnTo>
+                  <a:lnTo>
+                    <a:pt x="2712930" y="2593404"/>
+                  </a:lnTo>
+                  <a:lnTo>
+                    <a:pt x="2635295" y="2597448"/>
+                  </a:lnTo>
+                  <a:lnTo>
+                    <a:pt x="2557661" y="2601472"/>
+                  </a:lnTo>
+                  <a:lnTo>
+                    <a:pt x="2480027" y="2605475"/>
+                  </a:lnTo>
+                  <a:lnTo>
+                    <a:pt x="2402393" y="2609457"/>
+                  </a:lnTo>
+                  <a:lnTo>
+                    <a:pt x="2324759" y="2613419"/>
+                  </a:lnTo>
+                  <a:lnTo>
+                    <a:pt x="2247125" y="2617361"/>
+                  </a:lnTo>
+                  <a:lnTo>
+                    <a:pt x="2169491" y="2621283"/>
+                  </a:lnTo>
+                  <a:lnTo>
+                    <a:pt x="2091857" y="2625185"/>
+                  </a:lnTo>
+                  <a:lnTo>
+                    <a:pt x="2014223" y="2629068"/>
+                  </a:lnTo>
+                  <a:lnTo>
+                    <a:pt x="1936589" y="2632930"/>
+                  </a:lnTo>
+                  <a:lnTo>
+                    <a:pt x="1858955" y="2636772"/>
+                  </a:lnTo>
+                  <a:lnTo>
+                    <a:pt x="1781321" y="2640596"/>
+                  </a:lnTo>
+                  <a:lnTo>
+                    <a:pt x="1703687" y="2644399"/>
+                  </a:lnTo>
+                  <a:lnTo>
+                    <a:pt x="1626053" y="2648183"/>
+                  </a:lnTo>
+                  <a:lnTo>
+                    <a:pt x="1548419" y="2651948"/>
+                  </a:lnTo>
+                  <a:lnTo>
+                    <a:pt x="1470785" y="2655694"/>
+                  </a:lnTo>
+                  <a:lnTo>
+                    <a:pt x="1393151" y="2659420"/>
+                  </a:lnTo>
+                  <a:lnTo>
+                    <a:pt x="1315517" y="2663128"/>
+                  </a:lnTo>
+                  <a:lnTo>
+                    <a:pt x="1237883" y="2666817"/>
+                  </a:lnTo>
+                  <a:lnTo>
+                    <a:pt x="1160249" y="2670487"/>
+                  </a:lnTo>
+                  <a:lnTo>
+                    <a:pt x="1082615" y="2674138"/>
+                  </a:lnTo>
+                  <a:lnTo>
+                    <a:pt x="1004981" y="2677771"/>
+                  </a:lnTo>
+                  <a:lnTo>
+                    <a:pt x="927346" y="2681385"/>
+                  </a:lnTo>
+                  <a:lnTo>
+                    <a:pt x="849712" y="2684980"/>
+                  </a:lnTo>
+                  <a:lnTo>
+                    <a:pt x="772078" y="2688558"/>
+                  </a:lnTo>
+                  <a:lnTo>
+                    <a:pt x="694444" y="2692117"/>
+                  </a:lnTo>
+                  <a:lnTo>
+                    <a:pt x="616810" y="2695658"/>
+                  </a:lnTo>
+                  <a:lnTo>
+                    <a:pt x="539176" y="2699181"/>
+                  </a:lnTo>
+                  <a:lnTo>
+                    <a:pt x="461542" y="2702686"/>
+                  </a:lnTo>
+                  <a:lnTo>
+                    <a:pt x="383908" y="2706173"/>
+                  </a:lnTo>
+                  <a:lnTo>
+                    <a:pt x="306274" y="2709642"/>
+                  </a:lnTo>
+                  <a:lnTo>
+                    <a:pt x="228640" y="2713094"/>
+                  </a:lnTo>
+                  <a:lnTo>
+                    <a:pt x="151006" y="2716528"/>
+                  </a:lnTo>
+                  <a:lnTo>
+                    <a:pt x="73372" y="2719945"/>
+                  </a:lnTo>
+                  <a:lnTo>
+                    <a:pt x="0" y="2723157"/>
                   </a:lnTo>
                   <a:close/>
                 </a:path>
@@ -3609,300 +3609,300 @@
           </p:nvSpPr>
           <p:spPr>
             <a:xfrm>
-              <a:off x="817517" y="1998086"/>
-              <a:ext cx="7370972" cy="2679984"/>
+              <a:off x="817517" y="2170331"/>
+              <a:ext cx="7370972" cy="2556062"/>
             </a:xfrm>
             <a:custGeom>
               <a:avLst/>
               <a:pathLst>
-                <a:path w="7370972" h="2679984">
+                <a:path w="7370972" h="2556062">
                   <a:moveTo>
                     <a:pt x="0" y="0"/>
                   </a:moveTo>
                   <a:lnTo>
-                    <a:pt x="73372" y="106713"/>
-                  </a:lnTo>
-                  <a:lnTo>
-                    <a:pt x="151006" y="216040"/>
-                  </a:lnTo>
-                  <a:lnTo>
-                    <a:pt x="228640" y="321897"/>
-                  </a:lnTo>
-                  <a:lnTo>
-                    <a:pt x="306274" y="424394"/>
-                  </a:lnTo>
-                  <a:lnTo>
-                    <a:pt x="383908" y="523638"/>
-                  </a:lnTo>
-                  <a:lnTo>
-                    <a:pt x="461542" y="619732"/>
-                  </a:lnTo>
-                  <a:lnTo>
-                    <a:pt x="539176" y="712776"/>
-                  </a:lnTo>
-                  <a:lnTo>
-                    <a:pt x="616810" y="802866"/>
-                  </a:lnTo>
-                  <a:lnTo>
-                    <a:pt x="694444" y="890097"/>
-                  </a:lnTo>
-                  <a:lnTo>
-                    <a:pt x="772078" y="974560"/>
-                  </a:lnTo>
-                  <a:lnTo>
-                    <a:pt x="849712" y="1056341"/>
-                  </a:lnTo>
-                  <a:lnTo>
-                    <a:pt x="927346" y="1135527"/>
-                  </a:lnTo>
-                  <a:lnTo>
-                    <a:pt x="1004981" y="1212199"/>
-                  </a:lnTo>
-                  <a:lnTo>
-                    <a:pt x="1082615" y="1286437"/>
-                  </a:lnTo>
-                  <a:lnTo>
-                    <a:pt x="1160249" y="1358320"/>
-                  </a:lnTo>
-                  <a:lnTo>
-                    <a:pt x="1237883" y="1427920"/>
-                  </a:lnTo>
-                  <a:lnTo>
-                    <a:pt x="1315517" y="1495312"/>
-                  </a:lnTo>
-                  <a:lnTo>
-                    <a:pt x="1393151" y="1560564"/>
-                  </a:lnTo>
-                  <a:lnTo>
-                    <a:pt x="1470785" y="1623745"/>
-                  </a:lnTo>
-                  <a:lnTo>
-                    <a:pt x="1548419" y="1684921"/>
-                  </a:lnTo>
-                  <a:lnTo>
-                    <a:pt x="1626053" y="1744155"/>
-                  </a:lnTo>
-                  <a:lnTo>
-                    <a:pt x="1703687" y="1801509"/>
-                  </a:lnTo>
-                  <a:lnTo>
-                    <a:pt x="1781321" y="1857043"/>
-                  </a:lnTo>
-                  <a:lnTo>
-                    <a:pt x="1858955" y="1910814"/>
-                  </a:lnTo>
-                  <a:lnTo>
-                    <a:pt x="1936589" y="1962878"/>
-                  </a:lnTo>
-                  <a:lnTo>
-                    <a:pt x="2014223" y="2013290"/>
-                  </a:lnTo>
-                  <a:lnTo>
-                    <a:pt x="2091857" y="2062101"/>
-                  </a:lnTo>
-                  <a:lnTo>
-                    <a:pt x="2169491" y="2109364"/>
-                  </a:lnTo>
-                  <a:lnTo>
-                    <a:pt x="2247125" y="2155126"/>
-                  </a:lnTo>
-                  <a:lnTo>
-                    <a:pt x="2324759" y="2199435"/>
-                  </a:lnTo>
-                  <a:lnTo>
-                    <a:pt x="2402393" y="2242338"/>
-                  </a:lnTo>
-                  <a:lnTo>
-                    <a:pt x="2480027" y="2283880"/>
-                  </a:lnTo>
-                  <a:lnTo>
-                    <a:pt x="2557661" y="2324103"/>
-                  </a:lnTo>
-                  <a:lnTo>
-                    <a:pt x="2635295" y="2363049"/>
-                  </a:lnTo>
-                  <a:lnTo>
-                    <a:pt x="2712930" y="2400759"/>
-                  </a:lnTo>
-                  <a:lnTo>
-                    <a:pt x="2790564" y="2437272"/>
-                  </a:lnTo>
-                  <a:lnTo>
-                    <a:pt x="2868198" y="2472626"/>
-                  </a:lnTo>
-                  <a:lnTo>
-                    <a:pt x="2945832" y="2506858"/>
-                  </a:lnTo>
-                  <a:lnTo>
-                    <a:pt x="3023466" y="2540004"/>
-                  </a:lnTo>
-                  <a:lnTo>
-                    <a:pt x="3101100" y="2572097"/>
-                  </a:lnTo>
-                  <a:lnTo>
-                    <a:pt x="3178734" y="2603172"/>
-                  </a:lnTo>
-                  <a:lnTo>
-                    <a:pt x="3256368" y="2633260"/>
-                  </a:lnTo>
-                  <a:lnTo>
-                    <a:pt x="3334002" y="2662393"/>
-                  </a:lnTo>
-                  <a:lnTo>
-                    <a:pt x="3411636" y="2679984"/>
-                  </a:lnTo>
-                  <a:lnTo>
-                    <a:pt x="3489270" y="2675521"/>
-                  </a:lnTo>
-                  <a:lnTo>
-                    <a:pt x="3566904" y="2671036"/>
-                  </a:lnTo>
-                  <a:lnTo>
-                    <a:pt x="3644538" y="2666528"/>
-                  </a:lnTo>
-                  <a:lnTo>
-                    <a:pt x="3722172" y="2661997"/>
-                  </a:lnTo>
-                  <a:lnTo>
-                    <a:pt x="3799806" y="2657442"/>
-                  </a:lnTo>
-                  <a:lnTo>
-                    <a:pt x="3877440" y="2652864"/>
-                  </a:lnTo>
-                  <a:lnTo>
-                    <a:pt x="3955074" y="2648263"/>
-                  </a:lnTo>
-                  <a:lnTo>
-                    <a:pt x="4032708" y="2643638"/>
-                  </a:lnTo>
-                  <a:lnTo>
-                    <a:pt x="4110342" y="2638989"/>
-                  </a:lnTo>
-                  <a:lnTo>
-                    <a:pt x="4187976" y="2634317"/>
-                  </a:lnTo>
-                  <a:lnTo>
-                    <a:pt x="4265610" y="2629620"/>
-                  </a:lnTo>
-                  <a:lnTo>
-                    <a:pt x="4343244" y="2624900"/>
-                  </a:lnTo>
-                  <a:lnTo>
-                    <a:pt x="4420879" y="2620155"/>
-                  </a:lnTo>
-                  <a:lnTo>
-                    <a:pt x="4498513" y="2615387"/>
-                  </a:lnTo>
-                  <a:lnTo>
-                    <a:pt x="4576147" y="2610593"/>
-                  </a:lnTo>
-                  <a:lnTo>
-                    <a:pt x="4653781" y="2605775"/>
-                  </a:lnTo>
-                  <a:lnTo>
-                    <a:pt x="4731415" y="2600933"/>
-                  </a:lnTo>
-                  <a:lnTo>
-                    <a:pt x="4809049" y="2596066"/>
-                  </a:lnTo>
-                  <a:lnTo>
-                    <a:pt x="4886683" y="2591173"/>
-                  </a:lnTo>
-                  <a:lnTo>
-                    <a:pt x="4964317" y="2586256"/>
-                  </a:lnTo>
-                  <a:lnTo>
-                    <a:pt x="5041951" y="2581313"/>
-                  </a:lnTo>
-                  <a:lnTo>
-                    <a:pt x="5119585" y="2576345"/>
-                  </a:lnTo>
-                  <a:lnTo>
-                    <a:pt x="5197219" y="2571352"/>
-                  </a:lnTo>
-                  <a:lnTo>
-                    <a:pt x="5274853" y="2566333"/>
-                  </a:lnTo>
-                  <a:lnTo>
-                    <a:pt x="5352487" y="2561289"/>
-                  </a:lnTo>
-                  <a:lnTo>
-                    <a:pt x="5430121" y="2556218"/>
-                  </a:lnTo>
-                  <a:lnTo>
-                    <a:pt x="5507755" y="2551122"/>
-                  </a:lnTo>
-                  <a:lnTo>
-                    <a:pt x="5585389" y="2545999"/>
-                  </a:lnTo>
-                  <a:lnTo>
-                    <a:pt x="5663023" y="2540851"/>
-                  </a:lnTo>
-                  <a:lnTo>
-                    <a:pt x="5740657" y="2535675"/>
-                  </a:lnTo>
-                  <a:lnTo>
-                    <a:pt x="5818291" y="2530474"/>
-                  </a:lnTo>
-                  <a:lnTo>
-                    <a:pt x="5895925" y="2525246"/>
-                  </a:lnTo>
-                  <a:lnTo>
-                    <a:pt x="5973559" y="2519990"/>
-                  </a:lnTo>
-                  <a:lnTo>
-                    <a:pt x="6051193" y="2514709"/>
-                  </a:lnTo>
-                  <a:lnTo>
-                    <a:pt x="6128827" y="2509399"/>
-                  </a:lnTo>
-                  <a:lnTo>
-                    <a:pt x="6206462" y="2504063"/>
-                  </a:lnTo>
-                  <a:lnTo>
-                    <a:pt x="6284096" y="2498700"/>
-                  </a:lnTo>
-                  <a:lnTo>
-                    <a:pt x="6361730" y="2493309"/>
-                  </a:lnTo>
-                  <a:lnTo>
-                    <a:pt x="6439364" y="2487890"/>
-                  </a:lnTo>
-                  <a:lnTo>
-                    <a:pt x="6516998" y="2482444"/>
-                  </a:lnTo>
-                  <a:lnTo>
-                    <a:pt x="6594632" y="2476969"/>
-                  </a:lnTo>
-                  <a:lnTo>
-                    <a:pt x="6672266" y="2471467"/>
-                  </a:lnTo>
-                  <a:lnTo>
-                    <a:pt x="6749900" y="2465936"/>
-                  </a:lnTo>
-                  <a:lnTo>
-                    <a:pt x="6827534" y="2460377"/>
-                  </a:lnTo>
-                  <a:lnTo>
-                    <a:pt x="6905168" y="2454790"/>
-                  </a:lnTo>
-                  <a:lnTo>
-                    <a:pt x="6982802" y="2449174"/>
-                  </a:lnTo>
-                  <a:lnTo>
-                    <a:pt x="7060436" y="2443529"/>
-                  </a:lnTo>
-                  <a:lnTo>
-                    <a:pt x="7138070" y="2437856"/>
-                  </a:lnTo>
-                  <a:lnTo>
-                    <a:pt x="7215704" y="2432153"/>
-                  </a:lnTo>
-                  <a:lnTo>
-                    <a:pt x="7293338" y="2426421"/>
-                  </a:lnTo>
-                  <a:lnTo>
-                    <a:pt x="7370972" y="2420660"/>
+                    <a:pt x="73372" y="101778"/>
+                  </a:lnTo>
+                  <a:lnTo>
+                    <a:pt x="151006" y="206050"/>
+                  </a:lnTo>
+                  <a:lnTo>
+                    <a:pt x="228640" y="307013"/>
+                  </a:lnTo>
+                  <a:lnTo>
+                    <a:pt x="306274" y="404770"/>
+                  </a:lnTo>
+                  <a:lnTo>
+                    <a:pt x="383908" y="499425"/>
+                  </a:lnTo>
+                  <a:lnTo>
+                    <a:pt x="461542" y="591076"/>
+                  </a:lnTo>
+                  <a:lnTo>
+                    <a:pt x="539176" y="679817"/>
+                  </a:lnTo>
+                  <a:lnTo>
+                    <a:pt x="616810" y="765742"/>
+                  </a:lnTo>
+                  <a:lnTo>
+                    <a:pt x="694444" y="848940"/>
+                  </a:lnTo>
+                  <a:lnTo>
+                    <a:pt x="772078" y="929496"/>
+                  </a:lnTo>
+                  <a:lnTo>
+                    <a:pt x="849712" y="1007496"/>
+                  </a:lnTo>
+                  <a:lnTo>
+                    <a:pt x="927346" y="1083020"/>
+                  </a:lnTo>
+                  <a:lnTo>
+                    <a:pt x="1004981" y="1156147"/>
+                  </a:lnTo>
+                  <a:lnTo>
+                    <a:pt x="1082615" y="1226953"/>
+                  </a:lnTo>
+                  <a:lnTo>
+                    <a:pt x="1160249" y="1295511"/>
+                  </a:lnTo>
+                  <a:lnTo>
+                    <a:pt x="1237883" y="1361894"/>
+                  </a:lnTo>
+                  <a:lnTo>
+                    <a:pt x="1315517" y="1426169"/>
+                  </a:lnTo>
+                  <a:lnTo>
+                    <a:pt x="1393151" y="1488404"/>
+                  </a:lnTo>
+                  <a:lnTo>
+                    <a:pt x="1470785" y="1548664"/>
+                  </a:lnTo>
+                  <a:lnTo>
+                    <a:pt x="1548419" y="1607011"/>
+                  </a:lnTo>
+                  <a:lnTo>
+                    <a:pt x="1626053" y="1663506"/>
+                  </a:lnTo>
+                  <a:lnTo>
+                    <a:pt x="1703687" y="1718208"/>
+                  </a:lnTo>
+                  <a:lnTo>
+                    <a:pt x="1781321" y="1771174"/>
+                  </a:lnTo>
+                  <a:lnTo>
+                    <a:pt x="1858955" y="1822459"/>
+                  </a:lnTo>
+                  <a:lnTo>
+                    <a:pt x="1936589" y="1872115"/>
+                  </a:lnTo>
+                  <a:lnTo>
+                    <a:pt x="2014223" y="1920196"/>
+                  </a:lnTo>
+                  <a:lnTo>
+                    <a:pt x="2091857" y="1966750"/>
+                  </a:lnTo>
+                  <a:lnTo>
+                    <a:pt x="2169491" y="2011827"/>
+                  </a:lnTo>
+                  <a:lnTo>
+                    <a:pt x="2247125" y="2055473"/>
+                  </a:lnTo>
+                  <a:lnTo>
+                    <a:pt x="2324759" y="2097734"/>
+                  </a:lnTo>
+                  <a:lnTo>
+                    <a:pt x="2402393" y="2138654"/>
+                  </a:lnTo>
+                  <a:lnTo>
+                    <a:pt x="2480027" y="2178274"/>
+                  </a:lnTo>
+                  <a:lnTo>
+                    <a:pt x="2557661" y="2216637"/>
+                  </a:lnTo>
+                  <a:lnTo>
+                    <a:pt x="2635295" y="2253782"/>
+                  </a:lnTo>
+                  <a:lnTo>
+                    <a:pt x="2712930" y="2289749"/>
+                  </a:lnTo>
+                  <a:lnTo>
+                    <a:pt x="2790564" y="2324573"/>
+                  </a:lnTo>
+                  <a:lnTo>
+                    <a:pt x="2868198" y="2358293"/>
+                  </a:lnTo>
+                  <a:lnTo>
+                    <a:pt x="2945832" y="2390942"/>
+                  </a:lnTo>
+                  <a:lnTo>
+                    <a:pt x="3023466" y="2422555"/>
+                  </a:lnTo>
+                  <a:lnTo>
+                    <a:pt x="3101100" y="2453164"/>
+                  </a:lnTo>
+                  <a:lnTo>
+                    <a:pt x="3178734" y="2482802"/>
+                  </a:lnTo>
+                  <a:lnTo>
+                    <a:pt x="3256368" y="2511499"/>
+                  </a:lnTo>
+                  <a:lnTo>
+                    <a:pt x="3334002" y="2539285"/>
+                  </a:lnTo>
+                  <a:lnTo>
+                    <a:pt x="3411636" y="2556062"/>
+                  </a:lnTo>
+                  <a:lnTo>
+                    <a:pt x="3489270" y="2551806"/>
+                  </a:lnTo>
+                  <a:lnTo>
+                    <a:pt x="3566904" y="2547528"/>
+                  </a:lnTo>
+                  <a:lnTo>
+                    <a:pt x="3644538" y="2543229"/>
+                  </a:lnTo>
+                  <a:lnTo>
+                    <a:pt x="3722172" y="2538907"/>
+                  </a:lnTo>
+                  <a:lnTo>
+                    <a:pt x="3799806" y="2534563"/>
+                  </a:lnTo>
+                  <a:lnTo>
+                    <a:pt x="3877440" y="2530197"/>
+                  </a:lnTo>
+                  <a:lnTo>
+                    <a:pt x="3955074" y="2525808"/>
+                  </a:lnTo>
+                  <a:lnTo>
+                    <a:pt x="4032708" y="2521397"/>
+                  </a:lnTo>
+                  <a:lnTo>
+                    <a:pt x="4110342" y="2516963"/>
+                  </a:lnTo>
+                  <a:lnTo>
+                    <a:pt x="4187976" y="2512507"/>
+                  </a:lnTo>
+                  <a:lnTo>
+                    <a:pt x="4265610" y="2508028"/>
+                  </a:lnTo>
+                  <a:lnTo>
+                    <a:pt x="4343244" y="2503526"/>
+                  </a:lnTo>
+                  <a:lnTo>
+                    <a:pt x="4420879" y="2499000"/>
+                  </a:lnTo>
+                  <a:lnTo>
+                    <a:pt x="4498513" y="2494452"/>
+                  </a:lnTo>
+                  <a:lnTo>
+                    <a:pt x="4576147" y="2489880"/>
+                  </a:lnTo>
+                  <a:lnTo>
+                    <a:pt x="4653781" y="2485285"/>
+                  </a:lnTo>
+                  <a:lnTo>
+                    <a:pt x="4731415" y="2480667"/>
+                  </a:lnTo>
+                  <a:lnTo>
+                    <a:pt x="4809049" y="2476024"/>
+                  </a:lnTo>
+                  <a:lnTo>
+                    <a:pt x="4886683" y="2471358"/>
+                  </a:lnTo>
+                  <a:lnTo>
+                    <a:pt x="4964317" y="2466668"/>
+                  </a:lnTo>
+                  <a:lnTo>
+                    <a:pt x="5041951" y="2461954"/>
+                  </a:lnTo>
+                  <a:lnTo>
+                    <a:pt x="5119585" y="2457216"/>
+                  </a:lnTo>
+                  <a:lnTo>
+                    <a:pt x="5197219" y="2452454"/>
+                  </a:lnTo>
+                  <a:lnTo>
+                    <a:pt x="5274853" y="2447667"/>
+                  </a:lnTo>
+                  <a:lnTo>
+                    <a:pt x="5352487" y="2442856"/>
+                  </a:lnTo>
+                  <a:lnTo>
+                    <a:pt x="5430121" y="2438020"/>
+                  </a:lnTo>
+                  <a:lnTo>
+                    <a:pt x="5507755" y="2433159"/>
+                  </a:lnTo>
+                  <a:lnTo>
+                    <a:pt x="5585389" y="2428273"/>
+                  </a:lnTo>
+                  <a:lnTo>
+                    <a:pt x="5663023" y="2423363"/>
+                  </a:lnTo>
+                  <a:lnTo>
+                    <a:pt x="5740657" y="2418427"/>
+                  </a:lnTo>
+                  <a:lnTo>
+                    <a:pt x="5818291" y="2413466"/>
+                  </a:lnTo>
+                  <a:lnTo>
+                    <a:pt x="5895925" y="2408479"/>
+                  </a:lnTo>
+                  <a:lnTo>
+                    <a:pt x="5973559" y="2403467"/>
+                  </a:lnTo>
+                  <a:lnTo>
+                    <a:pt x="6051193" y="2398429"/>
+                  </a:lnTo>
+                  <a:lnTo>
+                    <a:pt x="6128827" y="2393366"/>
+                  </a:lnTo>
+                  <a:lnTo>
+                    <a:pt x="6206462" y="2388276"/>
+                  </a:lnTo>
+                  <a:lnTo>
+                    <a:pt x="6284096" y="2383161"/>
+                  </a:lnTo>
+                  <a:lnTo>
+                    <a:pt x="6361730" y="2378019"/>
+                  </a:lnTo>
+                  <a:lnTo>
+                    <a:pt x="6439364" y="2372851"/>
+                  </a:lnTo>
+                  <a:lnTo>
+                    <a:pt x="6516998" y="2367656"/>
+                  </a:lnTo>
+                  <a:lnTo>
+                    <a:pt x="6594632" y="2362435"/>
+                  </a:lnTo>
+                  <a:lnTo>
+                    <a:pt x="6672266" y="2357187"/>
+                  </a:lnTo>
+                  <a:lnTo>
+                    <a:pt x="6749900" y="2351912"/>
+                  </a:lnTo>
+                  <a:lnTo>
+                    <a:pt x="6827534" y="2346610"/>
+                  </a:lnTo>
+                  <a:lnTo>
+                    <a:pt x="6905168" y="2341281"/>
+                  </a:lnTo>
+                  <a:lnTo>
+                    <a:pt x="6982802" y="2335925"/>
+                  </a:lnTo>
+                  <a:lnTo>
+                    <a:pt x="7060436" y="2330541"/>
+                  </a:lnTo>
+                  <a:lnTo>
+                    <a:pt x="7138070" y="2325130"/>
+                  </a:lnTo>
+                  <a:lnTo>
+                    <a:pt x="7215704" y="2319691"/>
+                  </a:lnTo>
+                  <a:lnTo>
+                    <a:pt x="7293338" y="2314224"/>
+                  </a:lnTo>
+                  <a:lnTo>
+                    <a:pt x="7370972" y="2308729"/>
                   </a:lnTo>
                 </a:path>
               </a:pathLst>
@@ -3922,300 +3922,300 @@
           </p:nvSpPr>
           <p:spPr>
             <a:xfrm>
-              <a:off x="817517" y="4682510"/>
-              <a:ext cx="7370972" cy="700608"/>
+              <a:off x="817517" y="4730628"/>
+              <a:ext cx="7370972" cy="668212"/>
             </a:xfrm>
             <a:custGeom>
               <a:avLst/>
               <a:pathLst>
-                <a:path w="7370972" h="700608">
+                <a:path w="7370972" h="668212">
                   <a:moveTo>
-                    <a:pt x="7370972" y="700608"/>
+                    <a:pt x="7370972" y="668212"/>
                   </a:moveTo>
                   <a:lnTo>
-                    <a:pt x="7293338" y="695163"/>
-                  </a:lnTo>
-                  <a:lnTo>
-                    <a:pt x="7215704" y="689540"/>
-                  </a:lnTo>
-                  <a:lnTo>
-                    <a:pt x="7138070" y="683733"/>
-                  </a:lnTo>
-                  <a:lnTo>
-                    <a:pt x="7060436" y="677735"/>
-                  </a:lnTo>
-                  <a:lnTo>
-                    <a:pt x="6982802" y="671541"/>
-                  </a:lnTo>
-                  <a:lnTo>
-                    <a:pt x="6905168" y="665144"/>
-                  </a:lnTo>
-                  <a:lnTo>
-                    <a:pt x="6827534" y="658536"/>
-                  </a:lnTo>
-                  <a:lnTo>
-                    <a:pt x="6749900" y="651713"/>
-                  </a:lnTo>
-                  <a:lnTo>
-                    <a:pt x="6672266" y="644665"/>
-                  </a:lnTo>
-                  <a:lnTo>
-                    <a:pt x="6594632" y="637387"/>
-                  </a:lnTo>
-                  <a:lnTo>
-                    <a:pt x="6516998" y="629870"/>
-                  </a:lnTo>
-                  <a:lnTo>
-                    <a:pt x="6439364" y="622107"/>
-                  </a:lnTo>
-                  <a:lnTo>
-                    <a:pt x="6361730" y="614089"/>
-                  </a:lnTo>
-                  <a:lnTo>
-                    <a:pt x="6284096" y="605808"/>
-                  </a:lnTo>
-                  <a:lnTo>
-                    <a:pt x="6206462" y="597256"/>
-                  </a:lnTo>
-                  <a:lnTo>
-                    <a:pt x="6128827" y="588423"/>
-                  </a:lnTo>
-                  <a:lnTo>
-                    <a:pt x="6051193" y="579301"/>
-                  </a:lnTo>
-                  <a:lnTo>
-                    <a:pt x="5973559" y="569880"/>
-                  </a:lnTo>
-                  <a:lnTo>
-                    <a:pt x="5895925" y="560150"/>
-                  </a:lnTo>
-                  <a:lnTo>
-                    <a:pt x="5818291" y="550101"/>
-                  </a:lnTo>
-                  <a:lnTo>
-                    <a:pt x="5740657" y="539723"/>
-                  </a:lnTo>
-                  <a:lnTo>
-                    <a:pt x="5663023" y="529004"/>
-                  </a:lnTo>
-                  <a:lnTo>
-                    <a:pt x="5585389" y="517934"/>
-                  </a:lnTo>
-                  <a:lnTo>
-                    <a:pt x="5507755" y="506502"/>
-                  </a:lnTo>
-                  <a:lnTo>
-                    <a:pt x="5430121" y="494694"/>
-                  </a:lnTo>
-                  <a:lnTo>
-                    <a:pt x="5352487" y="482499"/>
-                  </a:lnTo>
-                  <a:lnTo>
-                    <a:pt x="5274853" y="469905"/>
-                  </a:lnTo>
-                  <a:lnTo>
-                    <a:pt x="5197219" y="456898"/>
-                  </a:lnTo>
-                  <a:lnTo>
-                    <a:pt x="5119585" y="443464"/>
-                  </a:lnTo>
-                  <a:lnTo>
-                    <a:pt x="5041951" y="429590"/>
-                  </a:lnTo>
-                  <a:lnTo>
-                    <a:pt x="4964317" y="415261"/>
-                  </a:lnTo>
-                  <a:lnTo>
-                    <a:pt x="4886683" y="400463"/>
-                  </a:lnTo>
-                  <a:lnTo>
-                    <a:pt x="4809049" y="385179"/>
-                  </a:lnTo>
-                  <a:lnTo>
-                    <a:pt x="4731415" y="369395"/>
-                  </a:lnTo>
-                  <a:lnTo>
-                    <a:pt x="4653781" y="353093"/>
-                  </a:lnTo>
-                  <a:lnTo>
-                    <a:pt x="4576147" y="336256"/>
-                  </a:lnTo>
-                  <a:lnTo>
-                    <a:pt x="4498513" y="318868"/>
-                  </a:lnTo>
-                  <a:lnTo>
-                    <a:pt x="4420879" y="300909"/>
-                  </a:lnTo>
-                  <a:lnTo>
-                    <a:pt x="4343244" y="282362"/>
-                  </a:lnTo>
-                  <a:lnTo>
-                    <a:pt x="4265610" y="263207"/>
-                  </a:lnTo>
-                  <a:lnTo>
-                    <a:pt x="4187976" y="243424"/>
-                  </a:lnTo>
-                  <a:lnTo>
-                    <a:pt x="4110342" y="222993"/>
-                  </a:lnTo>
-                  <a:lnTo>
-                    <a:pt x="4032708" y="201892"/>
-                  </a:lnTo>
-                  <a:lnTo>
-                    <a:pt x="3955074" y="180099"/>
-                  </a:lnTo>
-                  <a:lnTo>
-                    <a:pt x="3877440" y="157591"/>
-                  </a:lnTo>
-                  <a:lnTo>
-                    <a:pt x="3799806" y="134346"/>
-                  </a:lnTo>
-                  <a:lnTo>
-                    <a:pt x="3722172" y="110339"/>
-                  </a:lnTo>
-                  <a:lnTo>
-                    <a:pt x="3644538" y="85545"/>
-                  </a:lnTo>
-                  <a:lnTo>
-                    <a:pt x="3566904" y="59938"/>
-                  </a:lnTo>
-                  <a:lnTo>
-                    <a:pt x="3489270" y="33491"/>
-                  </a:lnTo>
-                  <a:lnTo>
-                    <a:pt x="3411636" y="6178"/>
+                    <a:pt x="7293338" y="663019"/>
+                  </a:lnTo>
+                  <a:lnTo>
+                    <a:pt x="7215704" y="657656"/>
+                  </a:lnTo>
+                  <a:lnTo>
+                    <a:pt x="7138070" y="652117"/>
+                  </a:lnTo>
+                  <a:lnTo>
+                    <a:pt x="7060436" y="646397"/>
+                  </a:lnTo>
+                  <a:lnTo>
+                    <a:pt x="6982802" y="640489"/>
+                  </a:lnTo>
+                  <a:lnTo>
+                    <a:pt x="6905168" y="634388"/>
+                  </a:lnTo>
+                  <a:lnTo>
+                    <a:pt x="6827534" y="628086"/>
+                  </a:lnTo>
+                  <a:lnTo>
+                    <a:pt x="6749900" y="621578"/>
+                  </a:lnTo>
+                  <a:lnTo>
+                    <a:pt x="6672266" y="614856"/>
+                  </a:lnTo>
+                  <a:lnTo>
+                    <a:pt x="6594632" y="607914"/>
+                  </a:lnTo>
+                  <a:lnTo>
+                    <a:pt x="6516998" y="600745"/>
+                  </a:lnTo>
+                  <a:lnTo>
+                    <a:pt x="6439364" y="593341"/>
+                  </a:lnTo>
+                  <a:lnTo>
+                    <a:pt x="6361730" y="585693"/>
+                  </a:lnTo>
+                  <a:lnTo>
+                    <a:pt x="6284096" y="577796"/>
+                  </a:lnTo>
+                  <a:lnTo>
+                    <a:pt x="6206462" y="569639"/>
+                  </a:lnTo>
+                  <a:lnTo>
+                    <a:pt x="6128827" y="561215"/>
+                  </a:lnTo>
+                  <a:lnTo>
+                    <a:pt x="6051193" y="552514"/>
+                  </a:lnTo>
+                  <a:lnTo>
+                    <a:pt x="5973559" y="543529"/>
+                  </a:lnTo>
+                  <a:lnTo>
+                    <a:pt x="5895925" y="534249"/>
+                  </a:lnTo>
+                  <a:lnTo>
+                    <a:pt x="5818291" y="524665"/>
+                  </a:lnTo>
+                  <a:lnTo>
+                    <a:pt x="5740657" y="514766"/>
+                  </a:lnTo>
+                  <a:lnTo>
+                    <a:pt x="5663023" y="504543"/>
+                  </a:lnTo>
+                  <a:lnTo>
+                    <a:pt x="5585389" y="493985"/>
+                  </a:lnTo>
+                  <a:lnTo>
+                    <a:pt x="5507755" y="483081"/>
+                  </a:lnTo>
+                  <a:lnTo>
+                    <a:pt x="5430121" y="471820"/>
+                  </a:lnTo>
+                  <a:lnTo>
+                    <a:pt x="5352487" y="460189"/>
+                  </a:lnTo>
+                  <a:lnTo>
+                    <a:pt x="5274853" y="448177"/>
+                  </a:lnTo>
+                  <a:lnTo>
+                    <a:pt x="5197219" y="435771"/>
+                  </a:lnTo>
+                  <a:lnTo>
+                    <a:pt x="5119585" y="422959"/>
+                  </a:lnTo>
+                  <a:lnTo>
+                    <a:pt x="5041951" y="409726"/>
+                  </a:lnTo>
+                  <a:lnTo>
+                    <a:pt x="4964317" y="396060"/>
+                  </a:lnTo>
+                  <a:lnTo>
+                    <a:pt x="4886683" y="381946"/>
+                  </a:lnTo>
+                  <a:lnTo>
+                    <a:pt x="4809049" y="367369"/>
+                  </a:lnTo>
+                  <a:lnTo>
+                    <a:pt x="4731415" y="352314"/>
+                  </a:lnTo>
+                  <a:lnTo>
+                    <a:pt x="4653781" y="336766"/>
+                  </a:lnTo>
+                  <a:lnTo>
+                    <a:pt x="4576147" y="320708"/>
+                  </a:lnTo>
+                  <a:lnTo>
+                    <a:pt x="4498513" y="304123"/>
+                  </a:lnTo>
+                  <a:lnTo>
+                    <a:pt x="4420879" y="286995"/>
+                  </a:lnTo>
+                  <a:lnTo>
+                    <a:pt x="4343244" y="269306"/>
+                  </a:lnTo>
+                  <a:lnTo>
+                    <a:pt x="4265610" y="251037"/>
+                  </a:lnTo>
+                  <a:lnTo>
+                    <a:pt x="4187976" y="232168"/>
+                  </a:lnTo>
+                  <a:lnTo>
+                    <a:pt x="4110342" y="212682"/>
+                  </a:lnTo>
+                  <a:lnTo>
+                    <a:pt x="4032708" y="192556"/>
+                  </a:lnTo>
+                  <a:lnTo>
+                    <a:pt x="3955074" y="171771"/>
+                  </a:lnTo>
+                  <a:lnTo>
+                    <a:pt x="3877440" y="150304"/>
+                  </a:lnTo>
+                  <a:lnTo>
+                    <a:pt x="3799806" y="128134"/>
+                  </a:lnTo>
+                  <a:lnTo>
+                    <a:pt x="3722172" y="105237"/>
+                  </a:lnTo>
+                  <a:lnTo>
+                    <a:pt x="3644538" y="81589"/>
+                  </a:lnTo>
+                  <a:lnTo>
+                    <a:pt x="3566904" y="57166"/>
+                  </a:lnTo>
+                  <a:lnTo>
+                    <a:pt x="3489270" y="31943"/>
+                  </a:lnTo>
+                  <a:lnTo>
+                    <a:pt x="3411636" y="5892"/>
                   </a:lnTo>
                   <a:lnTo>
                     <a:pt x="3334002" y="0"/>
                   </a:lnTo>
                   <a:lnTo>
-                    <a:pt x="3256368" y="4417"/>
-                  </a:lnTo>
-                  <a:lnTo>
-                    <a:pt x="3178734" y="8811"/>
-                  </a:lnTo>
-                  <a:lnTo>
-                    <a:pt x="3101100" y="13183"/>
-                  </a:lnTo>
-                  <a:lnTo>
-                    <a:pt x="3023466" y="17533"/>
-                  </a:lnTo>
-                  <a:lnTo>
-                    <a:pt x="2945832" y="21861"/>
-                  </a:lnTo>
-                  <a:lnTo>
-                    <a:pt x="2868198" y="26166"/>
-                  </a:lnTo>
-                  <a:lnTo>
-                    <a:pt x="2790564" y="30450"/>
-                  </a:lnTo>
-                  <a:lnTo>
-                    <a:pt x="2712930" y="34712"/>
-                  </a:lnTo>
-                  <a:lnTo>
-                    <a:pt x="2635295" y="38952"/>
-                  </a:lnTo>
-                  <a:lnTo>
-                    <a:pt x="2557661" y="43171"/>
-                  </a:lnTo>
-                  <a:lnTo>
-                    <a:pt x="2480027" y="47368"/>
-                  </a:lnTo>
-                  <a:lnTo>
-                    <a:pt x="2402393" y="51543"/>
-                  </a:lnTo>
-                  <a:lnTo>
-                    <a:pt x="2324759" y="55698"/>
-                  </a:lnTo>
-                  <a:lnTo>
-                    <a:pt x="2247125" y="59831"/>
-                  </a:lnTo>
-                  <a:lnTo>
-                    <a:pt x="2169491" y="63943"/>
-                  </a:lnTo>
-                  <a:lnTo>
-                    <a:pt x="2091857" y="68034"/>
-                  </a:lnTo>
-                  <a:lnTo>
-                    <a:pt x="2014223" y="72104"/>
-                  </a:lnTo>
-                  <a:lnTo>
-                    <a:pt x="1936589" y="76154"/>
-                  </a:lnTo>
-                  <a:lnTo>
-                    <a:pt x="1858955" y="80183"/>
-                  </a:lnTo>
-                  <a:lnTo>
-                    <a:pt x="1781321" y="84191"/>
-                  </a:lnTo>
-                  <a:lnTo>
-                    <a:pt x="1703687" y="88179"/>
-                  </a:lnTo>
-                  <a:lnTo>
-                    <a:pt x="1626053" y="92147"/>
-                  </a:lnTo>
-                  <a:lnTo>
-                    <a:pt x="1548419" y="96094"/>
-                  </a:lnTo>
-                  <a:lnTo>
-                    <a:pt x="1470785" y="100022"/>
-                  </a:lnTo>
-                  <a:lnTo>
-                    <a:pt x="1393151" y="103929"/>
-                  </a:lnTo>
-                  <a:lnTo>
-                    <a:pt x="1315517" y="107816"/>
-                  </a:lnTo>
-                  <a:lnTo>
-                    <a:pt x="1237883" y="111684"/>
-                  </a:lnTo>
-                  <a:lnTo>
-                    <a:pt x="1160249" y="115532"/>
-                  </a:lnTo>
-                  <a:lnTo>
-                    <a:pt x="1082615" y="119360"/>
-                  </a:lnTo>
-                  <a:lnTo>
-                    <a:pt x="1004981" y="123169"/>
-                  </a:lnTo>
-                  <a:lnTo>
-                    <a:pt x="927346" y="126958"/>
-                  </a:lnTo>
-                  <a:lnTo>
-                    <a:pt x="849712" y="130728"/>
-                  </a:lnTo>
-                  <a:lnTo>
-                    <a:pt x="772078" y="134479"/>
-                  </a:lnTo>
-                  <a:lnTo>
-                    <a:pt x="694444" y="138211"/>
-                  </a:lnTo>
-                  <a:lnTo>
-                    <a:pt x="616810" y="141923"/>
-                  </a:lnTo>
-                  <a:lnTo>
-                    <a:pt x="539176" y="145617"/>
-                  </a:lnTo>
-                  <a:lnTo>
-                    <a:pt x="461542" y="149292"/>
-                  </a:lnTo>
-                  <a:lnTo>
-                    <a:pt x="383908" y="152948"/>
-                  </a:lnTo>
-                  <a:lnTo>
-                    <a:pt x="306274" y="156586"/>
-                  </a:lnTo>
-                  <a:lnTo>
-                    <a:pt x="228640" y="160205"/>
-                  </a:lnTo>
-                  <a:lnTo>
-                    <a:pt x="151006" y="163805"/>
-                  </a:lnTo>
-                  <a:lnTo>
-                    <a:pt x="73372" y="167387"/>
-                  </a:lnTo>
-                  <a:lnTo>
-                    <a:pt x="0" y="170756"/>
+                    <a:pt x="3256368" y="4212"/>
+                  </a:lnTo>
+                  <a:lnTo>
+                    <a:pt x="3178734" y="8404"/>
+                  </a:lnTo>
+                  <a:lnTo>
+                    <a:pt x="3101100" y="12574"/>
+                  </a:lnTo>
+                  <a:lnTo>
+                    <a:pt x="3023466" y="16722"/>
+                  </a:lnTo>
+                  <a:lnTo>
+                    <a:pt x="2945832" y="20850"/>
+                  </a:lnTo>
+                  <a:lnTo>
+                    <a:pt x="2868198" y="24956"/>
+                  </a:lnTo>
+                  <a:lnTo>
+                    <a:pt x="2790564" y="29042"/>
+                  </a:lnTo>
+                  <a:lnTo>
+                    <a:pt x="2712930" y="33107"/>
+                  </a:lnTo>
+                  <a:lnTo>
+                    <a:pt x="2635295" y="37151"/>
+                  </a:lnTo>
+                  <a:lnTo>
+                    <a:pt x="2557661" y="41174"/>
+                  </a:lnTo>
+                  <a:lnTo>
+                    <a:pt x="2480027" y="45177"/>
+                  </a:lnTo>
+                  <a:lnTo>
+                    <a:pt x="2402393" y="49160"/>
+                  </a:lnTo>
+                  <a:lnTo>
+                    <a:pt x="2324759" y="53122"/>
+                  </a:lnTo>
+                  <a:lnTo>
+                    <a:pt x="2247125" y="57064"/>
+                  </a:lnTo>
+                  <a:lnTo>
+                    <a:pt x="2169491" y="60986"/>
+                  </a:lnTo>
+                  <a:lnTo>
+                    <a:pt x="2091857" y="64888"/>
+                  </a:lnTo>
+                  <a:lnTo>
+                    <a:pt x="2014223" y="68770"/>
+                  </a:lnTo>
+                  <a:lnTo>
+                    <a:pt x="1936589" y="72633"/>
+                  </a:lnTo>
+                  <a:lnTo>
+                    <a:pt x="1858955" y="76475"/>
+                  </a:lnTo>
+                  <a:lnTo>
+                    <a:pt x="1781321" y="80298"/>
+                  </a:lnTo>
+                  <a:lnTo>
+                    <a:pt x="1703687" y="84102"/>
+                  </a:lnTo>
+                  <a:lnTo>
+                    <a:pt x="1626053" y="87886"/>
+                  </a:lnTo>
+                  <a:lnTo>
+                    <a:pt x="1548419" y="91651"/>
+                  </a:lnTo>
+                  <a:lnTo>
+                    <a:pt x="1470785" y="95397"/>
+                  </a:lnTo>
+                  <a:lnTo>
+                    <a:pt x="1393151" y="99123"/>
+                  </a:lnTo>
+                  <a:lnTo>
+                    <a:pt x="1315517" y="102831"/>
+                  </a:lnTo>
+                  <a:lnTo>
+                    <a:pt x="1237883" y="106520"/>
+                  </a:lnTo>
+                  <a:lnTo>
+                    <a:pt x="1160249" y="110190"/>
+                  </a:lnTo>
+                  <a:lnTo>
+                    <a:pt x="1082615" y="113841"/>
+                  </a:lnTo>
+                  <a:lnTo>
+                    <a:pt x="1004981" y="117473"/>
+                  </a:lnTo>
+                  <a:lnTo>
+                    <a:pt x="927346" y="121088"/>
+                  </a:lnTo>
+                  <a:lnTo>
+                    <a:pt x="849712" y="124683"/>
+                  </a:lnTo>
+                  <a:lnTo>
+                    <a:pt x="772078" y="128261"/>
+                  </a:lnTo>
+                  <a:lnTo>
+                    <a:pt x="694444" y="131820"/>
+                  </a:lnTo>
+                  <a:lnTo>
+                    <a:pt x="616810" y="135361"/>
+                  </a:lnTo>
+                  <a:lnTo>
+                    <a:pt x="539176" y="138884"/>
+                  </a:lnTo>
+                  <a:lnTo>
+                    <a:pt x="461542" y="142389"/>
+                  </a:lnTo>
+                  <a:lnTo>
+                    <a:pt x="383908" y="145876"/>
+                  </a:lnTo>
+                  <a:lnTo>
+                    <a:pt x="306274" y="149345"/>
+                  </a:lnTo>
+                  <a:lnTo>
+                    <a:pt x="228640" y="152797"/>
+                  </a:lnTo>
+                  <a:lnTo>
+                    <a:pt x="151006" y="156231"/>
+                  </a:lnTo>
+                  <a:lnTo>
+                    <a:pt x="73372" y="159648"/>
+                  </a:lnTo>
+                  <a:lnTo>
+                    <a:pt x="0" y="162860"/>
                   </a:lnTo>
                 </a:path>
               </a:pathLst>
@@ -4235,300 +4235,300 @@
           </p:nvSpPr>
           <p:spPr>
             <a:xfrm>
-              <a:off x="817517" y="3977162"/>
-              <a:ext cx="7370972" cy="1138736"/>
+              <a:off x="817517" y="4057895"/>
+              <a:ext cx="7370972" cy="1086081"/>
             </a:xfrm>
             <a:custGeom>
               <a:avLst/>
               <a:pathLst>
-                <a:path w="7370972" h="1138736">
+                <a:path w="7370972" h="1086081">
                   <a:moveTo>
                     <a:pt x="0" y="0"/>
                   </a:moveTo>
                   <a:lnTo>
-                    <a:pt x="73372" y="20044"/>
-                  </a:lnTo>
-                  <a:lnTo>
-                    <a:pt x="151006" y="40967"/>
-                  </a:lnTo>
-                  <a:lnTo>
-                    <a:pt x="228640" y="61607"/>
-                  </a:lnTo>
-                  <a:lnTo>
-                    <a:pt x="306274" y="81970"/>
-                  </a:lnTo>
-                  <a:lnTo>
-                    <a:pt x="383908" y="102058"/>
-                  </a:lnTo>
-                  <a:lnTo>
-                    <a:pt x="461542" y="121875"/>
-                  </a:lnTo>
-                  <a:lnTo>
-                    <a:pt x="539176" y="141425"/>
-                  </a:lnTo>
-                  <a:lnTo>
-                    <a:pt x="616810" y="160711"/>
-                  </a:lnTo>
-                  <a:lnTo>
-                    <a:pt x="694444" y="179738"/>
-                  </a:lnTo>
-                  <a:lnTo>
-                    <a:pt x="772078" y="198508"/>
-                  </a:lnTo>
-                  <a:lnTo>
-                    <a:pt x="849712" y="217025"/>
-                  </a:lnTo>
-                  <a:lnTo>
-                    <a:pt x="927346" y="235292"/>
-                  </a:lnTo>
-                  <a:lnTo>
-                    <a:pt x="1004981" y="253313"/>
-                  </a:lnTo>
-                  <a:lnTo>
-                    <a:pt x="1082615" y="271091"/>
-                  </a:lnTo>
-                  <a:lnTo>
-                    <a:pt x="1160249" y="288629"/>
-                  </a:lnTo>
-                  <a:lnTo>
-                    <a:pt x="1237883" y="305931"/>
-                  </a:lnTo>
-                  <a:lnTo>
-                    <a:pt x="1315517" y="323000"/>
-                  </a:lnTo>
-                  <a:lnTo>
-                    <a:pt x="1393151" y="339838"/>
-                  </a:lnTo>
-                  <a:lnTo>
-                    <a:pt x="1470785" y="356450"/>
-                  </a:lnTo>
-                  <a:lnTo>
-                    <a:pt x="1548419" y="372838"/>
-                  </a:lnTo>
-                  <a:lnTo>
-                    <a:pt x="1626053" y="389004"/>
-                  </a:lnTo>
-                  <a:lnTo>
-                    <a:pt x="1703687" y="404953"/>
-                  </a:lnTo>
-                  <a:lnTo>
-                    <a:pt x="1781321" y="420687"/>
-                  </a:lnTo>
-                  <a:lnTo>
-                    <a:pt x="1858955" y="436209"/>
-                  </a:lnTo>
-                  <a:lnTo>
-                    <a:pt x="1936589" y="451521"/>
-                  </a:lnTo>
-                  <a:lnTo>
-                    <a:pt x="2014223" y="466627"/>
-                  </a:lnTo>
-                  <a:lnTo>
-                    <a:pt x="2091857" y="481529"/>
-                  </a:lnTo>
-                  <a:lnTo>
-                    <a:pt x="2169491" y="496231"/>
-                  </a:lnTo>
-                  <a:lnTo>
-                    <a:pt x="2247125" y="510734"/>
-                  </a:lnTo>
-                  <a:lnTo>
-                    <a:pt x="2324759" y="525042"/>
-                  </a:lnTo>
-                  <a:lnTo>
-                    <a:pt x="2402393" y="539156"/>
-                  </a:lnTo>
-                  <a:lnTo>
-                    <a:pt x="2480027" y="553081"/>
-                  </a:lnTo>
-                  <a:lnTo>
-                    <a:pt x="2557661" y="566818"/>
-                  </a:lnTo>
-                  <a:lnTo>
-                    <a:pt x="2635295" y="580369"/>
-                  </a:lnTo>
-                  <a:lnTo>
-                    <a:pt x="2712930" y="593738"/>
-                  </a:lnTo>
-                  <a:lnTo>
-                    <a:pt x="2790564" y="606927"/>
-                  </a:lnTo>
-                  <a:lnTo>
-                    <a:pt x="2868198" y="619938"/>
-                  </a:lnTo>
-                  <a:lnTo>
-                    <a:pt x="2945832" y="632773"/>
-                  </a:lnTo>
-                  <a:lnTo>
-                    <a:pt x="3023466" y="645436"/>
-                  </a:lnTo>
-                  <a:lnTo>
-                    <a:pt x="3101100" y="657928"/>
-                  </a:lnTo>
-                  <a:lnTo>
-                    <a:pt x="3178734" y="670251"/>
-                  </a:lnTo>
-                  <a:lnTo>
-                    <a:pt x="3256368" y="682408"/>
-                  </a:lnTo>
-                  <a:lnTo>
-                    <a:pt x="3334002" y="694402"/>
-                  </a:lnTo>
-                  <a:lnTo>
-                    <a:pt x="3411636" y="706233"/>
-                  </a:lnTo>
-                  <a:lnTo>
-                    <a:pt x="3489270" y="717905"/>
-                  </a:lnTo>
-                  <a:lnTo>
-                    <a:pt x="3566904" y="729420"/>
-                  </a:lnTo>
-                  <a:lnTo>
-                    <a:pt x="3644538" y="740780"/>
-                  </a:lnTo>
-                  <a:lnTo>
-                    <a:pt x="3722172" y="751986"/>
-                  </a:lnTo>
-                  <a:lnTo>
-                    <a:pt x="3799806" y="763042"/>
-                  </a:lnTo>
-                  <a:lnTo>
-                    <a:pt x="3877440" y="773948"/>
-                  </a:lnTo>
-                  <a:lnTo>
-                    <a:pt x="3955074" y="784707"/>
-                  </a:lnTo>
-                  <a:lnTo>
-                    <a:pt x="4032708" y="795321"/>
-                  </a:lnTo>
-                  <a:lnTo>
-                    <a:pt x="4110342" y="805792"/>
-                  </a:lnTo>
-                  <a:lnTo>
-                    <a:pt x="4187976" y="816122"/>
-                  </a:lnTo>
-                  <a:lnTo>
-                    <a:pt x="4265610" y="826313"/>
-                  </a:lnTo>
-                  <a:lnTo>
-                    <a:pt x="4343244" y="836366"/>
-                  </a:lnTo>
-                  <a:lnTo>
-                    <a:pt x="4420879" y="846284"/>
-                  </a:lnTo>
-                  <a:lnTo>
-                    <a:pt x="4498513" y="856068"/>
-                  </a:lnTo>
-                  <a:lnTo>
-                    <a:pt x="4576147" y="865721"/>
-                  </a:lnTo>
-                  <a:lnTo>
-                    <a:pt x="4653781" y="875243"/>
-                  </a:lnTo>
-                  <a:lnTo>
-                    <a:pt x="4731415" y="884636"/>
-                  </a:lnTo>
-                  <a:lnTo>
-                    <a:pt x="4809049" y="893903"/>
-                  </a:lnTo>
-                  <a:lnTo>
-                    <a:pt x="4886683" y="903046"/>
-                  </a:lnTo>
-                  <a:lnTo>
-                    <a:pt x="4964317" y="912064"/>
-                  </a:lnTo>
-                  <a:lnTo>
-                    <a:pt x="5041951" y="920962"/>
-                  </a:lnTo>
-                  <a:lnTo>
-                    <a:pt x="5119585" y="929739"/>
-                  </a:lnTo>
-                  <a:lnTo>
-                    <a:pt x="5197219" y="938398"/>
-                  </a:lnTo>
-                  <a:lnTo>
-                    <a:pt x="5274853" y="946940"/>
-                  </a:lnTo>
-                  <a:lnTo>
-                    <a:pt x="5352487" y="955368"/>
-                  </a:lnTo>
-                  <a:lnTo>
-                    <a:pt x="5430121" y="963681"/>
-                  </a:lnTo>
-                  <a:lnTo>
-                    <a:pt x="5507755" y="971883"/>
-                  </a:lnTo>
-                  <a:lnTo>
-                    <a:pt x="5585389" y="979973"/>
-                  </a:lnTo>
-                  <a:lnTo>
-                    <a:pt x="5663023" y="987955"/>
-                  </a:lnTo>
-                  <a:lnTo>
-                    <a:pt x="5740657" y="995829"/>
-                  </a:lnTo>
-                  <a:lnTo>
-                    <a:pt x="5818291" y="1003597"/>
-                  </a:lnTo>
-                  <a:lnTo>
-                    <a:pt x="5895925" y="1011261"/>
-                  </a:lnTo>
-                  <a:lnTo>
-                    <a:pt x="5973559" y="1018821"/>
-                  </a:lnTo>
-                  <a:lnTo>
-                    <a:pt x="6051193" y="1026279"/>
-                  </a:lnTo>
-                  <a:lnTo>
-                    <a:pt x="6128827" y="1033636"/>
-                  </a:lnTo>
-                  <a:lnTo>
-                    <a:pt x="6206462" y="1040895"/>
-                  </a:lnTo>
-                  <a:lnTo>
-                    <a:pt x="6284096" y="1048055"/>
-                  </a:lnTo>
-                  <a:lnTo>
-                    <a:pt x="6361730" y="1055119"/>
-                  </a:lnTo>
-                  <a:lnTo>
-                    <a:pt x="6439364" y="1062088"/>
-                  </a:lnTo>
-                  <a:lnTo>
-                    <a:pt x="6516998" y="1068963"/>
-                  </a:lnTo>
-                  <a:lnTo>
-                    <a:pt x="6594632" y="1075745"/>
-                  </a:lnTo>
-                  <a:lnTo>
-                    <a:pt x="6672266" y="1082436"/>
-                  </a:lnTo>
-                  <a:lnTo>
-                    <a:pt x="6749900" y="1089036"/>
-                  </a:lnTo>
-                  <a:lnTo>
-                    <a:pt x="6827534" y="1095548"/>
-                  </a:lnTo>
-                  <a:lnTo>
-                    <a:pt x="6905168" y="1101971"/>
-                  </a:lnTo>
-                  <a:lnTo>
-                    <a:pt x="6982802" y="1108309"/>
-                  </a:lnTo>
-                  <a:lnTo>
-                    <a:pt x="7060436" y="1114560"/>
-                  </a:lnTo>
-                  <a:lnTo>
-                    <a:pt x="7138070" y="1120728"/>
-                  </a:lnTo>
-                  <a:lnTo>
-                    <a:pt x="7215704" y="1126812"/>
-                  </a:lnTo>
-                  <a:lnTo>
-                    <a:pt x="7293338" y="1132814"/>
-                  </a:lnTo>
-                  <a:lnTo>
-                    <a:pt x="7370972" y="1138736"/>
+                    <a:pt x="73372" y="19117"/>
+                  </a:lnTo>
+                  <a:lnTo>
+                    <a:pt x="151006" y="39072"/>
+                  </a:lnTo>
+                  <a:lnTo>
+                    <a:pt x="228640" y="58759"/>
+                  </a:lnTo>
+                  <a:lnTo>
+                    <a:pt x="306274" y="78180"/>
+                  </a:lnTo>
+                  <a:lnTo>
+                    <a:pt x="383908" y="97339"/>
+                  </a:lnTo>
+                  <a:lnTo>
+                    <a:pt x="461542" y="116240"/>
+                  </a:lnTo>
+                  <a:lnTo>
+                    <a:pt x="539176" y="134886"/>
+                  </a:lnTo>
+                  <a:lnTo>
+                    <a:pt x="616810" y="153280"/>
+                  </a:lnTo>
+                  <a:lnTo>
+                    <a:pt x="694444" y="171427"/>
+                  </a:lnTo>
+                  <a:lnTo>
+                    <a:pt x="772078" y="189329"/>
+                  </a:lnTo>
+                  <a:lnTo>
+                    <a:pt x="849712" y="206989"/>
+                  </a:lnTo>
+                  <a:lnTo>
+                    <a:pt x="927346" y="224412"/>
+                  </a:lnTo>
+                  <a:lnTo>
+                    <a:pt x="1004981" y="241600"/>
+                  </a:lnTo>
+                  <a:lnTo>
+                    <a:pt x="1082615" y="258556"/>
+                  </a:lnTo>
+                  <a:lnTo>
+                    <a:pt x="1160249" y="275283"/>
+                  </a:lnTo>
+                  <a:lnTo>
+                    <a:pt x="1237883" y="291785"/>
+                  </a:lnTo>
+                  <a:lnTo>
+                    <a:pt x="1315517" y="308064"/>
+                  </a:lnTo>
+                  <a:lnTo>
+                    <a:pt x="1393151" y="324124"/>
+                  </a:lnTo>
+                  <a:lnTo>
+                    <a:pt x="1470785" y="339968"/>
+                  </a:lnTo>
+                  <a:lnTo>
+                    <a:pt x="1548419" y="355598"/>
+                  </a:lnTo>
+                  <a:lnTo>
+                    <a:pt x="1626053" y="371017"/>
+                  </a:lnTo>
+                  <a:lnTo>
+                    <a:pt x="1703687" y="386228"/>
+                  </a:lnTo>
+                  <a:lnTo>
+                    <a:pt x="1781321" y="401234"/>
+                  </a:lnTo>
+                  <a:lnTo>
+                    <a:pt x="1858955" y="416038"/>
+                  </a:lnTo>
+                  <a:lnTo>
+                    <a:pt x="1936589" y="430643"/>
+                  </a:lnTo>
+                  <a:lnTo>
+                    <a:pt x="2014223" y="445050"/>
+                  </a:lnTo>
+                  <a:lnTo>
+                    <a:pt x="2091857" y="459263"/>
+                  </a:lnTo>
+                  <a:lnTo>
+                    <a:pt x="2169491" y="473285"/>
+                  </a:lnTo>
+                  <a:lnTo>
+                    <a:pt x="2247125" y="487118"/>
+                  </a:lnTo>
+                  <a:lnTo>
+                    <a:pt x="2324759" y="500764"/>
+                  </a:lnTo>
+                  <a:lnTo>
+                    <a:pt x="2402393" y="514226"/>
+                  </a:lnTo>
+                  <a:lnTo>
+                    <a:pt x="2480027" y="527507"/>
+                  </a:lnTo>
+                  <a:lnTo>
+                    <a:pt x="2557661" y="540608"/>
+                  </a:lnTo>
+                  <a:lnTo>
+                    <a:pt x="2635295" y="553533"/>
+                  </a:lnTo>
+                  <a:lnTo>
+                    <a:pt x="2712930" y="566284"/>
+                  </a:lnTo>
+                  <a:lnTo>
+                    <a:pt x="2790564" y="578863"/>
+                  </a:lnTo>
+                  <a:lnTo>
+                    <a:pt x="2868198" y="591272"/>
+                  </a:lnTo>
+                  <a:lnTo>
+                    <a:pt x="2945832" y="603514"/>
+                  </a:lnTo>
+                  <a:lnTo>
+                    <a:pt x="3023466" y="615591"/>
+                  </a:lnTo>
+                  <a:lnTo>
+                    <a:pt x="3101100" y="627505"/>
+                  </a:lnTo>
+                  <a:lnTo>
+                    <a:pt x="3178734" y="639259"/>
+                  </a:lnTo>
+                  <a:lnTo>
+                    <a:pt x="3256368" y="650854"/>
+                  </a:lnTo>
+                  <a:lnTo>
+                    <a:pt x="3334002" y="662293"/>
+                  </a:lnTo>
+                  <a:lnTo>
+                    <a:pt x="3411636" y="673577"/>
+                  </a:lnTo>
+                  <a:lnTo>
+                    <a:pt x="3489270" y="684710"/>
+                  </a:lnTo>
+                  <a:lnTo>
+                    <a:pt x="3566904" y="695692"/>
+                  </a:lnTo>
+                  <a:lnTo>
+                    <a:pt x="3644538" y="706526"/>
+                  </a:lnTo>
+                  <a:lnTo>
+                    <a:pt x="3722172" y="717215"/>
+                  </a:lnTo>
+                  <a:lnTo>
+                    <a:pt x="3799806" y="727759"/>
+                  </a:lnTo>
+                  <a:lnTo>
+                    <a:pt x="3877440" y="738161"/>
+                  </a:lnTo>
+                  <a:lnTo>
+                    <a:pt x="3955074" y="748423"/>
+                  </a:lnTo>
+                  <a:lnTo>
+                    <a:pt x="4032708" y="758546"/>
+                  </a:lnTo>
+                  <a:lnTo>
+                    <a:pt x="4110342" y="768533"/>
+                  </a:lnTo>
+                  <a:lnTo>
+                    <a:pt x="4187976" y="778385"/>
+                  </a:lnTo>
+                  <a:lnTo>
+                    <a:pt x="4265610" y="788105"/>
+                  </a:lnTo>
+                  <a:lnTo>
+                    <a:pt x="4343244" y="797693"/>
+                  </a:lnTo>
+                  <a:lnTo>
+                    <a:pt x="4420879" y="807152"/>
+                  </a:lnTo>
+                  <a:lnTo>
+                    <a:pt x="4498513" y="816484"/>
+                  </a:lnTo>
+                  <a:lnTo>
+                    <a:pt x="4576147" y="825690"/>
+                  </a:lnTo>
+                  <a:lnTo>
+                    <a:pt x="4653781" y="834772"/>
+                  </a:lnTo>
+                  <a:lnTo>
+                    <a:pt x="4731415" y="843731"/>
+                  </a:lnTo>
+                  <a:lnTo>
+                    <a:pt x="4809049" y="852570"/>
+                  </a:lnTo>
+                  <a:lnTo>
+                    <a:pt x="4886683" y="861289"/>
+                  </a:lnTo>
+                  <a:lnTo>
+                    <a:pt x="4964317" y="869891"/>
+                  </a:lnTo>
+                  <a:lnTo>
+                    <a:pt x="5041951" y="878377"/>
+                  </a:lnTo>
+                  <a:lnTo>
+                    <a:pt x="5119585" y="886748"/>
+                  </a:lnTo>
+                  <a:lnTo>
+                    <a:pt x="5197219" y="895007"/>
+                  </a:lnTo>
+                  <a:lnTo>
+                    <a:pt x="5274853" y="903154"/>
+                  </a:lnTo>
+                  <a:lnTo>
+                    <a:pt x="5352487" y="911192"/>
+                  </a:lnTo>
+                  <a:lnTo>
+                    <a:pt x="5430121" y="919121"/>
+                  </a:lnTo>
+                  <a:lnTo>
+                    <a:pt x="5507755" y="926943"/>
+                  </a:lnTo>
+                  <a:lnTo>
+                    <a:pt x="5585389" y="934660"/>
+                  </a:lnTo>
+                  <a:lnTo>
+                    <a:pt x="5663023" y="942272"/>
+                  </a:lnTo>
+                  <a:lnTo>
+                    <a:pt x="5740657" y="949783"/>
+                  </a:lnTo>
+                  <a:lnTo>
+                    <a:pt x="5818291" y="957191"/>
+                  </a:lnTo>
+                  <a:lnTo>
+                    <a:pt x="5895925" y="964500"/>
+                  </a:lnTo>
+                  <a:lnTo>
+                    <a:pt x="5973559" y="971711"/>
+                  </a:lnTo>
+                  <a:lnTo>
+                    <a:pt x="6051193" y="978824"/>
+                  </a:lnTo>
+                  <a:lnTo>
+                    <a:pt x="6128827" y="985841"/>
+                  </a:lnTo>
+                  <a:lnTo>
+                    <a:pt x="6206462" y="992764"/>
+                  </a:lnTo>
+                  <a:lnTo>
+                    <a:pt x="6284096" y="999594"/>
+                  </a:lnTo>
+                  <a:lnTo>
+                    <a:pt x="6361730" y="1006331"/>
+                  </a:lnTo>
+                  <a:lnTo>
+                    <a:pt x="6439364" y="1012978"/>
+                  </a:lnTo>
+                  <a:lnTo>
+                    <a:pt x="6516998" y="1019534"/>
+                  </a:lnTo>
+                  <a:lnTo>
+                    <a:pt x="6594632" y="1026003"/>
+                  </a:lnTo>
+                  <a:lnTo>
+                    <a:pt x="6672266" y="1032384"/>
+                  </a:lnTo>
+                  <a:lnTo>
+                    <a:pt x="6749900" y="1038680"/>
+                  </a:lnTo>
+                  <a:lnTo>
+                    <a:pt x="6827534" y="1044890"/>
+                  </a:lnTo>
+                  <a:lnTo>
+                    <a:pt x="6905168" y="1051017"/>
+                  </a:lnTo>
+                  <a:lnTo>
+                    <a:pt x="6982802" y="1057061"/>
+                  </a:lnTo>
+                  <a:lnTo>
+                    <a:pt x="7060436" y="1063023"/>
+                  </a:lnTo>
+                  <a:lnTo>
+                    <a:pt x="7138070" y="1068906"/>
+                  </a:lnTo>
+                  <a:lnTo>
+                    <a:pt x="7215704" y="1074709"/>
+                  </a:lnTo>
+                  <a:lnTo>
+                    <a:pt x="7293338" y="1080433"/>
+                  </a:lnTo>
+                  <a:lnTo>
+                    <a:pt x="7370972" y="1086081"/>
                   </a:lnTo>
                 </a:path>
               </a:pathLst>
@@ -4557,7 +4557,7 @@
           </p:nvSpPr>
           <p:spPr>
             <a:xfrm>
-              <a:off x="817517" y="4679530"/>
+              <a:off x="817517" y="4727786"/>
               <a:ext cx="7799693" cy="0"/>
             </a:xfrm>
             <a:custGeom>
@@ -4600,15 +4600,15 @@
           </p:nvSpPr>
           <p:spPr>
             <a:xfrm>
-              <a:off x="4203673" y="1896563"/>
-              <a:ext cx="0" cy="3826579"/>
+              <a:off x="4203673" y="2073503"/>
+              <a:ext cx="0" cy="3649639"/>
             </a:xfrm>
             <a:custGeom>
               <a:avLst/>
               <a:pathLst>
-                <a:path w="0" h="3826579">
+                <a:path w="0" h="3649639">
                   <a:moveTo>
-                    <a:pt x="0" y="3826579"/>
+                    <a:pt x="0" y="3649639"/>
                   </a:moveTo>
                   <a:lnTo>
                     <a:pt x="0" y="0"/>
@@ -4643,7 +4643,7 @@
           </p:nvSpPr>
           <p:spPr>
             <a:xfrm>
-              <a:off x="692708" y="5509156"/>
+              <a:off x="692708" y="5517199"/>
               <a:ext cx="62179" cy="80101"/>
             </a:xfrm>
             <a:prstGeom prst="rect">
@@ -4689,7 +4689,7 @@
           </p:nvSpPr>
           <p:spPr>
             <a:xfrm>
-              <a:off x="692708" y="4639479"/>
+              <a:off x="692708" y="4687735"/>
               <a:ext cx="62179" cy="80101"/>
             </a:xfrm>
             <a:prstGeom prst="rect">
@@ -4735,7 +4735,7 @@
           </p:nvSpPr>
           <p:spPr>
             <a:xfrm>
-              <a:off x="692708" y="3769802"/>
+              <a:off x="692708" y="3858272"/>
               <a:ext cx="62179" cy="80101"/>
             </a:xfrm>
             <a:prstGeom prst="rect">
@@ -4781,7 +4781,7 @@
           </p:nvSpPr>
           <p:spPr>
             <a:xfrm>
-              <a:off x="692708" y="2900125"/>
+              <a:off x="692708" y="3028808"/>
               <a:ext cx="62179" cy="80101"/>
             </a:xfrm>
             <a:prstGeom prst="rect">
@@ -4827,7 +4827,7 @@
           </p:nvSpPr>
           <p:spPr>
             <a:xfrm>
-              <a:off x="692708" y="2030448"/>
+              <a:off x="692708" y="2199345"/>
               <a:ext cx="62179" cy="80101"/>
             </a:xfrm>
             <a:prstGeom prst="rect">
@@ -5103,7 +5103,7 @@
           </p:nvSpPr>
           <p:spPr>
             <a:xfrm rot="-5400000">
-              <a:off x="68446" y="3759743"/>
+              <a:off x="68446" y="3848213"/>
               <a:ext cx="1016904" cy="100218"/>
             </a:xfrm>
             <a:prstGeom prst="rect">
@@ -5144,6 +5144,52 @@
         <p:sp>
           <p:nvSpPr>
             <p:cNvPr id="38" name="tx38"/>
+            <p:cNvSpPr/>
+            <p:nvPr/>
+          </p:nvSpPr>
+          <p:spPr>
+            <a:xfrm>
+              <a:off x="817517" y="1896563"/>
+              <a:ext cx="4166463" cy="82021"/>
+            </a:xfrm>
+            <a:prstGeom prst="rect">
+              <a:avLst/>
+            </a:prstGeom>
+            <a:noFill/>
+          </p:spPr>
+          <p:txBody>
+            <a:bodyPr lIns="0" rIns="0" tIns="0" bIns="0" anchorCtr="1" anchor="ctr" wrap="none"/>
+            <a:lstStyle/>
+            <a:p>
+              <a:pPr algn="l" marL="0" marR="0" indent="0">
+                <a:lnSpc>
+                  <a:spcPts val="900"/>
+                </a:lnSpc>
+                <a:spcBef>
+                  <a:spcPts val="0"/>
+                </a:spcBef>
+                <a:spcAft>
+                  <a:spcPts val="0"/>
+                </a:spcAft>
+              </a:pPr>
+              <a:r>
+                <a:rPr sz="900">
+                  <a:solidFill>
+                    <a:srgbClr val="404040">
+                      <a:alpha val="100000"/>
+                    </a:srgbClr>
+                  </a:solidFill>
+                  <a:latin typeface="Helvetica"/>
+                  <a:cs typeface="Helvetica"/>
+                </a:rPr>
+                <a:t>subHR = 0.86 (95% CI 0.69-1.06), p = 0.154   (per 0.1-unit increase in eGFR ratio)</a:t>
+              </a:r>
+            </a:p>
+          </p:txBody>
+        </p:sp>
+        <p:sp>
+          <p:nvSpPr>
+            <p:cNvPr id="39" name="tx39"/>
             <p:cNvSpPr/>
             <p:nvPr/>
           </p:nvSpPr>

--- a/docs/plots/carbo/jx_carbo_linsubhr_ratio_grade2.pptx
+++ b/docs/plots/carbo/jx_carbo_linsubhr_ratio_grade2.pptx
@@ -2271,26 +2271,26 @@
           </p:nvSpPr>
           <p:spPr>
             <a:xfrm>
-              <a:off x="817517" y="5142518"/>
-              <a:ext cx="7799693" cy="0"/>
+              <a:off x="915645" y="5071743"/>
+              <a:ext cx="7682587" cy="0"/>
             </a:xfrm>
             <a:custGeom>
               <a:avLst/>
               <a:pathLst>
-                <a:path w="7799693" h="0">
+                <a:path w="7682587" h="0">
                   <a:moveTo>
                     <a:pt x="0" y="0"/>
                   </a:moveTo>
                   <a:lnTo>
-                    <a:pt x="7799693" y="0"/>
-                  </a:lnTo>
-                  <a:lnTo>
-                    <a:pt x="7799693" y="0"/>
+                    <a:pt x="7682587" y="0"/>
+                  </a:lnTo>
+                  <a:lnTo>
+                    <a:pt x="7682587" y="0"/>
                   </a:lnTo>
                 </a:path>
               </a:pathLst>
             </a:custGeom>
-            <a:ln w="6775" cap="flat">
+            <a:ln w="8623" cap="flat">
               <a:solidFill>
                 <a:srgbClr val="EBEBEB">
                   <a:alpha val="100000"/>
@@ -2314,26 +2314,26 @@
           </p:nvSpPr>
           <p:spPr>
             <a:xfrm>
-              <a:off x="817517" y="4313054"/>
-              <a:ext cx="7799693" cy="0"/>
+              <a:off x="915645" y="4298074"/>
+              <a:ext cx="7682587" cy="0"/>
             </a:xfrm>
             <a:custGeom>
               <a:avLst/>
               <a:pathLst>
-                <a:path w="7799693" h="0">
+                <a:path w="7682587" h="0">
                   <a:moveTo>
                     <a:pt x="0" y="0"/>
                   </a:moveTo>
                   <a:lnTo>
-                    <a:pt x="7799693" y="0"/>
-                  </a:lnTo>
-                  <a:lnTo>
-                    <a:pt x="7799693" y="0"/>
+                    <a:pt x="7682587" y="0"/>
+                  </a:lnTo>
+                  <a:lnTo>
+                    <a:pt x="7682587" y="0"/>
                   </a:lnTo>
                 </a:path>
               </a:pathLst>
             </a:custGeom>
-            <a:ln w="6775" cap="flat">
+            <a:ln w="8623" cap="flat">
               <a:solidFill>
                 <a:srgbClr val="EBEBEB">
                   <a:alpha val="100000"/>
@@ -2357,26 +2357,26 @@
           </p:nvSpPr>
           <p:spPr>
             <a:xfrm>
-              <a:off x="817517" y="3483591"/>
-              <a:ext cx="7799693" cy="0"/>
+              <a:off x="915645" y="3524405"/>
+              <a:ext cx="7682587" cy="0"/>
             </a:xfrm>
             <a:custGeom>
               <a:avLst/>
               <a:pathLst>
-                <a:path w="7799693" h="0">
+                <a:path w="7682587" h="0">
                   <a:moveTo>
                     <a:pt x="0" y="0"/>
                   </a:moveTo>
                   <a:lnTo>
-                    <a:pt x="7799693" y="0"/>
-                  </a:lnTo>
-                  <a:lnTo>
-                    <a:pt x="7799693" y="0"/>
+                    <a:pt x="7682587" y="0"/>
+                  </a:lnTo>
+                  <a:lnTo>
+                    <a:pt x="7682587" y="0"/>
                   </a:lnTo>
                 </a:path>
               </a:pathLst>
             </a:custGeom>
-            <a:ln w="6775" cap="flat">
+            <a:ln w="8623" cap="flat">
               <a:solidFill>
                 <a:srgbClr val="EBEBEB">
                   <a:alpha val="100000"/>
@@ -2400,26 +2400,26 @@
           </p:nvSpPr>
           <p:spPr>
             <a:xfrm>
-              <a:off x="817517" y="2654127"/>
-              <a:ext cx="7799693" cy="0"/>
+              <a:off x="915645" y="2750737"/>
+              <a:ext cx="7682587" cy="0"/>
             </a:xfrm>
             <a:custGeom>
               <a:avLst/>
               <a:pathLst>
-                <a:path w="7799693" h="0">
+                <a:path w="7682587" h="0">
                   <a:moveTo>
                     <a:pt x="0" y="0"/>
                   </a:moveTo>
                   <a:lnTo>
-                    <a:pt x="7799693" y="0"/>
-                  </a:lnTo>
-                  <a:lnTo>
-                    <a:pt x="7799693" y="0"/>
+                    <a:pt x="7682587" y="0"/>
+                  </a:lnTo>
+                  <a:lnTo>
+                    <a:pt x="7682587" y="0"/>
                   </a:lnTo>
                 </a:path>
               </a:pathLst>
             </a:custGeom>
-            <a:ln w="6775" cap="flat">
+            <a:ln w="8623" cap="flat">
               <a:solidFill>
                 <a:srgbClr val="EBEBEB">
                   <a:alpha val="100000"/>
@@ -2443,15 +2443,15 @@
           </p:nvSpPr>
           <p:spPr>
             <a:xfrm>
-              <a:off x="1615213" y="2073503"/>
-              <a:ext cx="0" cy="3649639"/>
+              <a:off x="1701364" y="2209169"/>
+              <a:ext cx="0" cy="3404141"/>
             </a:xfrm>
             <a:custGeom>
               <a:avLst/>
               <a:pathLst>
-                <a:path w="0" h="3649639">
+                <a:path w="0" h="3404141">
                   <a:moveTo>
-                    <a:pt x="0" y="3649639"/>
+                    <a:pt x="0" y="3404141"/>
                   </a:moveTo>
                   <a:lnTo>
                     <a:pt x="0" y="0"/>
@@ -2462,7 +2462,7 @@
                 </a:path>
               </a:pathLst>
             </a:custGeom>
-            <a:ln w="6775" cap="flat">
+            <a:ln w="8623" cap="flat">
               <a:solidFill>
                 <a:srgbClr val="EBEBEB">
                   <a:alpha val="100000"/>
@@ -2486,15 +2486,15 @@
           </p:nvSpPr>
           <p:spPr>
             <a:xfrm>
-              <a:off x="3387871" y="2073503"/>
-              <a:ext cx="0" cy="3649639"/>
+              <a:off x="3447406" y="2209169"/>
+              <a:ext cx="0" cy="3404141"/>
             </a:xfrm>
             <a:custGeom>
               <a:avLst/>
               <a:pathLst>
-                <a:path w="0" h="3649639">
+                <a:path w="0" h="3404141">
                   <a:moveTo>
-                    <a:pt x="0" y="3649639"/>
+                    <a:pt x="0" y="3404141"/>
                   </a:moveTo>
                   <a:lnTo>
                     <a:pt x="0" y="0"/>
@@ -2505,7 +2505,7 @@
                 </a:path>
               </a:pathLst>
             </a:custGeom>
-            <a:ln w="6775" cap="flat">
+            <a:ln w="8623" cap="flat">
               <a:solidFill>
                 <a:srgbClr val="EBEBEB">
                   <a:alpha val="100000"/>
@@ -2529,15 +2529,15 @@
           </p:nvSpPr>
           <p:spPr>
             <a:xfrm>
-              <a:off x="5160528" y="2073503"/>
-              <a:ext cx="0" cy="3649639"/>
+              <a:off x="5193449" y="2209169"/>
+              <a:ext cx="0" cy="3404141"/>
             </a:xfrm>
             <a:custGeom>
               <a:avLst/>
               <a:pathLst>
-                <a:path w="0" h="3649639">
+                <a:path w="0" h="3404141">
                   <a:moveTo>
-                    <a:pt x="0" y="3649639"/>
+                    <a:pt x="0" y="3404141"/>
                   </a:moveTo>
                   <a:lnTo>
                     <a:pt x="0" y="0"/>
@@ -2548,7 +2548,7 @@
                 </a:path>
               </a:pathLst>
             </a:custGeom>
-            <a:ln w="6775" cap="flat">
+            <a:ln w="8623" cap="flat">
               <a:solidFill>
                 <a:srgbClr val="EBEBEB">
                   <a:alpha val="100000"/>
@@ -2572,15 +2572,15 @@
           </p:nvSpPr>
           <p:spPr>
             <a:xfrm>
-              <a:off x="6933186" y="2073503"/>
-              <a:ext cx="0" cy="3649639"/>
+              <a:off x="6939491" y="2209169"/>
+              <a:ext cx="0" cy="3404141"/>
             </a:xfrm>
             <a:custGeom>
               <a:avLst/>
               <a:pathLst>
-                <a:path w="0" h="3649639">
+                <a:path w="0" h="3404141">
                   <a:moveTo>
-                    <a:pt x="0" y="3649639"/>
+                    <a:pt x="0" y="3404141"/>
                   </a:moveTo>
                   <a:lnTo>
                     <a:pt x="0" y="0"/>
@@ -2591,7 +2591,7 @@
                 </a:path>
               </a:pathLst>
             </a:custGeom>
-            <a:ln w="6775" cap="flat">
+            <a:ln w="8623" cap="flat">
               <a:solidFill>
                 <a:srgbClr val="EBEBEB">
                   <a:alpha val="100000"/>
@@ -2615,26 +2615,26 @@
           </p:nvSpPr>
           <p:spPr>
             <a:xfrm>
-              <a:off x="817517" y="5557249"/>
-              <a:ext cx="7799693" cy="0"/>
+              <a:off x="915645" y="5458577"/>
+              <a:ext cx="7682587" cy="0"/>
             </a:xfrm>
             <a:custGeom>
               <a:avLst/>
               <a:pathLst>
-                <a:path w="7799693" h="0">
+                <a:path w="7682587" h="0">
                   <a:moveTo>
                     <a:pt x="0" y="0"/>
                   </a:moveTo>
                   <a:lnTo>
-                    <a:pt x="7799693" y="0"/>
-                  </a:lnTo>
-                  <a:lnTo>
-                    <a:pt x="7799693" y="0"/>
+                    <a:pt x="7682587" y="0"/>
+                  </a:lnTo>
+                  <a:lnTo>
+                    <a:pt x="7682587" y="0"/>
                   </a:lnTo>
                 </a:path>
               </a:pathLst>
             </a:custGeom>
-            <a:ln w="13550" cap="flat">
+            <a:ln w="17246" cap="flat">
               <a:solidFill>
                 <a:srgbClr val="EBEBEB">
                   <a:alpha val="100000"/>
@@ -2658,26 +2658,26 @@
           </p:nvSpPr>
           <p:spPr>
             <a:xfrm>
-              <a:off x="817517" y="4727786"/>
-              <a:ext cx="7799693" cy="0"/>
+              <a:off x="915645" y="4684908"/>
+              <a:ext cx="7682587" cy="0"/>
             </a:xfrm>
             <a:custGeom>
               <a:avLst/>
               <a:pathLst>
-                <a:path w="7799693" h="0">
+                <a:path w="7682587" h="0">
                   <a:moveTo>
                     <a:pt x="0" y="0"/>
                   </a:moveTo>
                   <a:lnTo>
-                    <a:pt x="7799693" y="0"/>
-                  </a:lnTo>
-                  <a:lnTo>
-                    <a:pt x="7799693" y="0"/>
+                    <a:pt x="7682587" y="0"/>
+                  </a:lnTo>
+                  <a:lnTo>
+                    <a:pt x="7682587" y="0"/>
                   </a:lnTo>
                 </a:path>
               </a:pathLst>
             </a:custGeom>
-            <a:ln w="13550" cap="flat">
+            <a:ln w="17246" cap="flat">
               <a:solidFill>
                 <a:srgbClr val="EBEBEB">
                   <a:alpha val="100000"/>
@@ -2701,26 +2701,26 @@
           </p:nvSpPr>
           <p:spPr>
             <a:xfrm>
-              <a:off x="817517" y="3898322"/>
-              <a:ext cx="7799693" cy="0"/>
+              <a:off x="915645" y="3911240"/>
+              <a:ext cx="7682587" cy="0"/>
             </a:xfrm>
             <a:custGeom>
               <a:avLst/>
               <a:pathLst>
-                <a:path w="7799693" h="0">
+                <a:path w="7682587" h="0">
                   <a:moveTo>
                     <a:pt x="0" y="0"/>
                   </a:moveTo>
                   <a:lnTo>
-                    <a:pt x="7799693" y="0"/>
-                  </a:lnTo>
-                  <a:lnTo>
-                    <a:pt x="7799693" y="0"/>
+                    <a:pt x="7682587" y="0"/>
+                  </a:lnTo>
+                  <a:lnTo>
+                    <a:pt x="7682587" y="0"/>
                   </a:lnTo>
                 </a:path>
               </a:pathLst>
             </a:custGeom>
-            <a:ln w="13550" cap="flat">
+            <a:ln w="17246" cap="flat">
               <a:solidFill>
                 <a:srgbClr val="EBEBEB">
                   <a:alpha val="100000"/>
@@ -2744,26 +2744,26 @@
           </p:nvSpPr>
           <p:spPr>
             <a:xfrm>
-              <a:off x="817517" y="3068859"/>
-              <a:ext cx="7799693" cy="0"/>
+              <a:off x="915645" y="3137571"/>
+              <a:ext cx="7682587" cy="0"/>
             </a:xfrm>
             <a:custGeom>
               <a:avLst/>
               <a:pathLst>
-                <a:path w="7799693" h="0">
+                <a:path w="7682587" h="0">
                   <a:moveTo>
                     <a:pt x="0" y="0"/>
                   </a:moveTo>
                   <a:lnTo>
-                    <a:pt x="7799693" y="0"/>
-                  </a:lnTo>
-                  <a:lnTo>
-                    <a:pt x="7799693" y="0"/>
+                    <a:pt x="7682587" y="0"/>
+                  </a:lnTo>
+                  <a:lnTo>
+                    <a:pt x="7682587" y="0"/>
                   </a:lnTo>
                 </a:path>
               </a:pathLst>
             </a:custGeom>
-            <a:ln w="13550" cap="flat">
+            <a:ln w="17246" cap="flat">
               <a:solidFill>
                 <a:srgbClr val="EBEBEB">
                   <a:alpha val="100000"/>
@@ -2787,26 +2787,26 @@
           </p:nvSpPr>
           <p:spPr>
             <a:xfrm>
-              <a:off x="817517" y="2239395"/>
-              <a:ext cx="7799693" cy="0"/>
+              <a:off x="915645" y="2363903"/>
+              <a:ext cx="7682587" cy="0"/>
             </a:xfrm>
             <a:custGeom>
               <a:avLst/>
               <a:pathLst>
-                <a:path w="7799693" h="0">
+                <a:path w="7682587" h="0">
                   <a:moveTo>
                     <a:pt x="0" y="0"/>
                   </a:moveTo>
                   <a:lnTo>
-                    <a:pt x="7799693" y="0"/>
-                  </a:lnTo>
-                  <a:lnTo>
-                    <a:pt x="7799693" y="0"/>
+                    <a:pt x="7682587" y="0"/>
+                  </a:lnTo>
+                  <a:lnTo>
+                    <a:pt x="7682587" y="0"/>
                   </a:lnTo>
                 </a:path>
               </a:pathLst>
             </a:custGeom>
-            <a:ln w="13550" cap="flat">
+            <a:ln w="17246" cap="flat">
               <a:solidFill>
                 <a:srgbClr val="EBEBEB">
                   <a:alpha val="100000"/>
@@ -2830,15 +2830,15 @@
           </p:nvSpPr>
           <p:spPr>
             <a:xfrm>
-              <a:off x="2501542" y="2073503"/>
-              <a:ext cx="0" cy="3649639"/>
+              <a:off x="2574385" y="2209169"/>
+              <a:ext cx="0" cy="3404141"/>
             </a:xfrm>
             <a:custGeom>
               <a:avLst/>
               <a:pathLst>
-                <a:path w="0" h="3649639">
+                <a:path w="0" h="3404141">
                   <a:moveTo>
-                    <a:pt x="0" y="3649639"/>
+                    <a:pt x="0" y="3404141"/>
                   </a:moveTo>
                   <a:lnTo>
                     <a:pt x="0" y="0"/>
@@ -2849,7 +2849,7 @@
                 </a:path>
               </a:pathLst>
             </a:custGeom>
-            <a:ln w="13550" cap="flat">
+            <a:ln w="17246" cap="flat">
               <a:solidFill>
                 <a:srgbClr val="EBEBEB">
                   <a:alpha val="100000"/>
@@ -2873,15 +2873,15 @@
           </p:nvSpPr>
           <p:spPr>
             <a:xfrm>
-              <a:off x="4274200" y="2073503"/>
-              <a:ext cx="0" cy="3649639"/>
+              <a:off x="4320427" y="2209169"/>
+              <a:ext cx="0" cy="3404141"/>
             </a:xfrm>
             <a:custGeom>
               <a:avLst/>
               <a:pathLst>
-                <a:path w="0" h="3649639">
+                <a:path w="0" h="3404141">
                   <a:moveTo>
-                    <a:pt x="0" y="3649639"/>
+                    <a:pt x="0" y="3404141"/>
                   </a:moveTo>
                   <a:lnTo>
                     <a:pt x="0" y="0"/>
@@ -2892,7 +2892,7 @@
                 </a:path>
               </a:pathLst>
             </a:custGeom>
-            <a:ln w="13550" cap="flat">
+            <a:ln w="17246" cap="flat">
               <a:solidFill>
                 <a:srgbClr val="EBEBEB">
                   <a:alpha val="100000"/>
@@ -2916,15 +2916,15 @@
           </p:nvSpPr>
           <p:spPr>
             <a:xfrm>
-              <a:off x="6046857" y="2073503"/>
-              <a:ext cx="0" cy="3649639"/>
+              <a:off x="6066470" y="2209169"/>
+              <a:ext cx="0" cy="3404141"/>
             </a:xfrm>
             <a:custGeom>
               <a:avLst/>
               <a:pathLst>
-                <a:path w="0" h="3649639">
+                <a:path w="0" h="3404141">
                   <a:moveTo>
-                    <a:pt x="0" y="3649639"/>
+                    <a:pt x="0" y="3404141"/>
                   </a:moveTo>
                   <a:lnTo>
                     <a:pt x="0" y="0"/>
@@ -2935,7 +2935,7 @@
                 </a:path>
               </a:pathLst>
             </a:custGeom>
-            <a:ln w="13550" cap="flat">
+            <a:ln w="17246" cap="flat">
               <a:solidFill>
                 <a:srgbClr val="EBEBEB">
                   <a:alpha val="100000"/>
@@ -2959,15 +2959,15 @@
           </p:nvSpPr>
           <p:spPr>
             <a:xfrm>
-              <a:off x="7819515" y="2073503"/>
-              <a:ext cx="0" cy="3649639"/>
+              <a:off x="7812512" y="2209169"/>
+              <a:ext cx="0" cy="3404141"/>
             </a:xfrm>
             <a:custGeom>
               <a:avLst/>
               <a:pathLst>
-                <a:path w="0" h="3649639">
+                <a:path w="0" h="3404141">
                   <a:moveTo>
-                    <a:pt x="0" y="3649639"/>
+                    <a:pt x="0" y="3404141"/>
                   </a:moveTo>
                   <a:lnTo>
                     <a:pt x="0" y="0"/>
@@ -2978,7 +2978,7 @@
                 </a:path>
               </a:pathLst>
             </a:custGeom>
-            <a:ln w="13550" cap="flat">
+            <a:ln w="17246" cap="flat">
               <a:solidFill>
                 <a:srgbClr val="EBEBEB">
                   <a:alpha val="100000"/>
@@ -3002,588 +3002,588 @@
           </p:nvSpPr>
           <p:spPr>
             <a:xfrm>
-              <a:off x="817517" y="2170331"/>
-              <a:ext cx="7370972" cy="3228509"/>
+              <a:off x="915645" y="2299484"/>
+              <a:ext cx="7260303" cy="3011339"/>
             </a:xfrm>
             <a:custGeom>
               <a:avLst/>
               <a:pathLst>
-                <a:path w="7370972" h="3228509">
+                <a:path w="7260303" h="3011339">
                   <a:moveTo>
                     <a:pt x="0" y="0"/>
                   </a:moveTo>
                   <a:lnTo>
-                    <a:pt x="73372" y="101778"/>
-                  </a:lnTo>
-                  <a:lnTo>
-                    <a:pt x="151006" y="206050"/>
-                  </a:lnTo>
-                  <a:lnTo>
-                    <a:pt x="228640" y="307013"/>
-                  </a:lnTo>
-                  <a:lnTo>
-                    <a:pt x="306274" y="404770"/>
-                  </a:lnTo>
-                  <a:lnTo>
-                    <a:pt x="383908" y="499425"/>
-                  </a:lnTo>
-                  <a:lnTo>
-                    <a:pt x="461542" y="591076"/>
-                  </a:lnTo>
-                  <a:lnTo>
-                    <a:pt x="539176" y="679817"/>
-                  </a:lnTo>
-                  <a:lnTo>
-                    <a:pt x="616810" y="765742"/>
-                  </a:lnTo>
-                  <a:lnTo>
-                    <a:pt x="694444" y="848940"/>
-                  </a:lnTo>
-                  <a:lnTo>
-                    <a:pt x="772078" y="929496"/>
-                  </a:lnTo>
-                  <a:lnTo>
-                    <a:pt x="849712" y="1007496"/>
-                  </a:lnTo>
-                  <a:lnTo>
-                    <a:pt x="927346" y="1083020"/>
-                  </a:lnTo>
-                  <a:lnTo>
-                    <a:pt x="1004981" y="1156147"/>
-                  </a:lnTo>
-                  <a:lnTo>
-                    <a:pt x="1082615" y="1226953"/>
-                  </a:lnTo>
-                  <a:lnTo>
-                    <a:pt x="1160249" y="1295511"/>
-                  </a:lnTo>
-                  <a:lnTo>
-                    <a:pt x="1237883" y="1361894"/>
-                  </a:lnTo>
-                  <a:lnTo>
-                    <a:pt x="1315517" y="1426169"/>
-                  </a:lnTo>
-                  <a:lnTo>
-                    <a:pt x="1393151" y="1488404"/>
-                  </a:lnTo>
-                  <a:lnTo>
-                    <a:pt x="1470785" y="1548664"/>
-                  </a:lnTo>
-                  <a:lnTo>
-                    <a:pt x="1548419" y="1607011"/>
-                  </a:lnTo>
-                  <a:lnTo>
-                    <a:pt x="1626053" y="1663506"/>
-                  </a:lnTo>
-                  <a:lnTo>
-                    <a:pt x="1703687" y="1718208"/>
-                  </a:lnTo>
-                  <a:lnTo>
-                    <a:pt x="1781321" y="1771174"/>
-                  </a:lnTo>
-                  <a:lnTo>
-                    <a:pt x="1858955" y="1822459"/>
-                  </a:lnTo>
-                  <a:lnTo>
-                    <a:pt x="1936589" y="1872115"/>
-                  </a:lnTo>
-                  <a:lnTo>
-                    <a:pt x="2014223" y="1920196"/>
-                  </a:lnTo>
-                  <a:lnTo>
-                    <a:pt x="2091857" y="1966750"/>
-                  </a:lnTo>
-                  <a:lnTo>
-                    <a:pt x="2169491" y="2011827"/>
-                  </a:lnTo>
-                  <a:lnTo>
-                    <a:pt x="2247125" y="2055473"/>
-                  </a:lnTo>
-                  <a:lnTo>
-                    <a:pt x="2324759" y="2097734"/>
-                  </a:lnTo>
-                  <a:lnTo>
-                    <a:pt x="2402393" y="2138654"/>
-                  </a:lnTo>
-                  <a:lnTo>
-                    <a:pt x="2480027" y="2178274"/>
-                  </a:lnTo>
-                  <a:lnTo>
-                    <a:pt x="2557661" y="2216637"/>
-                  </a:lnTo>
-                  <a:lnTo>
-                    <a:pt x="2635295" y="2253782"/>
-                  </a:lnTo>
-                  <a:lnTo>
-                    <a:pt x="2712930" y="2289749"/>
-                  </a:lnTo>
-                  <a:lnTo>
-                    <a:pt x="2790564" y="2324573"/>
-                  </a:lnTo>
-                  <a:lnTo>
-                    <a:pt x="2868198" y="2358293"/>
-                  </a:lnTo>
-                  <a:lnTo>
-                    <a:pt x="2945832" y="2390942"/>
-                  </a:lnTo>
-                  <a:lnTo>
-                    <a:pt x="3023466" y="2422555"/>
-                  </a:lnTo>
-                  <a:lnTo>
-                    <a:pt x="3101100" y="2453164"/>
-                  </a:lnTo>
-                  <a:lnTo>
-                    <a:pt x="3178734" y="2482802"/>
-                  </a:lnTo>
-                  <a:lnTo>
-                    <a:pt x="3256368" y="2511499"/>
-                  </a:lnTo>
-                  <a:lnTo>
-                    <a:pt x="3334002" y="2539285"/>
-                  </a:lnTo>
-                  <a:lnTo>
-                    <a:pt x="3411636" y="2556062"/>
-                  </a:lnTo>
-                  <a:lnTo>
-                    <a:pt x="3489270" y="2551806"/>
-                  </a:lnTo>
-                  <a:lnTo>
-                    <a:pt x="3566904" y="2547528"/>
-                  </a:lnTo>
-                  <a:lnTo>
-                    <a:pt x="3644538" y="2543229"/>
-                  </a:lnTo>
-                  <a:lnTo>
-                    <a:pt x="3722172" y="2538907"/>
-                  </a:lnTo>
-                  <a:lnTo>
-                    <a:pt x="3799806" y="2534563"/>
-                  </a:lnTo>
-                  <a:lnTo>
-                    <a:pt x="3877440" y="2530197"/>
-                  </a:lnTo>
-                  <a:lnTo>
-                    <a:pt x="3955074" y="2525808"/>
-                  </a:lnTo>
-                  <a:lnTo>
-                    <a:pt x="4032708" y="2521397"/>
-                  </a:lnTo>
-                  <a:lnTo>
-                    <a:pt x="4110342" y="2516963"/>
-                  </a:lnTo>
-                  <a:lnTo>
-                    <a:pt x="4187976" y="2512507"/>
-                  </a:lnTo>
-                  <a:lnTo>
-                    <a:pt x="4265610" y="2508028"/>
-                  </a:lnTo>
-                  <a:lnTo>
-                    <a:pt x="4343244" y="2503526"/>
-                  </a:lnTo>
-                  <a:lnTo>
-                    <a:pt x="4420879" y="2499000"/>
-                  </a:lnTo>
-                  <a:lnTo>
-                    <a:pt x="4498513" y="2494452"/>
-                  </a:lnTo>
-                  <a:lnTo>
-                    <a:pt x="4576147" y="2489880"/>
-                  </a:lnTo>
-                  <a:lnTo>
-                    <a:pt x="4653781" y="2485285"/>
-                  </a:lnTo>
-                  <a:lnTo>
-                    <a:pt x="4731415" y="2480667"/>
-                  </a:lnTo>
-                  <a:lnTo>
-                    <a:pt x="4809049" y="2476024"/>
-                  </a:lnTo>
-                  <a:lnTo>
-                    <a:pt x="4886683" y="2471358"/>
-                  </a:lnTo>
-                  <a:lnTo>
-                    <a:pt x="4964317" y="2466668"/>
-                  </a:lnTo>
-                  <a:lnTo>
-                    <a:pt x="5041951" y="2461954"/>
-                  </a:lnTo>
-                  <a:lnTo>
-                    <a:pt x="5119585" y="2457216"/>
-                  </a:lnTo>
-                  <a:lnTo>
-                    <a:pt x="5197219" y="2452454"/>
-                  </a:lnTo>
-                  <a:lnTo>
-                    <a:pt x="5274853" y="2447667"/>
-                  </a:lnTo>
-                  <a:lnTo>
-                    <a:pt x="5352487" y="2442856"/>
-                  </a:lnTo>
-                  <a:lnTo>
-                    <a:pt x="5430121" y="2438020"/>
-                  </a:lnTo>
-                  <a:lnTo>
-                    <a:pt x="5507755" y="2433159"/>
-                  </a:lnTo>
-                  <a:lnTo>
-                    <a:pt x="5585389" y="2428273"/>
-                  </a:lnTo>
-                  <a:lnTo>
-                    <a:pt x="5663023" y="2423363"/>
-                  </a:lnTo>
-                  <a:lnTo>
-                    <a:pt x="5740657" y="2418427"/>
-                  </a:lnTo>
-                  <a:lnTo>
-                    <a:pt x="5818291" y="2413466"/>
-                  </a:lnTo>
-                  <a:lnTo>
-                    <a:pt x="5895925" y="2408479"/>
-                  </a:lnTo>
-                  <a:lnTo>
-                    <a:pt x="5973559" y="2403467"/>
-                  </a:lnTo>
-                  <a:lnTo>
-                    <a:pt x="6051193" y="2398429"/>
-                  </a:lnTo>
-                  <a:lnTo>
-                    <a:pt x="6128827" y="2393366"/>
-                  </a:lnTo>
-                  <a:lnTo>
-                    <a:pt x="6206462" y="2388276"/>
-                  </a:lnTo>
-                  <a:lnTo>
-                    <a:pt x="6284096" y="2383161"/>
-                  </a:lnTo>
-                  <a:lnTo>
-                    <a:pt x="6361730" y="2378019"/>
-                  </a:lnTo>
-                  <a:lnTo>
-                    <a:pt x="6439364" y="2372851"/>
-                  </a:lnTo>
-                  <a:lnTo>
-                    <a:pt x="6516998" y="2367656"/>
-                  </a:lnTo>
-                  <a:lnTo>
-                    <a:pt x="6594632" y="2362435"/>
-                  </a:lnTo>
-                  <a:lnTo>
-                    <a:pt x="6672266" y="2357187"/>
-                  </a:lnTo>
-                  <a:lnTo>
-                    <a:pt x="6749900" y="2351912"/>
-                  </a:lnTo>
-                  <a:lnTo>
-                    <a:pt x="6827534" y="2346610"/>
-                  </a:lnTo>
-                  <a:lnTo>
-                    <a:pt x="6905168" y="2341281"/>
-                  </a:lnTo>
-                  <a:lnTo>
-                    <a:pt x="6982802" y="2335925"/>
-                  </a:lnTo>
-                  <a:lnTo>
-                    <a:pt x="7060436" y="2330541"/>
-                  </a:lnTo>
-                  <a:lnTo>
-                    <a:pt x="7138070" y="2325130"/>
-                  </a:lnTo>
-                  <a:lnTo>
-                    <a:pt x="7215704" y="2319691"/>
-                  </a:lnTo>
-                  <a:lnTo>
-                    <a:pt x="7293338" y="2314224"/>
-                  </a:lnTo>
-                  <a:lnTo>
-                    <a:pt x="7370972" y="2308729"/>
-                  </a:lnTo>
-                  <a:lnTo>
-                    <a:pt x="7370972" y="3228509"/>
-                  </a:lnTo>
-                  <a:lnTo>
-                    <a:pt x="7293338" y="3223316"/>
-                  </a:lnTo>
-                  <a:lnTo>
-                    <a:pt x="7215704" y="3217953"/>
-                  </a:lnTo>
-                  <a:lnTo>
-                    <a:pt x="7138070" y="3212415"/>
-                  </a:lnTo>
-                  <a:lnTo>
-                    <a:pt x="7060436" y="3206694"/>
-                  </a:lnTo>
-                  <a:lnTo>
-                    <a:pt x="6982802" y="3200786"/>
-                  </a:lnTo>
-                  <a:lnTo>
-                    <a:pt x="6905168" y="3194685"/>
-                  </a:lnTo>
-                  <a:lnTo>
-                    <a:pt x="6827534" y="3188383"/>
-                  </a:lnTo>
-                  <a:lnTo>
-                    <a:pt x="6749900" y="3181875"/>
-                  </a:lnTo>
-                  <a:lnTo>
-                    <a:pt x="6672266" y="3175153"/>
-                  </a:lnTo>
-                  <a:lnTo>
-                    <a:pt x="6594632" y="3168212"/>
-                  </a:lnTo>
-                  <a:lnTo>
-                    <a:pt x="6516998" y="3161042"/>
-                  </a:lnTo>
-                  <a:lnTo>
-                    <a:pt x="6439364" y="3153638"/>
-                  </a:lnTo>
-                  <a:lnTo>
-                    <a:pt x="6361730" y="3145991"/>
-                  </a:lnTo>
-                  <a:lnTo>
-                    <a:pt x="6284096" y="3138093"/>
-                  </a:lnTo>
-                  <a:lnTo>
-                    <a:pt x="6206462" y="3129936"/>
-                  </a:lnTo>
-                  <a:lnTo>
-                    <a:pt x="6128827" y="3121512"/>
-                  </a:lnTo>
-                  <a:lnTo>
-                    <a:pt x="6051193" y="3112812"/>
-                  </a:lnTo>
-                  <a:lnTo>
-                    <a:pt x="5973559" y="3103826"/>
-                  </a:lnTo>
-                  <a:lnTo>
-                    <a:pt x="5895925" y="3094546"/>
-                  </a:lnTo>
-                  <a:lnTo>
-                    <a:pt x="5818291" y="3084962"/>
-                  </a:lnTo>
-                  <a:lnTo>
-                    <a:pt x="5740657" y="3075063"/>
-                  </a:lnTo>
-                  <a:lnTo>
-                    <a:pt x="5663023" y="3064840"/>
-                  </a:lnTo>
-                  <a:lnTo>
-                    <a:pt x="5585389" y="3054282"/>
-                  </a:lnTo>
-                  <a:lnTo>
-                    <a:pt x="5507755" y="3043378"/>
-                  </a:lnTo>
-                  <a:lnTo>
-                    <a:pt x="5430121" y="3032117"/>
-                  </a:lnTo>
-                  <a:lnTo>
-                    <a:pt x="5352487" y="3020486"/>
-                  </a:lnTo>
-                  <a:lnTo>
-                    <a:pt x="5274853" y="3008474"/>
-                  </a:lnTo>
-                  <a:lnTo>
-                    <a:pt x="5197219" y="2996068"/>
-                  </a:lnTo>
-                  <a:lnTo>
-                    <a:pt x="5119585" y="2983256"/>
-                  </a:lnTo>
-                  <a:lnTo>
-                    <a:pt x="5041951" y="2970023"/>
-                  </a:lnTo>
-                  <a:lnTo>
-                    <a:pt x="4964317" y="2956357"/>
-                  </a:lnTo>
-                  <a:lnTo>
-                    <a:pt x="4886683" y="2942243"/>
-                  </a:lnTo>
-                  <a:lnTo>
-                    <a:pt x="4809049" y="2927666"/>
-                  </a:lnTo>
-                  <a:lnTo>
-                    <a:pt x="4731415" y="2912611"/>
-                  </a:lnTo>
-                  <a:lnTo>
-                    <a:pt x="4653781" y="2897063"/>
-                  </a:lnTo>
-                  <a:lnTo>
-                    <a:pt x="4576147" y="2881005"/>
-                  </a:lnTo>
-                  <a:lnTo>
-                    <a:pt x="4498513" y="2864421"/>
-                  </a:lnTo>
-                  <a:lnTo>
-                    <a:pt x="4420879" y="2847293"/>
-                  </a:lnTo>
-                  <a:lnTo>
-                    <a:pt x="4343244" y="2829603"/>
-                  </a:lnTo>
-                  <a:lnTo>
-                    <a:pt x="4265610" y="2811334"/>
-                  </a:lnTo>
-                  <a:lnTo>
-                    <a:pt x="4187976" y="2792466"/>
-                  </a:lnTo>
-                  <a:lnTo>
-                    <a:pt x="4110342" y="2772979"/>
-                  </a:lnTo>
-                  <a:lnTo>
-                    <a:pt x="4032708" y="2752853"/>
-                  </a:lnTo>
-                  <a:lnTo>
-                    <a:pt x="3955074" y="2732068"/>
-                  </a:lnTo>
-                  <a:lnTo>
-                    <a:pt x="3877440" y="2710601"/>
-                  </a:lnTo>
-                  <a:lnTo>
-                    <a:pt x="3799806" y="2688431"/>
-                  </a:lnTo>
-                  <a:lnTo>
-                    <a:pt x="3722172" y="2665534"/>
-                  </a:lnTo>
-                  <a:lnTo>
-                    <a:pt x="3644538" y="2641886"/>
-                  </a:lnTo>
-                  <a:lnTo>
-                    <a:pt x="3566904" y="2617463"/>
-                  </a:lnTo>
-                  <a:lnTo>
-                    <a:pt x="3489270" y="2592240"/>
-                  </a:lnTo>
-                  <a:lnTo>
-                    <a:pt x="3411636" y="2566190"/>
-                  </a:lnTo>
-                  <a:lnTo>
-                    <a:pt x="3334002" y="2560297"/>
-                  </a:lnTo>
-                  <a:lnTo>
-                    <a:pt x="3256368" y="2564510"/>
-                  </a:lnTo>
-                  <a:lnTo>
-                    <a:pt x="3178734" y="2568701"/>
-                  </a:lnTo>
-                  <a:lnTo>
-                    <a:pt x="3101100" y="2572871"/>
-                  </a:lnTo>
-                  <a:lnTo>
-                    <a:pt x="3023466" y="2577020"/>
-                  </a:lnTo>
-                  <a:lnTo>
-                    <a:pt x="2945832" y="2581147"/>
-                  </a:lnTo>
-                  <a:lnTo>
-                    <a:pt x="2868198" y="2585254"/>
-                  </a:lnTo>
-                  <a:lnTo>
-                    <a:pt x="2790564" y="2589339"/>
-                  </a:lnTo>
-                  <a:lnTo>
-                    <a:pt x="2712930" y="2593404"/>
-                  </a:lnTo>
-                  <a:lnTo>
-                    <a:pt x="2635295" y="2597448"/>
-                  </a:lnTo>
-                  <a:lnTo>
-                    <a:pt x="2557661" y="2601472"/>
-                  </a:lnTo>
-                  <a:lnTo>
-                    <a:pt x="2480027" y="2605475"/>
-                  </a:lnTo>
-                  <a:lnTo>
-                    <a:pt x="2402393" y="2609457"/>
-                  </a:lnTo>
-                  <a:lnTo>
-                    <a:pt x="2324759" y="2613419"/>
-                  </a:lnTo>
-                  <a:lnTo>
-                    <a:pt x="2247125" y="2617361"/>
-                  </a:lnTo>
-                  <a:lnTo>
-                    <a:pt x="2169491" y="2621283"/>
-                  </a:lnTo>
-                  <a:lnTo>
-                    <a:pt x="2091857" y="2625185"/>
-                  </a:lnTo>
-                  <a:lnTo>
-                    <a:pt x="2014223" y="2629068"/>
-                  </a:lnTo>
-                  <a:lnTo>
-                    <a:pt x="1936589" y="2632930"/>
-                  </a:lnTo>
-                  <a:lnTo>
-                    <a:pt x="1858955" y="2636772"/>
-                  </a:lnTo>
-                  <a:lnTo>
-                    <a:pt x="1781321" y="2640596"/>
-                  </a:lnTo>
-                  <a:lnTo>
-                    <a:pt x="1703687" y="2644399"/>
-                  </a:lnTo>
-                  <a:lnTo>
-                    <a:pt x="1626053" y="2648183"/>
-                  </a:lnTo>
-                  <a:lnTo>
-                    <a:pt x="1548419" y="2651948"/>
-                  </a:lnTo>
-                  <a:lnTo>
-                    <a:pt x="1470785" y="2655694"/>
-                  </a:lnTo>
-                  <a:lnTo>
-                    <a:pt x="1393151" y="2659420"/>
-                  </a:lnTo>
-                  <a:lnTo>
-                    <a:pt x="1315517" y="2663128"/>
-                  </a:lnTo>
-                  <a:lnTo>
-                    <a:pt x="1237883" y="2666817"/>
-                  </a:lnTo>
-                  <a:lnTo>
-                    <a:pt x="1160249" y="2670487"/>
-                  </a:lnTo>
-                  <a:lnTo>
-                    <a:pt x="1082615" y="2674138"/>
-                  </a:lnTo>
-                  <a:lnTo>
-                    <a:pt x="1004981" y="2677771"/>
-                  </a:lnTo>
-                  <a:lnTo>
-                    <a:pt x="927346" y="2681385"/>
-                  </a:lnTo>
-                  <a:lnTo>
-                    <a:pt x="849712" y="2684980"/>
-                  </a:lnTo>
-                  <a:lnTo>
-                    <a:pt x="772078" y="2688558"/>
-                  </a:lnTo>
-                  <a:lnTo>
-                    <a:pt x="694444" y="2692117"/>
-                  </a:lnTo>
-                  <a:lnTo>
-                    <a:pt x="616810" y="2695658"/>
-                  </a:lnTo>
-                  <a:lnTo>
-                    <a:pt x="539176" y="2699181"/>
-                  </a:lnTo>
-                  <a:lnTo>
-                    <a:pt x="461542" y="2702686"/>
-                  </a:lnTo>
-                  <a:lnTo>
-                    <a:pt x="383908" y="2706173"/>
-                  </a:lnTo>
-                  <a:lnTo>
-                    <a:pt x="306274" y="2709642"/>
-                  </a:lnTo>
-                  <a:lnTo>
-                    <a:pt x="228640" y="2713094"/>
-                  </a:lnTo>
-                  <a:lnTo>
-                    <a:pt x="151006" y="2716528"/>
-                  </a:lnTo>
-                  <a:lnTo>
-                    <a:pt x="73372" y="2719945"/>
-                  </a:lnTo>
-                  <a:lnTo>
-                    <a:pt x="0" y="2723157"/>
+                    <a:pt x="72270" y="94932"/>
+                  </a:lnTo>
+                  <a:lnTo>
+                    <a:pt x="148739" y="192190"/>
+                  </a:lnTo>
+                  <a:lnTo>
+                    <a:pt x="225207" y="286361"/>
+                  </a:lnTo>
+                  <a:lnTo>
+                    <a:pt x="301676" y="377543"/>
+                  </a:lnTo>
+                  <a:lnTo>
+                    <a:pt x="378144" y="465831"/>
+                  </a:lnTo>
+                  <a:lnTo>
+                    <a:pt x="454613" y="551316"/>
+                  </a:lnTo>
+                  <a:lnTo>
+                    <a:pt x="531081" y="634089"/>
+                  </a:lnTo>
+                  <a:lnTo>
+                    <a:pt x="607549" y="714233"/>
+                  </a:lnTo>
+                  <a:lnTo>
+                    <a:pt x="684018" y="791835"/>
+                  </a:lnTo>
+                  <a:lnTo>
+                    <a:pt x="760486" y="866973"/>
+                  </a:lnTo>
+                  <a:lnTo>
+                    <a:pt x="836955" y="939726"/>
+                  </a:lnTo>
+                  <a:lnTo>
+                    <a:pt x="913423" y="1010169"/>
+                  </a:lnTo>
+                  <a:lnTo>
+                    <a:pt x="989892" y="1078377"/>
+                  </a:lnTo>
+                  <a:lnTo>
+                    <a:pt x="1066360" y="1144420"/>
+                  </a:lnTo>
+                  <a:lnTo>
+                    <a:pt x="1142828" y="1208367"/>
+                  </a:lnTo>
+                  <a:lnTo>
+                    <a:pt x="1219297" y="1270284"/>
+                  </a:lnTo>
+                  <a:lnTo>
+                    <a:pt x="1295765" y="1330236"/>
+                  </a:lnTo>
+                  <a:lnTo>
+                    <a:pt x="1372234" y="1388285"/>
+                  </a:lnTo>
+                  <a:lnTo>
+                    <a:pt x="1448702" y="1444491"/>
+                  </a:lnTo>
+                  <a:lnTo>
+                    <a:pt x="1525171" y="1498913"/>
+                  </a:lnTo>
+                  <a:lnTo>
+                    <a:pt x="1601639" y="1551608"/>
+                  </a:lnTo>
+                  <a:lnTo>
+                    <a:pt x="1678107" y="1602631"/>
+                  </a:lnTo>
+                  <a:lnTo>
+                    <a:pt x="1754576" y="1652034"/>
+                  </a:lnTo>
+                  <a:lnTo>
+                    <a:pt x="1831044" y="1699868"/>
+                  </a:lnTo>
+                  <a:lnTo>
+                    <a:pt x="1907513" y="1746185"/>
+                  </a:lnTo>
+                  <a:lnTo>
+                    <a:pt x="1983981" y="1791031"/>
+                  </a:lnTo>
+                  <a:lnTo>
+                    <a:pt x="2060450" y="1834454"/>
+                  </a:lnTo>
+                  <a:lnTo>
+                    <a:pt x="2136918" y="1876499"/>
+                  </a:lnTo>
+                  <a:lnTo>
+                    <a:pt x="2213386" y="1917209"/>
+                  </a:lnTo>
+                  <a:lnTo>
+                    <a:pt x="2289855" y="1956627"/>
+                  </a:lnTo>
+                  <a:lnTo>
+                    <a:pt x="2366323" y="1994794"/>
+                  </a:lnTo>
+                  <a:lnTo>
+                    <a:pt x="2442792" y="2031750"/>
+                  </a:lnTo>
+                  <a:lnTo>
+                    <a:pt x="2519260" y="2067532"/>
+                  </a:lnTo>
+                  <a:lnTo>
+                    <a:pt x="2595729" y="2102179"/>
+                  </a:lnTo>
+                  <a:lnTo>
+                    <a:pt x="2672197" y="2135726"/>
+                  </a:lnTo>
+                  <a:lnTo>
+                    <a:pt x="2748666" y="2168208"/>
+                  </a:lnTo>
+                  <a:lnTo>
+                    <a:pt x="2825134" y="2199659"/>
+                  </a:lnTo>
+                  <a:lnTo>
+                    <a:pt x="2901602" y="2230112"/>
+                  </a:lnTo>
+                  <a:lnTo>
+                    <a:pt x="2978071" y="2259598"/>
+                  </a:lnTo>
+                  <a:lnTo>
+                    <a:pt x="3054539" y="2288149"/>
+                  </a:lnTo>
+                  <a:lnTo>
+                    <a:pt x="3131008" y="2315793"/>
+                  </a:lnTo>
+                  <a:lnTo>
+                    <a:pt x="3207476" y="2342560"/>
+                  </a:lnTo>
+                  <a:lnTo>
+                    <a:pt x="3283945" y="2368477"/>
+                  </a:lnTo>
+                  <a:lnTo>
+                    <a:pt x="3360413" y="2384125"/>
+                  </a:lnTo>
+                  <a:lnTo>
+                    <a:pt x="3436881" y="2380156"/>
+                  </a:lnTo>
+                  <a:lnTo>
+                    <a:pt x="3513350" y="2376165"/>
+                  </a:lnTo>
+                  <a:lnTo>
+                    <a:pt x="3589818" y="2372155"/>
+                  </a:lnTo>
+                  <a:lnTo>
+                    <a:pt x="3666287" y="2368124"/>
+                  </a:lnTo>
+                  <a:lnTo>
+                    <a:pt x="3742755" y="2364072"/>
+                  </a:lnTo>
+                  <a:lnTo>
+                    <a:pt x="3819224" y="2360000"/>
+                  </a:lnTo>
+                  <a:lnTo>
+                    <a:pt x="3895692" y="2355906"/>
+                  </a:lnTo>
+                  <a:lnTo>
+                    <a:pt x="3972160" y="2351792"/>
+                  </a:lnTo>
+                  <a:lnTo>
+                    <a:pt x="4048629" y="2347656"/>
+                  </a:lnTo>
+                  <a:lnTo>
+                    <a:pt x="4125097" y="2343500"/>
+                  </a:lnTo>
+                  <a:lnTo>
+                    <a:pt x="4201566" y="2339322"/>
+                  </a:lnTo>
+                  <a:lnTo>
+                    <a:pt x="4278034" y="2335123"/>
+                  </a:lnTo>
+                  <a:lnTo>
+                    <a:pt x="4354503" y="2330902"/>
+                  </a:lnTo>
+                  <a:lnTo>
+                    <a:pt x="4430971" y="2326659"/>
+                  </a:lnTo>
+                  <a:lnTo>
+                    <a:pt x="4507439" y="2322395"/>
+                  </a:lnTo>
+                  <a:lnTo>
+                    <a:pt x="4583908" y="2318109"/>
+                  </a:lnTo>
+                  <a:lnTo>
+                    <a:pt x="4660376" y="2313801"/>
+                  </a:lnTo>
+                  <a:lnTo>
+                    <a:pt x="4736845" y="2309471"/>
+                  </a:lnTo>
+                  <a:lnTo>
+                    <a:pt x="4813313" y="2305119"/>
+                  </a:lnTo>
+                  <a:lnTo>
+                    <a:pt x="4889782" y="2300745"/>
+                  </a:lnTo>
+                  <a:lnTo>
+                    <a:pt x="4966250" y="2296348"/>
+                  </a:lnTo>
+                  <a:lnTo>
+                    <a:pt x="5042719" y="2291928"/>
+                  </a:lnTo>
+                  <a:lnTo>
+                    <a:pt x="5119187" y="2287486"/>
+                  </a:lnTo>
+                  <a:lnTo>
+                    <a:pt x="5195655" y="2283021"/>
+                  </a:lnTo>
+                  <a:lnTo>
+                    <a:pt x="5272124" y="2278534"/>
+                  </a:lnTo>
+                  <a:lnTo>
+                    <a:pt x="5348592" y="2274023"/>
+                  </a:lnTo>
+                  <a:lnTo>
+                    <a:pt x="5425061" y="2269489"/>
+                  </a:lnTo>
+                  <a:lnTo>
+                    <a:pt x="5501529" y="2264932"/>
+                  </a:lnTo>
+                  <a:lnTo>
+                    <a:pt x="5577998" y="2260352"/>
+                  </a:lnTo>
+                  <a:lnTo>
+                    <a:pt x="5654466" y="2255748"/>
+                  </a:lnTo>
+                  <a:lnTo>
+                    <a:pt x="5730934" y="2251121"/>
+                  </a:lnTo>
+                  <a:lnTo>
+                    <a:pt x="5807403" y="2246470"/>
+                  </a:lnTo>
+                  <a:lnTo>
+                    <a:pt x="5883871" y="2241795"/>
+                  </a:lnTo>
+                  <a:lnTo>
+                    <a:pt x="5960340" y="2237096"/>
+                  </a:lnTo>
+                  <a:lnTo>
+                    <a:pt x="6036808" y="2232373"/>
+                  </a:lnTo>
+                  <a:lnTo>
+                    <a:pt x="6113277" y="2227626"/>
+                  </a:lnTo>
+                  <a:lnTo>
+                    <a:pt x="6189745" y="2222854"/>
+                  </a:lnTo>
+                  <a:lnTo>
+                    <a:pt x="6266213" y="2218058"/>
+                  </a:lnTo>
+                  <a:lnTo>
+                    <a:pt x="6342682" y="2213238"/>
+                  </a:lnTo>
+                  <a:lnTo>
+                    <a:pt x="6419150" y="2208393"/>
+                  </a:lnTo>
+                  <a:lnTo>
+                    <a:pt x="6495619" y="2203523"/>
+                  </a:lnTo>
+                  <a:lnTo>
+                    <a:pt x="6572087" y="2198628"/>
+                  </a:lnTo>
+                  <a:lnTo>
+                    <a:pt x="6648556" y="2193708"/>
+                  </a:lnTo>
+                  <a:lnTo>
+                    <a:pt x="6725024" y="2188763"/>
+                  </a:lnTo>
+                  <a:lnTo>
+                    <a:pt x="6801492" y="2183792"/>
+                  </a:lnTo>
+                  <a:lnTo>
+                    <a:pt x="6877961" y="2178796"/>
+                  </a:lnTo>
+                  <a:lnTo>
+                    <a:pt x="6954429" y="2173774"/>
+                  </a:lnTo>
+                  <a:lnTo>
+                    <a:pt x="7030898" y="2168727"/>
+                  </a:lnTo>
+                  <a:lnTo>
+                    <a:pt x="7107366" y="2163654"/>
+                  </a:lnTo>
+                  <a:lnTo>
+                    <a:pt x="7183835" y="2158555"/>
+                  </a:lnTo>
+                  <a:lnTo>
+                    <a:pt x="7260303" y="2153430"/>
+                  </a:lnTo>
+                  <a:lnTo>
+                    <a:pt x="7260303" y="3011339"/>
+                  </a:lnTo>
+                  <a:lnTo>
+                    <a:pt x="7183835" y="3006496"/>
+                  </a:lnTo>
+                  <a:lnTo>
+                    <a:pt x="7107366" y="3001494"/>
+                  </a:lnTo>
+                  <a:lnTo>
+                    <a:pt x="7030898" y="2996327"/>
+                  </a:lnTo>
+                  <a:lnTo>
+                    <a:pt x="6954429" y="2990992"/>
+                  </a:lnTo>
+                  <a:lnTo>
+                    <a:pt x="6877961" y="2985481"/>
+                  </a:lnTo>
+                  <a:lnTo>
+                    <a:pt x="6801492" y="2979790"/>
+                  </a:lnTo>
+                  <a:lnTo>
+                    <a:pt x="6725024" y="2973912"/>
+                  </a:lnTo>
+                  <a:lnTo>
+                    <a:pt x="6648556" y="2967842"/>
+                  </a:lnTo>
+                  <a:lnTo>
+                    <a:pt x="6572087" y="2961573"/>
+                  </a:lnTo>
+                  <a:lnTo>
+                    <a:pt x="6495619" y="2955098"/>
+                  </a:lnTo>
+                  <a:lnTo>
+                    <a:pt x="6419150" y="2948410"/>
+                  </a:lnTo>
+                  <a:lnTo>
+                    <a:pt x="6342682" y="2941504"/>
+                  </a:lnTo>
+                  <a:lnTo>
+                    <a:pt x="6266213" y="2934371"/>
+                  </a:lnTo>
+                  <a:lnTo>
+                    <a:pt x="6189745" y="2927005"/>
+                  </a:lnTo>
+                  <a:lnTo>
+                    <a:pt x="6113277" y="2919397"/>
+                  </a:lnTo>
+                  <a:lnTo>
+                    <a:pt x="6036808" y="2911539"/>
+                  </a:lnTo>
+                  <a:lnTo>
+                    <a:pt x="5960340" y="2903424"/>
+                  </a:lnTo>
+                  <a:lnTo>
+                    <a:pt x="5883871" y="2895043"/>
+                  </a:lnTo>
+                  <a:lnTo>
+                    <a:pt x="5807403" y="2886387"/>
+                  </a:lnTo>
+                  <a:lnTo>
+                    <a:pt x="5730934" y="2877448"/>
+                  </a:lnTo>
+                  <a:lnTo>
+                    <a:pt x="5654466" y="2868215"/>
+                  </a:lnTo>
+                  <a:lnTo>
+                    <a:pt x="5577998" y="2858680"/>
+                  </a:lnTo>
+                  <a:lnTo>
+                    <a:pt x="5501529" y="2848832"/>
+                  </a:lnTo>
+                  <a:lnTo>
+                    <a:pt x="5425061" y="2838661"/>
+                  </a:lnTo>
+                  <a:lnTo>
+                    <a:pt x="5348592" y="2828157"/>
+                  </a:lnTo>
+                  <a:lnTo>
+                    <a:pt x="5272124" y="2817309"/>
+                  </a:lnTo>
+                  <a:lnTo>
+                    <a:pt x="5195655" y="2806105"/>
+                  </a:lnTo>
+                  <a:lnTo>
+                    <a:pt x="5119187" y="2794534"/>
+                  </a:lnTo>
+                  <a:lnTo>
+                    <a:pt x="5042719" y="2782583"/>
+                  </a:lnTo>
+                  <a:lnTo>
+                    <a:pt x="4966250" y="2770241"/>
+                  </a:lnTo>
+                  <a:lnTo>
+                    <a:pt x="4889782" y="2757494"/>
+                  </a:lnTo>
+                  <a:lnTo>
+                    <a:pt x="4813313" y="2744329"/>
+                  </a:lnTo>
+                  <a:lnTo>
+                    <a:pt x="4736845" y="2730733"/>
+                  </a:lnTo>
+                  <a:lnTo>
+                    <a:pt x="4660376" y="2716691"/>
+                  </a:lnTo>
+                  <a:lnTo>
+                    <a:pt x="4583908" y="2702188"/>
+                  </a:lnTo>
+                  <a:lnTo>
+                    <a:pt x="4507439" y="2687210"/>
+                  </a:lnTo>
+                  <a:lnTo>
+                    <a:pt x="4430971" y="2671742"/>
+                  </a:lnTo>
+                  <a:lnTo>
+                    <a:pt x="4354503" y="2655766"/>
+                  </a:lnTo>
+                  <a:lnTo>
+                    <a:pt x="4278034" y="2639266"/>
+                  </a:lnTo>
+                  <a:lnTo>
+                    <a:pt x="4201566" y="2622226"/>
+                  </a:lnTo>
+                  <a:lnTo>
+                    <a:pt x="4125097" y="2604627"/>
+                  </a:lnTo>
+                  <a:lnTo>
+                    <a:pt x="4048629" y="2586451"/>
+                  </a:lnTo>
+                  <a:lnTo>
+                    <a:pt x="3972160" y="2567679"/>
+                  </a:lnTo>
+                  <a:lnTo>
+                    <a:pt x="3895692" y="2548292"/>
+                  </a:lnTo>
+                  <a:lnTo>
+                    <a:pt x="3819224" y="2528269"/>
+                  </a:lnTo>
+                  <a:lnTo>
+                    <a:pt x="3742755" y="2507590"/>
+                  </a:lnTo>
+                  <a:lnTo>
+                    <a:pt x="3666287" y="2486233"/>
+                  </a:lnTo>
+                  <a:lnTo>
+                    <a:pt x="3589818" y="2464176"/>
+                  </a:lnTo>
+                  <a:lnTo>
+                    <a:pt x="3513350" y="2441396"/>
+                  </a:lnTo>
+                  <a:lnTo>
+                    <a:pt x="3436881" y="2417869"/>
+                  </a:lnTo>
+                  <a:lnTo>
+                    <a:pt x="3360413" y="2393571"/>
+                  </a:lnTo>
+                  <a:lnTo>
+                    <a:pt x="3283945" y="2388075"/>
+                  </a:lnTo>
+                  <a:lnTo>
+                    <a:pt x="3207476" y="2392004"/>
+                  </a:lnTo>
+                  <a:lnTo>
+                    <a:pt x="3131008" y="2395914"/>
+                  </a:lnTo>
+                  <a:lnTo>
+                    <a:pt x="3054539" y="2399803"/>
+                  </a:lnTo>
+                  <a:lnTo>
+                    <a:pt x="2978071" y="2403673"/>
+                  </a:lnTo>
+                  <a:lnTo>
+                    <a:pt x="2901602" y="2407523"/>
+                  </a:lnTo>
+                  <a:lnTo>
+                    <a:pt x="2825134" y="2411353"/>
+                  </a:lnTo>
+                  <a:lnTo>
+                    <a:pt x="2748666" y="2415164"/>
+                  </a:lnTo>
+                  <a:lnTo>
+                    <a:pt x="2672197" y="2418955"/>
+                  </a:lnTo>
+                  <a:lnTo>
+                    <a:pt x="2595729" y="2422727"/>
+                  </a:lnTo>
+                  <a:lnTo>
+                    <a:pt x="2519260" y="2426480"/>
+                  </a:lnTo>
+                  <a:lnTo>
+                    <a:pt x="2442792" y="2430214"/>
+                  </a:lnTo>
+                  <a:lnTo>
+                    <a:pt x="2366323" y="2433928"/>
+                  </a:lnTo>
+                  <a:lnTo>
+                    <a:pt x="2289855" y="2437624"/>
+                  </a:lnTo>
+                  <a:lnTo>
+                    <a:pt x="2213386" y="2441301"/>
+                  </a:lnTo>
+                  <a:lnTo>
+                    <a:pt x="2136918" y="2444959"/>
+                  </a:lnTo>
+                  <a:lnTo>
+                    <a:pt x="2060450" y="2448599"/>
+                  </a:lnTo>
+                  <a:lnTo>
+                    <a:pt x="1983981" y="2452220"/>
+                  </a:lnTo>
+                  <a:lnTo>
+                    <a:pt x="1907513" y="2455822"/>
+                  </a:lnTo>
+                  <a:lnTo>
+                    <a:pt x="1831044" y="2459406"/>
+                  </a:lnTo>
+                  <a:lnTo>
+                    <a:pt x="1754576" y="2462972"/>
+                  </a:lnTo>
+                  <a:lnTo>
+                    <a:pt x="1678107" y="2466520"/>
+                  </a:lnTo>
+                  <a:lnTo>
+                    <a:pt x="1601639" y="2470050"/>
+                  </a:lnTo>
+                  <a:lnTo>
+                    <a:pt x="1525171" y="2473561"/>
+                  </a:lnTo>
+                  <a:lnTo>
+                    <a:pt x="1448702" y="2477055"/>
+                  </a:lnTo>
+                  <a:lnTo>
+                    <a:pt x="1372234" y="2480531"/>
+                  </a:lnTo>
+                  <a:lnTo>
+                    <a:pt x="1295765" y="2483989"/>
+                  </a:lnTo>
+                  <a:lnTo>
+                    <a:pt x="1219297" y="2487430"/>
+                  </a:lnTo>
+                  <a:lnTo>
+                    <a:pt x="1142828" y="2490853"/>
+                  </a:lnTo>
+                  <a:lnTo>
+                    <a:pt x="1066360" y="2494259"/>
+                  </a:lnTo>
+                  <a:lnTo>
+                    <a:pt x="989892" y="2497647"/>
+                  </a:lnTo>
+                  <a:lnTo>
+                    <a:pt x="913423" y="2501018"/>
+                  </a:lnTo>
+                  <a:lnTo>
+                    <a:pt x="836955" y="2504372"/>
+                  </a:lnTo>
+                  <a:lnTo>
+                    <a:pt x="760486" y="2507708"/>
+                  </a:lnTo>
+                  <a:lnTo>
+                    <a:pt x="684018" y="2511028"/>
+                  </a:lnTo>
+                  <a:lnTo>
+                    <a:pt x="607549" y="2514331"/>
+                  </a:lnTo>
+                  <a:lnTo>
+                    <a:pt x="531081" y="2517617"/>
+                  </a:lnTo>
+                  <a:lnTo>
+                    <a:pt x="454613" y="2520886"/>
+                  </a:lnTo>
+                  <a:lnTo>
+                    <a:pt x="378144" y="2524139"/>
+                  </a:lnTo>
+                  <a:lnTo>
+                    <a:pt x="301676" y="2527375"/>
+                  </a:lnTo>
+                  <a:lnTo>
+                    <a:pt x="225207" y="2530594"/>
+                  </a:lnTo>
+                  <a:lnTo>
+                    <a:pt x="148739" y="2533797"/>
+                  </a:lnTo>
+                  <a:lnTo>
+                    <a:pt x="72270" y="2536984"/>
+                  </a:lnTo>
+                  <a:lnTo>
+                    <a:pt x="0" y="2539980"/>
                   </a:lnTo>
                   <a:close/>
                 </a:path>
@@ -3609,300 +3609,300 @@
           </p:nvSpPr>
           <p:spPr>
             <a:xfrm>
-              <a:off x="817517" y="2170331"/>
-              <a:ext cx="7370972" cy="2556062"/>
+              <a:off x="915645" y="2299484"/>
+              <a:ext cx="7260303" cy="2384125"/>
             </a:xfrm>
             <a:custGeom>
               <a:avLst/>
               <a:pathLst>
-                <a:path w="7370972" h="2556062">
+                <a:path w="7260303" h="2384125">
                   <a:moveTo>
                     <a:pt x="0" y="0"/>
                   </a:moveTo>
                   <a:lnTo>
-                    <a:pt x="73372" y="101778"/>
-                  </a:lnTo>
-                  <a:lnTo>
-                    <a:pt x="151006" y="206050"/>
-                  </a:lnTo>
-                  <a:lnTo>
-                    <a:pt x="228640" y="307013"/>
-                  </a:lnTo>
-                  <a:lnTo>
-                    <a:pt x="306274" y="404770"/>
-                  </a:lnTo>
-                  <a:lnTo>
-                    <a:pt x="383908" y="499425"/>
-                  </a:lnTo>
-                  <a:lnTo>
-                    <a:pt x="461542" y="591076"/>
-                  </a:lnTo>
-                  <a:lnTo>
-                    <a:pt x="539176" y="679817"/>
-                  </a:lnTo>
-                  <a:lnTo>
-                    <a:pt x="616810" y="765742"/>
-                  </a:lnTo>
-                  <a:lnTo>
-                    <a:pt x="694444" y="848940"/>
-                  </a:lnTo>
-                  <a:lnTo>
-                    <a:pt x="772078" y="929496"/>
-                  </a:lnTo>
-                  <a:lnTo>
-                    <a:pt x="849712" y="1007496"/>
-                  </a:lnTo>
-                  <a:lnTo>
-                    <a:pt x="927346" y="1083020"/>
-                  </a:lnTo>
-                  <a:lnTo>
-                    <a:pt x="1004981" y="1156147"/>
-                  </a:lnTo>
-                  <a:lnTo>
-                    <a:pt x="1082615" y="1226953"/>
-                  </a:lnTo>
-                  <a:lnTo>
-                    <a:pt x="1160249" y="1295511"/>
-                  </a:lnTo>
-                  <a:lnTo>
-                    <a:pt x="1237883" y="1361894"/>
-                  </a:lnTo>
-                  <a:lnTo>
-                    <a:pt x="1315517" y="1426169"/>
-                  </a:lnTo>
-                  <a:lnTo>
-                    <a:pt x="1393151" y="1488404"/>
-                  </a:lnTo>
-                  <a:lnTo>
-                    <a:pt x="1470785" y="1548664"/>
-                  </a:lnTo>
-                  <a:lnTo>
-                    <a:pt x="1548419" y="1607011"/>
-                  </a:lnTo>
-                  <a:lnTo>
-                    <a:pt x="1626053" y="1663506"/>
-                  </a:lnTo>
-                  <a:lnTo>
-                    <a:pt x="1703687" y="1718208"/>
-                  </a:lnTo>
-                  <a:lnTo>
-                    <a:pt x="1781321" y="1771174"/>
-                  </a:lnTo>
-                  <a:lnTo>
-                    <a:pt x="1858955" y="1822459"/>
-                  </a:lnTo>
-                  <a:lnTo>
-                    <a:pt x="1936589" y="1872115"/>
-                  </a:lnTo>
-                  <a:lnTo>
-                    <a:pt x="2014223" y="1920196"/>
-                  </a:lnTo>
-                  <a:lnTo>
-                    <a:pt x="2091857" y="1966750"/>
-                  </a:lnTo>
-                  <a:lnTo>
-                    <a:pt x="2169491" y="2011827"/>
-                  </a:lnTo>
-                  <a:lnTo>
-                    <a:pt x="2247125" y="2055473"/>
-                  </a:lnTo>
-                  <a:lnTo>
-                    <a:pt x="2324759" y="2097734"/>
-                  </a:lnTo>
-                  <a:lnTo>
-                    <a:pt x="2402393" y="2138654"/>
-                  </a:lnTo>
-                  <a:lnTo>
-                    <a:pt x="2480027" y="2178274"/>
-                  </a:lnTo>
-                  <a:lnTo>
-                    <a:pt x="2557661" y="2216637"/>
-                  </a:lnTo>
-                  <a:lnTo>
-                    <a:pt x="2635295" y="2253782"/>
-                  </a:lnTo>
-                  <a:lnTo>
-                    <a:pt x="2712930" y="2289749"/>
-                  </a:lnTo>
-                  <a:lnTo>
-                    <a:pt x="2790564" y="2324573"/>
-                  </a:lnTo>
-                  <a:lnTo>
-                    <a:pt x="2868198" y="2358293"/>
-                  </a:lnTo>
-                  <a:lnTo>
-                    <a:pt x="2945832" y="2390942"/>
-                  </a:lnTo>
-                  <a:lnTo>
-                    <a:pt x="3023466" y="2422555"/>
-                  </a:lnTo>
-                  <a:lnTo>
-                    <a:pt x="3101100" y="2453164"/>
-                  </a:lnTo>
-                  <a:lnTo>
-                    <a:pt x="3178734" y="2482802"/>
-                  </a:lnTo>
-                  <a:lnTo>
-                    <a:pt x="3256368" y="2511499"/>
-                  </a:lnTo>
-                  <a:lnTo>
-                    <a:pt x="3334002" y="2539285"/>
-                  </a:lnTo>
-                  <a:lnTo>
-                    <a:pt x="3411636" y="2556062"/>
-                  </a:lnTo>
-                  <a:lnTo>
-                    <a:pt x="3489270" y="2551806"/>
-                  </a:lnTo>
-                  <a:lnTo>
-                    <a:pt x="3566904" y="2547528"/>
-                  </a:lnTo>
-                  <a:lnTo>
-                    <a:pt x="3644538" y="2543229"/>
-                  </a:lnTo>
-                  <a:lnTo>
-                    <a:pt x="3722172" y="2538907"/>
-                  </a:lnTo>
-                  <a:lnTo>
-                    <a:pt x="3799806" y="2534563"/>
-                  </a:lnTo>
-                  <a:lnTo>
-                    <a:pt x="3877440" y="2530197"/>
-                  </a:lnTo>
-                  <a:lnTo>
-                    <a:pt x="3955074" y="2525808"/>
-                  </a:lnTo>
-                  <a:lnTo>
-                    <a:pt x="4032708" y="2521397"/>
-                  </a:lnTo>
-                  <a:lnTo>
-                    <a:pt x="4110342" y="2516963"/>
-                  </a:lnTo>
-                  <a:lnTo>
-                    <a:pt x="4187976" y="2512507"/>
-                  </a:lnTo>
-                  <a:lnTo>
-                    <a:pt x="4265610" y="2508028"/>
-                  </a:lnTo>
-                  <a:lnTo>
-                    <a:pt x="4343244" y="2503526"/>
-                  </a:lnTo>
-                  <a:lnTo>
-                    <a:pt x="4420879" y="2499000"/>
-                  </a:lnTo>
-                  <a:lnTo>
-                    <a:pt x="4498513" y="2494452"/>
-                  </a:lnTo>
-                  <a:lnTo>
-                    <a:pt x="4576147" y="2489880"/>
-                  </a:lnTo>
-                  <a:lnTo>
-                    <a:pt x="4653781" y="2485285"/>
-                  </a:lnTo>
-                  <a:lnTo>
-                    <a:pt x="4731415" y="2480667"/>
-                  </a:lnTo>
-                  <a:lnTo>
-                    <a:pt x="4809049" y="2476024"/>
-                  </a:lnTo>
-                  <a:lnTo>
-                    <a:pt x="4886683" y="2471358"/>
-                  </a:lnTo>
-                  <a:lnTo>
-                    <a:pt x="4964317" y="2466668"/>
-                  </a:lnTo>
-                  <a:lnTo>
-                    <a:pt x="5041951" y="2461954"/>
-                  </a:lnTo>
-                  <a:lnTo>
-                    <a:pt x="5119585" y="2457216"/>
-                  </a:lnTo>
-                  <a:lnTo>
-                    <a:pt x="5197219" y="2452454"/>
-                  </a:lnTo>
-                  <a:lnTo>
-                    <a:pt x="5274853" y="2447667"/>
-                  </a:lnTo>
-                  <a:lnTo>
-                    <a:pt x="5352487" y="2442856"/>
-                  </a:lnTo>
-                  <a:lnTo>
-                    <a:pt x="5430121" y="2438020"/>
-                  </a:lnTo>
-                  <a:lnTo>
-                    <a:pt x="5507755" y="2433159"/>
-                  </a:lnTo>
-                  <a:lnTo>
-                    <a:pt x="5585389" y="2428273"/>
-                  </a:lnTo>
-                  <a:lnTo>
-                    <a:pt x="5663023" y="2423363"/>
-                  </a:lnTo>
-                  <a:lnTo>
-                    <a:pt x="5740657" y="2418427"/>
-                  </a:lnTo>
-                  <a:lnTo>
-                    <a:pt x="5818291" y="2413466"/>
-                  </a:lnTo>
-                  <a:lnTo>
-                    <a:pt x="5895925" y="2408479"/>
-                  </a:lnTo>
-                  <a:lnTo>
-                    <a:pt x="5973559" y="2403467"/>
-                  </a:lnTo>
-                  <a:lnTo>
-                    <a:pt x="6051193" y="2398429"/>
-                  </a:lnTo>
-                  <a:lnTo>
-                    <a:pt x="6128827" y="2393366"/>
-                  </a:lnTo>
-                  <a:lnTo>
-                    <a:pt x="6206462" y="2388276"/>
-                  </a:lnTo>
-                  <a:lnTo>
-                    <a:pt x="6284096" y="2383161"/>
-                  </a:lnTo>
-                  <a:lnTo>
-                    <a:pt x="6361730" y="2378019"/>
-                  </a:lnTo>
-                  <a:lnTo>
-                    <a:pt x="6439364" y="2372851"/>
-                  </a:lnTo>
-                  <a:lnTo>
-                    <a:pt x="6516998" y="2367656"/>
-                  </a:lnTo>
-                  <a:lnTo>
-                    <a:pt x="6594632" y="2362435"/>
-                  </a:lnTo>
-                  <a:lnTo>
-                    <a:pt x="6672266" y="2357187"/>
-                  </a:lnTo>
-                  <a:lnTo>
-                    <a:pt x="6749900" y="2351912"/>
-                  </a:lnTo>
-                  <a:lnTo>
-                    <a:pt x="6827534" y="2346610"/>
-                  </a:lnTo>
-                  <a:lnTo>
-                    <a:pt x="6905168" y="2341281"/>
-                  </a:lnTo>
-                  <a:lnTo>
-                    <a:pt x="6982802" y="2335925"/>
-                  </a:lnTo>
-                  <a:lnTo>
-                    <a:pt x="7060436" y="2330541"/>
-                  </a:lnTo>
-                  <a:lnTo>
-                    <a:pt x="7138070" y="2325130"/>
-                  </a:lnTo>
-                  <a:lnTo>
-                    <a:pt x="7215704" y="2319691"/>
-                  </a:lnTo>
-                  <a:lnTo>
-                    <a:pt x="7293338" y="2314224"/>
-                  </a:lnTo>
-                  <a:lnTo>
-                    <a:pt x="7370972" y="2308729"/>
+                    <a:pt x="72270" y="94932"/>
+                  </a:lnTo>
+                  <a:lnTo>
+                    <a:pt x="148739" y="192190"/>
+                  </a:lnTo>
+                  <a:lnTo>
+                    <a:pt x="225207" y="286361"/>
+                  </a:lnTo>
+                  <a:lnTo>
+                    <a:pt x="301676" y="377543"/>
+                  </a:lnTo>
+                  <a:lnTo>
+                    <a:pt x="378144" y="465831"/>
+                  </a:lnTo>
+                  <a:lnTo>
+                    <a:pt x="454613" y="551316"/>
+                  </a:lnTo>
+                  <a:lnTo>
+                    <a:pt x="531081" y="634089"/>
+                  </a:lnTo>
+                  <a:lnTo>
+                    <a:pt x="607549" y="714233"/>
+                  </a:lnTo>
+                  <a:lnTo>
+                    <a:pt x="684018" y="791835"/>
+                  </a:lnTo>
+                  <a:lnTo>
+                    <a:pt x="760486" y="866973"/>
+                  </a:lnTo>
+                  <a:lnTo>
+                    <a:pt x="836955" y="939726"/>
+                  </a:lnTo>
+                  <a:lnTo>
+                    <a:pt x="913423" y="1010169"/>
+                  </a:lnTo>
+                  <a:lnTo>
+                    <a:pt x="989892" y="1078377"/>
+                  </a:lnTo>
+                  <a:lnTo>
+                    <a:pt x="1066360" y="1144420"/>
+                  </a:lnTo>
+                  <a:lnTo>
+                    <a:pt x="1142828" y="1208367"/>
+                  </a:lnTo>
+                  <a:lnTo>
+                    <a:pt x="1219297" y="1270284"/>
+                  </a:lnTo>
+                  <a:lnTo>
+                    <a:pt x="1295765" y="1330236"/>
+                  </a:lnTo>
+                  <a:lnTo>
+                    <a:pt x="1372234" y="1388285"/>
+                  </a:lnTo>
+                  <a:lnTo>
+                    <a:pt x="1448702" y="1444491"/>
+                  </a:lnTo>
+                  <a:lnTo>
+                    <a:pt x="1525171" y="1498913"/>
+                  </a:lnTo>
+                  <a:lnTo>
+                    <a:pt x="1601639" y="1551608"/>
+                  </a:lnTo>
+                  <a:lnTo>
+                    <a:pt x="1678107" y="1602631"/>
+                  </a:lnTo>
+                  <a:lnTo>
+                    <a:pt x="1754576" y="1652034"/>
+                  </a:lnTo>
+                  <a:lnTo>
+                    <a:pt x="1831044" y="1699868"/>
+                  </a:lnTo>
+                  <a:lnTo>
+                    <a:pt x="1907513" y="1746185"/>
+                  </a:lnTo>
+                  <a:lnTo>
+                    <a:pt x="1983981" y="1791031"/>
+                  </a:lnTo>
+                  <a:lnTo>
+                    <a:pt x="2060450" y="1834454"/>
+                  </a:lnTo>
+                  <a:lnTo>
+                    <a:pt x="2136918" y="1876499"/>
+                  </a:lnTo>
+                  <a:lnTo>
+                    <a:pt x="2213386" y="1917209"/>
+                  </a:lnTo>
+                  <a:lnTo>
+                    <a:pt x="2289855" y="1956627"/>
+                  </a:lnTo>
+                  <a:lnTo>
+                    <a:pt x="2366323" y="1994794"/>
+                  </a:lnTo>
+                  <a:lnTo>
+                    <a:pt x="2442792" y="2031750"/>
+                  </a:lnTo>
+                  <a:lnTo>
+                    <a:pt x="2519260" y="2067532"/>
+                  </a:lnTo>
+                  <a:lnTo>
+                    <a:pt x="2595729" y="2102179"/>
+                  </a:lnTo>
+                  <a:lnTo>
+                    <a:pt x="2672197" y="2135726"/>
+                  </a:lnTo>
+                  <a:lnTo>
+                    <a:pt x="2748666" y="2168208"/>
+                  </a:lnTo>
+                  <a:lnTo>
+                    <a:pt x="2825134" y="2199659"/>
+                  </a:lnTo>
+                  <a:lnTo>
+                    <a:pt x="2901602" y="2230112"/>
+                  </a:lnTo>
+                  <a:lnTo>
+                    <a:pt x="2978071" y="2259598"/>
+                  </a:lnTo>
+                  <a:lnTo>
+                    <a:pt x="3054539" y="2288149"/>
+                  </a:lnTo>
+                  <a:lnTo>
+                    <a:pt x="3131008" y="2315793"/>
+                  </a:lnTo>
+                  <a:lnTo>
+                    <a:pt x="3207476" y="2342560"/>
+                  </a:lnTo>
+                  <a:lnTo>
+                    <a:pt x="3283945" y="2368477"/>
+                  </a:lnTo>
+                  <a:lnTo>
+                    <a:pt x="3360413" y="2384125"/>
+                  </a:lnTo>
+                  <a:lnTo>
+                    <a:pt x="3436881" y="2380156"/>
+                  </a:lnTo>
+                  <a:lnTo>
+                    <a:pt x="3513350" y="2376165"/>
+                  </a:lnTo>
+                  <a:lnTo>
+                    <a:pt x="3589818" y="2372155"/>
+                  </a:lnTo>
+                  <a:lnTo>
+                    <a:pt x="3666287" y="2368124"/>
+                  </a:lnTo>
+                  <a:lnTo>
+                    <a:pt x="3742755" y="2364072"/>
+                  </a:lnTo>
+                  <a:lnTo>
+                    <a:pt x="3819224" y="2360000"/>
+                  </a:lnTo>
+                  <a:lnTo>
+                    <a:pt x="3895692" y="2355906"/>
+                  </a:lnTo>
+                  <a:lnTo>
+                    <a:pt x="3972160" y="2351792"/>
+                  </a:lnTo>
+                  <a:lnTo>
+                    <a:pt x="4048629" y="2347656"/>
+                  </a:lnTo>
+                  <a:lnTo>
+                    <a:pt x="4125097" y="2343500"/>
+                  </a:lnTo>
+                  <a:lnTo>
+                    <a:pt x="4201566" y="2339322"/>
+                  </a:lnTo>
+                  <a:lnTo>
+                    <a:pt x="4278034" y="2335123"/>
+                  </a:lnTo>
+                  <a:lnTo>
+                    <a:pt x="4354503" y="2330902"/>
+                  </a:lnTo>
+                  <a:lnTo>
+                    <a:pt x="4430971" y="2326659"/>
+                  </a:lnTo>
+                  <a:lnTo>
+                    <a:pt x="4507439" y="2322395"/>
+                  </a:lnTo>
+                  <a:lnTo>
+                    <a:pt x="4583908" y="2318109"/>
+                  </a:lnTo>
+                  <a:lnTo>
+                    <a:pt x="4660376" y="2313801"/>
+                  </a:lnTo>
+                  <a:lnTo>
+                    <a:pt x="4736845" y="2309471"/>
+                  </a:lnTo>
+                  <a:lnTo>
+                    <a:pt x="4813313" y="2305119"/>
+                  </a:lnTo>
+                  <a:lnTo>
+                    <a:pt x="4889782" y="2300745"/>
+                  </a:lnTo>
+                  <a:lnTo>
+                    <a:pt x="4966250" y="2296348"/>
+                  </a:lnTo>
+                  <a:lnTo>
+                    <a:pt x="5042719" y="2291928"/>
+                  </a:lnTo>
+                  <a:lnTo>
+                    <a:pt x="5119187" y="2287486"/>
+                  </a:lnTo>
+                  <a:lnTo>
+                    <a:pt x="5195655" y="2283021"/>
+                  </a:lnTo>
+                  <a:lnTo>
+                    <a:pt x="5272124" y="2278534"/>
+                  </a:lnTo>
+                  <a:lnTo>
+                    <a:pt x="5348592" y="2274023"/>
+                  </a:lnTo>
+                  <a:lnTo>
+                    <a:pt x="5425061" y="2269489"/>
+                  </a:lnTo>
+                  <a:lnTo>
+                    <a:pt x="5501529" y="2264932"/>
+                  </a:lnTo>
+                  <a:lnTo>
+                    <a:pt x="5577998" y="2260352"/>
+                  </a:lnTo>
+                  <a:lnTo>
+                    <a:pt x="5654466" y="2255748"/>
+                  </a:lnTo>
+                  <a:lnTo>
+                    <a:pt x="5730934" y="2251121"/>
+                  </a:lnTo>
+                  <a:lnTo>
+                    <a:pt x="5807403" y="2246470"/>
+                  </a:lnTo>
+                  <a:lnTo>
+                    <a:pt x="5883871" y="2241795"/>
+                  </a:lnTo>
+                  <a:lnTo>
+                    <a:pt x="5960340" y="2237096"/>
+                  </a:lnTo>
+                  <a:lnTo>
+                    <a:pt x="6036808" y="2232373"/>
+                  </a:lnTo>
+                  <a:lnTo>
+                    <a:pt x="6113277" y="2227626"/>
+                  </a:lnTo>
+                  <a:lnTo>
+                    <a:pt x="6189745" y="2222854"/>
+                  </a:lnTo>
+                  <a:lnTo>
+                    <a:pt x="6266213" y="2218058"/>
+                  </a:lnTo>
+                  <a:lnTo>
+                    <a:pt x="6342682" y="2213238"/>
+                  </a:lnTo>
+                  <a:lnTo>
+                    <a:pt x="6419150" y="2208393"/>
+                  </a:lnTo>
+                  <a:lnTo>
+                    <a:pt x="6495619" y="2203523"/>
+                  </a:lnTo>
+                  <a:lnTo>
+                    <a:pt x="6572087" y="2198628"/>
+                  </a:lnTo>
+                  <a:lnTo>
+                    <a:pt x="6648556" y="2193708"/>
+                  </a:lnTo>
+                  <a:lnTo>
+                    <a:pt x="6725024" y="2188763"/>
+                  </a:lnTo>
+                  <a:lnTo>
+                    <a:pt x="6801492" y="2183792"/>
+                  </a:lnTo>
+                  <a:lnTo>
+                    <a:pt x="6877961" y="2178796"/>
+                  </a:lnTo>
+                  <a:lnTo>
+                    <a:pt x="6954429" y="2173774"/>
+                  </a:lnTo>
+                  <a:lnTo>
+                    <a:pt x="7030898" y="2168727"/>
+                  </a:lnTo>
+                  <a:lnTo>
+                    <a:pt x="7107366" y="2163654"/>
+                  </a:lnTo>
+                  <a:lnTo>
+                    <a:pt x="7183835" y="2158555"/>
+                  </a:lnTo>
+                  <a:lnTo>
+                    <a:pt x="7260303" y="2153430"/>
                   </a:lnTo>
                 </a:path>
               </a:pathLst>
@@ -3922,300 +3922,300 @@
           </p:nvSpPr>
           <p:spPr>
             <a:xfrm>
-              <a:off x="817517" y="4730628"/>
-              <a:ext cx="7370972" cy="668212"/>
+              <a:off x="915645" y="4687559"/>
+              <a:ext cx="7260303" cy="623264"/>
             </a:xfrm>
             <a:custGeom>
               <a:avLst/>
               <a:pathLst>
-                <a:path w="7370972" h="668212">
+                <a:path w="7260303" h="623264">
                   <a:moveTo>
-                    <a:pt x="7370972" y="668212"/>
+                    <a:pt x="7260303" y="623264"/>
                   </a:moveTo>
                   <a:lnTo>
-                    <a:pt x="7293338" y="663019"/>
-                  </a:lnTo>
-                  <a:lnTo>
-                    <a:pt x="7215704" y="657656"/>
-                  </a:lnTo>
-                  <a:lnTo>
-                    <a:pt x="7138070" y="652117"/>
-                  </a:lnTo>
-                  <a:lnTo>
-                    <a:pt x="7060436" y="646397"/>
-                  </a:lnTo>
-                  <a:lnTo>
-                    <a:pt x="6982802" y="640489"/>
-                  </a:lnTo>
-                  <a:lnTo>
-                    <a:pt x="6905168" y="634388"/>
-                  </a:lnTo>
-                  <a:lnTo>
-                    <a:pt x="6827534" y="628086"/>
-                  </a:lnTo>
-                  <a:lnTo>
-                    <a:pt x="6749900" y="621578"/>
-                  </a:lnTo>
-                  <a:lnTo>
-                    <a:pt x="6672266" y="614856"/>
-                  </a:lnTo>
-                  <a:lnTo>
-                    <a:pt x="6594632" y="607914"/>
-                  </a:lnTo>
-                  <a:lnTo>
-                    <a:pt x="6516998" y="600745"/>
-                  </a:lnTo>
-                  <a:lnTo>
-                    <a:pt x="6439364" y="593341"/>
-                  </a:lnTo>
-                  <a:lnTo>
-                    <a:pt x="6361730" y="585693"/>
-                  </a:lnTo>
-                  <a:lnTo>
-                    <a:pt x="6284096" y="577796"/>
-                  </a:lnTo>
-                  <a:lnTo>
-                    <a:pt x="6206462" y="569639"/>
-                  </a:lnTo>
-                  <a:lnTo>
-                    <a:pt x="6128827" y="561215"/>
-                  </a:lnTo>
-                  <a:lnTo>
-                    <a:pt x="6051193" y="552514"/>
-                  </a:lnTo>
-                  <a:lnTo>
-                    <a:pt x="5973559" y="543529"/>
-                  </a:lnTo>
-                  <a:lnTo>
-                    <a:pt x="5895925" y="534249"/>
-                  </a:lnTo>
-                  <a:lnTo>
-                    <a:pt x="5818291" y="524665"/>
-                  </a:lnTo>
-                  <a:lnTo>
-                    <a:pt x="5740657" y="514766"/>
-                  </a:lnTo>
-                  <a:lnTo>
-                    <a:pt x="5663023" y="504543"/>
-                  </a:lnTo>
-                  <a:lnTo>
-                    <a:pt x="5585389" y="493985"/>
-                  </a:lnTo>
-                  <a:lnTo>
-                    <a:pt x="5507755" y="483081"/>
-                  </a:lnTo>
-                  <a:lnTo>
-                    <a:pt x="5430121" y="471820"/>
-                  </a:lnTo>
-                  <a:lnTo>
-                    <a:pt x="5352487" y="460189"/>
-                  </a:lnTo>
-                  <a:lnTo>
-                    <a:pt x="5274853" y="448177"/>
-                  </a:lnTo>
-                  <a:lnTo>
-                    <a:pt x="5197219" y="435771"/>
-                  </a:lnTo>
-                  <a:lnTo>
-                    <a:pt x="5119585" y="422959"/>
-                  </a:lnTo>
-                  <a:lnTo>
-                    <a:pt x="5041951" y="409726"/>
-                  </a:lnTo>
-                  <a:lnTo>
-                    <a:pt x="4964317" y="396060"/>
-                  </a:lnTo>
-                  <a:lnTo>
-                    <a:pt x="4886683" y="381946"/>
-                  </a:lnTo>
-                  <a:lnTo>
-                    <a:pt x="4809049" y="367369"/>
-                  </a:lnTo>
-                  <a:lnTo>
-                    <a:pt x="4731415" y="352314"/>
-                  </a:lnTo>
-                  <a:lnTo>
-                    <a:pt x="4653781" y="336766"/>
-                  </a:lnTo>
-                  <a:lnTo>
-                    <a:pt x="4576147" y="320708"/>
-                  </a:lnTo>
-                  <a:lnTo>
-                    <a:pt x="4498513" y="304123"/>
-                  </a:lnTo>
-                  <a:lnTo>
-                    <a:pt x="4420879" y="286995"/>
-                  </a:lnTo>
-                  <a:lnTo>
-                    <a:pt x="4343244" y="269306"/>
-                  </a:lnTo>
-                  <a:lnTo>
-                    <a:pt x="4265610" y="251037"/>
-                  </a:lnTo>
-                  <a:lnTo>
-                    <a:pt x="4187976" y="232168"/>
-                  </a:lnTo>
-                  <a:lnTo>
-                    <a:pt x="4110342" y="212682"/>
-                  </a:lnTo>
-                  <a:lnTo>
-                    <a:pt x="4032708" y="192556"/>
-                  </a:lnTo>
-                  <a:lnTo>
-                    <a:pt x="3955074" y="171771"/>
-                  </a:lnTo>
-                  <a:lnTo>
-                    <a:pt x="3877440" y="150304"/>
-                  </a:lnTo>
-                  <a:lnTo>
-                    <a:pt x="3799806" y="128134"/>
-                  </a:lnTo>
-                  <a:lnTo>
-                    <a:pt x="3722172" y="105237"/>
-                  </a:lnTo>
-                  <a:lnTo>
-                    <a:pt x="3644538" y="81589"/>
-                  </a:lnTo>
-                  <a:lnTo>
-                    <a:pt x="3566904" y="57166"/>
-                  </a:lnTo>
-                  <a:lnTo>
-                    <a:pt x="3489270" y="31943"/>
-                  </a:lnTo>
-                  <a:lnTo>
-                    <a:pt x="3411636" y="5892"/>
-                  </a:lnTo>
-                  <a:lnTo>
-                    <a:pt x="3334002" y="0"/>
-                  </a:lnTo>
-                  <a:lnTo>
-                    <a:pt x="3256368" y="4212"/>
-                  </a:lnTo>
-                  <a:lnTo>
-                    <a:pt x="3178734" y="8404"/>
-                  </a:lnTo>
-                  <a:lnTo>
-                    <a:pt x="3101100" y="12574"/>
-                  </a:lnTo>
-                  <a:lnTo>
-                    <a:pt x="3023466" y="16722"/>
-                  </a:lnTo>
-                  <a:lnTo>
-                    <a:pt x="2945832" y="20850"/>
-                  </a:lnTo>
-                  <a:lnTo>
-                    <a:pt x="2868198" y="24956"/>
-                  </a:lnTo>
-                  <a:lnTo>
-                    <a:pt x="2790564" y="29042"/>
-                  </a:lnTo>
-                  <a:lnTo>
-                    <a:pt x="2712930" y="33107"/>
-                  </a:lnTo>
-                  <a:lnTo>
-                    <a:pt x="2635295" y="37151"/>
-                  </a:lnTo>
-                  <a:lnTo>
-                    <a:pt x="2557661" y="41174"/>
-                  </a:lnTo>
-                  <a:lnTo>
-                    <a:pt x="2480027" y="45177"/>
-                  </a:lnTo>
-                  <a:lnTo>
-                    <a:pt x="2402393" y="49160"/>
-                  </a:lnTo>
-                  <a:lnTo>
-                    <a:pt x="2324759" y="53122"/>
-                  </a:lnTo>
-                  <a:lnTo>
-                    <a:pt x="2247125" y="57064"/>
-                  </a:lnTo>
-                  <a:lnTo>
-                    <a:pt x="2169491" y="60986"/>
-                  </a:lnTo>
-                  <a:lnTo>
-                    <a:pt x="2091857" y="64888"/>
-                  </a:lnTo>
-                  <a:lnTo>
-                    <a:pt x="2014223" y="68770"/>
-                  </a:lnTo>
-                  <a:lnTo>
-                    <a:pt x="1936589" y="72633"/>
-                  </a:lnTo>
-                  <a:lnTo>
-                    <a:pt x="1858955" y="76475"/>
-                  </a:lnTo>
-                  <a:lnTo>
-                    <a:pt x="1781321" y="80298"/>
-                  </a:lnTo>
-                  <a:lnTo>
-                    <a:pt x="1703687" y="84102"/>
-                  </a:lnTo>
-                  <a:lnTo>
-                    <a:pt x="1626053" y="87886"/>
-                  </a:lnTo>
-                  <a:lnTo>
-                    <a:pt x="1548419" y="91651"/>
-                  </a:lnTo>
-                  <a:lnTo>
-                    <a:pt x="1470785" y="95397"/>
-                  </a:lnTo>
-                  <a:lnTo>
-                    <a:pt x="1393151" y="99123"/>
-                  </a:lnTo>
-                  <a:lnTo>
-                    <a:pt x="1315517" y="102831"/>
-                  </a:lnTo>
-                  <a:lnTo>
-                    <a:pt x="1237883" y="106520"/>
-                  </a:lnTo>
-                  <a:lnTo>
-                    <a:pt x="1160249" y="110190"/>
-                  </a:lnTo>
-                  <a:lnTo>
-                    <a:pt x="1082615" y="113841"/>
-                  </a:lnTo>
-                  <a:lnTo>
-                    <a:pt x="1004981" y="117473"/>
-                  </a:lnTo>
-                  <a:lnTo>
-                    <a:pt x="927346" y="121088"/>
-                  </a:lnTo>
-                  <a:lnTo>
-                    <a:pt x="849712" y="124683"/>
-                  </a:lnTo>
-                  <a:lnTo>
-                    <a:pt x="772078" y="128261"/>
-                  </a:lnTo>
-                  <a:lnTo>
-                    <a:pt x="694444" y="131820"/>
-                  </a:lnTo>
-                  <a:lnTo>
-                    <a:pt x="616810" y="135361"/>
-                  </a:lnTo>
-                  <a:lnTo>
-                    <a:pt x="539176" y="138884"/>
-                  </a:lnTo>
-                  <a:lnTo>
-                    <a:pt x="461542" y="142389"/>
-                  </a:lnTo>
-                  <a:lnTo>
-                    <a:pt x="383908" y="145876"/>
-                  </a:lnTo>
-                  <a:lnTo>
-                    <a:pt x="306274" y="149345"/>
-                  </a:lnTo>
-                  <a:lnTo>
-                    <a:pt x="228640" y="152797"/>
-                  </a:lnTo>
-                  <a:lnTo>
-                    <a:pt x="151006" y="156231"/>
-                  </a:lnTo>
-                  <a:lnTo>
-                    <a:pt x="73372" y="159648"/>
-                  </a:lnTo>
-                  <a:lnTo>
-                    <a:pt x="0" y="162860"/>
+                    <a:pt x="7183835" y="618420"/>
+                  </a:lnTo>
+                  <a:lnTo>
+                    <a:pt x="7107366" y="613418"/>
+                  </a:lnTo>
+                  <a:lnTo>
+                    <a:pt x="7030898" y="608252"/>
+                  </a:lnTo>
+                  <a:lnTo>
+                    <a:pt x="6954429" y="602916"/>
+                  </a:lnTo>
+                  <a:lnTo>
+                    <a:pt x="6877961" y="597406"/>
+                  </a:lnTo>
+                  <a:lnTo>
+                    <a:pt x="6801492" y="591715"/>
+                  </a:lnTo>
+                  <a:lnTo>
+                    <a:pt x="6725024" y="585837"/>
+                  </a:lnTo>
+                  <a:lnTo>
+                    <a:pt x="6648556" y="579766"/>
+                  </a:lnTo>
+                  <a:lnTo>
+                    <a:pt x="6572087" y="573497"/>
+                  </a:lnTo>
+                  <a:lnTo>
+                    <a:pt x="6495619" y="567022"/>
+                  </a:lnTo>
+                  <a:lnTo>
+                    <a:pt x="6419150" y="560335"/>
+                  </a:lnTo>
+                  <a:lnTo>
+                    <a:pt x="6342682" y="553429"/>
+                  </a:lnTo>
+                  <a:lnTo>
+                    <a:pt x="6266213" y="546296"/>
+                  </a:lnTo>
+                  <a:lnTo>
+                    <a:pt x="6189745" y="538929"/>
+                  </a:lnTo>
+                  <a:lnTo>
+                    <a:pt x="6113277" y="531321"/>
+                  </a:lnTo>
+                  <a:lnTo>
+                    <a:pt x="6036808" y="523464"/>
+                  </a:lnTo>
+                  <a:lnTo>
+                    <a:pt x="5960340" y="515349"/>
+                  </a:lnTo>
+                  <a:lnTo>
+                    <a:pt x="5883871" y="506968"/>
+                  </a:lnTo>
+                  <a:lnTo>
+                    <a:pt x="5807403" y="498312"/>
+                  </a:lnTo>
+                  <a:lnTo>
+                    <a:pt x="5730934" y="489372"/>
+                  </a:lnTo>
+                  <a:lnTo>
+                    <a:pt x="5654466" y="480140"/>
+                  </a:lnTo>
+                  <a:lnTo>
+                    <a:pt x="5577998" y="470604"/>
+                  </a:lnTo>
+                  <a:lnTo>
+                    <a:pt x="5501529" y="460757"/>
+                  </a:lnTo>
+                  <a:lnTo>
+                    <a:pt x="5425061" y="450586"/>
+                  </a:lnTo>
+                  <a:lnTo>
+                    <a:pt x="5348592" y="440082"/>
+                  </a:lnTo>
+                  <a:lnTo>
+                    <a:pt x="5272124" y="429234"/>
+                  </a:lnTo>
+                  <a:lnTo>
+                    <a:pt x="5195655" y="418030"/>
+                  </a:lnTo>
+                  <a:lnTo>
+                    <a:pt x="5119187" y="406458"/>
+                  </a:lnTo>
+                  <a:lnTo>
+                    <a:pt x="5042719" y="394508"/>
+                  </a:lnTo>
+                  <a:lnTo>
+                    <a:pt x="4966250" y="382165"/>
+                  </a:lnTo>
+                  <a:lnTo>
+                    <a:pt x="4889782" y="369418"/>
+                  </a:lnTo>
+                  <a:lnTo>
+                    <a:pt x="4813313" y="356254"/>
+                  </a:lnTo>
+                  <a:lnTo>
+                    <a:pt x="4736845" y="342657"/>
+                  </a:lnTo>
+                  <a:lnTo>
+                    <a:pt x="4660376" y="328615"/>
+                  </a:lnTo>
+                  <a:lnTo>
+                    <a:pt x="4583908" y="314113"/>
+                  </a:lnTo>
+                  <a:lnTo>
+                    <a:pt x="4507439" y="299135"/>
+                  </a:lnTo>
+                  <a:lnTo>
+                    <a:pt x="4430971" y="283666"/>
+                  </a:lnTo>
+                  <a:lnTo>
+                    <a:pt x="4354503" y="267690"/>
+                  </a:lnTo>
+                  <a:lnTo>
+                    <a:pt x="4278034" y="251191"/>
+                  </a:lnTo>
+                  <a:lnTo>
+                    <a:pt x="4201566" y="234150"/>
+                  </a:lnTo>
+                  <a:lnTo>
+                    <a:pt x="4125097" y="216551"/>
+                  </a:lnTo>
+                  <a:lnTo>
+                    <a:pt x="4048629" y="198375"/>
+                  </a:lnTo>
+                  <a:lnTo>
+                    <a:pt x="3972160" y="179604"/>
+                  </a:lnTo>
+                  <a:lnTo>
+                    <a:pt x="3895692" y="160216"/>
+                  </a:lnTo>
+                  <a:lnTo>
+                    <a:pt x="3819224" y="140194"/>
+                  </a:lnTo>
+                  <a:lnTo>
+                    <a:pt x="3742755" y="119515"/>
+                  </a:lnTo>
+                  <a:lnTo>
+                    <a:pt x="3666287" y="98158"/>
+                  </a:lnTo>
+                  <a:lnTo>
+                    <a:pt x="3589818" y="76101"/>
+                  </a:lnTo>
+                  <a:lnTo>
+                    <a:pt x="3513350" y="53321"/>
+                  </a:lnTo>
+                  <a:lnTo>
+                    <a:pt x="3436881" y="29794"/>
+                  </a:lnTo>
+                  <a:lnTo>
+                    <a:pt x="3360413" y="5496"/>
+                  </a:lnTo>
+                  <a:lnTo>
+                    <a:pt x="3283945" y="0"/>
+                  </a:lnTo>
+                  <a:lnTo>
+                    <a:pt x="3207476" y="3929"/>
+                  </a:lnTo>
+                  <a:lnTo>
+                    <a:pt x="3131008" y="7838"/>
+                  </a:lnTo>
+                  <a:lnTo>
+                    <a:pt x="3054539" y="11728"/>
+                  </a:lnTo>
+                  <a:lnTo>
+                    <a:pt x="2978071" y="15597"/>
+                  </a:lnTo>
+                  <a:lnTo>
+                    <a:pt x="2901602" y="19447"/>
+                  </a:lnTo>
+                  <a:lnTo>
+                    <a:pt x="2825134" y="23278"/>
+                  </a:lnTo>
+                  <a:lnTo>
+                    <a:pt x="2748666" y="27088"/>
+                  </a:lnTo>
+                  <a:lnTo>
+                    <a:pt x="2672197" y="30880"/>
+                  </a:lnTo>
+                  <a:lnTo>
+                    <a:pt x="2595729" y="34652"/>
+                  </a:lnTo>
+                  <a:lnTo>
+                    <a:pt x="2519260" y="38405"/>
+                  </a:lnTo>
+                  <a:lnTo>
+                    <a:pt x="2442792" y="42138"/>
+                  </a:lnTo>
+                  <a:lnTo>
+                    <a:pt x="2366323" y="45853"/>
+                  </a:lnTo>
+                  <a:lnTo>
+                    <a:pt x="2289855" y="49549"/>
+                  </a:lnTo>
+                  <a:lnTo>
+                    <a:pt x="2213386" y="53226"/>
+                  </a:lnTo>
+                  <a:lnTo>
+                    <a:pt x="2136918" y="56884"/>
+                  </a:lnTo>
+                  <a:lnTo>
+                    <a:pt x="2060450" y="60523"/>
+                  </a:lnTo>
+                  <a:lnTo>
+                    <a:pt x="1983981" y="64144"/>
+                  </a:lnTo>
+                  <a:lnTo>
+                    <a:pt x="1907513" y="67747"/>
+                  </a:lnTo>
+                  <a:lnTo>
+                    <a:pt x="1831044" y="71331"/>
+                  </a:lnTo>
+                  <a:lnTo>
+                    <a:pt x="1754576" y="74897"/>
+                  </a:lnTo>
+                  <a:lnTo>
+                    <a:pt x="1678107" y="78445"/>
+                  </a:lnTo>
+                  <a:lnTo>
+                    <a:pt x="1601639" y="81974"/>
+                  </a:lnTo>
+                  <a:lnTo>
+                    <a:pt x="1525171" y="85486"/>
+                  </a:lnTo>
+                  <a:lnTo>
+                    <a:pt x="1448702" y="88980"/>
+                  </a:lnTo>
+                  <a:lnTo>
+                    <a:pt x="1372234" y="92456"/>
+                  </a:lnTo>
+                  <a:lnTo>
+                    <a:pt x="1295765" y="95914"/>
+                  </a:lnTo>
+                  <a:lnTo>
+                    <a:pt x="1219297" y="99354"/>
+                  </a:lnTo>
+                  <a:lnTo>
+                    <a:pt x="1142828" y="102778"/>
+                  </a:lnTo>
+                  <a:lnTo>
+                    <a:pt x="1066360" y="106183"/>
+                  </a:lnTo>
+                  <a:lnTo>
+                    <a:pt x="989892" y="109571"/>
+                  </a:lnTo>
+                  <a:lnTo>
+                    <a:pt x="913423" y="112942"/>
+                  </a:lnTo>
+                  <a:lnTo>
+                    <a:pt x="836955" y="116296"/>
+                  </a:lnTo>
+                  <a:lnTo>
+                    <a:pt x="760486" y="119633"/>
+                  </a:lnTo>
+                  <a:lnTo>
+                    <a:pt x="684018" y="122953"/>
+                  </a:lnTo>
+                  <a:lnTo>
+                    <a:pt x="607549" y="126255"/>
+                  </a:lnTo>
+                  <a:lnTo>
+                    <a:pt x="531081" y="129541"/>
+                  </a:lnTo>
+                  <a:lnTo>
+                    <a:pt x="454613" y="132811"/>
+                  </a:lnTo>
+                  <a:lnTo>
+                    <a:pt x="378144" y="136063"/>
+                  </a:lnTo>
+                  <a:lnTo>
+                    <a:pt x="301676" y="139299"/>
+                  </a:lnTo>
+                  <a:lnTo>
+                    <a:pt x="225207" y="142519"/>
+                  </a:lnTo>
+                  <a:lnTo>
+                    <a:pt x="148739" y="145722"/>
+                  </a:lnTo>
+                  <a:lnTo>
+                    <a:pt x="72270" y="148909"/>
+                  </a:lnTo>
+                  <a:lnTo>
+                    <a:pt x="0" y="151905"/>
                   </a:lnTo>
                 </a:path>
               </a:pathLst>
@@ -4235,300 +4235,300 @@
           </p:nvSpPr>
           <p:spPr>
             <a:xfrm>
-              <a:off x="817517" y="4057895"/>
-              <a:ext cx="7370972" cy="1086081"/>
+              <a:off x="915645" y="4060079"/>
+              <a:ext cx="7260303" cy="1013024"/>
             </a:xfrm>
             <a:custGeom>
               <a:avLst/>
               <a:pathLst>
-                <a:path w="7370972" h="1086081">
+                <a:path w="7260303" h="1013024">
                   <a:moveTo>
                     <a:pt x="0" y="0"/>
                   </a:moveTo>
                   <a:lnTo>
-                    <a:pt x="73372" y="19117"/>
-                  </a:lnTo>
-                  <a:lnTo>
-                    <a:pt x="151006" y="39072"/>
-                  </a:lnTo>
-                  <a:lnTo>
-                    <a:pt x="228640" y="58759"/>
-                  </a:lnTo>
-                  <a:lnTo>
-                    <a:pt x="306274" y="78180"/>
-                  </a:lnTo>
-                  <a:lnTo>
-                    <a:pt x="383908" y="97339"/>
-                  </a:lnTo>
-                  <a:lnTo>
-                    <a:pt x="461542" y="116240"/>
-                  </a:lnTo>
-                  <a:lnTo>
-                    <a:pt x="539176" y="134886"/>
-                  </a:lnTo>
-                  <a:lnTo>
-                    <a:pt x="616810" y="153280"/>
-                  </a:lnTo>
-                  <a:lnTo>
-                    <a:pt x="694444" y="171427"/>
-                  </a:lnTo>
-                  <a:lnTo>
-                    <a:pt x="772078" y="189329"/>
-                  </a:lnTo>
-                  <a:lnTo>
-                    <a:pt x="849712" y="206989"/>
-                  </a:lnTo>
-                  <a:lnTo>
-                    <a:pt x="927346" y="224412"/>
-                  </a:lnTo>
-                  <a:lnTo>
-                    <a:pt x="1004981" y="241600"/>
-                  </a:lnTo>
-                  <a:lnTo>
-                    <a:pt x="1082615" y="258556"/>
-                  </a:lnTo>
-                  <a:lnTo>
-                    <a:pt x="1160249" y="275283"/>
-                  </a:lnTo>
-                  <a:lnTo>
-                    <a:pt x="1237883" y="291785"/>
-                  </a:lnTo>
-                  <a:lnTo>
-                    <a:pt x="1315517" y="308064"/>
-                  </a:lnTo>
-                  <a:lnTo>
-                    <a:pt x="1393151" y="324124"/>
-                  </a:lnTo>
-                  <a:lnTo>
-                    <a:pt x="1470785" y="339968"/>
-                  </a:lnTo>
-                  <a:lnTo>
-                    <a:pt x="1548419" y="355598"/>
-                  </a:lnTo>
-                  <a:lnTo>
-                    <a:pt x="1626053" y="371017"/>
-                  </a:lnTo>
-                  <a:lnTo>
-                    <a:pt x="1703687" y="386228"/>
-                  </a:lnTo>
-                  <a:lnTo>
-                    <a:pt x="1781321" y="401234"/>
-                  </a:lnTo>
-                  <a:lnTo>
-                    <a:pt x="1858955" y="416038"/>
-                  </a:lnTo>
-                  <a:lnTo>
-                    <a:pt x="1936589" y="430643"/>
-                  </a:lnTo>
-                  <a:lnTo>
-                    <a:pt x="2014223" y="445050"/>
-                  </a:lnTo>
-                  <a:lnTo>
-                    <a:pt x="2091857" y="459263"/>
-                  </a:lnTo>
-                  <a:lnTo>
-                    <a:pt x="2169491" y="473285"/>
-                  </a:lnTo>
-                  <a:lnTo>
-                    <a:pt x="2247125" y="487118"/>
-                  </a:lnTo>
-                  <a:lnTo>
-                    <a:pt x="2324759" y="500764"/>
-                  </a:lnTo>
-                  <a:lnTo>
-                    <a:pt x="2402393" y="514226"/>
-                  </a:lnTo>
-                  <a:lnTo>
-                    <a:pt x="2480027" y="527507"/>
-                  </a:lnTo>
-                  <a:lnTo>
-                    <a:pt x="2557661" y="540608"/>
-                  </a:lnTo>
-                  <a:lnTo>
-                    <a:pt x="2635295" y="553533"/>
-                  </a:lnTo>
-                  <a:lnTo>
-                    <a:pt x="2712930" y="566284"/>
-                  </a:lnTo>
-                  <a:lnTo>
-                    <a:pt x="2790564" y="578863"/>
-                  </a:lnTo>
-                  <a:lnTo>
-                    <a:pt x="2868198" y="591272"/>
-                  </a:lnTo>
-                  <a:lnTo>
-                    <a:pt x="2945832" y="603514"/>
-                  </a:lnTo>
-                  <a:lnTo>
-                    <a:pt x="3023466" y="615591"/>
-                  </a:lnTo>
-                  <a:lnTo>
-                    <a:pt x="3101100" y="627505"/>
-                  </a:lnTo>
-                  <a:lnTo>
-                    <a:pt x="3178734" y="639259"/>
-                  </a:lnTo>
-                  <a:lnTo>
-                    <a:pt x="3256368" y="650854"/>
-                  </a:lnTo>
-                  <a:lnTo>
-                    <a:pt x="3334002" y="662293"/>
-                  </a:lnTo>
-                  <a:lnTo>
-                    <a:pt x="3411636" y="673577"/>
-                  </a:lnTo>
-                  <a:lnTo>
-                    <a:pt x="3489270" y="684710"/>
-                  </a:lnTo>
-                  <a:lnTo>
-                    <a:pt x="3566904" y="695692"/>
-                  </a:lnTo>
-                  <a:lnTo>
-                    <a:pt x="3644538" y="706526"/>
-                  </a:lnTo>
-                  <a:lnTo>
-                    <a:pt x="3722172" y="717215"/>
-                  </a:lnTo>
-                  <a:lnTo>
-                    <a:pt x="3799806" y="727759"/>
-                  </a:lnTo>
-                  <a:lnTo>
-                    <a:pt x="3877440" y="738161"/>
-                  </a:lnTo>
-                  <a:lnTo>
-                    <a:pt x="3955074" y="748423"/>
-                  </a:lnTo>
-                  <a:lnTo>
-                    <a:pt x="4032708" y="758546"/>
-                  </a:lnTo>
-                  <a:lnTo>
-                    <a:pt x="4110342" y="768533"/>
-                  </a:lnTo>
-                  <a:lnTo>
-                    <a:pt x="4187976" y="778385"/>
-                  </a:lnTo>
-                  <a:lnTo>
-                    <a:pt x="4265610" y="788105"/>
-                  </a:lnTo>
-                  <a:lnTo>
-                    <a:pt x="4343244" y="797693"/>
-                  </a:lnTo>
-                  <a:lnTo>
-                    <a:pt x="4420879" y="807152"/>
-                  </a:lnTo>
-                  <a:lnTo>
-                    <a:pt x="4498513" y="816484"/>
-                  </a:lnTo>
-                  <a:lnTo>
-                    <a:pt x="4576147" y="825690"/>
-                  </a:lnTo>
-                  <a:lnTo>
-                    <a:pt x="4653781" y="834772"/>
-                  </a:lnTo>
-                  <a:lnTo>
-                    <a:pt x="4731415" y="843731"/>
-                  </a:lnTo>
-                  <a:lnTo>
-                    <a:pt x="4809049" y="852570"/>
-                  </a:lnTo>
-                  <a:lnTo>
-                    <a:pt x="4886683" y="861289"/>
-                  </a:lnTo>
-                  <a:lnTo>
-                    <a:pt x="4964317" y="869891"/>
-                  </a:lnTo>
-                  <a:lnTo>
-                    <a:pt x="5041951" y="878377"/>
-                  </a:lnTo>
-                  <a:lnTo>
-                    <a:pt x="5119585" y="886748"/>
-                  </a:lnTo>
-                  <a:lnTo>
-                    <a:pt x="5197219" y="895007"/>
-                  </a:lnTo>
-                  <a:lnTo>
-                    <a:pt x="5274853" y="903154"/>
-                  </a:lnTo>
-                  <a:lnTo>
-                    <a:pt x="5352487" y="911192"/>
-                  </a:lnTo>
-                  <a:lnTo>
-                    <a:pt x="5430121" y="919121"/>
-                  </a:lnTo>
-                  <a:lnTo>
-                    <a:pt x="5507755" y="926943"/>
-                  </a:lnTo>
-                  <a:lnTo>
-                    <a:pt x="5585389" y="934660"/>
-                  </a:lnTo>
-                  <a:lnTo>
-                    <a:pt x="5663023" y="942272"/>
-                  </a:lnTo>
-                  <a:lnTo>
-                    <a:pt x="5740657" y="949783"/>
-                  </a:lnTo>
-                  <a:lnTo>
-                    <a:pt x="5818291" y="957191"/>
-                  </a:lnTo>
-                  <a:lnTo>
-                    <a:pt x="5895925" y="964500"/>
-                  </a:lnTo>
-                  <a:lnTo>
-                    <a:pt x="5973559" y="971711"/>
-                  </a:lnTo>
-                  <a:lnTo>
-                    <a:pt x="6051193" y="978824"/>
-                  </a:lnTo>
-                  <a:lnTo>
-                    <a:pt x="6128827" y="985841"/>
-                  </a:lnTo>
-                  <a:lnTo>
-                    <a:pt x="6206462" y="992764"/>
-                  </a:lnTo>
-                  <a:lnTo>
-                    <a:pt x="6284096" y="999594"/>
-                  </a:lnTo>
-                  <a:lnTo>
-                    <a:pt x="6361730" y="1006331"/>
-                  </a:lnTo>
-                  <a:lnTo>
-                    <a:pt x="6439364" y="1012978"/>
-                  </a:lnTo>
-                  <a:lnTo>
-                    <a:pt x="6516998" y="1019534"/>
-                  </a:lnTo>
-                  <a:lnTo>
-                    <a:pt x="6594632" y="1026003"/>
-                  </a:lnTo>
-                  <a:lnTo>
-                    <a:pt x="6672266" y="1032384"/>
-                  </a:lnTo>
-                  <a:lnTo>
-                    <a:pt x="6749900" y="1038680"/>
-                  </a:lnTo>
-                  <a:lnTo>
-                    <a:pt x="6827534" y="1044890"/>
-                  </a:lnTo>
-                  <a:lnTo>
-                    <a:pt x="6905168" y="1051017"/>
-                  </a:lnTo>
-                  <a:lnTo>
-                    <a:pt x="6982802" y="1057061"/>
-                  </a:lnTo>
-                  <a:lnTo>
-                    <a:pt x="7060436" y="1063023"/>
-                  </a:lnTo>
-                  <a:lnTo>
-                    <a:pt x="7138070" y="1068906"/>
-                  </a:lnTo>
-                  <a:lnTo>
-                    <a:pt x="7215704" y="1074709"/>
-                  </a:lnTo>
-                  <a:lnTo>
-                    <a:pt x="7293338" y="1080433"/>
-                  </a:lnTo>
-                  <a:lnTo>
-                    <a:pt x="7370972" y="1086081"/>
+                    <a:pt x="72270" y="17831"/>
+                  </a:lnTo>
+                  <a:lnTo>
+                    <a:pt x="148739" y="36444"/>
+                  </a:lnTo>
+                  <a:lnTo>
+                    <a:pt x="225207" y="54806"/>
+                  </a:lnTo>
+                  <a:lnTo>
+                    <a:pt x="301676" y="72921"/>
+                  </a:lnTo>
+                  <a:lnTo>
+                    <a:pt x="378144" y="90791"/>
+                  </a:lnTo>
+                  <a:lnTo>
+                    <a:pt x="454613" y="108420"/>
+                  </a:lnTo>
+                  <a:lnTo>
+                    <a:pt x="531081" y="125812"/>
+                  </a:lnTo>
+                  <a:lnTo>
+                    <a:pt x="607549" y="142970"/>
+                  </a:lnTo>
+                  <a:lnTo>
+                    <a:pt x="684018" y="159896"/>
+                  </a:lnTo>
+                  <a:lnTo>
+                    <a:pt x="760486" y="176593"/>
+                  </a:lnTo>
+                  <a:lnTo>
+                    <a:pt x="836955" y="193066"/>
+                  </a:lnTo>
+                  <a:lnTo>
+                    <a:pt x="913423" y="209317"/>
+                  </a:lnTo>
+                  <a:lnTo>
+                    <a:pt x="989892" y="225348"/>
+                  </a:lnTo>
+                  <a:lnTo>
+                    <a:pt x="1066360" y="241164"/>
+                  </a:lnTo>
+                  <a:lnTo>
+                    <a:pt x="1142828" y="256766"/>
+                  </a:lnTo>
+                  <a:lnTo>
+                    <a:pt x="1219297" y="272158"/>
+                  </a:lnTo>
+                  <a:lnTo>
+                    <a:pt x="1295765" y="287342"/>
+                  </a:lnTo>
+                  <a:lnTo>
+                    <a:pt x="1372234" y="302322"/>
+                  </a:lnTo>
+                  <a:lnTo>
+                    <a:pt x="1448702" y="317099"/>
+                  </a:lnTo>
+                  <a:lnTo>
+                    <a:pt x="1525171" y="331678"/>
+                  </a:lnTo>
+                  <a:lnTo>
+                    <a:pt x="1601639" y="346060"/>
+                  </a:lnTo>
+                  <a:lnTo>
+                    <a:pt x="1678107" y="360248"/>
+                  </a:lnTo>
+                  <a:lnTo>
+                    <a:pt x="1754576" y="374245"/>
+                  </a:lnTo>
+                  <a:lnTo>
+                    <a:pt x="1831044" y="388053"/>
+                  </a:lnTo>
+                  <a:lnTo>
+                    <a:pt x="1907513" y="401675"/>
+                  </a:lnTo>
+                  <a:lnTo>
+                    <a:pt x="1983981" y="415113"/>
+                  </a:lnTo>
+                  <a:lnTo>
+                    <a:pt x="2060450" y="428370"/>
+                  </a:lnTo>
+                  <a:lnTo>
+                    <a:pt x="2136918" y="441449"/>
+                  </a:lnTo>
+                  <a:lnTo>
+                    <a:pt x="2213386" y="454351"/>
+                  </a:lnTo>
+                  <a:lnTo>
+                    <a:pt x="2289855" y="467079"/>
+                  </a:lnTo>
+                  <a:lnTo>
+                    <a:pt x="2366323" y="479636"/>
+                  </a:lnTo>
+                  <a:lnTo>
+                    <a:pt x="2442792" y="492023"/>
+                  </a:lnTo>
+                  <a:lnTo>
+                    <a:pt x="2519260" y="504244"/>
+                  </a:lnTo>
+                  <a:lnTo>
+                    <a:pt x="2595729" y="516299"/>
+                  </a:lnTo>
+                  <a:lnTo>
+                    <a:pt x="2672197" y="528192"/>
+                  </a:lnTo>
+                  <a:lnTo>
+                    <a:pt x="2748666" y="539925"/>
+                  </a:lnTo>
+                  <a:lnTo>
+                    <a:pt x="2825134" y="551499"/>
+                  </a:lnTo>
+                  <a:lnTo>
+                    <a:pt x="2901602" y="562918"/>
+                  </a:lnTo>
+                  <a:lnTo>
+                    <a:pt x="2978071" y="574183"/>
+                  </a:lnTo>
+                  <a:lnTo>
+                    <a:pt x="3054539" y="585295"/>
+                  </a:lnTo>
+                  <a:lnTo>
+                    <a:pt x="3131008" y="596258"/>
+                  </a:lnTo>
+                  <a:lnTo>
+                    <a:pt x="3207476" y="607073"/>
+                  </a:lnTo>
+                  <a:lnTo>
+                    <a:pt x="3283945" y="617743"/>
+                  </a:lnTo>
+                  <a:lnTo>
+                    <a:pt x="3360413" y="628268"/>
+                  </a:lnTo>
+                  <a:lnTo>
+                    <a:pt x="3436881" y="638652"/>
+                  </a:lnTo>
+                  <a:lnTo>
+                    <a:pt x="3513350" y="648895"/>
+                  </a:lnTo>
+                  <a:lnTo>
+                    <a:pt x="3589818" y="659001"/>
+                  </a:lnTo>
+                  <a:lnTo>
+                    <a:pt x="3666287" y="668970"/>
+                  </a:lnTo>
+                  <a:lnTo>
+                    <a:pt x="3742755" y="678805"/>
+                  </a:lnTo>
+                  <a:lnTo>
+                    <a:pt x="3819224" y="688507"/>
+                  </a:lnTo>
+                  <a:lnTo>
+                    <a:pt x="3895692" y="698079"/>
+                  </a:lnTo>
+                  <a:lnTo>
+                    <a:pt x="3972160" y="707521"/>
+                  </a:lnTo>
+                  <a:lnTo>
+                    <a:pt x="4048629" y="716836"/>
+                  </a:lnTo>
+                  <a:lnTo>
+                    <a:pt x="4125097" y="726026"/>
+                  </a:lnTo>
+                  <a:lnTo>
+                    <a:pt x="4201566" y="735092"/>
+                  </a:lnTo>
+                  <a:lnTo>
+                    <a:pt x="4278034" y="744035"/>
+                  </a:lnTo>
+                  <a:lnTo>
+                    <a:pt x="4354503" y="752858"/>
+                  </a:lnTo>
+                  <a:lnTo>
+                    <a:pt x="4430971" y="761562"/>
+                  </a:lnTo>
+                  <a:lnTo>
+                    <a:pt x="4507439" y="770149"/>
+                  </a:lnTo>
+                  <a:lnTo>
+                    <a:pt x="4583908" y="778620"/>
+                  </a:lnTo>
+                  <a:lnTo>
+                    <a:pt x="4660376" y="786976"/>
+                  </a:lnTo>
+                  <a:lnTo>
+                    <a:pt x="4736845" y="795220"/>
+                  </a:lnTo>
+                  <a:lnTo>
+                    <a:pt x="4813313" y="803353"/>
+                  </a:lnTo>
+                  <a:lnTo>
+                    <a:pt x="4889782" y="811376"/>
+                  </a:lnTo>
+                  <a:lnTo>
+                    <a:pt x="4966250" y="819292"/>
+                  </a:lnTo>
+                  <a:lnTo>
+                    <a:pt x="5042719" y="827100"/>
+                  </a:lnTo>
+                  <a:lnTo>
+                    <a:pt x="5119187" y="834803"/>
+                  </a:lnTo>
+                  <a:lnTo>
+                    <a:pt x="5195655" y="842402"/>
+                  </a:lnTo>
+                  <a:lnTo>
+                    <a:pt x="5272124" y="849899"/>
+                  </a:lnTo>
+                  <a:lnTo>
+                    <a:pt x="5348592" y="857295"/>
+                  </a:lnTo>
+                  <a:lnTo>
+                    <a:pt x="5425061" y="864591"/>
+                  </a:lnTo>
+                  <a:lnTo>
+                    <a:pt x="5501529" y="871789"/>
+                  </a:lnTo>
+                  <a:lnTo>
+                    <a:pt x="5577998" y="878889"/>
+                  </a:lnTo>
+                  <a:lnTo>
+                    <a:pt x="5654466" y="885894"/>
+                  </a:lnTo>
+                  <a:lnTo>
+                    <a:pt x="5730934" y="892805"/>
+                  </a:lnTo>
+                  <a:lnTo>
+                    <a:pt x="5807403" y="899622"/>
+                  </a:lnTo>
+                  <a:lnTo>
+                    <a:pt x="5883871" y="906347"/>
+                  </a:lnTo>
+                  <a:lnTo>
+                    <a:pt x="5960340" y="912982"/>
+                  </a:lnTo>
+                  <a:lnTo>
+                    <a:pt x="6036808" y="919528"/>
+                  </a:lnTo>
+                  <a:lnTo>
+                    <a:pt x="6113277" y="925985"/>
+                  </a:lnTo>
+                  <a:lnTo>
+                    <a:pt x="6189745" y="932355"/>
+                  </a:lnTo>
+                  <a:lnTo>
+                    <a:pt x="6266213" y="938639"/>
+                  </a:lnTo>
+                  <a:lnTo>
+                    <a:pt x="6342682" y="944838"/>
+                  </a:lnTo>
+                  <a:lnTo>
+                    <a:pt x="6419150" y="950954"/>
+                  </a:lnTo>
+                  <a:lnTo>
+                    <a:pt x="6495619" y="956987"/>
+                  </a:lnTo>
+                  <a:lnTo>
+                    <a:pt x="6572087" y="962940"/>
+                  </a:lnTo>
+                  <a:lnTo>
+                    <a:pt x="6648556" y="968811"/>
+                  </a:lnTo>
+                  <a:lnTo>
+                    <a:pt x="6725024" y="974604"/>
+                  </a:lnTo>
+                  <a:lnTo>
+                    <a:pt x="6801492" y="980319"/>
+                  </a:lnTo>
+                  <a:lnTo>
+                    <a:pt x="6877961" y="985956"/>
+                  </a:lnTo>
+                  <a:lnTo>
+                    <a:pt x="6954429" y="991518"/>
+                  </a:lnTo>
+                  <a:lnTo>
+                    <a:pt x="7030898" y="997004"/>
+                  </a:lnTo>
+                  <a:lnTo>
+                    <a:pt x="7107366" y="1002417"/>
+                  </a:lnTo>
+                  <a:lnTo>
+                    <a:pt x="7183835" y="1007757"/>
+                  </a:lnTo>
+                  <a:lnTo>
+                    <a:pt x="7260303" y="1013024"/>
                   </a:lnTo>
                 </a:path>
               </a:pathLst>
@@ -4557,21 +4557,21 @@
           </p:nvSpPr>
           <p:spPr>
             <a:xfrm>
-              <a:off x="817517" y="4727786"/>
-              <a:ext cx="7799693" cy="0"/>
+              <a:off x="915645" y="4684908"/>
+              <a:ext cx="7682587" cy="0"/>
             </a:xfrm>
             <a:custGeom>
               <a:avLst/>
               <a:pathLst>
-                <a:path w="7799693" h="0">
+                <a:path w="7682587" h="0">
                   <a:moveTo>
                     <a:pt x="0" y="0"/>
                   </a:moveTo>
                   <a:lnTo>
-                    <a:pt x="7799693" y="0"/>
-                  </a:lnTo>
-                  <a:lnTo>
-                    <a:pt x="7799693" y="0"/>
+                    <a:pt x="7682587" y="0"/>
+                  </a:lnTo>
+                  <a:lnTo>
+                    <a:pt x="7682587" y="0"/>
                   </a:lnTo>
                 </a:path>
               </a:pathLst>
@@ -4600,15 +4600,15 @@
           </p:nvSpPr>
           <p:spPr>
             <a:xfrm>
-              <a:off x="4203673" y="2073503"/>
-              <a:ext cx="0" cy="3649639"/>
+              <a:off x="4250960" y="2209169"/>
+              <a:ext cx="0" cy="3404141"/>
             </a:xfrm>
             <a:custGeom>
               <a:avLst/>
               <a:pathLst>
-                <a:path w="0" h="3649639">
+                <a:path w="0" h="3404141">
                   <a:moveTo>
-                    <a:pt x="0" y="3649639"/>
+                    <a:pt x="0" y="3404141"/>
                   </a:moveTo>
                   <a:lnTo>
                     <a:pt x="0" y="0"/>
@@ -4643,8 +4643,8 @@
           </p:nvSpPr>
           <p:spPr>
             <a:xfrm>
-              <a:off x="692708" y="5517199"/>
-              <a:ext cx="62179" cy="80101"/>
+              <a:off x="756929" y="5407599"/>
+              <a:ext cx="79004" cy="101955"/>
             </a:xfrm>
             <a:prstGeom prst="rect">
               <a:avLst/>
@@ -4657,7 +4657,7 @@
             <a:p>
               <a:pPr algn="l" marL="0" marR="0" indent="0">
                 <a:lnSpc>
-                  <a:spcPts val="880"/>
+                  <a:spcPts val="1120"/>
                 </a:lnSpc>
                 <a:spcBef>
                   <a:spcPts val="0"/>
@@ -4667,7 +4667,7 @@
                 </a:spcAft>
               </a:pPr>
               <a:r>
-                <a:rPr sz="880">
+                <a:rPr sz="1120">
                   <a:solidFill>
                     <a:srgbClr val="4D4D4D">
                       <a:alpha val="100000"/>
@@ -4689,8 +4689,8 @@
           </p:nvSpPr>
           <p:spPr>
             <a:xfrm>
-              <a:off x="692708" y="4687735"/>
-              <a:ext cx="62179" cy="80101"/>
+              <a:off x="756929" y="4633931"/>
+              <a:ext cx="79004" cy="101955"/>
             </a:xfrm>
             <a:prstGeom prst="rect">
               <a:avLst/>
@@ -4703,7 +4703,7 @@
             <a:p>
               <a:pPr algn="l" marL="0" marR="0" indent="0">
                 <a:lnSpc>
-                  <a:spcPts val="880"/>
+                  <a:spcPts val="1120"/>
                 </a:lnSpc>
                 <a:spcBef>
                   <a:spcPts val="0"/>
@@ -4713,7 +4713,7 @@
                 </a:spcAft>
               </a:pPr>
               <a:r>
-                <a:rPr sz="880">
+                <a:rPr sz="1120">
                   <a:solidFill>
                     <a:srgbClr val="4D4D4D">
                       <a:alpha val="100000"/>
@@ -4735,8 +4735,8 @@
           </p:nvSpPr>
           <p:spPr>
             <a:xfrm>
-              <a:off x="692708" y="3858272"/>
-              <a:ext cx="62179" cy="80101"/>
+              <a:off x="756929" y="3860262"/>
+              <a:ext cx="79004" cy="101955"/>
             </a:xfrm>
             <a:prstGeom prst="rect">
               <a:avLst/>
@@ -4749,7 +4749,7 @@
             <a:p>
               <a:pPr algn="l" marL="0" marR="0" indent="0">
                 <a:lnSpc>
-                  <a:spcPts val="880"/>
+                  <a:spcPts val="1120"/>
                 </a:lnSpc>
                 <a:spcBef>
                   <a:spcPts val="0"/>
@@ -4759,7 +4759,7 @@
                 </a:spcAft>
               </a:pPr>
               <a:r>
-                <a:rPr sz="880">
+                <a:rPr sz="1120">
                   <a:solidFill>
                     <a:srgbClr val="4D4D4D">
                       <a:alpha val="100000"/>
@@ -4781,8 +4781,8 @@
           </p:nvSpPr>
           <p:spPr>
             <a:xfrm>
-              <a:off x="692708" y="3028808"/>
-              <a:ext cx="62179" cy="80101"/>
+              <a:off x="756929" y="3086593"/>
+              <a:ext cx="79004" cy="101955"/>
             </a:xfrm>
             <a:prstGeom prst="rect">
               <a:avLst/>
@@ -4795,7 +4795,7 @@
             <a:p>
               <a:pPr algn="l" marL="0" marR="0" indent="0">
                 <a:lnSpc>
-                  <a:spcPts val="880"/>
+                  <a:spcPts val="1120"/>
                 </a:lnSpc>
                 <a:spcBef>
                   <a:spcPts val="0"/>
@@ -4805,7 +4805,7 @@
                 </a:spcAft>
               </a:pPr>
               <a:r>
-                <a:rPr sz="880">
+                <a:rPr sz="1120">
                   <a:solidFill>
                     <a:srgbClr val="4D4D4D">
                       <a:alpha val="100000"/>
@@ -4827,8 +4827,8 @@
           </p:nvSpPr>
           <p:spPr>
             <a:xfrm>
-              <a:off x="692708" y="2199345"/>
-              <a:ext cx="62179" cy="80101"/>
+              <a:off x="756929" y="2312925"/>
+              <a:ext cx="79004" cy="101955"/>
             </a:xfrm>
             <a:prstGeom prst="rect">
               <a:avLst/>
@@ -4841,7 +4841,7 @@
             <a:p>
               <a:pPr algn="l" marL="0" marR="0" indent="0">
                 <a:lnSpc>
-                  <a:spcPts val="880"/>
+                  <a:spcPts val="1120"/>
                 </a:lnSpc>
                 <a:spcBef>
                   <a:spcPts val="0"/>
@@ -4851,7 +4851,7 @@
                 </a:spcAft>
               </a:pPr>
               <a:r>
-                <a:rPr sz="880">
+                <a:rPr sz="1120">
                   <a:solidFill>
                     <a:srgbClr val="4D4D4D">
                       <a:alpha val="100000"/>
@@ -4873,8 +4873,8 @@
           </p:nvSpPr>
           <p:spPr>
             <a:xfrm>
-              <a:off x="2423864" y="5785772"/>
-              <a:ext cx="155356" cy="80101"/>
+              <a:off x="2475630" y="5693022"/>
+              <a:ext cx="197510" cy="101955"/>
             </a:xfrm>
             <a:prstGeom prst="rect">
               <a:avLst/>
@@ -4887,7 +4887,7 @@
             <a:p>
               <a:pPr algn="l" marL="0" marR="0" indent="0">
                 <a:lnSpc>
-                  <a:spcPts val="880"/>
+                  <a:spcPts val="1120"/>
                 </a:lnSpc>
                 <a:spcBef>
                   <a:spcPts val="0"/>
@@ -4897,7 +4897,7 @@
                 </a:spcAft>
               </a:pPr>
               <a:r>
-                <a:rPr sz="880">
+                <a:rPr sz="1120">
                   <a:solidFill>
                     <a:srgbClr val="4D4D4D">
                       <a:alpha val="100000"/>
@@ -4919,8 +4919,8 @@
           </p:nvSpPr>
           <p:spPr>
             <a:xfrm>
-              <a:off x="4196521" y="5785772"/>
-              <a:ext cx="155356" cy="80101"/>
+              <a:off x="4221672" y="5693022"/>
+              <a:ext cx="197510" cy="101955"/>
             </a:xfrm>
             <a:prstGeom prst="rect">
               <a:avLst/>
@@ -4933,7 +4933,7 @@
             <a:p>
               <a:pPr algn="l" marL="0" marR="0" indent="0">
                 <a:lnSpc>
-                  <a:spcPts val="880"/>
+                  <a:spcPts val="1120"/>
                 </a:lnSpc>
                 <a:spcBef>
                   <a:spcPts val="0"/>
@@ -4943,7 +4943,7 @@
                 </a:spcAft>
               </a:pPr>
               <a:r>
-                <a:rPr sz="880">
+                <a:rPr sz="1120">
                   <a:solidFill>
                     <a:srgbClr val="4D4D4D">
                       <a:alpha val="100000"/>
@@ -4965,8 +4965,8 @@
           </p:nvSpPr>
           <p:spPr>
             <a:xfrm>
-              <a:off x="5969179" y="5785772"/>
-              <a:ext cx="155356" cy="80101"/>
+              <a:off x="5967715" y="5693022"/>
+              <a:ext cx="197510" cy="101955"/>
             </a:xfrm>
             <a:prstGeom prst="rect">
               <a:avLst/>
@@ -4979,7 +4979,7 @@
             <a:p>
               <a:pPr algn="l" marL="0" marR="0" indent="0">
                 <a:lnSpc>
-                  <a:spcPts val="880"/>
+                  <a:spcPts val="1120"/>
                 </a:lnSpc>
                 <a:spcBef>
                   <a:spcPts val="0"/>
@@ -4989,7 +4989,7 @@
                 </a:spcAft>
               </a:pPr>
               <a:r>
-                <a:rPr sz="880">
+                <a:rPr sz="1120">
                   <a:solidFill>
                     <a:srgbClr val="4D4D4D">
                       <a:alpha val="100000"/>
@@ -5011,8 +5011,8 @@
           </p:nvSpPr>
           <p:spPr>
             <a:xfrm>
-              <a:off x="7741836" y="5785772"/>
-              <a:ext cx="155356" cy="80101"/>
+              <a:off x="7713757" y="5693022"/>
+              <a:ext cx="197510" cy="101955"/>
             </a:xfrm>
             <a:prstGeom prst="rect">
               <a:avLst/>
@@ -5025,7 +5025,7 @@
             <a:p>
               <a:pPr algn="l" marL="0" marR="0" indent="0">
                 <a:lnSpc>
-                  <a:spcPts val="880"/>
+                  <a:spcPts val="1120"/>
                 </a:lnSpc>
                 <a:spcBef>
                   <a:spcPts val="0"/>
@@ -5035,7 +5035,7 @@
                 </a:spcAft>
               </a:pPr>
               <a:r>
-                <a:rPr sz="880">
+                <a:rPr sz="1120">
                   <a:solidFill>
                     <a:srgbClr val="4D4D4D">
                       <a:alpha val="100000"/>
@@ -5057,8 +5057,8 @@
           </p:nvSpPr>
           <p:spPr>
             <a:xfrm>
-              <a:off x="3879271" y="5925448"/>
-              <a:ext cx="1676186" cy="100218"/>
+              <a:off x="3690153" y="5870717"/>
+              <a:ext cx="2133569" cy="127558"/>
             </a:xfrm>
             <a:prstGeom prst="rect">
               <a:avLst/>
@@ -5071,7 +5071,7 @@
             <a:p>
               <a:pPr algn="l" marL="0" marR="0" indent="0">
                 <a:lnSpc>
-                  <a:spcPts val="1100"/>
+                  <a:spcPts val="1400"/>
                 </a:lnSpc>
                 <a:spcBef>
                   <a:spcPts val="0"/>
@@ -5081,7 +5081,7 @@
                 </a:spcAft>
               </a:pPr>
               <a:r>
-                <a:rPr sz="1100">
+                <a:rPr sz="1400">
                   <a:solidFill>
                     <a:srgbClr val="000000">
                       <a:alpha val="100000"/>
@@ -5103,8 +5103,8 @@
           </p:nvSpPr>
           <p:spPr>
             <a:xfrm rot="-5400000">
-              <a:off x="68446" y="3848213"/>
-              <a:ext cx="1016904" cy="100218"/>
+              <a:off x="-37527" y="3847460"/>
+              <a:ext cx="1294150" cy="127558"/>
             </a:xfrm>
             <a:prstGeom prst="rect">
               <a:avLst/>
@@ -5117,7 +5117,7 @@
             <a:p>
               <a:pPr algn="l" marL="0" marR="0" indent="0">
                 <a:lnSpc>
-                  <a:spcPts val="1100"/>
+                  <a:spcPts val="1400"/>
                 </a:lnSpc>
                 <a:spcBef>
                   <a:spcPts val="0"/>
@@ -5127,7 +5127,7 @@
                 </a:spcAft>
               </a:pPr>
               <a:r>
-                <a:rPr sz="1100">
+                <a:rPr sz="1400">
                   <a:solidFill>
                     <a:srgbClr val="000000">
                       <a:alpha val="100000"/>
@@ -5149,8 +5149,8 @@
           </p:nvSpPr>
           <p:spPr>
             <a:xfrm>
-              <a:off x="817517" y="1896563"/>
-              <a:ext cx="4166463" cy="82021"/>
+              <a:off x="915645" y="1977589"/>
+              <a:ext cx="5556900" cy="109362"/>
             </a:xfrm>
             <a:prstGeom prst="rect">
               <a:avLst/>
@@ -5163,7 +5163,7 @@
             <a:p>
               <a:pPr algn="l" marL="0" marR="0" indent="0">
                 <a:lnSpc>
-                  <a:spcPts val="900"/>
+                  <a:spcPts val="1200"/>
                 </a:lnSpc>
                 <a:spcBef>
                   <a:spcPts val="0"/>
@@ -5173,7 +5173,7 @@
                 </a:spcAft>
               </a:pPr>
               <a:r>
-                <a:rPr sz="900">
+                <a:rPr sz="1200">
                   <a:solidFill>
                     <a:srgbClr val="404040">
                       <a:alpha val="100000"/>
@@ -5195,8 +5195,8 @@
           </p:nvSpPr>
           <p:spPr>
             <a:xfrm>
-              <a:off x="817517" y="1669789"/>
-              <a:ext cx="2821289" cy="120152"/>
+              <a:off x="915645" y="1688767"/>
+              <a:ext cx="3591763" cy="153070"/>
             </a:xfrm>
             <a:prstGeom prst="rect">
               <a:avLst/>
@@ -5209,7 +5209,7 @@
             <a:p>
               <a:pPr algn="l" marL="0" marR="0" indent="0">
                 <a:lnSpc>
-                  <a:spcPts val="1320"/>
+                  <a:spcPts val="1680"/>
                 </a:lnSpc>
                 <a:spcBef>
                   <a:spcPts val="0"/>
@@ -5219,7 +5219,7 @@
                 </a:spcAft>
               </a:pPr>
               <a:r>
-                <a:rPr sz="1320">
+                <a:rPr sz="1680">
                   <a:solidFill>
                     <a:srgbClr val="000000">
                       <a:alpha val="100000"/>
